--- a/docs/theme-preview/pptx/editorial.pptx
+++ b/docs/theme-preview/pptx/editorial.pptx
@@ -11205,7 +11205,7 @@
                 <a:ea typeface="Pretendard" pitchFamily="34" charset="-122"/>
                 <a:cs typeface="Pretendard" pitchFamily="34" charset="-120"/>
               </a:rPr>
-              <a:t>Markdown Semantics</a:t>
+              <a:t>Semantic Blocks</a:t>
             </a:r>
             <a:endParaRPr lang="en-US" sz="2200" dirty="0"/>
           </a:p>
@@ -14744,7 +14744,7 @@
                 <a:ea typeface="Pretendard" pitchFamily="34" charset="-122"/>
                 <a:cs typeface="Pretendard" pitchFamily="34" charset="-120"/>
               </a:rPr>
-              <a:t>Markdown Semantics</a:t>
+              <a:t>Semantic Blocks</a:t>
             </a:r>
             <a:endParaRPr lang="en-US" sz="3400" dirty="0"/>
           </a:p>

--- a/docs/theme-preview/pptx/editorial.pptx
+++ b/docs/theme-preview/pptx/editorial.pptx
@@ -125,7 +125,7 @@
 </p:presentation>
 </file>
 
-<file path=ppt/charts/chart5.xml><?xml version="1.0" encoding="utf-8"?>
+<file path=ppt/charts/chart3.xml><?xml version="1.0" encoding="utf-8"?>
 <c:chartSpace xmlns:c="http://schemas.openxmlformats.org/drawingml/2006/chart" xmlns:a="http://schemas.openxmlformats.org/drawingml/2006/main" xmlns:r="http://schemas.openxmlformats.org/officeDocument/2006/relationships">
   <c:date1904 val="0"/>
   <c:roundedCorners val="1"/>
@@ -10200,8 +10200,37 @@
         </p:nvSpPr>
         <p:spPr>
           <a:xfrm>
-            <a:off x="914400" y="1417320"/>
-            <a:ext cx="73152" cy="868680"/>
+            <a:off x="786384" y="1956816"/>
+            <a:ext cx="32004" cy="3483864"/>
+          </a:xfrm>
+          <a:prstGeom prst="rect">
+            <a:avLst/>
+          </a:prstGeom>
+          <a:solidFill>
+            <a:srgbClr val="FCD34D">
+              <a:alpha val="80000"/>
+            </a:srgbClr>
+          </a:solidFill>
+          <a:ln w="12700">
+            <a:solidFill>
+              <a:srgbClr val="FCD34D">
+                <a:alpha val="0"/>
+              </a:srgbClr>
+            </a:solidFill>
+            <a:prstDash val="solid"/>
+          </a:ln>
+        </p:spPr>
+      </p:sp>
+      <p:sp>
+        <p:nvSpPr>
+          <p:cNvPr id="6" name="Shape 4"/>
+          <p:cNvSpPr/>
+          <p:nvPr/>
+        </p:nvSpPr>
+        <p:spPr>
+          <a:xfrm>
+            <a:off x="914400" y="1865376"/>
+            <a:ext cx="73152" cy="1024128"/>
           </a:xfrm>
           <a:prstGeom prst="rect">
             <a:avLst/>
@@ -10221,14 +10250,14 @@
       </p:sp>
       <p:sp>
         <p:nvSpPr>
-          <p:cNvPr id="6" name="Shape 4"/>
-          <p:cNvSpPr/>
-          <p:nvPr/>
-        </p:nvSpPr>
-        <p:spPr>
-          <a:xfrm>
-            <a:off x="914400" y="2560320"/>
-            <a:ext cx="73152" cy="868680"/>
+          <p:cNvPr id="7" name="Shape 5"/>
+          <p:cNvSpPr/>
+          <p:nvPr/>
+        </p:nvSpPr>
+        <p:spPr>
+          <a:xfrm>
+            <a:off x="914400" y="3191256"/>
+            <a:ext cx="73152" cy="1024128"/>
           </a:xfrm>
           <a:prstGeom prst="rect">
             <a:avLst/>
@@ -10248,14 +10277,14 @@
       </p:sp>
       <p:sp>
         <p:nvSpPr>
-          <p:cNvPr id="7" name="Shape 5"/>
-          <p:cNvSpPr/>
-          <p:nvPr/>
-        </p:nvSpPr>
-        <p:spPr>
-          <a:xfrm>
-            <a:off x="914400" y="3703320"/>
-            <a:ext cx="73152" cy="868680"/>
+          <p:cNvPr id="8" name="Shape 6"/>
+          <p:cNvSpPr/>
+          <p:nvPr/>
+        </p:nvSpPr>
+        <p:spPr>
+          <a:xfrm>
+            <a:off x="914400" y="4507992"/>
+            <a:ext cx="73152" cy="1024128"/>
           </a:xfrm>
           <a:prstGeom prst="rect">
             <a:avLst/>
@@ -10275,7 +10304,7 @@
       </p:sp>
       <p:pic>
         <p:nvPicPr>
-          <p:cNvPr id="8" name="Image 0" descr="preencoded.png">    </p:cNvPr>
+          <p:cNvPr id="9" name="Image 0" descr="preencoded.png">    </p:cNvPr>
           <p:cNvPicPr>
             <a:picLocks noChangeAspect="1"/>
           </p:cNvPicPr>
@@ -10295,8 +10324,8 @@
         </p:blipFill>
         <p:spPr>
           <a:xfrm>
-            <a:off x="914400" y="1417320"/>
-            <a:ext cx="10241280" cy="868680"/>
+            <a:off x="914400" y="1865376"/>
+            <a:ext cx="10241280" cy="1024128"/>
           </a:xfrm>
           <a:prstGeom prst="rect">
             <a:avLst/>
@@ -10305,14 +10334,14 @@
       </p:pic>
       <p:sp>
         <p:nvSpPr>
-          <p:cNvPr id="9" name="Shape 6"/>
-          <p:cNvSpPr/>
-          <p:nvPr/>
-        </p:nvSpPr>
-        <p:spPr>
-          <a:xfrm>
-            <a:off x="914400" y="1417320"/>
-            <a:ext cx="10241280" cy="868680"/>
+          <p:cNvPr id="10" name="Shape 7"/>
+          <p:cNvSpPr/>
+          <p:nvPr/>
+        </p:nvSpPr>
+        <p:spPr>
+          <a:xfrm>
+            <a:off x="914400" y="1865376"/>
+            <a:ext cx="10241280" cy="1024128"/>
           </a:xfrm>
           <a:prstGeom prst="rect">
             <a:avLst/>
@@ -10341,7 +10370,7 @@
       </p:sp>
       <p:pic>
         <p:nvPicPr>
-          <p:cNvPr id="10" name="Image 1" descr="preencoded.png">    </p:cNvPr>
+          <p:cNvPr id="11" name="Image 1" descr="preencoded.png">    </p:cNvPr>
           <p:cNvPicPr>
             <a:picLocks noChangeAspect="1"/>
           </p:cNvPicPr>
@@ -10361,8 +10390,8 @@
         </p:blipFill>
         <p:spPr>
           <a:xfrm>
-            <a:off x="914400" y="2560320"/>
-            <a:ext cx="10241280" cy="868680"/>
+            <a:off x="914400" y="3191256"/>
+            <a:ext cx="10241280" cy="1024128"/>
           </a:xfrm>
           <a:prstGeom prst="rect">
             <a:avLst/>
@@ -10371,14 +10400,14 @@
       </p:pic>
       <p:sp>
         <p:nvSpPr>
-          <p:cNvPr id="11" name="Shape 7"/>
-          <p:cNvSpPr/>
-          <p:nvPr/>
-        </p:nvSpPr>
-        <p:spPr>
-          <a:xfrm>
-            <a:off x="914400" y="2560320"/>
-            <a:ext cx="10241280" cy="868680"/>
+          <p:cNvPr id="12" name="Shape 8"/>
+          <p:cNvSpPr/>
+          <p:nvPr/>
+        </p:nvSpPr>
+        <p:spPr>
+          <a:xfrm>
+            <a:off x="914400" y="3191256"/>
+            <a:ext cx="10241280" cy="1024128"/>
           </a:xfrm>
           <a:prstGeom prst="rect">
             <a:avLst/>
@@ -10407,7 +10436,7 @@
       </p:sp>
       <p:pic>
         <p:nvPicPr>
-          <p:cNvPr id="12" name="Image 2" descr="preencoded.png">    </p:cNvPr>
+          <p:cNvPr id="13" name="Image 2" descr="preencoded.png">    </p:cNvPr>
           <p:cNvPicPr>
             <a:picLocks noChangeAspect="1"/>
           </p:cNvPicPr>
@@ -10427,8 +10456,8 @@
         </p:blipFill>
         <p:spPr>
           <a:xfrm>
-            <a:off x="914400" y="3703320"/>
-            <a:ext cx="10241280" cy="868680"/>
+            <a:off x="914400" y="4507992"/>
+            <a:ext cx="10241280" cy="1024128"/>
           </a:xfrm>
           <a:prstGeom prst="rect">
             <a:avLst/>
@@ -10437,14 +10466,14 @@
       </p:pic>
       <p:sp>
         <p:nvSpPr>
-          <p:cNvPr id="13" name="Shape 8"/>
-          <p:cNvSpPr/>
-          <p:nvPr/>
-        </p:nvSpPr>
-        <p:spPr>
-          <a:xfrm>
-            <a:off x="914400" y="3703320"/>
-            <a:ext cx="10241280" cy="868680"/>
+          <p:cNvPr id="14" name="Shape 9"/>
+          <p:cNvSpPr/>
+          <p:nvPr/>
+        </p:nvSpPr>
+        <p:spPr>
+          <a:xfrm>
+            <a:off x="914400" y="4507992"/>
+            <a:ext cx="10241280" cy="1024128"/>
           </a:xfrm>
           <a:prstGeom prst="rect">
             <a:avLst/>
@@ -10473,7 +10502,7 @@
       </p:sp>
       <p:sp>
         <p:nvSpPr>
-          <p:cNvPr id="14" name="Text 9"/>
+          <p:cNvPr id="15" name="Text 10"/>
           <p:cNvSpPr txBox="1"/>
           <p:nvPr/>
         </p:nvSpPr>
@@ -10515,18 +10544,18 @@
       </p:sp>
       <p:sp>
         <p:nvSpPr>
-          <p:cNvPr id="15" name="Shape 10"/>
-          <p:cNvSpPr/>
-          <p:nvPr/>
-        </p:nvSpPr>
-        <p:spPr>
-          <a:xfrm>
-            <a:off x="1097280" y="1623060"/>
-            <a:ext cx="457200" cy="457200"/>
+          <p:cNvPr id="16" name="Shape 11"/>
+          <p:cNvSpPr/>
+          <p:nvPr/>
+        </p:nvSpPr>
+        <p:spPr>
+          <a:xfrm>
+            <a:off x="1097280" y="2140428"/>
+            <a:ext cx="474025" cy="474025"/>
           </a:xfrm>
           <a:prstGeom prst="roundRect">
             <a:avLst>
-              <a:gd name="adj" fmla="val 8000"/>
+              <a:gd name="adj" fmla="val 7716"/>
             </a:avLst>
           </a:prstGeom>
           <a:solidFill>
@@ -10542,7 +10571,7 @@
       </p:sp>
       <p:pic>
         <p:nvPicPr>
-          <p:cNvPr id="16" name="Image 3" descr="flow icon from tabler-icons (MIT)">    </p:cNvPr>
+          <p:cNvPr id="17" name="Image 3" descr="flow icon from tabler-icons (MIT)">    </p:cNvPr>
           <p:cNvPicPr>
             <a:picLocks noChangeAspect="1"/>
           </p:cNvPicPr>
@@ -10562,8 +10591,8 @@
         </p:blipFill>
         <p:spPr>
           <a:xfrm>
-            <a:off x="1170432" y="1696212"/>
-            <a:ext cx="310896" cy="310896"/>
+            <a:off x="1170432" y="2213580"/>
+            <a:ext cx="327721" cy="327721"/>
           </a:xfrm>
           <a:prstGeom prst="rect">
             <a:avLst/>
@@ -10572,14 +10601,14 @@
       </p:pic>
       <p:sp>
         <p:nvSpPr>
-          <p:cNvPr id="17" name="Text 11"/>
+          <p:cNvPr id="18" name="Text 12"/>
           <p:cNvSpPr txBox="1"/>
           <p:nvPr/>
         </p:nvSpPr>
         <p:spPr>
           <a:xfrm>
-            <a:off x="1682496" y="1508760"/>
-            <a:ext cx="9272016" cy="685800"/>
+            <a:off x="1699321" y="1957548"/>
+            <a:ext cx="9255191" cy="839785"/>
           </a:xfrm>
           <a:prstGeom prst="rect">
             <a:avLst/>
@@ -10631,18 +10660,18 @@
       </p:sp>
       <p:sp>
         <p:nvSpPr>
-          <p:cNvPr id="18" name="Shape 12"/>
-          <p:cNvSpPr/>
-          <p:nvPr/>
-        </p:nvSpPr>
-        <p:spPr>
-          <a:xfrm>
-            <a:off x="1097280" y="2766060"/>
-            <a:ext cx="457200" cy="457200"/>
+          <p:cNvPr id="19" name="Shape 13"/>
+          <p:cNvSpPr/>
+          <p:nvPr/>
+        </p:nvSpPr>
+        <p:spPr>
+          <a:xfrm>
+            <a:off x="1097280" y="3466308"/>
+            <a:ext cx="474025" cy="474025"/>
           </a:xfrm>
           <a:prstGeom prst="roundRect">
             <a:avLst>
-              <a:gd name="adj" fmla="val 8000"/>
+              <a:gd name="adj" fmla="val 7716"/>
             </a:avLst>
           </a:prstGeom>
           <a:solidFill>
@@ -10658,7 +10687,7 @@
       </p:sp>
       <p:pic>
         <p:nvPicPr>
-          <p:cNvPr id="19" name="Image 4" descr="verified icon from tabler-icons (MIT)">    </p:cNvPr>
+          <p:cNvPr id="20" name="Image 4" descr="verified icon from tabler-icons (MIT)">    </p:cNvPr>
           <p:cNvPicPr>
             <a:picLocks noChangeAspect="1"/>
           </p:cNvPicPr>
@@ -10678,8 +10707,8 @@
         </p:blipFill>
         <p:spPr>
           <a:xfrm>
-            <a:off x="1170432" y="2839212"/>
-            <a:ext cx="310896" cy="310896"/>
+            <a:off x="1170432" y="3539460"/>
+            <a:ext cx="327721" cy="327721"/>
           </a:xfrm>
           <a:prstGeom prst="rect">
             <a:avLst/>
@@ -10688,14 +10717,14 @@
       </p:pic>
       <p:sp>
         <p:nvSpPr>
-          <p:cNvPr id="20" name="Text 13"/>
+          <p:cNvPr id="21" name="Text 14"/>
           <p:cNvSpPr txBox="1"/>
           <p:nvPr/>
         </p:nvSpPr>
         <p:spPr>
           <a:xfrm>
-            <a:off x="1682496" y="2651760"/>
-            <a:ext cx="9272016" cy="685800"/>
+            <a:off x="1699321" y="3283428"/>
+            <a:ext cx="9255191" cy="839785"/>
           </a:xfrm>
           <a:prstGeom prst="rect">
             <a:avLst/>
@@ -10747,18 +10776,18 @@
       </p:sp>
       <p:sp>
         <p:nvSpPr>
-          <p:cNvPr id="21" name="Shape 14"/>
-          <p:cNvSpPr/>
-          <p:nvPr/>
-        </p:nvSpPr>
-        <p:spPr>
-          <a:xfrm>
-            <a:off x="1097280" y="3909060"/>
-            <a:ext cx="457200" cy="457200"/>
+          <p:cNvPr id="22" name="Shape 15"/>
+          <p:cNvSpPr/>
+          <p:nvPr/>
+        </p:nvSpPr>
+        <p:spPr>
+          <a:xfrm>
+            <a:off x="1097280" y="4783044"/>
+            <a:ext cx="474025" cy="474025"/>
           </a:xfrm>
           <a:prstGeom prst="roundRect">
             <a:avLst>
-              <a:gd name="adj" fmla="val 8000"/>
+              <a:gd name="adj" fmla="val 7716"/>
             </a:avLst>
           </a:prstGeom>
           <a:solidFill>
@@ -10774,7 +10803,7 @@
       </p:sp>
       <p:pic>
         <p:nvPicPr>
-          <p:cNvPr id="22" name="Image 5" descr="spark icon from tabler-icons (MIT)">    </p:cNvPr>
+          <p:cNvPr id="23" name="Image 5" descr="spark icon from tabler-icons (MIT)">    </p:cNvPr>
           <p:cNvPicPr>
             <a:picLocks noChangeAspect="1"/>
           </p:cNvPicPr>
@@ -10794,8 +10823,8 @@
         </p:blipFill>
         <p:spPr>
           <a:xfrm>
-            <a:off x="1170432" y="3982212"/>
-            <a:ext cx="310896" cy="310896"/>
+            <a:off x="1170432" y="4856196"/>
+            <a:ext cx="327721" cy="327721"/>
           </a:xfrm>
           <a:prstGeom prst="rect">
             <a:avLst/>
@@ -10804,14 +10833,14 @@
       </p:pic>
       <p:sp>
         <p:nvSpPr>
-          <p:cNvPr id="23" name="Text 15"/>
+          <p:cNvPr id="24" name="Text 16"/>
           <p:cNvSpPr txBox="1"/>
           <p:nvPr/>
         </p:nvSpPr>
         <p:spPr>
           <a:xfrm>
-            <a:off x="1682496" y="3794760"/>
-            <a:ext cx="9272016" cy="685800"/>
+            <a:off x="1699321" y="4600164"/>
+            <a:ext cx="9255191" cy="839785"/>
           </a:xfrm>
           <a:prstGeom prst="rect">
             <a:avLst/>
@@ -10982,8 +11011,8 @@
         </p:nvSpPr>
         <p:spPr>
           <a:xfrm>
-            <a:off x="914400" y="1463040"/>
-            <a:ext cx="10241280" cy="73152"/>
+            <a:off x="822960" y="1188720"/>
+            <a:ext cx="10515600" cy="45720"/>
           </a:xfrm>
           <a:prstGeom prst="rect">
             <a:avLst/>
@@ -11003,7 +11032,387 @@
       </p:sp>
       <p:sp>
         <p:nvSpPr>
-          <p:cNvPr id="6" name="Text 4"/>
+          <p:cNvPr id="6" name="Shape 4"/>
+          <p:cNvSpPr/>
+          <p:nvPr/>
+        </p:nvSpPr>
+        <p:spPr>
+          <a:xfrm>
+            <a:off x="822960" y="6199632"/>
+            <a:ext cx="2011680" cy="45720"/>
+          </a:xfrm>
+          <a:prstGeom prst="rect">
+            <a:avLst/>
+          </a:prstGeom>
+          <a:solidFill>
+            <a:srgbClr val="FCD34D"/>
+          </a:solidFill>
+          <a:ln w="12700">
+            <a:solidFill>
+              <a:srgbClr val="FCD34D">
+                <a:alpha val="0"/>
+              </a:srgbClr>
+            </a:solidFill>
+            <a:prstDash val="solid"/>
+          </a:ln>
+        </p:spPr>
+      </p:sp>
+      <p:sp>
+        <p:nvSpPr>
+          <p:cNvPr id="7" name="Shape 5"/>
+          <p:cNvSpPr/>
+          <p:nvPr/>
+        </p:nvSpPr>
+        <p:spPr>
+          <a:xfrm>
+            <a:off x="6080760" y="1389888"/>
+            <a:ext cx="22860" cy="4663440"/>
+          </a:xfrm>
+          <a:prstGeom prst="rect">
+            <a:avLst/>
+          </a:prstGeom>
+          <a:solidFill>
+            <a:srgbClr val="E7D8C9">
+              <a:alpha val="90000"/>
+            </a:srgbClr>
+          </a:solidFill>
+          <a:ln w="12700">
+            <a:solidFill>
+              <a:srgbClr val="E7D8C9">
+                <a:alpha val="0"/>
+              </a:srgbClr>
+            </a:solidFill>
+            <a:prstDash val="solid"/>
+          </a:ln>
+        </p:spPr>
+      </p:sp>
+      <p:sp>
+        <p:nvSpPr>
+          <p:cNvPr id="8" name="Shape 6"/>
+          <p:cNvSpPr/>
+          <p:nvPr/>
+        </p:nvSpPr>
+        <p:spPr>
+          <a:xfrm>
+            <a:off x="822960" y="1389888"/>
+            <a:ext cx="73152" cy="658368"/>
+          </a:xfrm>
+          <a:prstGeom prst="rect">
+            <a:avLst/>
+          </a:prstGeom>
+          <a:solidFill>
+            <a:srgbClr val="B45309"/>
+          </a:solidFill>
+          <a:ln w="12700">
+            <a:solidFill>
+              <a:srgbClr val="B45309">
+                <a:alpha val="0"/>
+              </a:srgbClr>
+            </a:solidFill>
+            <a:prstDash val="solid"/>
+          </a:ln>
+        </p:spPr>
+      </p:sp>
+      <p:sp>
+        <p:nvSpPr>
+          <p:cNvPr id="9" name="Shape 7"/>
+          <p:cNvSpPr/>
+          <p:nvPr/>
+        </p:nvSpPr>
+        <p:spPr>
+          <a:xfrm>
+            <a:off x="822960" y="2194560"/>
+            <a:ext cx="73152" cy="658368"/>
+          </a:xfrm>
+          <a:prstGeom prst="rect">
+            <a:avLst/>
+          </a:prstGeom>
+          <a:solidFill>
+            <a:srgbClr val="FCD34D"/>
+          </a:solidFill>
+          <a:ln w="12700">
+            <a:solidFill>
+              <a:srgbClr val="FCD34D">
+                <a:alpha val="0"/>
+              </a:srgbClr>
+            </a:solidFill>
+            <a:prstDash val="solid"/>
+          </a:ln>
+        </p:spPr>
+      </p:sp>
+      <p:sp>
+        <p:nvSpPr>
+          <p:cNvPr id="10" name="Shape 8"/>
+          <p:cNvSpPr/>
+          <p:nvPr/>
+        </p:nvSpPr>
+        <p:spPr>
+          <a:xfrm>
+            <a:off x="822960" y="2990088"/>
+            <a:ext cx="73152" cy="658368"/>
+          </a:xfrm>
+          <a:prstGeom prst="rect">
+            <a:avLst/>
+          </a:prstGeom>
+          <a:solidFill>
+            <a:srgbClr val="B45309"/>
+          </a:solidFill>
+          <a:ln w="12700">
+            <a:solidFill>
+              <a:srgbClr val="B45309">
+                <a:alpha val="0"/>
+              </a:srgbClr>
+            </a:solidFill>
+            <a:prstDash val="solid"/>
+          </a:ln>
+        </p:spPr>
+      </p:sp>
+      <p:sp>
+        <p:nvSpPr>
+          <p:cNvPr id="11" name="Shape 9"/>
+          <p:cNvSpPr/>
+          <p:nvPr/>
+        </p:nvSpPr>
+        <p:spPr>
+          <a:xfrm>
+            <a:off x="822960" y="3794760"/>
+            <a:ext cx="73152" cy="658368"/>
+          </a:xfrm>
+          <a:prstGeom prst="rect">
+            <a:avLst/>
+          </a:prstGeom>
+          <a:solidFill>
+            <a:srgbClr val="FCD34D"/>
+          </a:solidFill>
+          <a:ln w="12700">
+            <a:solidFill>
+              <a:srgbClr val="FCD34D">
+                <a:alpha val="0"/>
+              </a:srgbClr>
+            </a:solidFill>
+            <a:prstDash val="solid"/>
+          </a:ln>
+        </p:spPr>
+      </p:sp>
+      <p:sp>
+        <p:nvSpPr>
+          <p:cNvPr id="12" name="Shape 10"/>
+          <p:cNvSpPr/>
+          <p:nvPr/>
+        </p:nvSpPr>
+        <p:spPr>
+          <a:xfrm>
+            <a:off x="822960" y="4599432"/>
+            <a:ext cx="73152" cy="658368"/>
+          </a:xfrm>
+          <a:prstGeom prst="rect">
+            <a:avLst/>
+          </a:prstGeom>
+          <a:solidFill>
+            <a:srgbClr val="B45309"/>
+          </a:solidFill>
+          <a:ln w="12700">
+            <a:solidFill>
+              <a:srgbClr val="B45309">
+                <a:alpha val="0"/>
+              </a:srgbClr>
+            </a:solidFill>
+            <a:prstDash val="solid"/>
+          </a:ln>
+        </p:spPr>
+      </p:sp>
+      <p:sp>
+        <p:nvSpPr>
+          <p:cNvPr id="13" name="Shape 11"/>
+          <p:cNvSpPr/>
+          <p:nvPr/>
+        </p:nvSpPr>
+        <p:spPr>
+          <a:xfrm>
+            <a:off x="822960" y="5394960"/>
+            <a:ext cx="73152" cy="658368"/>
+          </a:xfrm>
+          <a:prstGeom prst="rect">
+            <a:avLst/>
+          </a:prstGeom>
+          <a:solidFill>
+            <a:srgbClr val="FCD34D"/>
+          </a:solidFill>
+          <a:ln w="12700">
+            <a:solidFill>
+              <a:srgbClr val="FCD34D">
+                <a:alpha val="0"/>
+              </a:srgbClr>
+            </a:solidFill>
+            <a:prstDash val="solid"/>
+          </a:ln>
+        </p:spPr>
+      </p:sp>
+      <p:sp>
+        <p:nvSpPr>
+          <p:cNvPr id="14" name="Shape 12"/>
+          <p:cNvSpPr/>
+          <p:nvPr/>
+        </p:nvSpPr>
+        <p:spPr>
+          <a:xfrm>
+            <a:off x="6272784" y="1389888"/>
+            <a:ext cx="73152" cy="658368"/>
+          </a:xfrm>
+          <a:prstGeom prst="rect">
+            <a:avLst/>
+          </a:prstGeom>
+          <a:solidFill>
+            <a:srgbClr val="B45309"/>
+          </a:solidFill>
+          <a:ln w="12700">
+            <a:solidFill>
+              <a:srgbClr val="B45309">
+                <a:alpha val="0"/>
+              </a:srgbClr>
+            </a:solidFill>
+            <a:prstDash val="solid"/>
+          </a:ln>
+        </p:spPr>
+      </p:sp>
+      <p:sp>
+        <p:nvSpPr>
+          <p:cNvPr id="15" name="Shape 13"/>
+          <p:cNvSpPr/>
+          <p:nvPr/>
+        </p:nvSpPr>
+        <p:spPr>
+          <a:xfrm>
+            <a:off x="6272784" y="2194560"/>
+            <a:ext cx="73152" cy="658368"/>
+          </a:xfrm>
+          <a:prstGeom prst="rect">
+            <a:avLst/>
+          </a:prstGeom>
+          <a:solidFill>
+            <a:srgbClr val="FCD34D"/>
+          </a:solidFill>
+          <a:ln w="12700">
+            <a:solidFill>
+              <a:srgbClr val="FCD34D">
+                <a:alpha val="0"/>
+              </a:srgbClr>
+            </a:solidFill>
+            <a:prstDash val="solid"/>
+          </a:ln>
+        </p:spPr>
+      </p:sp>
+      <p:sp>
+        <p:nvSpPr>
+          <p:cNvPr id="16" name="Shape 14"/>
+          <p:cNvSpPr/>
+          <p:nvPr/>
+        </p:nvSpPr>
+        <p:spPr>
+          <a:xfrm>
+            <a:off x="6272784" y="2990088"/>
+            <a:ext cx="73152" cy="658368"/>
+          </a:xfrm>
+          <a:prstGeom prst="rect">
+            <a:avLst/>
+          </a:prstGeom>
+          <a:solidFill>
+            <a:srgbClr val="B45309"/>
+          </a:solidFill>
+          <a:ln w="12700">
+            <a:solidFill>
+              <a:srgbClr val="B45309">
+                <a:alpha val="0"/>
+              </a:srgbClr>
+            </a:solidFill>
+            <a:prstDash val="solid"/>
+          </a:ln>
+        </p:spPr>
+      </p:sp>
+      <p:sp>
+        <p:nvSpPr>
+          <p:cNvPr id="17" name="Shape 15"/>
+          <p:cNvSpPr/>
+          <p:nvPr/>
+        </p:nvSpPr>
+        <p:spPr>
+          <a:xfrm>
+            <a:off x="6272784" y="3794760"/>
+            <a:ext cx="73152" cy="658368"/>
+          </a:xfrm>
+          <a:prstGeom prst="rect">
+            <a:avLst/>
+          </a:prstGeom>
+          <a:solidFill>
+            <a:srgbClr val="FCD34D"/>
+          </a:solidFill>
+          <a:ln w="12700">
+            <a:solidFill>
+              <a:srgbClr val="FCD34D">
+                <a:alpha val="0"/>
+              </a:srgbClr>
+            </a:solidFill>
+            <a:prstDash val="solid"/>
+          </a:ln>
+        </p:spPr>
+      </p:sp>
+      <p:sp>
+        <p:nvSpPr>
+          <p:cNvPr id="18" name="Shape 16"/>
+          <p:cNvSpPr/>
+          <p:nvPr/>
+        </p:nvSpPr>
+        <p:spPr>
+          <a:xfrm>
+            <a:off x="6272784" y="4599432"/>
+            <a:ext cx="73152" cy="658368"/>
+          </a:xfrm>
+          <a:prstGeom prst="rect">
+            <a:avLst/>
+          </a:prstGeom>
+          <a:solidFill>
+            <a:srgbClr val="B45309"/>
+          </a:solidFill>
+          <a:ln w="12700">
+            <a:solidFill>
+              <a:srgbClr val="B45309">
+                <a:alpha val="0"/>
+              </a:srgbClr>
+            </a:solidFill>
+            <a:prstDash val="solid"/>
+          </a:ln>
+        </p:spPr>
+      </p:sp>
+      <p:sp>
+        <p:nvSpPr>
+          <p:cNvPr id="19" name="Shape 17"/>
+          <p:cNvSpPr/>
+          <p:nvPr/>
+        </p:nvSpPr>
+        <p:spPr>
+          <a:xfrm>
+            <a:off x="6272784" y="5394960"/>
+            <a:ext cx="73152" cy="658368"/>
+          </a:xfrm>
+          <a:prstGeom prst="rect">
+            <a:avLst/>
+          </a:prstGeom>
+          <a:solidFill>
+            <a:srgbClr val="FCD34D"/>
+          </a:solidFill>
+          <a:ln w="12700">
+            <a:solidFill>
+              <a:srgbClr val="FCD34D">
+                <a:alpha val="0"/>
+              </a:srgbClr>
+            </a:solidFill>
+            <a:prstDash val="solid"/>
+          </a:ln>
+        </p:spPr>
+      </p:sp>
+      <p:sp>
+        <p:nvSpPr>
+          <p:cNvPr id="20" name="Text 18"/>
           <p:cNvSpPr txBox="1"/>
           <p:nvPr/>
         </p:nvSpPr>
@@ -11045,14 +11454,14 @@
       </p:sp>
       <p:sp>
         <p:nvSpPr>
-          <p:cNvPr id="7" name="Text 5"/>
+          <p:cNvPr id="21" name="Text 19"/>
           <p:cNvSpPr txBox="1"/>
           <p:nvPr/>
         </p:nvSpPr>
         <p:spPr>
           <a:xfrm>
-            <a:off x="987552" y="1572768"/>
-            <a:ext cx="10094976" cy="355092"/>
+            <a:off x="1042416" y="1481328"/>
+            <a:ext cx="4645152" cy="475488"/>
           </a:xfrm>
           <a:prstGeom prst="rect">
             <a:avLst/>
@@ -11064,14 +11473,14 @@
           <a:bodyPr wrap="square" lIns="0" tIns="25400" rIns="25400" bIns="0" rtlCol="0" anchor="ctr"/>
           <a:lstStyle/>
           <a:p>
-            <a:pPr algn="l" indent="0" marL="0">
+            <a:pPr algn="ctr" indent="0" marL="0">
               <a:lnSpc>
                 <a:spcPct val="120000"/>
               </a:lnSpc>
               <a:buNone/>
             </a:pPr>
             <a:r>
-              <a:rPr lang="en-US" sz="2200" dirty="0">
+              <a:rPr lang="en-US" sz="1800" dirty="0">
                 <a:solidFill>
                   <a:srgbClr val="1F2937"/>
                 </a:solidFill>
@@ -11079,22 +11488,22 @@
                 <a:ea typeface="Pretendard" pitchFamily="34" charset="-122"/>
                 <a:cs typeface="Pretendard" pitchFamily="34" charset="-120"/>
               </a:rPr>
-              <a:t>Preview Purpose</a:t>
+              <a:t>01  Preview Purpose</a:t>
             </a:r>
-            <a:endParaRPr lang="en-US" sz="2200" dirty="0"/>
+            <a:endParaRPr lang="en-US" sz="1800" dirty="0"/>
           </a:p>
         </p:txBody>
       </p:sp>
       <p:sp>
         <p:nvSpPr>
-          <p:cNvPr id="8" name="Text 6"/>
+          <p:cNvPr id="22" name="Text 20"/>
           <p:cNvSpPr txBox="1"/>
           <p:nvPr/>
         </p:nvSpPr>
         <p:spPr>
           <a:xfrm>
-            <a:off x="987552" y="1927860"/>
-            <a:ext cx="10094976" cy="355092"/>
+            <a:off x="1042416" y="2286000"/>
+            <a:ext cx="4645152" cy="475488"/>
           </a:xfrm>
           <a:prstGeom prst="rect">
             <a:avLst/>
@@ -11106,14 +11515,14 @@
           <a:bodyPr wrap="square" lIns="0" tIns="25400" rIns="25400" bIns="0" rtlCol="0" anchor="ctr"/>
           <a:lstStyle/>
           <a:p>
-            <a:pPr algn="l" indent="0" marL="0">
+            <a:pPr algn="ctr" indent="0" marL="0">
               <a:lnSpc>
                 <a:spcPct val="120000"/>
               </a:lnSpc>
               <a:buNone/>
             </a:pPr>
             <a:r>
-              <a:rPr lang="en-US" sz="2200" dirty="0">
+              <a:rPr lang="en-US" sz="1800" dirty="0">
                 <a:solidFill>
                   <a:srgbClr val="1F2937"/>
                 </a:solidFill>
@@ -11121,22 +11530,22 @@
                 <a:ea typeface="Pretendard" pitchFamily="34" charset="-122"/>
                 <a:cs typeface="Pretendard" pitchFamily="34" charset="-120"/>
               </a:rPr>
-              <a:t>Composition Contract</a:t>
+              <a:t>02  Composition Contract</a:t>
             </a:r>
-            <a:endParaRPr lang="en-US" sz="2200" dirty="0"/>
+            <a:endParaRPr lang="en-US" sz="1800" dirty="0"/>
           </a:p>
         </p:txBody>
       </p:sp>
       <p:sp>
         <p:nvSpPr>
-          <p:cNvPr id="9" name="Text 7"/>
+          <p:cNvPr id="23" name="Text 21"/>
           <p:cNvSpPr txBox="1"/>
           <p:nvPr/>
         </p:nvSpPr>
         <p:spPr>
           <a:xfrm>
-            <a:off x="987552" y="2282952"/>
-            <a:ext cx="10094976" cy="355092"/>
+            <a:off x="1042416" y="3081528"/>
+            <a:ext cx="4645152" cy="475488"/>
           </a:xfrm>
           <a:prstGeom prst="rect">
             <a:avLst/>
@@ -11148,14 +11557,14 @@
           <a:bodyPr wrap="square" lIns="0" tIns="25400" rIns="25400" bIns="0" rtlCol="0" anchor="ctr"/>
           <a:lstStyle/>
           <a:p>
-            <a:pPr algn="l" indent="0" marL="0">
+            <a:pPr algn="ctr" indent="0" marL="0">
               <a:lnSpc>
                 <a:spcPct val="120000"/>
               </a:lnSpc>
               <a:buNone/>
             </a:pPr>
             <a:r>
-              <a:rPr lang="en-US" sz="2200" dirty="0">
+              <a:rPr lang="en-US" sz="1800" dirty="0">
                 <a:solidFill>
                   <a:srgbClr val="1F2937"/>
                 </a:solidFill>
@@ -11163,22 +11572,22 @@
                 <a:ea typeface="Pretendard" pitchFamily="34" charset="-122"/>
                 <a:cs typeface="Pretendard" pitchFamily="34" charset="-120"/>
               </a:rPr>
-              <a:t>Style Families</a:t>
+              <a:t>03  Style Families</a:t>
             </a:r>
-            <a:endParaRPr lang="en-US" sz="2200" dirty="0"/>
+            <a:endParaRPr lang="en-US" sz="1800" dirty="0"/>
           </a:p>
         </p:txBody>
       </p:sp>
       <p:sp>
         <p:nvSpPr>
-          <p:cNvPr id="10" name="Text 8"/>
+          <p:cNvPr id="24" name="Text 22"/>
           <p:cNvSpPr txBox="1"/>
           <p:nvPr/>
         </p:nvSpPr>
         <p:spPr>
           <a:xfrm>
-            <a:off x="987552" y="2638044"/>
-            <a:ext cx="10094976" cy="355092"/>
+            <a:off x="1042416" y="3886200"/>
+            <a:ext cx="4645152" cy="475488"/>
           </a:xfrm>
           <a:prstGeom prst="rect">
             <a:avLst/>
@@ -11190,14 +11599,14 @@
           <a:bodyPr wrap="square" lIns="0" tIns="25400" rIns="25400" bIns="0" rtlCol="0" anchor="ctr"/>
           <a:lstStyle/>
           <a:p>
-            <a:pPr algn="l" indent="0" marL="0">
+            <a:pPr algn="ctr" indent="0" marL="0">
               <a:lnSpc>
                 <a:spcPct val="120000"/>
               </a:lnSpc>
               <a:buNone/>
             </a:pPr>
             <a:r>
-              <a:rPr lang="en-US" sz="2200" dirty="0">
+              <a:rPr lang="en-US" sz="1800" dirty="0">
                 <a:solidFill>
                   <a:srgbClr val="1F2937"/>
                 </a:solidFill>
@@ -11205,22 +11614,22 @@
                 <a:ea typeface="Pretendard" pitchFamily="34" charset="-122"/>
                 <a:cs typeface="Pretendard" pitchFamily="34" charset="-120"/>
               </a:rPr>
-              <a:t>Semantic Blocks</a:t>
+              <a:t>04  Semantic Blocks</a:t>
             </a:r>
-            <a:endParaRPr lang="en-US" sz="2200" dirty="0"/>
+            <a:endParaRPr lang="en-US" sz="1800" dirty="0"/>
           </a:p>
         </p:txBody>
       </p:sp>
       <p:sp>
         <p:nvSpPr>
-          <p:cNvPr id="11" name="Text 9"/>
+          <p:cNvPr id="25" name="Text 23"/>
           <p:cNvSpPr txBox="1"/>
           <p:nvPr/>
         </p:nvSpPr>
         <p:spPr>
           <a:xfrm>
-            <a:off x="987552" y="2993136"/>
-            <a:ext cx="10094976" cy="355092"/>
+            <a:off x="1042416" y="4690872"/>
+            <a:ext cx="4645152" cy="475488"/>
           </a:xfrm>
           <a:prstGeom prst="rect">
             <a:avLst/>
@@ -11232,14 +11641,14 @@
           <a:bodyPr wrap="square" lIns="0" tIns="25400" rIns="25400" bIns="0" rtlCol="0" anchor="ctr"/>
           <a:lstStyle/>
           <a:p>
-            <a:pPr algn="l" indent="0" marL="0">
+            <a:pPr algn="ctr" indent="0" marL="0">
               <a:lnSpc>
                 <a:spcPct val="120000"/>
               </a:lnSpc>
               <a:buNone/>
             </a:pPr>
             <a:r>
-              <a:rPr lang="en-US" sz="2200" dirty="0">
+              <a:rPr lang="en-US" sz="1800" dirty="0">
                 <a:solidFill>
                   <a:srgbClr val="1F2937"/>
                 </a:solidFill>
@@ -11247,22 +11656,22 @@
                 <a:ea typeface="Pretendard" pitchFamily="34" charset="-122"/>
                 <a:cs typeface="Pretendard" pitchFamily="34" charset="-120"/>
               </a:rPr>
-              <a:t>Pipeline Diagram</a:t>
+              <a:t>05  Pipeline Diagram</a:t>
             </a:r>
-            <a:endParaRPr lang="en-US" sz="2200" dirty="0"/>
+            <a:endParaRPr lang="en-US" sz="1800" dirty="0"/>
           </a:p>
         </p:txBody>
       </p:sp>
       <p:sp>
         <p:nvSpPr>
-          <p:cNvPr id="12" name="Text 10"/>
+          <p:cNvPr id="26" name="Text 24"/>
           <p:cNvSpPr txBox="1"/>
           <p:nvPr/>
         </p:nvSpPr>
         <p:spPr>
           <a:xfrm>
-            <a:off x="987552" y="3348228"/>
-            <a:ext cx="10094976" cy="355092"/>
+            <a:off x="1042416" y="5486400"/>
+            <a:ext cx="4645152" cy="475488"/>
           </a:xfrm>
           <a:prstGeom prst="rect">
             <a:avLst/>
@@ -11274,14 +11683,14 @@
           <a:bodyPr wrap="square" lIns="0" tIns="25400" rIns="25400" bIns="0" rtlCol="0" anchor="ctr"/>
           <a:lstStyle/>
           <a:p>
-            <a:pPr algn="l" indent="0" marL="0">
+            <a:pPr algn="ctr" indent="0" marL="0">
               <a:lnSpc>
                 <a:spcPct val="120000"/>
               </a:lnSpc>
               <a:buNone/>
             </a:pPr>
             <a:r>
-              <a:rPr lang="en-US" sz="2200" dirty="0">
+              <a:rPr lang="en-US" sz="1800" dirty="0">
                 <a:solidFill>
                   <a:srgbClr val="1F2937"/>
                 </a:solidFill>
@@ -11289,22 +11698,22 @@
                 <a:ea typeface="Pretendard" pitchFamily="34" charset="-122"/>
                 <a:cs typeface="Pretendard" pitchFamily="34" charset="-120"/>
               </a:rPr>
-              <a:t>Table Coherence</a:t>
+              <a:t>06  Table Coherence</a:t>
             </a:r>
-            <a:endParaRPr lang="en-US" sz="2200" dirty="0"/>
+            <a:endParaRPr lang="en-US" sz="1800" dirty="0"/>
           </a:p>
         </p:txBody>
       </p:sp>
       <p:sp>
         <p:nvSpPr>
-          <p:cNvPr id="13" name="Text 11"/>
+          <p:cNvPr id="27" name="Text 25"/>
           <p:cNvSpPr txBox="1"/>
           <p:nvPr/>
         </p:nvSpPr>
         <p:spPr>
           <a:xfrm>
-            <a:off x="987552" y="3703320"/>
-            <a:ext cx="10094976" cy="355092"/>
+            <a:off x="6492240" y="1481328"/>
+            <a:ext cx="4645152" cy="475488"/>
           </a:xfrm>
           <a:prstGeom prst="rect">
             <a:avLst/>
@@ -11316,14 +11725,14 @@
           <a:bodyPr wrap="square" lIns="0" tIns="25400" rIns="25400" bIns="0" rtlCol="0" anchor="ctr"/>
           <a:lstStyle/>
           <a:p>
-            <a:pPr algn="l" indent="0" marL="0">
+            <a:pPr algn="ctr" indent="0" marL="0">
               <a:lnSpc>
                 <a:spcPct val="120000"/>
               </a:lnSpc>
               <a:buNone/>
             </a:pPr>
             <a:r>
-              <a:rPr lang="en-US" sz="2200" dirty="0">
+              <a:rPr lang="en-US" sz="1800" dirty="0">
                 <a:solidFill>
                   <a:srgbClr val="1F2937"/>
                 </a:solidFill>
@@ -11331,22 +11740,22 @@
                 <a:ea typeface="Pretendard" pitchFamily="34" charset="-122"/>
                 <a:cs typeface="Pretendard" pitchFamily="34" charset="-120"/>
               </a:rPr>
-              <a:t>Chart and Table Pair</a:t>
+              <a:t>07  Chart and Table Pair</a:t>
             </a:r>
-            <a:endParaRPr lang="en-US" sz="2200" dirty="0"/>
+            <a:endParaRPr lang="en-US" sz="1800" dirty="0"/>
           </a:p>
         </p:txBody>
       </p:sp>
       <p:sp>
         <p:nvSpPr>
-          <p:cNvPr id="14" name="Text 12"/>
+          <p:cNvPr id="28" name="Text 26"/>
           <p:cNvSpPr txBox="1"/>
           <p:nvPr/>
         </p:nvSpPr>
         <p:spPr>
           <a:xfrm>
-            <a:off x="987552" y="4058412"/>
-            <a:ext cx="10094976" cy="355092"/>
+            <a:off x="6492240" y="2286000"/>
+            <a:ext cx="4645152" cy="475488"/>
           </a:xfrm>
           <a:prstGeom prst="rect">
             <a:avLst/>
@@ -11358,14 +11767,14 @@
           <a:bodyPr wrap="square" lIns="0" tIns="25400" rIns="25400" bIns="0" rtlCol="0" anchor="ctr"/>
           <a:lstStyle/>
           <a:p>
-            <a:pPr algn="l" indent="0" marL="0">
+            <a:pPr algn="ctr" indent="0" marL="0">
               <a:lnSpc>
                 <a:spcPct val="120000"/>
               </a:lnSpc>
               <a:buNone/>
             </a:pPr>
             <a:r>
-              <a:rPr lang="en-US" sz="2200" dirty="0">
+              <a:rPr lang="en-US" sz="1800" dirty="0">
                 <a:solidFill>
                   <a:srgbClr val="1F2937"/>
                 </a:solidFill>
@@ -11373,22 +11782,22 @@
                 <a:ea typeface="Pretendard" pitchFamily="34" charset="-122"/>
                 <a:cs typeface="Pretendard" pitchFamily="34" charset="-120"/>
               </a:rPr>
-              <a:t>Editable Proof Objects</a:t>
+              <a:t>08  Editable Proof Objects</a:t>
             </a:r>
-            <a:endParaRPr lang="en-US" sz="2200" dirty="0"/>
+            <a:endParaRPr lang="en-US" sz="1800" dirty="0"/>
           </a:p>
         </p:txBody>
       </p:sp>
       <p:sp>
         <p:nvSpPr>
-          <p:cNvPr id="15" name="Text 13"/>
+          <p:cNvPr id="29" name="Text 27"/>
           <p:cNvSpPr txBox="1"/>
           <p:nvPr/>
         </p:nvSpPr>
         <p:spPr>
           <a:xfrm>
-            <a:off x="987552" y="4413504"/>
-            <a:ext cx="10094976" cy="355092"/>
+            <a:off x="6492240" y="3081528"/>
+            <a:ext cx="4645152" cy="475488"/>
           </a:xfrm>
           <a:prstGeom prst="rect">
             <a:avLst/>
@@ -11400,14 +11809,14 @@
           <a:bodyPr wrap="square" lIns="0" tIns="25400" rIns="25400" bIns="0" rtlCol="0" anchor="ctr"/>
           <a:lstStyle/>
           <a:p>
-            <a:pPr algn="l" indent="0" marL="0">
+            <a:pPr algn="ctr" indent="0" marL="0">
               <a:lnSpc>
                 <a:spcPct val="120000"/>
               </a:lnSpc>
               <a:buNone/>
             </a:pPr>
             <a:r>
-              <a:rPr lang="en-US" sz="2200" dirty="0">
+              <a:rPr lang="en-US" sz="1800" dirty="0">
                 <a:solidFill>
                   <a:srgbClr val="1F2937"/>
                 </a:solidFill>
@@ -11415,22 +11824,22 @@
                 <a:ea typeface="Pretendard" pitchFamily="34" charset="-122"/>
                 <a:cs typeface="Pretendard" pitchFamily="34" charset="-120"/>
               </a:rPr>
-              <a:t>Object Shape Grammar</a:t>
+              <a:t>09  Object Shape Grammar</a:t>
             </a:r>
-            <a:endParaRPr lang="en-US" sz="2200" dirty="0"/>
+            <a:endParaRPr lang="en-US" sz="1800" dirty="0"/>
           </a:p>
         </p:txBody>
       </p:sp>
       <p:sp>
         <p:nvSpPr>
-          <p:cNvPr id="16" name="Text 14"/>
+          <p:cNvPr id="30" name="Text 28"/>
           <p:cNvSpPr txBox="1"/>
           <p:nvPr/>
         </p:nvSpPr>
         <p:spPr>
           <a:xfrm>
-            <a:off x="987552" y="4768596"/>
-            <a:ext cx="10094976" cy="355092"/>
+            <a:off x="6492240" y="3886200"/>
+            <a:ext cx="4645152" cy="475488"/>
           </a:xfrm>
           <a:prstGeom prst="rect">
             <a:avLst/>
@@ -11442,14 +11851,14 @@
           <a:bodyPr wrap="square" lIns="0" tIns="25400" rIns="25400" bIns="0" rtlCol="0" anchor="ctr"/>
           <a:lstStyle/>
           <a:p>
-            <a:pPr algn="l" indent="0" marL="0">
+            <a:pPr algn="ctr" indent="0" marL="0">
               <a:lnSpc>
                 <a:spcPct val="120000"/>
               </a:lnSpc>
               <a:buNone/>
             </a:pPr>
             <a:r>
-              <a:rPr lang="en-US" sz="2200" dirty="0">
+              <a:rPr lang="en-US" sz="1800" dirty="0">
                 <a:solidFill>
                   <a:srgbClr val="1F2937"/>
                 </a:solidFill>
@@ -11457,22 +11866,22 @@
                 <a:ea typeface="Pretendard" pitchFamily="34" charset="-122"/>
                 <a:cs typeface="Pretendard" pitchFamily="34" charset="-120"/>
               </a:rPr>
-              <a:t>Icon and Text Aside</a:t>
+              <a:t>10  Icon and Text Aside</a:t>
             </a:r>
-            <a:endParaRPr lang="en-US" sz="2200" dirty="0"/>
+            <a:endParaRPr lang="en-US" sz="1800" dirty="0"/>
           </a:p>
         </p:txBody>
       </p:sp>
       <p:sp>
         <p:nvSpPr>
-          <p:cNvPr id="17" name="Text 15"/>
+          <p:cNvPr id="31" name="Text 29"/>
           <p:cNvSpPr txBox="1"/>
           <p:nvPr/>
         </p:nvSpPr>
         <p:spPr>
           <a:xfrm>
-            <a:off x="987552" y="5123688"/>
-            <a:ext cx="10094976" cy="355092"/>
+            <a:off x="6492240" y="4690872"/>
+            <a:ext cx="4645152" cy="475488"/>
           </a:xfrm>
           <a:prstGeom prst="rect">
             <a:avLst/>
@@ -11484,14 +11893,14 @@
           <a:bodyPr wrap="square" lIns="0" tIns="25400" rIns="25400" bIns="0" rtlCol="0" anchor="ctr"/>
           <a:lstStyle/>
           <a:p>
-            <a:pPr algn="l" indent="0" marL="0">
+            <a:pPr algn="ctr" indent="0" marL="0">
               <a:lnSpc>
                 <a:spcPct val="120000"/>
               </a:lnSpc>
               <a:buNone/>
             </a:pPr>
             <a:r>
-              <a:rPr lang="en-US" sz="2200" dirty="0">
+              <a:rPr lang="en-US" sz="1800" dirty="0">
                 <a:solidFill>
                   <a:srgbClr val="1F2937"/>
                 </a:solidFill>
@@ -11499,22 +11908,22 @@
                 <a:ea typeface="Pretendard" pitchFamily="34" charset="-122"/>
                 <a:cs typeface="Pretendard" pitchFamily="34" charset="-120"/>
               </a:rPr>
-              <a:t>Overflow Guard</a:t>
+              <a:t>11  Overflow Guard</a:t>
             </a:r>
-            <a:endParaRPr lang="en-US" sz="2200" dirty="0"/>
+            <a:endParaRPr lang="en-US" sz="1800" dirty="0"/>
           </a:p>
         </p:txBody>
       </p:sp>
       <p:sp>
         <p:nvSpPr>
-          <p:cNvPr id="18" name="Text 16"/>
+          <p:cNvPr id="32" name="Text 30"/>
           <p:cNvSpPr txBox="1"/>
           <p:nvPr/>
         </p:nvSpPr>
         <p:spPr>
           <a:xfrm>
-            <a:off x="987552" y="5478780"/>
-            <a:ext cx="10094976" cy="355092"/>
+            <a:off x="6492240" y="5486400"/>
+            <a:ext cx="4645152" cy="475488"/>
           </a:xfrm>
           <a:prstGeom prst="rect">
             <a:avLst/>
@@ -11526,14 +11935,14 @@
           <a:bodyPr wrap="square" lIns="0" tIns="25400" rIns="25400" bIns="0" rtlCol="0" anchor="ctr"/>
           <a:lstStyle/>
           <a:p>
-            <a:pPr algn="l" indent="0" marL="0">
+            <a:pPr algn="ctr" indent="0" marL="0">
               <a:lnSpc>
                 <a:spcPct val="120000"/>
               </a:lnSpc>
               <a:buNone/>
             </a:pPr>
             <a:r>
-              <a:rPr lang="en-US" sz="2200" dirty="0">
+              <a:rPr lang="en-US" sz="1800" dirty="0">
                 <a:solidFill>
                   <a:srgbClr val="1F2937"/>
                 </a:solidFill>
@@ -11541,9 +11950,9 @@
                 <a:ea typeface="Pretendard" pitchFamily="34" charset="-122"/>
                 <a:cs typeface="Pretendard" pitchFamily="34" charset="-120"/>
               </a:rPr>
-              <a:t>Actions Output Review</a:t>
+              <a:t>12  Actions Output Review</a:t>
             </a:r>
-            <a:endParaRPr lang="en-US" sz="2200" dirty="0"/>
+            <a:endParaRPr lang="en-US" sz="1800" dirty="0"/>
           </a:p>
         </p:txBody>
       </p:sp>
@@ -12126,8 +12535,37 @@
         </p:nvSpPr>
         <p:spPr>
           <a:xfrm>
-            <a:off x="914400" y="1417320"/>
-            <a:ext cx="73152" cy="868680"/>
+            <a:off x="786384" y="1956816"/>
+            <a:ext cx="32004" cy="3483864"/>
+          </a:xfrm>
+          <a:prstGeom prst="rect">
+            <a:avLst/>
+          </a:prstGeom>
+          <a:solidFill>
+            <a:srgbClr val="FCD34D">
+              <a:alpha val="80000"/>
+            </a:srgbClr>
+          </a:solidFill>
+          <a:ln w="12700">
+            <a:solidFill>
+              <a:srgbClr val="FCD34D">
+                <a:alpha val="0"/>
+              </a:srgbClr>
+            </a:solidFill>
+            <a:prstDash val="solid"/>
+          </a:ln>
+        </p:spPr>
+      </p:sp>
+      <p:sp>
+        <p:nvSpPr>
+          <p:cNvPr id="6" name="Shape 4"/>
+          <p:cNvSpPr/>
+          <p:nvPr/>
+        </p:nvSpPr>
+        <p:spPr>
+          <a:xfrm>
+            <a:off x="914400" y="1865376"/>
+            <a:ext cx="73152" cy="1024128"/>
           </a:xfrm>
           <a:prstGeom prst="rect">
             <a:avLst/>
@@ -12147,14 +12585,14 @@
       </p:sp>
       <p:sp>
         <p:nvSpPr>
-          <p:cNvPr id="6" name="Shape 4"/>
-          <p:cNvSpPr/>
-          <p:nvPr/>
-        </p:nvSpPr>
-        <p:spPr>
-          <a:xfrm>
-            <a:off x="914400" y="2560320"/>
-            <a:ext cx="73152" cy="868680"/>
+          <p:cNvPr id="7" name="Shape 5"/>
+          <p:cNvSpPr/>
+          <p:nvPr/>
+        </p:nvSpPr>
+        <p:spPr>
+          <a:xfrm>
+            <a:off x="914400" y="3191256"/>
+            <a:ext cx="73152" cy="1024128"/>
           </a:xfrm>
           <a:prstGeom prst="rect">
             <a:avLst/>
@@ -12174,14 +12612,14 @@
       </p:sp>
       <p:sp>
         <p:nvSpPr>
-          <p:cNvPr id="7" name="Shape 5"/>
-          <p:cNvSpPr/>
-          <p:nvPr/>
-        </p:nvSpPr>
-        <p:spPr>
-          <a:xfrm>
-            <a:off x="914400" y="3703320"/>
-            <a:ext cx="73152" cy="868680"/>
+          <p:cNvPr id="8" name="Shape 6"/>
+          <p:cNvSpPr/>
+          <p:nvPr/>
+        </p:nvSpPr>
+        <p:spPr>
+          <a:xfrm>
+            <a:off x="914400" y="4507992"/>
+            <a:ext cx="73152" cy="1024128"/>
           </a:xfrm>
           <a:prstGeom prst="rect">
             <a:avLst/>
@@ -12201,7 +12639,7 @@
       </p:sp>
       <p:pic>
         <p:nvPicPr>
-          <p:cNvPr id="8" name="Image 0" descr="preencoded.png">    </p:cNvPr>
+          <p:cNvPr id="9" name="Image 0" descr="preencoded.png">    </p:cNvPr>
           <p:cNvPicPr>
             <a:picLocks noChangeAspect="1"/>
           </p:cNvPicPr>
@@ -12221,8 +12659,8 @@
         </p:blipFill>
         <p:spPr>
           <a:xfrm>
-            <a:off x="914400" y="1417320"/>
-            <a:ext cx="10241280" cy="868680"/>
+            <a:off x="914400" y="1865376"/>
+            <a:ext cx="10241280" cy="1024128"/>
           </a:xfrm>
           <a:prstGeom prst="rect">
             <a:avLst/>
@@ -12231,14 +12669,14 @@
       </p:pic>
       <p:sp>
         <p:nvSpPr>
-          <p:cNvPr id="9" name="Shape 6"/>
-          <p:cNvSpPr/>
-          <p:nvPr/>
-        </p:nvSpPr>
-        <p:spPr>
-          <a:xfrm>
-            <a:off x="914400" y="1417320"/>
-            <a:ext cx="10241280" cy="868680"/>
+          <p:cNvPr id="10" name="Shape 7"/>
+          <p:cNvSpPr/>
+          <p:nvPr/>
+        </p:nvSpPr>
+        <p:spPr>
+          <a:xfrm>
+            <a:off x="914400" y="1865376"/>
+            <a:ext cx="10241280" cy="1024128"/>
           </a:xfrm>
           <a:prstGeom prst="rect">
             <a:avLst/>
@@ -12267,7 +12705,7 @@
       </p:sp>
       <p:pic>
         <p:nvPicPr>
-          <p:cNvPr id="10" name="Image 1" descr="preencoded.png">    </p:cNvPr>
+          <p:cNvPr id="11" name="Image 1" descr="preencoded.png">    </p:cNvPr>
           <p:cNvPicPr>
             <a:picLocks noChangeAspect="1"/>
           </p:cNvPicPr>
@@ -12287,8 +12725,8 @@
         </p:blipFill>
         <p:spPr>
           <a:xfrm>
-            <a:off x="914400" y="2560320"/>
-            <a:ext cx="10241280" cy="868680"/>
+            <a:off x="914400" y="3191256"/>
+            <a:ext cx="10241280" cy="1024128"/>
           </a:xfrm>
           <a:prstGeom prst="rect">
             <a:avLst/>
@@ -12297,14 +12735,14 @@
       </p:pic>
       <p:sp>
         <p:nvSpPr>
-          <p:cNvPr id="11" name="Shape 7"/>
-          <p:cNvSpPr/>
-          <p:nvPr/>
-        </p:nvSpPr>
-        <p:spPr>
-          <a:xfrm>
-            <a:off x="914400" y="2560320"/>
-            <a:ext cx="10241280" cy="868680"/>
+          <p:cNvPr id="12" name="Shape 8"/>
+          <p:cNvSpPr/>
+          <p:nvPr/>
+        </p:nvSpPr>
+        <p:spPr>
+          <a:xfrm>
+            <a:off x="914400" y="3191256"/>
+            <a:ext cx="10241280" cy="1024128"/>
           </a:xfrm>
           <a:prstGeom prst="rect">
             <a:avLst/>
@@ -12333,7 +12771,7 @@
       </p:sp>
       <p:pic>
         <p:nvPicPr>
-          <p:cNvPr id="12" name="Image 2" descr="preencoded.png">    </p:cNvPr>
+          <p:cNvPr id="13" name="Image 2" descr="preencoded.png">    </p:cNvPr>
           <p:cNvPicPr>
             <a:picLocks noChangeAspect="1"/>
           </p:cNvPicPr>
@@ -12353,8 +12791,8 @@
         </p:blipFill>
         <p:spPr>
           <a:xfrm>
-            <a:off x="914400" y="3703320"/>
-            <a:ext cx="10241280" cy="868680"/>
+            <a:off x="914400" y="4507992"/>
+            <a:ext cx="10241280" cy="1024128"/>
           </a:xfrm>
           <a:prstGeom prst="rect">
             <a:avLst/>
@@ -12363,14 +12801,14 @@
       </p:pic>
       <p:sp>
         <p:nvSpPr>
-          <p:cNvPr id="13" name="Shape 8"/>
-          <p:cNvSpPr/>
-          <p:nvPr/>
-        </p:nvSpPr>
-        <p:spPr>
-          <a:xfrm>
-            <a:off x="914400" y="3703320"/>
-            <a:ext cx="10241280" cy="868680"/>
+          <p:cNvPr id="14" name="Shape 9"/>
+          <p:cNvSpPr/>
+          <p:nvPr/>
+        </p:nvSpPr>
+        <p:spPr>
+          <a:xfrm>
+            <a:off x="914400" y="4507992"/>
+            <a:ext cx="10241280" cy="1024128"/>
           </a:xfrm>
           <a:prstGeom prst="rect">
             <a:avLst/>
@@ -12399,7 +12837,7 @@
       </p:sp>
       <p:sp>
         <p:nvSpPr>
-          <p:cNvPr id="14" name="Text 9"/>
+          <p:cNvPr id="15" name="Text 10"/>
           <p:cNvSpPr txBox="1"/>
           <p:nvPr/>
         </p:nvSpPr>
@@ -12441,18 +12879,18 @@
       </p:sp>
       <p:sp>
         <p:nvSpPr>
-          <p:cNvPr id="15" name="Shape 10"/>
-          <p:cNvSpPr/>
-          <p:nvPr/>
-        </p:nvSpPr>
-        <p:spPr>
-          <a:xfrm>
-            <a:off x="1097280" y="1623060"/>
-            <a:ext cx="457200" cy="457200"/>
+          <p:cNvPr id="16" name="Shape 11"/>
+          <p:cNvSpPr/>
+          <p:nvPr/>
+        </p:nvSpPr>
+        <p:spPr>
+          <a:xfrm>
+            <a:off x="1097280" y="2140428"/>
+            <a:ext cx="474025" cy="474025"/>
           </a:xfrm>
           <a:prstGeom prst="roundRect">
             <a:avLst>
-              <a:gd name="adj" fmla="val 8000"/>
+              <a:gd name="adj" fmla="val 7716"/>
             </a:avLst>
           </a:prstGeom>
           <a:solidFill>
@@ -12468,7 +12906,7 @@
       </p:sp>
       <p:pic>
         <p:nvPicPr>
-          <p:cNvPr id="16" name="Image 3" descr="flow icon from tabler-icons (MIT)">    </p:cNvPr>
+          <p:cNvPr id="17" name="Image 3" descr="flow icon from tabler-icons (MIT)">    </p:cNvPr>
           <p:cNvPicPr>
             <a:picLocks noChangeAspect="1"/>
           </p:cNvPicPr>
@@ -12488,8 +12926,8 @@
         </p:blipFill>
         <p:spPr>
           <a:xfrm>
-            <a:off x="1170432" y="1696212"/>
-            <a:ext cx="310896" cy="310896"/>
+            <a:off x="1170432" y="2213580"/>
+            <a:ext cx="327721" cy="327721"/>
           </a:xfrm>
           <a:prstGeom prst="rect">
             <a:avLst/>
@@ -12498,14 +12936,14 @@
       </p:pic>
       <p:sp>
         <p:nvSpPr>
-          <p:cNvPr id="17" name="Text 11"/>
+          <p:cNvPr id="18" name="Text 12"/>
           <p:cNvSpPr txBox="1"/>
           <p:nvPr/>
         </p:nvSpPr>
         <p:spPr>
           <a:xfrm>
-            <a:off x="1682496" y="1508760"/>
-            <a:ext cx="9272016" cy="685800"/>
+            <a:off x="1699321" y="1957548"/>
+            <a:ext cx="9255191" cy="839785"/>
           </a:xfrm>
           <a:prstGeom prst="rect">
             <a:avLst/>
@@ -12557,18 +12995,18 @@
       </p:sp>
       <p:sp>
         <p:nvSpPr>
-          <p:cNvPr id="18" name="Shape 12"/>
-          <p:cNvSpPr/>
-          <p:nvPr/>
-        </p:nvSpPr>
-        <p:spPr>
-          <a:xfrm>
-            <a:off x="1097280" y="2766060"/>
-            <a:ext cx="457200" cy="457200"/>
+          <p:cNvPr id="19" name="Shape 13"/>
+          <p:cNvSpPr/>
+          <p:nvPr/>
+        </p:nvSpPr>
+        <p:spPr>
+          <a:xfrm>
+            <a:off x="1097280" y="3466308"/>
+            <a:ext cx="474025" cy="474025"/>
           </a:xfrm>
           <a:prstGeom prst="roundRect">
             <a:avLst>
-              <a:gd name="adj" fmla="val 8000"/>
+              <a:gd name="adj" fmla="val 7716"/>
             </a:avLst>
           </a:prstGeom>
           <a:solidFill>
@@ -12584,7 +13022,7 @@
       </p:sp>
       <p:pic>
         <p:nvPicPr>
-          <p:cNvPr id="19" name="Image 4" descr="verified icon from tabler-icons (MIT)">    </p:cNvPr>
+          <p:cNvPr id="20" name="Image 4" descr="verified icon from tabler-icons (MIT)">    </p:cNvPr>
           <p:cNvPicPr>
             <a:picLocks noChangeAspect="1"/>
           </p:cNvPicPr>
@@ -12604,8 +13042,8 @@
         </p:blipFill>
         <p:spPr>
           <a:xfrm>
-            <a:off x="1170432" y="2839212"/>
-            <a:ext cx="310896" cy="310896"/>
+            <a:off x="1170432" y="3539460"/>
+            <a:ext cx="327721" cy="327721"/>
           </a:xfrm>
           <a:prstGeom prst="rect">
             <a:avLst/>
@@ -12614,14 +13052,14 @@
       </p:pic>
       <p:sp>
         <p:nvSpPr>
-          <p:cNvPr id="20" name="Text 13"/>
+          <p:cNvPr id="21" name="Text 14"/>
           <p:cNvSpPr txBox="1"/>
           <p:nvPr/>
         </p:nvSpPr>
         <p:spPr>
           <a:xfrm>
-            <a:off x="1682496" y="2651760"/>
-            <a:ext cx="9272016" cy="685800"/>
+            <a:off x="1699321" y="3283428"/>
+            <a:ext cx="9255191" cy="839785"/>
           </a:xfrm>
           <a:prstGeom prst="rect">
             <a:avLst/>
@@ -12673,18 +13111,18 @@
       </p:sp>
       <p:sp>
         <p:nvSpPr>
-          <p:cNvPr id="21" name="Shape 14"/>
-          <p:cNvSpPr/>
-          <p:nvPr/>
-        </p:nvSpPr>
-        <p:spPr>
-          <a:xfrm>
-            <a:off x="1097280" y="3909060"/>
-            <a:ext cx="457200" cy="457200"/>
+          <p:cNvPr id="22" name="Shape 15"/>
+          <p:cNvSpPr/>
+          <p:nvPr/>
+        </p:nvSpPr>
+        <p:spPr>
+          <a:xfrm>
+            <a:off x="1097280" y="4783044"/>
+            <a:ext cx="474025" cy="474025"/>
           </a:xfrm>
           <a:prstGeom prst="roundRect">
             <a:avLst>
-              <a:gd name="adj" fmla="val 8000"/>
+              <a:gd name="adj" fmla="val 7716"/>
             </a:avLst>
           </a:prstGeom>
           <a:solidFill>
@@ -12700,7 +13138,7 @@
       </p:sp>
       <p:pic>
         <p:nvPicPr>
-          <p:cNvPr id="22" name="Image 5" descr="spark icon from tabler-icons (MIT)">    </p:cNvPr>
+          <p:cNvPr id="23" name="Image 5" descr="spark icon from tabler-icons (MIT)">    </p:cNvPr>
           <p:cNvPicPr>
             <a:picLocks noChangeAspect="1"/>
           </p:cNvPicPr>
@@ -12720,8 +13158,8 @@
         </p:blipFill>
         <p:spPr>
           <a:xfrm>
-            <a:off x="1170432" y="3982212"/>
-            <a:ext cx="310896" cy="310896"/>
+            <a:off x="1170432" y="4856196"/>
+            <a:ext cx="327721" cy="327721"/>
           </a:xfrm>
           <a:prstGeom prst="rect">
             <a:avLst/>
@@ -12730,14 +13168,14 @@
       </p:pic>
       <p:sp>
         <p:nvSpPr>
-          <p:cNvPr id="23" name="Text 15"/>
+          <p:cNvPr id="24" name="Text 16"/>
           <p:cNvSpPr txBox="1"/>
           <p:nvPr/>
         </p:nvSpPr>
         <p:spPr>
           <a:xfrm>
-            <a:off x="1682496" y="3794760"/>
-            <a:ext cx="9272016" cy="685800"/>
+            <a:off x="1699321" y="4600164"/>
+            <a:ext cx="9255191" cy="839785"/>
           </a:xfrm>
           <a:prstGeom prst="rect">
             <a:avLst/>
@@ -13235,8 +13673,37 @@
         </p:nvSpPr>
         <p:spPr>
           <a:xfrm>
-            <a:off x="914400" y="1417320"/>
-            <a:ext cx="73152" cy="868680"/>
+            <a:off x="786384" y="1956816"/>
+            <a:ext cx="32004" cy="3483864"/>
+          </a:xfrm>
+          <a:prstGeom prst="rect">
+            <a:avLst/>
+          </a:prstGeom>
+          <a:solidFill>
+            <a:srgbClr val="FCD34D">
+              <a:alpha val="80000"/>
+            </a:srgbClr>
+          </a:solidFill>
+          <a:ln w="12700">
+            <a:solidFill>
+              <a:srgbClr val="FCD34D">
+                <a:alpha val="0"/>
+              </a:srgbClr>
+            </a:solidFill>
+            <a:prstDash val="solid"/>
+          </a:ln>
+        </p:spPr>
+      </p:sp>
+      <p:sp>
+        <p:nvSpPr>
+          <p:cNvPr id="6" name="Shape 4"/>
+          <p:cNvSpPr/>
+          <p:nvPr/>
+        </p:nvSpPr>
+        <p:spPr>
+          <a:xfrm>
+            <a:off x="914400" y="1865376"/>
+            <a:ext cx="73152" cy="1024128"/>
           </a:xfrm>
           <a:prstGeom prst="rect">
             <a:avLst/>
@@ -13256,14 +13723,14 @@
       </p:sp>
       <p:sp>
         <p:nvSpPr>
-          <p:cNvPr id="6" name="Shape 4"/>
-          <p:cNvSpPr/>
-          <p:nvPr/>
-        </p:nvSpPr>
-        <p:spPr>
-          <a:xfrm>
-            <a:off x="914400" y="2560320"/>
-            <a:ext cx="73152" cy="868680"/>
+          <p:cNvPr id="7" name="Shape 5"/>
+          <p:cNvSpPr/>
+          <p:nvPr/>
+        </p:nvSpPr>
+        <p:spPr>
+          <a:xfrm>
+            <a:off x="914400" y="3191256"/>
+            <a:ext cx="73152" cy="1024128"/>
           </a:xfrm>
           <a:prstGeom prst="rect">
             <a:avLst/>
@@ -13283,14 +13750,14 @@
       </p:sp>
       <p:sp>
         <p:nvSpPr>
-          <p:cNvPr id="7" name="Shape 5"/>
-          <p:cNvSpPr/>
-          <p:nvPr/>
-        </p:nvSpPr>
-        <p:spPr>
-          <a:xfrm>
-            <a:off x="914400" y="3703320"/>
-            <a:ext cx="73152" cy="868680"/>
+          <p:cNvPr id="8" name="Shape 6"/>
+          <p:cNvSpPr/>
+          <p:nvPr/>
+        </p:nvSpPr>
+        <p:spPr>
+          <a:xfrm>
+            <a:off x="914400" y="4507992"/>
+            <a:ext cx="73152" cy="1024128"/>
           </a:xfrm>
           <a:prstGeom prst="rect">
             <a:avLst/>
@@ -13310,7 +13777,7 @@
       </p:sp>
       <p:pic>
         <p:nvPicPr>
-          <p:cNvPr id="8" name="Image 0" descr="preencoded.png">    </p:cNvPr>
+          <p:cNvPr id="9" name="Image 0" descr="preencoded.png">    </p:cNvPr>
           <p:cNvPicPr>
             <a:picLocks noChangeAspect="1"/>
           </p:cNvPicPr>
@@ -13330,8 +13797,8 @@
         </p:blipFill>
         <p:spPr>
           <a:xfrm>
-            <a:off x="914400" y="1417320"/>
-            <a:ext cx="10241280" cy="868680"/>
+            <a:off x="914400" y="1865376"/>
+            <a:ext cx="10241280" cy="1024128"/>
           </a:xfrm>
           <a:prstGeom prst="rect">
             <a:avLst/>
@@ -13340,14 +13807,14 @@
       </p:pic>
       <p:sp>
         <p:nvSpPr>
-          <p:cNvPr id="9" name="Shape 6"/>
-          <p:cNvSpPr/>
-          <p:nvPr/>
-        </p:nvSpPr>
-        <p:spPr>
-          <a:xfrm>
-            <a:off x="914400" y="1417320"/>
-            <a:ext cx="10241280" cy="868680"/>
+          <p:cNvPr id="10" name="Shape 7"/>
+          <p:cNvSpPr/>
+          <p:nvPr/>
+        </p:nvSpPr>
+        <p:spPr>
+          <a:xfrm>
+            <a:off x="914400" y="1865376"/>
+            <a:ext cx="10241280" cy="1024128"/>
           </a:xfrm>
           <a:prstGeom prst="rect">
             <a:avLst/>
@@ -13376,7 +13843,7 @@
       </p:sp>
       <p:pic>
         <p:nvPicPr>
-          <p:cNvPr id="10" name="Image 1" descr="preencoded.png">    </p:cNvPr>
+          <p:cNvPr id="11" name="Image 1" descr="preencoded.png">    </p:cNvPr>
           <p:cNvPicPr>
             <a:picLocks noChangeAspect="1"/>
           </p:cNvPicPr>
@@ -13396,8 +13863,8 @@
         </p:blipFill>
         <p:spPr>
           <a:xfrm>
-            <a:off x="914400" y="2560320"/>
-            <a:ext cx="10241280" cy="868680"/>
+            <a:off x="914400" y="3191256"/>
+            <a:ext cx="10241280" cy="1024128"/>
           </a:xfrm>
           <a:prstGeom prst="rect">
             <a:avLst/>
@@ -13406,14 +13873,14 @@
       </p:pic>
       <p:sp>
         <p:nvSpPr>
-          <p:cNvPr id="11" name="Shape 7"/>
-          <p:cNvSpPr/>
-          <p:nvPr/>
-        </p:nvSpPr>
-        <p:spPr>
-          <a:xfrm>
-            <a:off x="914400" y="2560320"/>
-            <a:ext cx="10241280" cy="868680"/>
+          <p:cNvPr id="12" name="Shape 8"/>
+          <p:cNvSpPr/>
+          <p:nvPr/>
+        </p:nvSpPr>
+        <p:spPr>
+          <a:xfrm>
+            <a:off x="914400" y="3191256"/>
+            <a:ext cx="10241280" cy="1024128"/>
           </a:xfrm>
           <a:prstGeom prst="rect">
             <a:avLst/>
@@ -13442,7 +13909,7 @@
       </p:sp>
       <p:pic>
         <p:nvPicPr>
-          <p:cNvPr id="12" name="Image 2" descr="preencoded.png">    </p:cNvPr>
+          <p:cNvPr id="13" name="Image 2" descr="preencoded.png">    </p:cNvPr>
           <p:cNvPicPr>
             <a:picLocks noChangeAspect="1"/>
           </p:cNvPicPr>
@@ -13462,8 +13929,8 @@
         </p:blipFill>
         <p:spPr>
           <a:xfrm>
-            <a:off x="914400" y="3703320"/>
-            <a:ext cx="10241280" cy="868680"/>
+            <a:off x="914400" y="4507992"/>
+            <a:ext cx="10241280" cy="1024128"/>
           </a:xfrm>
           <a:prstGeom prst="rect">
             <a:avLst/>
@@ -13472,14 +13939,14 @@
       </p:pic>
       <p:sp>
         <p:nvSpPr>
-          <p:cNvPr id="13" name="Shape 8"/>
-          <p:cNvSpPr/>
-          <p:nvPr/>
-        </p:nvSpPr>
-        <p:spPr>
-          <a:xfrm>
-            <a:off x="914400" y="3703320"/>
-            <a:ext cx="10241280" cy="868680"/>
+          <p:cNvPr id="14" name="Shape 9"/>
+          <p:cNvSpPr/>
+          <p:nvPr/>
+        </p:nvSpPr>
+        <p:spPr>
+          <a:xfrm>
+            <a:off x="914400" y="4507992"/>
+            <a:ext cx="10241280" cy="1024128"/>
           </a:xfrm>
           <a:prstGeom prst="rect">
             <a:avLst/>
@@ -13508,7 +13975,7 @@
       </p:sp>
       <p:sp>
         <p:nvSpPr>
-          <p:cNvPr id="14" name="Text 9"/>
+          <p:cNvPr id="15" name="Text 10"/>
           <p:cNvSpPr txBox="1"/>
           <p:nvPr/>
         </p:nvSpPr>
@@ -13550,18 +14017,18 @@
       </p:sp>
       <p:sp>
         <p:nvSpPr>
-          <p:cNvPr id="15" name="Shape 10"/>
-          <p:cNvSpPr/>
-          <p:nvPr/>
-        </p:nvSpPr>
-        <p:spPr>
-          <a:xfrm>
-            <a:off x="1097280" y="1623060"/>
-            <a:ext cx="457200" cy="457200"/>
+          <p:cNvPr id="16" name="Shape 11"/>
+          <p:cNvSpPr/>
+          <p:nvPr/>
+        </p:nvSpPr>
+        <p:spPr>
+          <a:xfrm>
+            <a:off x="1097280" y="2140428"/>
+            <a:ext cx="474025" cy="474025"/>
           </a:xfrm>
           <a:prstGeom prst="roundRect">
             <a:avLst>
-              <a:gd name="adj" fmla="val 8000"/>
+              <a:gd name="adj" fmla="val 7716"/>
             </a:avLst>
           </a:prstGeom>
           <a:solidFill>
@@ -13577,7 +14044,7 @@
       </p:sp>
       <p:pic>
         <p:nvPicPr>
-          <p:cNvPr id="16" name="Image 3" descr="flow icon from tabler-icons (MIT)">    </p:cNvPr>
+          <p:cNvPr id="17" name="Image 3" descr="flow icon from tabler-icons (MIT)">    </p:cNvPr>
           <p:cNvPicPr>
             <a:picLocks noChangeAspect="1"/>
           </p:cNvPicPr>
@@ -13597,8 +14064,8 @@
         </p:blipFill>
         <p:spPr>
           <a:xfrm>
-            <a:off x="1170432" y="1696212"/>
-            <a:ext cx="310896" cy="310896"/>
+            <a:off x="1170432" y="2213580"/>
+            <a:ext cx="327721" cy="327721"/>
           </a:xfrm>
           <a:prstGeom prst="rect">
             <a:avLst/>
@@ -13607,14 +14074,14 @@
       </p:pic>
       <p:sp>
         <p:nvSpPr>
-          <p:cNvPr id="17" name="Text 11"/>
+          <p:cNvPr id="18" name="Text 12"/>
           <p:cNvSpPr txBox="1"/>
           <p:nvPr/>
         </p:nvSpPr>
         <p:spPr>
           <a:xfrm>
-            <a:off x="1682496" y="1508760"/>
-            <a:ext cx="9272016" cy="685800"/>
+            <a:off x="1699321" y="1957548"/>
+            <a:ext cx="9255191" cy="839785"/>
           </a:xfrm>
           <a:prstGeom prst="rect">
             <a:avLst/>
@@ -13641,7 +14108,7 @@
                 <a:ea typeface="Pretendard" pitchFamily="34" charset="-122"/>
                 <a:cs typeface="Pretendard" pitchFamily="34" charset="-120"/>
               </a:rPr>
-              <a:t>Plain / clean</a:t>
+              <a:t>Clean / minimalism</a:t>
             </a:r>
             <a:pPr algn="l" indent="0" marL="0">
               <a:lnSpc>
@@ -13658,7 +14125,7 @@
                 <a:ea typeface="Pretendard" pitchFamily="34" charset="-122"/>
                 <a:cs typeface="Pretendard" pitchFamily="34" charset="-120"/>
               </a:rPr>
-              <a:t>  low-decoration baselines.</a:t>
+              <a:t>  restrained structural baselines.</a:t>
             </a:r>
             <a:endParaRPr lang="en-US" sz="2200" dirty="0"/>
           </a:p>
@@ -13666,18 +14133,18 @@
       </p:sp>
       <p:sp>
         <p:nvSpPr>
-          <p:cNvPr id="18" name="Shape 12"/>
-          <p:cNvSpPr/>
-          <p:nvPr/>
-        </p:nvSpPr>
-        <p:spPr>
-          <a:xfrm>
-            <a:off x="1097280" y="2766060"/>
-            <a:ext cx="457200" cy="457200"/>
+          <p:cNvPr id="19" name="Shape 13"/>
+          <p:cNvSpPr/>
+          <p:nvPr/>
+        </p:nvSpPr>
+        <p:spPr>
+          <a:xfrm>
+            <a:off x="1097280" y="3466308"/>
+            <a:ext cx="474025" cy="474025"/>
           </a:xfrm>
           <a:prstGeom prst="roundRect">
             <a:avLst>
-              <a:gd name="adj" fmla="val 8000"/>
+              <a:gd name="adj" fmla="val 7716"/>
             </a:avLst>
           </a:prstGeom>
           <a:solidFill>
@@ -13693,7 +14160,7 @@
       </p:sp>
       <p:pic>
         <p:nvPicPr>
-          <p:cNvPr id="19" name="Image 4" descr="verified icon from tabler-icons (MIT)">    </p:cNvPr>
+          <p:cNvPr id="20" name="Image 4" descr="verified icon from tabler-icons (MIT)">    </p:cNvPr>
           <p:cNvPicPr>
             <a:picLocks noChangeAspect="1"/>
           </p:cNvPicPr>
@@ -13713,8 +14180,8 @@
         </p:blipFill>
         <p:spPr>
           <a:xfrm>
-            <a:off x="1170432" y="2839212"/>
-            <a:ext cx="310896" cy="310896"/>
+            <a:off x="1170432" y="3539460"/>
+            <a:ext cx="327721" cy="327721"/>
           </a:xfrm>
           <a:prstGeom prst="rect">
             <a:avLst/>
@@ -13723,14 +14190,14 @@
       </p:pic>
       <p:sp>
         <p:nvSpPr>
-          <p:cNvPr id="20" name="Text 13"/>
+          <p:cNvPr id="21" name="Text 14"/>
           <p:cNvSpPr txBox="1"/>
           <p:nvPr/>
         </p:nvSpPr>
         <p:spPr>
           <a:xfrm>
-            <a:off x="1682496" y="2651760"/>
-            <a:ext cx="9272016" cy="685800"/>
+            <a:off x="1699321" y="3283428"/>
+            <a:ext cx="9255191" cy="839785"/>
           </a:xfrm>
           <a:prstGeom prst="rect">
             <a:avLst/>
@@ -13782,18 +14249,18 @@
       </p:sp>
       <p:sp>
         <p:nvSpPr>
-          <p:cNvPr id="21" name="Shape 14"/>
-          <p:cNvSpPr/>
-          <p:nvPr/>
-        </p:nvSpPr>
-        <p:spPr>
-          <a:xfrm>
-            <a:off x="1097280" y="3909060"/>
-            <a:ext cx="457200" cy="457200"/>
+          <p:cNvPr id="22" name="Shape 15"/>
+          <p:cNvSpPr/>
+          <p:nvPr/>
+        </p:nvSpPr>
+        <p:spPr>
+          <a:xfrm>
+            <a:off x="1097280" y="4783044"/>
+            <a:ext cx="474025" cy="474025"/>
           </a:xfrm>
           <a:prstGeom prst="roundRect">
             <a:avLst>
-              <a:gd name="adj" fmla="val 8000"/>
+              <a:gd name="adj" fmla="val 7716"/>
             </a:avLst>
           </a:prstGeom>
           <a:solidFill>
@@ -13809,7 +14276,7 @@
       </p:sp>
       <p:pic>
         <p:nvPicPr>
-          <p:cNvPr id="22" name="Image 5" descr="spark icon from tabler-icons (MIT)">    </p:cNvPr>
+          <p:cNvPr id="23" name="Image 5" descr="spark icon from tabler-icons (MIT)">    </p:cNvPr>
           <p:cNvPicPr>
             <a:picLocks noChangeAspect="1"/>
           </p:cNvPicPr>
@@ -13829,8 +14296,8 @@
         </p:blipFill>
         <p:spPr>
           <a:xfrm>
-            <a:off x="1170432" y="3982212"/>
-            <a:ext cx="310896" cy="310896"/>
+            <a:off x="1170432" y="4856196"/>
+            <a:ext cx="327721" cy="327721"/>
           </a:xfrm>
           <a:prstGeom prst="rect">
             <a:avLst/>
@@ -13839,14 +14306,14 @@
       </p:pic>
       <p:sp>
         <p:nvSpPr>
-          <p:cNvPr id="23" name="Text 15"/>
+          <p:cNvPr id="24" name="Text 16"/>
           <p:cNvSpPr txBox="1"/>
           <p:nvPr/>
         </p:nvSpPr>
         <p:spPr>
           <a:xfrm>
-            <a:off x="1682496" y="3794760"/>
-            <a:ext cx="9272016" cy="685800"/>
+            <a:off x="1699321" y="4600164"/>
+            <a:ext cx="9255191" cy="839785"/>
           </a:xfrm>
           <a:prstGeom prst="rect">
             <a:avLst/>

--- a/docs/theme-preview/pptx/editorial.pptx
+++ b/docs/theme-preview/pptx/editorial.pptx
@@ -8653,7 +8653,7 @@
       </p:sp>
       <p:pic>
         <p:nvPicPr>
-          <p:cNvPr id="19" name="Image 4" descr="flow icon from tabler-icons (MIT)">    </p:cNvPr>
+          <p:cNvPr id="19" name="Image 4" descr="article icon from tabler-icons (MIT)">    </p:cNvPr>
           <p:cNvPicPr>
             <a:picLocks noChangeAspect="1"/>
           </p:cNvPicPr>
@@ -8769,7 +8769,7 @@
       </p:sp>
       <p:pic>
         <p:nvPicPr>
-          <p:cNvPr id="22" name="Image 5" descr="verified icon from tabler-icons (MIT)">    </p:cNvPr>
+          <p:cNvPr id="22" name="Image 5" descr="article icon from tabler-icons (MIT)">    </p:cNvPr>
           <p:cNvPicPr>
             <a:picLocks noChangeAspect="1"/>
           </p:cNvPicPr>
@@ -8885,7 +8885,7 @@
       </p:sp>
       <p:pic>
         <p:nvPicPr>
-          <p:cNvPr id="25" name="Image 6" descr="spark icon from tabler-icons (MIT)">    </p:cNvPr>
+          <p:cNvPr id="25" name="Image 6" descr="article icon from tabler-icons (MIT)">    </p:cNvPr>
           <p:cNvPicPr>
             <a:picLocks noChangeAspect="1"/>
           </p:cNvPicPr>
@@ -9001,7 +9001,7 @@
       </p:sp>
       <p:pic>
         <p:nvPicPr>
-          <p:cNvPr id="28" name="Image 7" descr="chart icon from tabler-icons (MIT)">    </p:cNvPr>
+          <p:cNvPr id="28" name="Image 7" descr="table icon from tabler-icons (MIT)">    </p:cNvPr>
           <p:cNvPicPr>
             <a:picLocks noChangeAspect="1"/>
           </p:cNvPicPr>
@@ -9644,7 +9644,7 @@
       </p:sp>
       <p:pic>
         <p:nvPicPr>
-          <p:cNvPr id="19" name="Image 4" descr="flow icon from tabler-icons (MIT)">    </p:cNvPr>
+          <p:cNvPr id="19" name="Image 4" descr="verified icon from tabler-icons (MIT)">    </p:cNvPr>
           <p:cNvPicPr>
             <a:picLocks noChangeAspect="1"/>
           </p:cNvPicPr>
@@ -9760,7 +9760,7 @@
       </p:sp>
       <p:pic>
         <p:nvPicPr>
-          <p:cNvPr id="22" name="Image 5" descr="verified icon from tabler-icons (MIT)">    </p:cNvPr>
+          <p:cNvPr id="22" name="Image 5" descr="table icon from tabler-icons (MIT)">    </p:cNvPr>
           <p:cNvPicPr>
             <a:picLocks noChangeAspect="1"/>
           </p:cNvPicPr>
@@ -9876,7 +9876,7 @@
       </p:sp>
       <p:pic>
         <p:nvPicPr>
-          <p:cNvPr id="25" name="Image 6" descr="spark icon from tabler-icons (MIT)">    </p:cNvPr>
+          <p:cNvPr id="25" name="Image 6" descr="article icon from tabler-icons (MIT)">    </p:cNvPr>
           <p:cNvPicPr>
             <a:picLocks noChangeAspect="1"/>
           </p:cNvPicPr>
@@ -9992,7 +9992,7 @@
       </p:sp>
       <p:pic>
         <p:nvPicPr>
-          <p:cNvPr id="28" name="Image 7" descr="chart icon from tabler-icons (MIT)">    </p:cNvPr>
+          <p:cNvPr id="28" name="Image 7" descr="article icon from tabler-icons (MIT)">    </p:cNvPr>
           <p:cNvPicPr>
             <a:picLocks noChangeAspect="1"/>
           </p:cNvPicPr>
@@ -12906,7 +12906,7 @@
       </p:sp>
       <p:pic>
         <p:nvPicPr>
-          <p:cNvPr id="17" name="Image 3" descr="flow icon from tabler-icons (MIT)">    </p:cNvPr>
+          <p:cNvPr id="17" name="Image 3" descr="article icon from tabler-icons (MIT)">    </p:cNvPr>
           <p:cNvPicPr>
             <a:picLocks noChangeAspect="1"/>
           </p:cNvPicPr>
@@ -13022,7 +13022,7 @@
       </p:sp>
       <p:pic>
         <p:nvPicPr>
-          <p:cNvPr id="20" name="Image 4" descr="verified icon from tabler-icons (MIT)">    </p:cNvPr>
+          <p:cNvPr id="20" name="Image 4" descr="chart icon from tabler-icons (MIT)">    </p:cNvPr>
           <p:cNvPicPr>
             <a:picLocks noChangeAspect="1"/>
           </p:cNvPicPr>
@@ -13138,7 +13138,7 @@
       </p:sp>
       <p:pic>
         <p:nvPicPr>
-          <p:cNvPr id="23" name="Image 5" descr="spark icon from tabler-icons (MIT)">    </p:cNvPr>
+          <p:cNvPr id="23" name="Image 5" descr="article icon from tabler-icons (MIT)">    </p:cNvPr>
           <p:cNvPicPr>
             <a:picLocks noChangeAspect="1"/>
           </p:cNvPicPr>
@@ -14044,7 +14044,7 @@
       </p:sp>
       <p:pic>
         <p:nvPicPr>
-          <p:cNvPr id="17" name="Image 3" descr="flow icon from tabler-icons (MIT)">    </p:cNvPr>
+          <p:cNvPr id="17" name="Image 3" descr="article icon from tabler-icons (MIT)">    </p:cNvPr>
           <p:cNvPicPr>
             <a:picLocks noChangeAspect="1"/>
           </p:cNvPicPr>
@@ -14160,7 +14160,7 @@
       </p:sp>
       <p:pic>
         <p:nvPicPr>
-          <p:cNvPr id="20" name="Image 4" descr="verified icon from tabler-icons (MIT)">    </p:cNvPr>
+          <p:cNvPr id="20" name="Image 4" descr="article icon from tabler-icons (MIT)">    </p:cNvPr>
           <p:cNvPicPr>
             <a:picLocks noChangeAspect="1"/>
           </p:cNvPicPr>
@@ -14276,7 +14276,7 @@
       </p:sp>
       <p:pic>
         <p:nvPicPr>
-          <p:cNvPr id="23" name="Image 5" descr="spark icon from tabler-icons (MIT)">    </p:cNvPr>
+          <p:cNvPr id="23" name="Image 5" descr="article icon from tabler-icons (MIT)">    </p:cNvPr>
           <p:cNvPicPr>
             <a:picLocks noChangeAspect="1"/>
           </p:cNvPicPr>
@@ -15246,7 +15246,7 @@
       </p:sp>
       <p:pic>
         <p:nvPicPr>
-          <p:cNvPr id="19" name="Image 4" descr="flow icon from tabler-icons (MIT)">    </p:cNvPr>
+          <p:cNvPr id="19" name="Image 4" descr="table icon from tabler-icons (MIT)">    </p:cNvPr>
           <p:cNvPicPr>
             <a:picLocks noChangeAspect="1"/>
           </p:cNvPicPr>
@@ -15362,7 +15362,7 @@
       </p:sp>
       <p:pic>
         <p:nvPicPr>
-          <p:cNvPr id="22" name="Image 5" descr="verified icon from tabler-icons (MIT)">    </p:cNvPr>
+          <p:cNvPr id="22" name="Image 5" descr="article icon from tabler-icons (MIT)">    </p:cNvPr>
           <p:cNvPicPr>
             <a:picLocks noChangeAspect="1"/>
           </p:cNvPicPr>
@@ -15478,7 +15478,7 @@
       </p:sp>
       <p:pic>
         <p:nvPicPr>
-          <p:cNvPr id="25" name="Image 6" descr="spark icon from tabler-icons (MIT)">    </p:cNvPr>
+          <p:cNvPr id="25" name="Image 6" descr="article icon from tabler-icons (MIT)">    </p:cNvPr>
           <p:cNvPicPr>
             <a:picLocks noChangeAspect="1"/>
           </p:cNvPicPr>
@@ -15594,7 +15594,7 @@
       </p:sp>
       <p:pic>
         <p:nvPicPr>
-          <p:cNvPr id="28" name="Image 7" descr="chart icon from tabler-icons (MIT)">    </p:cNvPr>
+          <p:cNvPr id="28" name="Image 7" descr="table icon from tabler-icons (MIT)">    </p:cNvPr>
           <p:cNvPicPr>
             <a:picLocks noChangeAspect="1"/>
           </p:cNvPicPr>

--- a/docs/theme-preview/pptx/editorial.pptx
+++ b/docs/theme-preview/pptx/editorial.pptx
@@ -11446,7 +11446,7 @@
                 <a:ea typeface="Pretendard" pitchFamily="34" charset="-122"/>
                 <a:cs typeface="Pretendard" pitchFamily="34" charset="-120"/>
               </a:rPr>
-              <a:t>목차</a:t>
+              <a:t>Agenda</a:t>
             </a:r>
             <a:endParaRPr lang="en-US" sz="3800" dirty="0"/>
           </a:p>

--- a/docs/theme-preview/pptx/editorial.pptx
+++ b/docs/theme-preview/pptx/editorial.pptx
@@ -3112,36 +3112,75 @@
           </a:ln>
         </p:spPr>
       </p:sp>
-      <p:sp>
-        <p:nvSpPr>
-          <p:cNvPr id="5" name="Shape 3"/>
-          <p:cNvSpPr/>
-          <p:nvPr/>
-        </p:nvSpPr>
-        <p:spPr>
-          <a:xfrm>
-            <a:off x="914400" y="1463040"/>
-            <a:ext cx="10241280" cy="73152"/>
-          </a:xfrm>
-          <a:prstGeom prst="rect">
-            <a:avLst/>
-          </a:prstGeom>
-          <a:solidFill>
-            <a:srgbClr val="B45309"/>
-          </a:solidFill>
-          <a:ln w="12700">
-            <a:solidFill>
-              <a:srgbClr val="B45309">
+      <p:pic>
+        <p:nvPicPr>
+          <p:cNvPr id="5" name="Image 0" descr="preencoded.png">    </p:cNvPr>
+          <p:cNvPicPr>
+            <a:picLocks noChangeAspect="1"/>
+          </p:cNvPicPr>
+          <p:nvPr/>
+        </p:nvPicPr>
+        <p:blipFill>
+          <a:blip r:embed="rId1">
+            <a:extLst>
+              <a:ext uri="{96DAC541-7B7A-43D3-8B79-37D633B846F1}">
+                <asvg:svgBlip xmlns:asvg="http://schemas.microsoft.com/office/drawing/2016/SVG/main" r:embed="rId2"/>
+              </a:ext>
+            </a:extLst>
+          </a:blip>
+          <a:stretch>
+            <a:fillRect/>
+          </a:stretch>
+        </p:blipFill>
+        <p:spPr>
+          <a:xfrm>
+            <a:off x="914400" y="1417320"/>
+            <a:ext cx="10241280" cy="4526280"/>
+          </a:xfrm>
+          <a:prstGeom prst="rect">
+            <a:avLst/>
+          </a:prstGeom>
+        </p:spPr>
+      </p:pic>
+      <p:sp>
+        <p:nvSpPr>
+          <p:cNvPr id="6" name="Shape 3"/>
+          <p:cNvSpPr/>
+          <p:nvPr/>
+        </p:nvSpPr>
+        <p:spPr>
+          <a:xfrm>
+            <a:off x="914400" y="1417320"/>
+            <a:ext cx="10241280" cy="4526280"/>
+          </a:xfrm>
+          <a:prstGeom prst="rect">
+            <a:avLst/>
+          </a:prstGeom>
+          <a:solidFill>
+            <a:srgbClr val="FFFBF5">
+              <a:alpha val="0"/>
+            </a:srgbClr>
+          </a:solidFill>
+          <a:ln w="12700">
+            <a:solidFill>
+              <a:srgbClr val="E7D8C9">
                 <a:alpha val="0"/>
               </a:srgbClr>
             </a:solidFill>
             <a:prstDash val="solid"/>
           </a:ln>
-        </p:spPr>
-      </p:sp>
-      <p:sp>
-        <p:nvSpPr>
-          <p:cNvPr id="6" name="Text 4"/>
+          <a:effectLst>
+            <a:outerShdw sx="100000" sy="100000" kx="0" ky="0" algn="bl" rotWithShape="0" blurRad="12700" dist="50800" dir="2700000">
+              <a:srgbClr val="000000">
+                <a:alpha val="8000"/>
+              </a:srgbClr>
+            </a:outerShdw>
+          </a:effectLst>
+        </p:spPr>
+      </p:sp>
+      <p:sp>
+        <p:nvSpPr>
+          <p:cNvPr id="7" name="Text 4"/>
           <p:cNvSpPr txBox="1"/>
           <p:nvPr/>
         </p:nvSpPr>
@@ -3196,8 +3235,8 @@
           </p:nvPr>
         </p:nvGraphicFramePr>
         <p:xfrm>
-          <a:off x="914400" y="1463040"/>
-          <a:ext cx="10241280" cy="4480560"/>
+          <a:off x="914400" y="1417320"/>
+          <a:ext cx="10241280" cy="4526280"/>
         </p:xfrm>
         <a:graphic>
           <a:graphicData uri="http://schemas.openxmlformats.org/drawingml/2006/table">
@@ -3208,7 +3247,7 @@
                 <a:gridCol w="3413760"/>
                 <a:gridCol w="3413760"/>
               </a:tblGrid>
-              <a:tr h="896112">
+              <a:tr h="905256">
                 <a:tc>
                   <a:txBody>
                     <a:bodyPr/>
@@ -3218,7 +3257,7 @@
                         <a:buNone/>
                       </a:pPr>
                       <a:r>
-                        <a:rPr lang="en-US" sz="2200" b="1" dirty="0">
+                        <a:rPr lang="en-US" sz="1800" b="1" dirty="0">
                           <a:solidFill>
                             <a:srgbClr val="FFFFFF"/>
                           </a:solidFill>
@@ -3228,7 +3267,7 @@
                         </a:rPr>
                         <a:t>Object</a:t>
                       </a:r>
-                      <a:endParaRPr lang="en-US" sz="2200" dirty="0">
+                      <a:endParaRPr lang="en-US" sz="1800" dirty="0">
                         <a:latin typeface="Pretendard" charset="0"/>
                         <a:ea typeface="Pretendard" charset="0"/>
                         <a:cs typeface="Pretendard" charset="0"/>
@@ -3286,7 +3325,7 @@
                         <a:buNone/>
                       </a:pPr>
                       <a:r>
-                        <a:rPr lang="en-US" sz="2200" b="1" dirty="0">
+                        <a:rPr lang="en-US" sz="1800" b="1" dirty="0">
                           <a:solidFill>
                             <a:srgbClr val="FFFFFF"/>
                           </a:solidFill>
@@ -3296,7 +3335,7 @@
                         </a:rPr>
                         <a:t>Renderer expectation</a:t>
                       </a:r>
-                      <a:endParaRPr lang="en-US" sz="2200" dirty="0">
+                      <a:endParaRPr lang="en-US" sz="1800" dirty="0">
                         <a:latin typeface="Pretendard" charset="0"/>
                         <a:ea typeface="Pretendard" charset="0"/>
                         <a:cs typeface="Pretendard" charset="0"/>
@@ -3354,7 +3393,7 @@
                         <a:buNone/>
                       </a:pPr>
                       <a:r>
-                        <a:rPr lang="en-US" sz="2200" b="1" dirty="0">
+                        <a:rPr lang="en-US" sz="1800" b="1" dirty="0">
                           <a:solidFill>
                             <a:srgbClr val="FFFFFF"/>
                           </a:solidFill>
@@ -3364,7 +3403,7 @@
                         </a:rPr>
                         <a:t>QA signal</a:t>
                       </a:r>
-                      <a:endParaRPr lang="en-US" sz="2200" dirty="0">
+                      <a:endParaRPr lang="en-US" sz="1800" dirty="0">
                         <a:latin typeface="Pretendard" charset="0"/>
                         <a:ea typeface="Pretendard" charset="0"/>
                         <a:cs typeface="Pretendard" charset="0"/>
@@ -3414,7 +3453,7 @@
                   </a:tcPr>
                 </a:tc>
               </a:tr>
-              <a:tr h="896112">
+              <a:tr h="905256">
                 <a:tc>
                   <a:txBody>
                     <a:bodyPr/>
@@ -3424,7 +3463,7 @@
                         <a:buNone/>
                       </a:pPr>
                       <a:r>
-                        <a:rPr lang="en-US" sz="2200" b="1" dirty="0">
+                        <a:rPr lang="en-US" sz="1800" b="1" dirty="0">
                           <a:solidFill>
                             <a:srgbClr val="1F2937"/>
                           </a:solidFill>
@@ -3434,7 +3473,7 @@
                         </a:rPr>
                         <a:t>Text box</a:t>
                       </a:r>
-                      <a:endParaRPr lang="en-US" sz="2200" dirty="0">
+                      <a:endParaRPr lang="en-US" sz="1800" dirty="0">
                         <a:latin typeface="Pretendard" charset="0"/>
                         <a:ea typeface="Pretendard" charset="0"/>
                         <a:cs typeface="Pretendard" charset="0"/>
@@ -3489,7 +3528,7 @@
                         <a:buNone/>
                       </a:pPr>
                       <a:r>
-                        <a:rPr lang="en-US" sz="2200" dirty="0">
+                        <a:rPr lang="en-US" sz="1800" dirty="0">
                           <a:solidFill>
                             <a:srgbClr val="1F2937"/>
                           </a:solidFill>
@@ -3499,7 +3538,7 @@
                         </a:rPr>
                         <a:t>editable, middle aligned</a:t>
                       </a:r>
-                      <a:endParaRPr lang="en-US" sz="2200" dirty="0">
+                      <a:endParaRPr lang="en-US" sz="1800" dirty="0">
                         <a:latin typeface="Pretendard" charset="0"/>
                         <a:ea typeface="Pretendard" charset="0"/>
                         <a:cs typeface="Pretendard" charset="0"/>
@@ -3554,7 +3593,7 @@
                         <a:buNone/>
                       </a:pPr>
                       <a:r>
-                        <a:rPr lang="en-US" sz="2200" dirty="0">
+                        <a:rPr lang="en-US" sz="1800" dirty="0">
                           <a:solidFill>
                             <a:srgbClr val="1F2937"/>
                           </a:solidFill>
@@ -3564,7 +3603,7 @@
                         </a:rPr>
                         <a:t>readable minimum size</a:t>
                       </a:r>
-                      <a:endParaRPr lang="en-US" sz="2200" dirty="0">
+                      <a:endParaRPr lang="en-US" sz="1800" dirty="0">
                         <a:latin typeface="Pretendard" charset="0"/>
                         <a:ea typeface="Pretendard" charset="0"/>
                         <a:cs typeface="Pretendard" charset="0"/>
@@ -3611,7 +3650,7 @@
                   </a:tcPr>
                 </a:tc>
               </a:tr>
-              <a:tr h="896112">
+              <a:tr h="905256">
                 <a:tc>
                   <a:txBody>
                     <a:bodyPr/>
@@ -3621,7 +3660,7 @@
                         <a:buNone/>
                       </a:pPr>
                       <a:r>
-                        <a:rPr lang="en-US" sz="2200" b="1" dirty="0">
+                        <a:rPr lang="en-US" sz="1800" b="1" dirty="0">
                           <a:solidFill>
                             <a:srgbClr val="1F2937"/>
                           </a:solidFill>
@@ -3631,7 +3670,7 @@
                         </a:rPr>
                         <a:t>Table</a:t>
                       </a:r>
-                      <a:endParaRPr lang="en-US" sz="2200" dirty="0">
+                      <a:endParaRPr lang="en-US" sz="1800" dirty="0">
                         <a:latin typeface="Pretendard" charset="0"/>
                         <a:ea typeface="Pretendard" charset="0"/>
                         <a:cs typeface="Pretendard" charset="0"/>
@@ -3691,7 +3730,7 @@
                         <a:buNone/>
                       </a:pPr>
                       <a:r>
-                        <a:rPr lang="en-US" sz="2200" dirty="0">
+                        <a:rPr lang="en-US" sz="1800" dirty="0">
                           <a:solidFill>
                             <a:srgbClr val="1F2937"/>
                           </a:solidFill>
@@ -3701,7 +3740,7 @@
                         </a:rPr>
                         <a:t>native table object</a:t>
                       </a:r>
-                      <a:endParaRPr lang="en-US" sz="2200" dirty="0">
+                      <a:endParaRPr lang="en-US" sz="1800" dirty="0">
                         <a:latin typeface="Pretendard" charset="0"/>
                         <a:ea typeface="Pretendard" charset="0"/>
                         <a:cs typeface="Pretendard" charset="0"/>
@@ -3761,7 +3800,7 @@
                         <a:buNone/>
                       </a:pPr>
                       <a:r>
-                        <a:rPr lang="en-US" sz="2200" dirty="0">
+                        <a:rPr lang="en-US" sz="1800" dirty="0">
                           <a:solidFill>
                             <a:srgbClr val="1F2937"/>
                           </a:solidFill>
@@ -3771,7 +3810,7 @@
                         </a:rPr>
                         <a:t>header fill and cell padding</a:t>
                       </a:r>
-                      <a:endParaRPr lang="en-US" sz="2200" dirty="0">
+                      <a:endParaRPr lang="en-US" sz="1800" dirty="0">
                         <a:latin typeface="Pretendard" charset="0"/>
                         <a:ea typeface="Pretendard" charset="0"/>
                         <a:cs typeface="Pretendard" charset="0"/>
@@ -3823,7 +3862,7 @@
                   </a:tcPr>
                 </a:tc>
               </a:tr>
-              <a:tr h="896112">
+              <a:tr h="905256">
                 <a:tc>
                   <a:txBody>
                     <a:bodyPr/>
@@ -3833,7 +3872,7 @@
                         <a:buNone/>
                       </a:pPr>
                       <a:r>
-                        <a:rPr lang="en-US" sz="2200" b="1" dirty="0">
+                        <a:rPr lang="en-US" sz="1800" b="1" dirty="0">
                           <a:solidFill>
                             <a:srgbClr val="1F2937"/>
                           </a:solidFill>
@@ -3843,7 +3882,7 @@
                         </a:rPr>
                         <a:t>Diagram</a:t>
                       </a:r>
-                      <a:endParaRPr lang="en-US" sz="2200" dirty="0">
+                      <a:endParaRPr lang="en-US" sz="1800" dirty="0">
                         <a:latin typeface="Pretendard" charset="0"/>
                         <a:ea typeface="Pretendard" charset="0"/>
                         <a:cs typeface="Pretendard" charset="0"/>
@@ -3898,7 +3937,7 @@
                         <a:buNone/>
                       </a:pPr>
                       <a:r>
-                        <a:rPr lang="en-US" sz="2200" dirty="0">
+                        <a:rPr lang="en-US" sz="1800" dirty="0">
                           <a:solidFill>
                             <a:srgbClr val="1F2937"/>
                           </a:solidFill>
@@ -3908,7 +3947,7 @@
                         </a:rPr>
                         <a:t>nodes and connectors</a:t>
                       </a:r>
-                      <a:endParaRPr lang="en-US" sz="2200" dirty="0">
+                      <a:endParaRPr lang="en-US" sz="1800" dirty="0">
                         <a:latin typeface="Pretendard" charset="0"/>
                         <a:ea typeface="Pretendard" charset="0"/>
                         <a:cs typeface="Pretendard" charset="0"/>
@@ -3963,7 +4002,7 @@
                         <a:buNone/>
                       </a:pPr>
                       <a:r>
-                        <a:rPr lang="en-US" sz="2200" dirty="0">
+                        <a:rPr lang="en-US" sz="1800" dirty="0">
                           <a:solidFill>
                             <a:srgbClr val="1F2937"/>
                           </a:solidFill>
@@ -3973,7 +4012,7 @@
                         </a:rPr>
                         <a:t>no clipped labels</a:t>
                       </a:r>
-                      <a:endParaRPr lang="en-US" sz="2200" dirty="0">
+                      <a:endParaRPr lang="en-US" sz="1800" dirty="0">
                         <a:latin typeface="Pretendard" charset="0"/>
                         <a:ea typeface="Pretendard" charset="0"/>
                         <a:cs typeface="Pretendard" charset="0"/>
@@ -4020,7 +4059,7 @@
                   </a:tcPr>
                 </a:tc>
               </a:tr>
-              <a:tr h="896112">
+              <a:tr h="905256">
                 <a:tc>
                   <a:txBody>
                     <a:bodyPr/>
@@ -4030,7 +4069,7 @@
                         <a:buNone/>
                       </a:pPr>
                       <a:r>
-                        <a:rPr lang="en-US" sz="2200" b="1" dirty="0">
+                        <a:rPr lang="en-US" sz="1800" b="1" dirty="0">
                           <a:solidFill>
                             <a:srgbClr val="1F2937"/>
                           </a:solidFill>
@@ -4040,7 +4079,7 @@
                         </a:rPr>
                         <a:t>Chart</a:t>
                       </a:r>
-                      <a:endParaRPr lang="en-US" sz="2200" dirty="0">
+                      <a:endParaRPr lang="en-US" sz="1800" dirty="0">
                         <a:latin typeface="Pretendard" charset="0"/>
                         <a:ea typeface="Pretendard" charset="0"/>
                         <a:cs typeface="Pretendard" charset="0"/>
@@ -4100,7 +4139,7 @@
                         <a:buNone/>
                       </a:pPr>
                       <a:r>
-                        <a:rPr lang="en-US" sz="2200" dirty="0">
+                        <a:rPr lang="en-US" sz="1800" dirty="0">
                           <a:solidFill>
                             <a:srgbClr val="1F2937"/>
                           </a:solidFill>
@@ -4110,7 +4149,7 @@
                         </a:rPr>
                         <a:t>theme-colored data object</a:t>
                       </a:r>
-                      <a:endParaRPr lang="en-US" sz="2200" dirty="0">
+                      <a:endParaRPr lang="en-US" sz="1800" dirty="0">
                         <a:latin typeface="Pretendard" charset="0"/>
                         <a:ea typeface="Pretendard" charset="0"/>
                         <a:cs typeface="Pretendard" charset="0"/>
@@ -4170,7 +4209,7 @@
                         <a:buNone/>
                       </a:pPr>
                       <a:r>
-                        <a:rPr lang="en-US" sz="2200" dirty="0">
+                        <a:rPr lang="en-US" sz="1800" dirty="0">
                           <a:solidFill>
                             <a:srgbClr val="1F2937"/>
                           </a:solidFill>
@@ -4180,7 +4219,7 @@
                         </a:rPr>
                         <a:t>contrast and value clarity</a:t>
                       </a:r>
-                      <a:endParaRPr lang="en-US" sz="2200" dirty="0">
+                      <a:endParaRPr lang="en-US" sz="1800" dirty="0">
                         <a:latin typeface="Pretendard" charset="0"/>
                         <a:ea typeface="Pretendard" charset="0"/>
                         <a:cs typeface="Pretendard" charset="0"/>
@@ -4752,36 +4791,75 @@
           </a:ln>
         </p:spPr>
       </p:sp>
-      <p:sp>
-        <p:nvSpPr>
-          <p:cNvPr id="5" name="Shape 3"/>
-          <p:cNvSpPr/>
-          <p:nvPr/>
-        </p:nvSpPr>
-        <p:spPr>
-          <a:xfrm>
-            <a:off x="914400" y="1463040"/>
-            <a:ext cx="10241280" cy="73152"/>
-          </a:xfrm>
-          <a:prstGeom prst="rect">
-            <a:avLst/>
-          </a:prstGeom>
-          <a:solidFill>
-            <a:srgbClr val="B45309"/>
-          </a:solidFill>
-          <a:ln w="12700">
-            <a:solidFill>
-              <a:srgbClr val="B45309">
+      <p:pic>
+        <p:nvPicPr>
+          <p:cNvPr id="5" name="Image 0" descr="preencoded.png">    </p:cNvPr>
+          <p:cNvPicPr>
+            <a:picLocks noChangeAspect="1"/>
+          </p:cNvPicPr>
+          <p:nvPr/>
+        </p:nvPicPr>
+        <p:blipFill>
+          <a:blip r:embed="rId1">
+            <a:extLst>
+              <a:ext uri="{96DAC541-7B7A-43D3-8B79-37D633B846F1}">
+                <asvg:svgBlip xmlns:asvg="http://schemas.microsoft.com/office/drawing/2016/SVG/main" r:embed="rId2"/>
+              </a:ext>
+            </a:extLst>
+          </a:blip>
+          <a:stretch>
+            <a:fillRect/>
+          </a:stretch>
+        </p:blipFill>
+        <p:spPr>
+          <a:xfrm>
+            <a:off x="914400" y="1417320"/>
+            <a:ext cx="10241280" cy="4526280"/>
+          </a:xfrm>
+          <a:prstGeom prst="rect">
+            <a:avLst/>
+          </a:prstGeom>
+        </p:spPr>
+      </p:pic>
+      <p:sp>
+        <p:nvSpPr>
+          <p:cNvPr id="6" name="Shape 3"/>
+          <p:cNvSpPr/>
+          <p:nvPr/>
+        </p:nvSpPr>
+        <p:spPr>
+          <a:xfrm>
+            <a:off x="914400" y="1417320"/>
+            <a:ext cx="10241280" cy="4526280"/>
+          </a:xfrm>
+          <a:prstGeom prst="rect">
+            <a:avLst/>
+          </a:prstGeom>
+          <a:solidFill>
+            <a:srgbClr val="FFFBF5">
+              <a:alpha val="0"/>
+            </a:srgbClr>
+          </a:solidFill>
+          <a:ln w="12700">
+            <a:solidFill>
+              <a:srgbClr val="E7D8C9">
                 <a:alpha val="0"/>
               </a:srgbClr>
             </a:solidFill>
             <a:prstDash val="solid"/>
           </a:ln>
-        </p:spPr>
-      </p:sp>
-      <p:sp>
-        <p:nvSpPr>
-          <p:cNvPr id="6" name="Text 4"/>
+          <a:effectLst>
+            <a:outerShdw sx="100000" sy="100000" kx="0" ky="0" algn="bl" rotWithShape="0" blurRad="12700" dist="50800" dir="2700000">
+              <a:srgbClr val="000000">
+                <a:alpha val="8000"/>
+              </a:srgbClr>
+            </a:outerShdw>
+          </a:effectLst>
+        </p:spPr>
+      </p:sp>
+      <p:sp>
+        <p:nvSpPr>
+          <p:cNvPr id="7" name="Text 4"/>
           <p:cNvSpPr txBox="1"/>
           <p:nvPr/>
         </p:nvSpPr>
@@ -4836,8 +4914,8 @@
           </p:nvPr>
         </p:nvGraphicFramePr>
         <p:xfrm>
-          <a:off x="914400" y="1463040"/>
-          <a:ext cx="10241280" cy="4480560"/>
+          <a:off x="914400" y="1417320"/>
+          <a:ext cx="10241280" cy="4526280"/>
         </p:xfrm>
         <a:graphic>
           <a:graphicData uri="http://schemas.openxmlformats.org/drawingml/2006/table">
@@ -4848,7 +4926,7 @@
                 <a:gridCol w="3413760"/>
                 <a:gridCol w="3413760"/>
               </a:tblGrid>
-              <a:tr h="1120140">
+              <a:tr h="1131570">
                 <a:tc>
                   <a:txBody>
                     <a:bodyPr/>
@@ -4858,7 +4936,7 @@
                         <a:buNone/>
                       </a:pPr>
                       <a:r>
-                        <a:rPr lang="en-US" sz="2200" b="1" dirty="0">
+                        <a:rPr lang="en-US" sz="1800" b="1" dirty="0">
                           <a:solidFill>
                             <a:srgbClr val="FFFFFF"/>
                           </a:solidFill>
@@ -4868,7 +4946,7 @@
                         </a:rPr>
                         <a:t>Stage</a:t>
                       </a:r>
-                      <a:endParaRPr lang="en-US" sz="2200" dirty="0">
+                      <a:endParaRPr lang="en-US" sz="1800" dirty="0">
                         <a:latin typeface="Pretendard" charset="0"/>
                         <a:ea typeface="Pretendard" charset="0"/>
                         <a:cs typeface="Pretendard" charset="0"/>
@@ -4926,7 +5004,7 @@
                         <a:buNone/>
                       </a:pPr>
                       <a:r>
-                        <a:rPr lang="en-US" sz="2200" b="1" dirty="0">
+                        <a:rPr lang="en-US" sz="1800" b="1" dirty="0">
                           <a:solidFill>
                             <a:srgbClr val="FFFFFF"/>
                           </a:solidFill>
@@ -4936,7 +5014,7 @@
                         </a:rPr>
                         <a:t>Coverage</a:t>
                       </a:r>
-                      <a:endParaRPr lang="en-US" sz="2200" dirty="0">
+                      <a:endParaRPr lang="en-US" sz="1800" dirty="0">
                         <a:latin typeface="Pretendard" charset="0"/>
                         <a:ea typeface="Pretendard" charset="0"/>
                         <a:cs typeface="Pretendard" charset="0"/>
@@ -4994,7 +5072,7 @@
                         <a:buNone/>
                       </a:pPr>
                       <a:r>
-                        <a:rPr lang="en-US" sz="2200" b="1" dirty="0">
+                        <a:rPr lang="en-US" sz="1800" b="1" dirty="0">
                           <a:solidFill>
                             <a:srgbClr val="FFFFFF"/>
                           </a:solidFill>
@@ -5004,7 +5082,7 @@
                         </a:rPr>
                         <a:t>Defects</a:t>
                       </a:r>
-                      <a:endParaRPr lang="en-US" sz="2200" dirty="0">
+                      <a:endParaRPr lang="en-US" sz="1800" dirty="0">
                         <a:latin typeface="Pretendard" charset="0"/>
                         <a:ea typeface="Pretendard" charset="0"/>
                         <a:cs typeface="Pretendard" charset="0"/>
@@ -5054,7 +5132,7 @@
                   </a:tcPr>
                 </a:tc>
               </a:tr>
-              <a:tr h="1120140">
+              <a:tr h="1131570">
                 <a:tc>
                   <a:txBody>
                     <a:bodyPr/>
@@ -5064,7 +5142,7 @@
                         <a:buNone/>
                       </a:pPr>
                       <a:r>
-                        <a:rPr lang="en-US" sz="2200" b="1" dirty="0">
+                        <a:rPr lang="en-US" sz="1800" b="1" dirty="0">
                           <a:solidFill>
                             <a:srgbClr val="1F2937"/>
                           </a:solidFill>
@@ -5074,7 +5152,7 @@
                         </a:rPr>
                         <a:t>Parser</a:t>
                       </a:r>
-                      <a:endParaRPr lang="en-US" sz="2200" dirty="0">
+                      <a:endParaRPr lang="en-US" sz="1800" dirty="0">
                         <a:latin typeface="Pretendard" charset="0"/>
                         <a:ea typeface="Pretendard" charset="0"/>
                         <a:cs typeface="Pretendard" charset="0"/>
@@ -5129,7 +5207,7 @@
                         <a:buNone/>
                       </a:pPr>
                       <a:r>
-                        <a:rPr lang="en-US" sz="2200" dirty="0">
+                        <a:rPr lang="en-US" sz="1800" dirty="0">
                           <a:solidFill>
                             <a:srgbClr val="1F2937"/>
                           </a:solidFill>
@@ -5139,7 +5217,7 @@
                         </a:rPr>
                         <a:t>92</a:t>
                       </a:r>
-                      <a:endParaRPr lang="en-US" sz="2200" dirty="0">
+                      <a:endParaRPr lang="en-US" sz="1800" dirty="0">
                         <a:latin typeface="Pretendard" charset="0"/>
                         <a:ea typeface="Pretendard" charset="0"/>
                         <a:cs typeface="Pretendard" charset="0"/>
@@ -5194,7 +5272,7 @@
                         <a:buNone/>
                       </a:pPr>
                       <a:r>
-                        <a:rPr lang="en-US" sz="2200" dirty="0">
+                        <a:rPr lang="en-US" sz="1800" dirty="0">
                           <a:solidFill>
                             <a:srgbClr val="1F2937"/>
                           </a:solidFill>
@@ -5204,7 +5282,7 @@
                         </a:rPr>
                         <a:t>3</a:t>
                       </a:r>
-                      <a:endParaRPr lang="en-US" sz="2200" dirty="0">
+                      <a:endParaRPr lang="en-US" sz="1800" dirty="0">
                         <a:latin typeface="Pretendard" charset="0"/>
                         <a:ea typeface="Pretendard" charset="0"/>
                         <a:cs typeface="Pretendard" charset="0"/>
@@ -5251,7 +5329,7 @@
                   </a:tcPr>
                 </a:tc>
               </a:tr>
-              <a:tr h="1120140">
+              <a:tr h="1131570">
                 <a:tc>
                   <a:txBody>
                     <a:bodyPr/>
@@ -5261,7 +5339,7 @@
                         <a:buNone/>
                       </a:pPr>
                       <a:r>
-                        <a:rPr lang="en-US" sz="2200" b="1" dirty="0">
+                        <a:rPr lang="en-US" sz="1800" b="1" dirty="0">
                           <a:solidFill>
                             <a:srgbClr val="1F2937"/>
                           </a:solidFill>
@@ -5271,7 +5349,7 @@
                         </a:rPr>
                         <a:t>Layout</a:t>
                       </a:r>
-                      <a:endParaRPr lang="en-US" sz="2200" dirty="0">
+                      <a:endParaRPr lang="en-US" sz="1800" dirty="0">
                         <a:latin typeface="Pretendard" charset="0"/>
                         <a:ea typeface="Pretendard" charset="0"/>
                         <a:cs typeface="Pretendard" charset="0"/>
@@ -5331,7 +5409,7 @@
                         <a:buNone/>
                       </a:pPr>
                       <a:r>
-                        <a:rPr lang="en-US" sz="2200" dirty="0">
+                        <a:rPr lang="en-US" sz="1800" dirty="0">
                           <a:solidFill>
                             <a:srgbClr val="1F2937"/>
                           </a:solidFill>
@@ -5341,7 +5419,7 @@
                         </a:rPr>
                         <a:t>88</a:t>
                       </a:r>
-                      <a:endParaRPr lang="en-US" sz="2200" dirty="0">
+                      <a:endParaRPr lang="en-US" sz="1800" dirty="0">
                         <a:latin typeface="Pretendard" charset="0"/>
                         <a:ea typeface="Pretendard" charset="0"/>
                         <a:cs typeface="Pretendard" charset="0"/>
@@ -5401,7 +5479,7 @@
                         <a:buNone/>
                       </a:pPr>
                       <a:r>
-                        <a:rPr lang="en-US" sz="2200" dirty="0">
+                        <a:rPr lang="en-US" sz="1800" dirty="0">
                           <a:solidFill>
                             <a:srgbClr val="1F2937"/>
                           </a:solidFill>
@@ -5411,7 +5489,7 @@
                         </a:rPr>
                         <a:t>5</a:t>
                       </a:r>
-                      <a:endParaRPr lang="en-US" sz="2200" dirty="0">
+                      <a:endParaRPr lang="en-US" sz="1800" dirty="0">
                         <a:latin typeface="Pretendard" charset="0"/>
                         <a:ea typeface="Pretendard" charset="0"/>
                         <a:cs typeface="Pretendard" charset="0"/>
@@ -5463,7 +5541,7 @@
                   </a:tcPr>
                 </a:tc>
               </a:tr>
-              <a:tr h="1120140">
+              <a:tr h="1131570">
                 <a:tc>
                   <a:txBody>
                     <a:bodyPr/>
@@ -5473,7 +5551,7 @@
                         <a:buNone/>
                       </a:pPr>
                       <a:r>
-                        <a:rPr lang="en-US" sz="2200" b="1" dirty="0">
+                        <a:rPr lang="en-US" sz="1800" b="1" dirty="0">
                           <a:solidFill>
                             <a:srgbClr val="1F2937"/>
                           </a:solidFill>
@@ -5483,7 +5561,7 @@
                         </a:rPr>
                         <a:t>PPTX</a:t>
                       </a:r>
-                      <a:endParaRPr lang="en-US" sz="2200" dirty="0">
+                      <a:endParaRPr lang="en-US" sz="1800" dirty="0">
                         <a:latin typeface="Pretendard" charset="0"/>
                         <a:ea typeface="Pretendard" charset="0"/>
                         <a:cs typeface="Pretendard" charset="0"/>
@@ -5538,7 +5616,7 @@
                         <a:buNone/>
                       </a:pPr>
                       <a:r>
-                        <a:rPr lang="en-US" sz="2200" dirty="0">
+                        <a:rPr lang="en-US" sz="1800" dirty="0">
                           <a:solidFill>
                             <a:srgbClr val="1F2937"/>
                           </a:solidFill>
@@ -5548,7 +5626,7 @@
                         </a:rPr>
                         <a:t>95</a:t>
                       </a:r>
-                      <a:endParaRPr lang="en-US" sz="2200" dirty="0">
+                      <a:endParaRPr lang="en-US" sz="1800" dirty="0">
                         <a:latin typeface="Pretendard" charset="0"/>
                         <a:ea typeface="Pretendard" charset="0"/>
                         <a:cs typeface="Pretendard" charset="0"/>
@@ -5603,7 +5681,7 @@
                         <a:buNone/>
                       </a:pPr>
                       <a:r>
-                        <a:rPr lang="en-US" sz="2200" dirty="0">
+                        <a:rPr lang="en-US" sz="1800" dirty="0">
                           <a:solidFill>
                             <a:srgbClr val="1F2937"/>
                           </a:solidFill>
@@ -5613,7 +5691,7 @@
                         </a:rPr>
                         <a:t>2</a:t>
                       </a:r>
-                      <a:endParaRPr lang="en-US" sz="2200" dirty="0">
+                      <a:endParaRPr lang="en-US" sz="1800" dirty="0">
                         <a:latin typeface="Pretendard" charset="0"/>
                         <a:ea typeface="Pretendard" charset="0"/>
                         <a:cs typeface="Pretendard" charset="0"/>

--- a/docs/theme-preview/pptx/editorial.pptx
+++ b/docs/theme-preview/pptx/editorial.pptx
@@ -24,9 +24,14 @@
     <p:sldId id="272" r:id="rId18"/>
     <p:sldId id="273" r:id="rId19"/>
     <p:sldId id="274" r:id="rId20"/>
+    <p:sldId id="275" r:id="rId21"/>
+    <p:sldId id="276" r:id="rId22"/>
+    <p:sldId id="277" r:id="rId23"/>
+    <p:sldId id="278" r:id="rId24"/>
+    <p:sldId id="279" r:id="rId25"/>
   </p:sldIdLst>
   <p:notesMasterIdLst>
-    <p:notesMasterId r:id="rId21"/>
+    <p:notesMasterId r:id="rId26"/>
   </p:notesMasterIdLst>
   <p:sldSz cx="12191695" cy="6858000"/>
   <p:notesSz cx="6858000" cy="12191695"/>
@@ -468,6 +473,246 @@
 </c:chartSpace>
 </file>
 
+<file path=ppt/charts/chart4.xml><?xml version="1.0" encoding="utf-8"?>
+<c:chartSpace xmlns:c="http://schemas.openxmlformats.org/drawingml/2006/chart" xmlns:a="http://schemas.openxmlformats.org/drawingml/2006/main" xmlns:r="http://schemas.openxmlformats.org/officeDocument/2006/relationships">
+  <c:date1904 val="0"/>
+  <c:roundedCorners val="1"/>
+  <c:chart>
+    <c:autoTitleDeleted val="1"/>
+    <c:plotArea>
+      <c:layout/>
+      <c:barChart>
+        <c:barDir val="col"/>
+        <c:grouping val="clustered"/>
+        <c:varyColors val="0"/>
+        <c:ser>
+          <c:idx val="0"/>
+          <c:order val="0"/>
+          <c:tx>
+            <c:strRef>
+              <c:f>Sheet1!$B$1</c:f>
+              <c:strCache>
+                <c:ptCount val="1"/>
+                <c:pt idx="0">
+                  <c:v>Score</c:v>
+                </c:pt>
+              </c:strCache>
+            </c:strRef>
+          </c:tx>
+          <c:spPr>
+            <a:solidFill>
+              <a:srgbClr val="B45309"/>
+            </a:solidFill>
+            <a:effectLst/>
+          </c:spPr>
+          <c:invertIfNegative val="0"/>
+          <c:dLbls>
+            <c:numFmt formatCode="#,##0" sourceLinked="0"/>
+            <c:txPr>
+              <a:bodyPr/>
+              <a:lstStyle/>
+              <a:p>
+                <a:pPr>
+                  <a:defRPr b="0" i="0" strike="noStrike" sz="1200" u="none">
+                    <a:solidFill>
+                      <a:srgbClr val="000000"/>
+                    </a:solidFill>
+                    <a:latin typeface="Arial"/>
+                  </a:defRPr>
+                </a:pPr>
+              </a:p>
+            </c:txPr>
+            <c:showLegendKey val="0"/>
+            <c:showVal val="1"/>
+            <c:showCatName val="0"/>
+            <c:showSerName val="0"/>
+            <c:showPercent val="0"/>
+            <c:showBubbleSize val="0"/>
+            <c:showLeaderLines val="0"/>
+          </c:dLbls>
+          <c:cat>
+            <c:multiLvlStrRef>
+              <c:f>Sheet1!$A$2:$A$4</c:f>
+              <c:multiLvlStrCache>
+                <c:ptCount val="3"/>
+                <c:lvl>
+                  <c:pt idx="0">
+                    <c:v>Parse</c:v>
+                  </c:pt>
+                  <c:pt idx="1">
+                    <c:v>Plan</c:v>
+                  </c:pt>
+                  <c:pt idx="2">
+                    <c:v>Render</c:v>
+                  </c:pt>
+                </c:lvl>
+              </c:multiLvlStrCache>
+            </c:multiLvlStrRef>
+          </c:cat>
+          <c:val>
+            <c:numRef>
+              <c:f>Sheet1!$B$2:$B$4</c:f>
+              <c:numCache>
+                <c:formatCode>General</c:formatCode>
+                <c:ptCount val="3"/>
+                <c:pt idx="0">
+                  <c:v>78</c:v>
+                </c:pt>
+                <c:pt idx="1">
+                  <c:v>86</c:v>
+                </c:pt>
+                <c:pt idx="2">
+                  <c:v>93</c:v>
+                </c:pt>
+              </c:numCache>
+            </c:numRef>
+          </c:val>
+        </c:ser>
+        <c:dLbls>
+          <c:numFmt formatCode="#,##0" sourceLinked="0"/>
+          <c:txPr>
+            <a:bodyPr/>
+            <a:lstStyle/>
+            <a:p>
+              <a:pPr>
+                <a:defRPr b="0" i="0" strike="noStrike" sz="1200" u="none">
+                  <a:solidFill>
+                    <a:srgbClr val="000000"/>
+                  </a:solidFill>
+                  <a:latin typeface="Arial"/>
+                </a:defRPr>
+              </a:pPr>
+            </a:p>
+          </c:txPr>
+          <c:showLegendKey val="0"/>
+          <c:showVal val="1"/>
+          <c:showCatName val="0"/>
+          <c:showSerName val="0"/>
+          <c:showPercent val="0"/>
+          <c:showBubbleSize val="0"/>
+          <c:showLeaderLines val="0"/>
+        </c:dLbls>
+        <c:gapWidth val="150"/>
+        <c:overlap val="0"/>
+        <c:axId val="2094734554"/>
+        <c:axId val="2094734552"/>
+        <c:axId val="2094734556"/>
+      </c:barChart>
+      <c:catAx>
+        <c:axId val="2094734554"/>
+        <c:scaling>
+          <c:orientation val="minMax"/>
+        </c:scaling>
+        <c:delete val="0"/>
+        <c:axPos val="b"/>
+        <c:numFmt formatCode="General" sourceLinked="1"/>
+        <c:majorTickMark val="out"/>
+        <c:minorTickMark val="none"/>
+        <c:tickLblPos val="low"/>
+        <c:spPr>
+          <a:ln w="12700" cap="flat">
+            <a:solidFill>
+              <a:srgbClr val="888888"/>
+            </a:solidFill>
+            <a:prstDash val="solid"/>
+            <a:round/>
+          </a:ln>
+        </c:spPr>
+        <c:txPr>
+          <a:bodyPr/>
+          <a:lstStyle/>
+          <a:p>
+            <a:pPr>
+              <a:defRPr sz="1100" b="0" i="0" u="none" strike="noStrike">
+                <a:solidFill>
+                  <a:srgbClr val="1F2937"/>
+                </a:solidFill>
+                <a:latin typeface="Pretendard"/>
+              </a:defRPr>
+            </a:pPr>
+            <a:endParaRPr lang="en-US"/>
+          </a:p>
+        </c:txPr>
+        <c:crossAx val="2094734552"/>
+        <c:crosses val="autoZero"/>
+        <c:auto val="1"/>
+        <c:lblAlgn val="ctr"/>
+        <c:noMultiLvlLbl val="1"/>
+      </c:catAx>
+      <c:valAx>
+        <c:axId val="2094734552"/>
+        <c:scaling>
+          <c:orientation val="minMax"/>
+        </c:scaling>
+        <c:delete val="0"/>
+        <c:axPos val="l"/>
+        <c:majorGridlines>
+          <c:spPr>
+            <a:ln w="12700" cap="flat">
+              <a:solidFill>
+                <a:srgbClr val="E7D8C9"/>
+              </a:solidFill>
+              <a:prstDash val="solid"/>
+              <a:round/>
+            </a:ln>
+          </c:spPr>
+        </c:majorGridlines>
+        <c:numFmt formatCode="General" sourceLinked="0"/>
+        <c:majorTickMark val="out"/>
+        <c:minorTickMark val="none"/>
+        <c:tickLblPos val="nextTo"/>
+        <c:spPr>
+          <a:ln w="12700" cap="flat">
+            <a:solidFill>
+              <a:srgbClr val="888888"/>
+            </a:solidFill>
+            <a:prstDash val="solid"/>
+            <a:round/>
+          </a:ln>
+        </c:spPr>
+        <c:txPr>
+          <a:bodyPr/>
+          <a:lstStyle/>
+          <a:p>
+            <a:pPr>
+              <a:defRPr sz="1100" b="0" i="0" u="none" strike="noStrike">
+                <a:solidFill>
+                  <a:srgbClr val="57534E"/>
+                </a:solidFill>
+                <a:latin typeface="Pretendard"/>
+              </a:defRPr>
+            </a:pPr>
+            <a:endParaRPr lang="en-US"/>
+          </a:p>
+        </c:txPr>
+        <c:crossAx val="2094734554"/>
+        <c:crosses val="autoZero"/>
+        <c:crossBetween val="between"/>
+      </c:valAx>
+      <c:spPr>
+        <a:noFill/>
+        <a:ln>
+          <a:noFill/>
+        </a:ln>
+        <a:effectLst/>
+      </c:spPr>
+    </c:plotArea>
+    <c:plotVisOnly val="1"/>
+    <c:dispBlanksAs val="span"/>
+  </c:chart>
+  <c:spPr>
+    <a:noFill/>
+    <a:ln>
+      <a:noFill/>
+    </a:ln>
+    <a:effectLst/>
+  </c:spPr>
+  <c:externalData r:id="rId1">
+    <c:autoUpdate val="0"/>
+  </c:externalData>
+</c:chartSpace>
+</file>
+
 <file path=ppt/notesMasters/notesMaster1.xml><?xml version="1.0" encoding="utf-8"?>
 <p:notesMaster xmlns:a="http://schemas.openxmlformats.org/drawingml/2006/main" xmlns:r="http://schemas.openxmlformats.org/officeDocument/2006/relationships" xmlns:p="http://schemas.openxmlformats.org/presentationml/2006/main">
   <p:cSld>
@@ -1873,6 +2118,446 @@
 </p:notes>
 </file>
 
+<file path=ppt/notesSlides/notesSlide20.xml><?xml version="1.0" encoding="utf-8"?>
+<p:notes xmlns:a="http://schemas.openxmlformats.org/drawingml/2006/main" xmlns:r="http://schemas.openxmlformats.org/officeDocument/2006/relationships" xmlns:p="http://schemas.openxmlformats.org/presentationml/2006/main">
+  <p:cSld>
+    <p:spTree>
+      <p:nvGrpSpPr>
+        <p:cNvPr id="1" name=""/>
+        <p:cNvGrpSpPr/>
+        <p:nvPr/>
+      </p:nvGrpSpPr>
+      <p:grpSpPr>
+        <a:xfrm>
+          <a:off x="0" y="0"/>
+          <a:ext cx="0" cy="0"/>
+          <a:chOff x="0" y="0"/>
+          <a:chExt cx="0" cy="0"/>
+        </a:xfrm>
+      </p:grpSpPr>
+      <p:sp>
+        <p:nvSpPr>
+          <p:cNvPr id="2" name="Slide Image Placeholder 1"/>
+          <p:cNvSpPr>
+            <a:spLocks noGrp="1" noRot="1" noChangeAspect="1"/>
+          </p:cNvSpPr>
+          <p:nvPr>
+            <p:ph type="sldImg"/>
+          </p:nvPr>
+        </p:nvSpPr>
+        <p:spPr/>
+      </p:sp>
+      <p:sp>
+        <p:nvSpPr>
+          <p:cNvPr id="3" name="Notes Placeholder 2"/>
+          <p:cNvSpPr>
+            <a:spLocks noGrp="1"/>
+          </p:cNvSpPr>
+          <p:nvPr>
+            <p:ph type="body" idx="1"/>
+          </p:nvPr>
+        </p:nvSpPr>
+        <p:spPr/>
+        <p:txBody>
+          <a:bodyPr/>
+          <a:lstStyle/>
+          <a:p>
+            <a:r>
+              <a:rPr lang="en-US" dirty="0"/>
+              <a:t/>
+            </a:r>
+            <a:endParaRPr lang="en-US" dirty="0"/>
+          </a:p>
+        </p:txBody>
+      </p:sp>
+      <p:sp>
+        <p:nvSpPr>
+          <p:cNvPr id="4" name="Slide Number Placeholder 3"/>
+          <p:cNvSpPr>
+            <a:spLocks noGrp="1"/>
+          </p:cNvSpPr>
+          <p:nvPr>
+            <p:ph type="sldNum" sz="quarter" idx="10"/>
+          </p:nvPr>
+        </p:nvSpPr>
+        <p:spPr/>
+        <p:txBody>
+          <a:bodyPr/>
+          <a:lstStyle/>
+          <a:p>
+            <a:fld id="{F7021451-1387-4CA6-816F-3879F97B5CBC}" type="slidenum">
+              <a:rPr lang="en-US"/>
+              <a:t>20</a:t>
+            </a:fld>
+            <a:endParaRPr lang="en-US"/>
+          </a:p>
+        </p:txBody>
+      </p:sp>
+    </p:spTree>
+    <p:extLst>
+      <p:ext uri="{BB962C8B-B14F-4D97-AF65-F5344CB8AC3E}">
+        <p14:creationId xmlns:p14="http://schemas.microsoft.com/office/powerpoint/2010/main" val="1024086991"/>
+      </p:ext>
+    </p:extLst>
+  </p:cSld>
+  <p:clrMapOvr>
+    <a:masterClrMapping/>
+  </p:clrMapOvr>
+</p:notes>
+</file>
+
+<file path=ppt/notesSlides/notesSlide21.xml><?xml version="1.0" encoding="utf-8"?>
+<p:notes xmlns:a="http://schemas.openxmlformats.org/drawingml/2006/main" xmlns:r="http://schemas.openxmlformats.org/officeDocument/2006/relationships" xmlns:p="http://schemas.openxmlformats.org/presentationml/2006/main">
+  <p:cSld>
+    <p:spTree>
+      <p:nvGrpSpPr>
+        <p:cNvPr id="1" name=""/>
+        <p:cNvGrpSpPr/>
+        <p:nvPr/>
+      </p:nvGrpSpPr>
+      <p:grpSpPr>
+        <a:xfrm>
+          <a:off x="0" y="0"/>
+          <a:ext cx="0" cy="0"/>
+          <a:chOff x="0" y="0"/>
+          <a:chExt cx="0" cy="0"/>
+        </a:xfrm>
+      </p:grpSpPr>
+      <p:sp>
+        <p:nvSpPr>
+          <p:cNvPr id="2" name="Slide Image Placeholder 1"/>
+          <p:cNvSpPr>
+            <a:spLocks noGrp="1" noRot="1" noChangeAspect="1"/>
+          </p:cNvSpPr>
+          <p:nvPr>
+            <p:ph type="sldImg"/>
+          </p:nvPr>
+        </p:nvSpPr>
+        <p:spPr/>
+      </p:sp>
+      <p:sp>
+        <p:nvSpPr>
+          <p:cNvPr id="3" name="Notes Placeholder 2"/>
+          <p:cNvSpPr>
+            <a:spLocks noGrp="1"/>
+          </p:cNvSpPr>
+          <p:nvPr>
+            <p:ph type="body" idx="1"/>
+          </p:nvPr>
+        </p:nvSpPr>
+        <p:spPr/>
+        <p:txBody>
+          <a:bodyPr/>
+          <a:lstStyle/>
+          <a:p>
+            <a:r>
+              <a:rPr lang="en-US" dirty="0"/>
+              <a:t/>
+            </a:r>
+            <a:endParaRPr lang="en-US" dirty="0"/>
+          </a:p>
+        </p:txBody>
+      </p:sp>
+      <p:sp>
+        <p:nvSpPr>
+          <p:cNvPr id="4" name="Slide Number Placeholder 3"/>
+          <p:cNvSpPr>
+            <a:spLocks noGrp="1"/>
+          </p:cNvSpPr>
+          <p:nvPr>
+            <p:ph type="sldNum" sz="quarter" idx="10"/>
+          </p:nvPr>
+        </p:nvSpPr>
+        <p:spPr/>
+        <p:txBody>
+          <a:bodyPr/>
+          <a:lstStyle/>
+          <a:p>
+            <a:fld id="{F7021451-1387-4CA6-816F-3879F97B5CBC}" type="slidenum">
+              <a:rPr lang="en-US"/>
+              <a:t>21</a:t>
+            </a:fld>
+            <a:endParaRPr lang="en-US"/>
+          </a:p>
+        </p:txBody>
+      </p:sp>
+    </p:spTree>
+    <p:extLst>
+      <p:ext uri="{BB962C8B-B14F-4D97-AF65-F5344CB8AC3E}">
+        <p14:creationId xmlns:p14="http://schemas.microsoft.com/office/powerpoint/2010/main" val="1024086991"/>
+      </p:ext>
+    </p:extLst>
+  </p:cSld>
+  <p:clrMapOvr>
+    <a:masterClrMapping/>
+  </p:clrMapOvr>
+</p:notes>
+</file>
+
+<file path=ppt/notesSlides/notesSlide22.xml><?xml version="1.0" encoding="utf-8"?>
+<p:notes xmlns:a="http://schemas.openxmlformats.org/drawingml/2006/main" xmlns:r="http://schemas.openxmlformats.org/officeDocument/2006/relationships" xmlns:p="http://schemas.openxmlformats.org/presentationml/2006/main">
+  <p:cSld>
+    <p:spTree>
+      <p:nvGrpSpPr>
+        <p:cNvPr id="1" name=""/>
+        <p:cNvGrpSpPr/>
+        <p:nvPr/>
+      </p:nvGrpSpPr>
+      <p:grpSpPr>
+        <a:xfrm>
+          <a:off x="0" y="0"/>
+          <a:ext cx="0" cy="0"/>
+          <a:chOff x="0" y="0"/>
+          <a:chExt cx="0" cy="0"/>
+        </a:xfrm>
+      </p:grpSpPr>
+      <p:sp>
+        <p:nvSpPr>
+          <p:cNvPr id="2" name="Slide Image Placeholder 1"/>
+          <p:cNvSpPr>
+            <a:spLocks noGrp="1" noRot="1" noChangeAspect="1"/>
+          </p:cNvSpPr>
+          <p:nvPr>
+            <p:ph type="sldImg"/>
+          </p:nvPr>
+        </p:nvSpPr>
+        <p:spPr/>
+      </p:sp>
+      <p:sp>
+        <p:nvSpPr>
+          <p:cNvPr id="3" name="Notes Placeholder 2"/>
+          <p:cNvSpPr>
+            <a:spLocks noGrp="1"/>
+          </p:cNvSpPr>
+          <p:nvPr>
+            <p:ph type="body" idx="1"/>
+          </p:nvPr>
+        </p:nvSpPr>
+        <p:spPr/>
+        <p:txBody>
+          <a:bodyPr/>
+          <a:lstStyle/>
+          <a:p>
+            <a:r>
+              <a:rPr lang="en-US" dirty="0"/>
+              <a:t/>
+            </a:r>
+            <a:endParaRPr lang="en-US" dirty="0"/>
+          </a:p>
+        </p:txBody>
+      </p:sp>
+      <p:sp>
+        <p:nvSpPr>
+          <p:cNvPr id="4" name="Slide Number Placeholder 3"/>
+          <p:cNvSpPr>
+            <a:spLocks noGrp="1"/>
+          </p:cNvSpPr>
+          <p:nvPr>
+            <p:ph type="sldNum" sz="quarter" idx="10"/>
+          </p:nvPr>
+        </p:nvSpPr>
+        <p:spPr/>
+        <p:txBody>
+          <a:bodyPr/>
+          <a:lstStyle/>
+          <a:p>
+            <a:fld id="{F7021451-1387-4CA6-816F-3879F97B5CBC}" type="slidenum">
+              <a:rPr lang="en-US"/>
+              <a:t>22</a:t>
+            </a:fld>
+            <a:endParaRPr lang="en-US"/>
+          </a:p>
+        </p:txBody>
+      </p:sp>
+    </p:spTree>
+    <p:extLst>
+      <p:ext uri="{BB962C8B-B14F-4D97-AF65-F5344CB8AC3E}">
+        <p14:creationId xmlns:p14="http://schemas.microsoft.com/office/powerpoint/2010/main" val="1024086991"/>
+      </p:ext>
+    </p:extLst>
+  </p:cSld>
+  <p:clrMapOvr>
+    <a:masterClrMapping/>
+  </p:clrMapOvr>
+</p:notes>
+</file>
+
+<file path=ppt/notesSlides/notesSlide23.xml><?xml version="1.0" encoding="utf-8"?>
+<p:notes xmlns:a="http://schemas.openxmlformats.org/drawingml/2006/main" xmlns:r="http://schemas.openxmlformats.org/officeDocument/2006/relationships" xmlns:p="http://schemas.openxmlformats.org/presentationml/2006/main">
+  <p:cSld>
+    <p:spTree>
+      <p:nvGrpSpPr>
+        <p:cNvPr id="1" name=""/>
+        <p:cNvGrpSpPr/>
+        <p:nvPr/>
+      </p:nvGrpSpPr>
+      <p:grpSpPr>
+        <a:xfrm>
+          <a:off x="0" y="0"/>
+          <a:ext cx="0" cy="0"/>
+          <a:chOff x="0" y="0"/>
+          <a:chExt cx="0" cy="0"/>
+        </a:xfrm>
+      </p:grpSpPr>
+      <p:sp>
+        <p:nvSpPr>
+          <p:cNvPr id="2" name="Slide Image Placeholder 1"/>
+          <p:cNvSpPr>
+            <a:spLocks noGrp="1" noRot="1" noChangeAspect="1"/>
+          </p:cNvSpPr>
+          <p:nvPr>
+            <p:ph type="sldImg"/>
+          </p:nvPr>
+        </p:nvSpPr>
+        <p:spPr/>
+      </p:sp>
+      <p:sp>
+        <p:nvSpPr>
+          <p:cNvPr id="3" name="Notes Placeholder 2"/>
+          <p:cNvSpPr>
+            <a:spLocks noGrp="1"/>
+          </p:cNvSpPr>
+          <p:nvPr>
+            <p:ph type="body" idx="1"/>
+          </p:nvPr>
+        </p:nvSpPr>
+        <p:spPr/>
+        <p:txBody>
+          <a:bodyPr/>
+          <a:lstStyle/>
+          <a:p>
+            <a:r>
+              <a:rPr lang="en-US" dirty="0"/>
+              <a:t/>
+            </a:r>
+            <a:endParaRPr lang="en-US" dirty="0"/>
+          </a:p>
+        </p:txBody>
+      </p:sp>
+      <p:sp>
+        <p:nvSpPr>
+          <p:cNvPr id="4" name="Slide Number Placeholder 3"/>
+          <p:cNvSpPr>
+            <a:spLocks noGrp="1"/>
+          </p:cNvSpPr>
+          <p:nvPr>
+            <p:ph type="sldNum" sz="quarter" idx="10"/>
+          </p:nvPr>
+        </p:nvSpPr>
+        <p:spPr/>
+        <p:txBody>
+          <a:bodyPr/>
+          <a:lstStyle/>
+          <a:p>
+            <a:fld id="{F7021451-1387-4CA6-816F-3879F97B5CBC}" type="slidenum">
+              <a:rPr lang="en-US"/>
+              <a:t>23</a:t>
+            </a:fld>
+            <a:endParaRPr lang="en-US"/>
+          </a:p>
+        </p:txBody>
+      </p:sp>
+    </p:spTree>
+    <p:extLst>
+      <p:ext uri="{BB962C8B-B14F-4D97-AF65-F5344CB8AC3E}">
+        <p14:creationId xmlns:p14="http://schemas.microsoft.com/office/powerpoint/2010/main" val="1024086991"/>
+      </p:ext>
+    </p:extLst>
+  </p:cSld>
+  <p:clrMapOvr>
+    <a:masterClrMapping/>
+  </p:clrMapOvr>
+</p:notes>
+</file>
+
+<file path=ppt/notesSlides/notesSlide24.xml><?xml version="1.0" encoding="utf-8"?>
+<p:notes xmlns:a="http://schemas.openxmlformats.org/drawingml/2006/main" xmlns:r="http://schemas.openxmlformats.org/officeDocument/2006/relationships" xmlns:p="http://schemas.openxmlformats.org/presentationml/2006/main">
+  <p:cSld>
+    <p:spTree>
+      <p:nvGrpSpPr>
+        <p:cNvPr id="1" name=""/>
+        <p:cNvGrpSpPr/>
+        <p:nvPr/>
+      </p:nvGrpSpPr>
+      <p:grpSpPr>
+        <a:xfrm>
+          <a:off x="0" y="0"/>
+          <a:ext cx="0" cy="0"/>
+          <a:chOff x="0" y="0"/>
+          <a:chExt cx="0" cy="0"/>
+        </a:xfrm>
+      </p:grpSpPr>
+      <p:sp>
+        <p:nvSpPr>
+          <p:cNvPr id="2" name="Slide Image Placeholder 1"/>
+          <p:cNvSpPr>
+            <a:spLocks noGrp="1" noRot="1" noChangeAspect="1"/>
+          </p:cNvSpPr>
+          <p:nvPr>
+            <p:ph type="sldImg"/>
+          </p:nvPr>
+        </p:nvSpPr>
+        <p:spPr/>
+      </p:sp>
+      <p:sp>
+        <p:nvSpPr>
+          <p:cNvPr id="3" name="Notes Placeholder 2"/>
+          <p:cNvSpPr>
+            <a:spLocks noGrp="1"/>
+          </p:cNvSpPr>
+          <p:nvPr>
+            <p:ph type="body" idx="1"/>
+          </p:nvPr>
+        </p:nvSpPr>
+        <p:spPr/>
+        <p:txBody>
+          <a:bodyPr/>
+          <a:lstStyle/>
+          <a:p>
+            <a:r>
+              <a:rPr lang="en-US" dirty="0"/>
+              <a:t/>
+            </a:r>
+            <a:endParaRPr lang="en-US" dirty="0"/>
+          </a:p>
+        </p:txBody>
+      </p:sp>
+      <p:sp>
+        <p:nvSpPr>
+          <p:cNvPr id="4" name="Slide Number Placeholder 3"/>
+          <p:cNvSpPr>
+            <a:spLocks noGrp="1"/>
+          </p:cNvSpPr>
+          <p:nvPr>
+            <p:ph type="sldNum" sz="quarter" idx="10"/>
+          </p:nvPr>
+        </p:nvSpPr>
+        <p:spPr/>
+        <p:txBody>
+          <a:bodyPr/>
+          <a:lstStyle/>
+          <a:p>
+            <a:fld id="{F7021451-1387-4CA6-816F-3879F97B5CBC}" type="slidenum">
+              <a:rPr lang="en-US"/>
+              <a:t>24</a:t>
+            </a:fld>
+            <a:endParaRPr lang="en-US"/>
+          </a:p>
+        </p:txBody>
+      </p:sp>
+    </p:spTree>
+    <p:extLst>
+      <p:ext uri="{BB962C8B-B14F-4D97-AF65-F5344CB8AC3E}">
+        <p14:creationId xmlns:p14="http://schemas.microsoft.com/office/powerpoint/2010/main" val="1024086991"/>
+      </p:ext>
+    </p:extLst>
+  </p:cSld>
+  <p:clrMapOvr>
+    <a:masterClrMapping/>
+  </p:clrMapOvr>
+</p:notes>
+</file>
+
 <file path=ppt/notesSlides/notesSlide3.xml><?xml version="1.0" encoding="utf-8"?>
 <p:notes xmlns:a="http://schemas.openxmlformats.org/drawingml/2006/main" xmlns:r="http://schemas.openxmlformats.org/officeDocument/2006/relationships" xmlns:p="http://schemas.openxmlformats.org/presentationml/2006/main">
   <p:cSld>
@@ -2993,7 +3678,7 @@
                 <a:ea typeface="Pretendard" pitchFamily="34" charset="-122"/>
                 <a:cs typeface="Pretendard" pitchFamily="34" charset="-120"/>
               </a:rPr>
-              <a:t>MDPR Composition Grammar QA</a:t>
+              <a:t>MDPR Design Grammar</a:t>
             </a:r>
             <a:endParaRPr lang="en-US" sz="4800" dirty="0"/>
           </a:p>
@@ -3112,6 +3797,2025 @@
           </a:ln>
         </p:spPr>
       </p:sp>
+      <p:sp>
+        <p:nvSpPr>
+          <p:cNvPr id="5" name="Text 3"/>
+          <p:cNvSpPr txBox="1"/>
+          <p:nvPr/>
+        </p:nvSpPr>
+        <p:spPr>
+          <a:xfrm>
+            <a:off x="731520" y="457200"/>
+            <a:ext cx="10698480" cy="731520"/>
+          </a:xfrm>
+          <a:prstGeom prst="rect">
+            <a:avLst/>
+          </a:prstGeom>
+          <a:noFill/>
+          <a:ln/>
+        </p:spPr>
+        <p:txBody>
+          <a:bodyPr wrap="square" lIns="0" tIns="0" rIns="0" bIns="0" rtlCol="0" anchor="ctr"/>
+          <a:lstStyle/>
+          <a:p>
+            <a:pPr algn="ctr" indent="0" marL="0">
+              <a:lnSpc>
+                <a:spcPct val="120000"/>
+              </a:lnSpc>
+              <a:buNone/>
+            </a:pPr>
+            <a:r>
+              <a:rPr lang="en-US" sz="3400" b="1" dirty="0">
+                <a:solidFill>
+                  <a:srgbClr val="1F2937"/>
+                </a:solidFill>
+                <a:latin typeface="Pretendard" pitchFamily="34" charset="0"/>
+                <a:ea typeface="Pretendard" pitchFamily="34" charset="-122"/>
+                <a:cs typeface="Pretendard" pitchFamily="34" charset="-120"/>
+              </a:rPr>
+              <a:t>Pipeline Diagram</a:t>
+            </a:r>
+            <a:endParaRPr lang="en-US" sz="3400" dirty="0"/>
+          </a:p>
+        </p:txBody>
+      </p:sp>
+      <p:sp>
+        <p:nvSpPr>
+          <p:cNvPr id="6" name="Shape 4"/>
+          <p:cNvSpPr/>
+          <p:nvPr/>
+        </p:nvSpPr>
+        <p:spPr>
+          <a:xfrm>
+            <a:off x="4002024" y="3095244"/>
+            <a:ext cx="457200" cy="0"/>
+          </a:xfrm>
+          <a:prstGeom prst="line">
+            <a:avLst/>
+          </a:prstGeom>
+          <a:noFill/>
+          <a:ln w="12700">
+            <a:solidFill>
+              <a:srgbClr val="B45309"/>
+            </a:solidFill>
+            <a:prstDash val="solid"/>
+            <a:tailEnd type="triangle"/>
+          </a:ln>
+        </p:spPr>
+      </p:sp>
+      <p:sp>
+        <p:nvSpPr>
+          <p:cNvPr id="7" name="Shape 5"/>
+          <p:cNvSpPr/>
+          <p:nvPr/>
+        </p:nvSpPr>
+        <p:spPr>
+          <a:xfrm>
+            <a:off x="7748016" y="3095244"/>
+            <a:ext cx="457200" cy="0"/>
+          </a:xfrm>
+          <a:prstGeom prst="line">
+            <a:avLst/>
+          </a:prstGeom>
+          <a:noFill/>
+          <a:ln w="12700">
+            <a:solidFill>
+              <a:srgbClr val="B45309"/>
+            </a:solidFill>
+            <a:prstDash val="solid"/>
+            <a:tailEnd type="triangle"/>
+          </a:ln>
+        </p:spPr>
+      </p:sp>
+      <p:sp>
+        <p:nvSpPr>
+          <p:cNvPr id="8" name="Shape 6"/>
+          <p:cNvSpPr/>
+          <p:nvPr/>
+        </p:nvSpPr>
+        <p:spPr>
+          <a:xfrm>
+            <a:off x="9849612" y="3627791"/>
+            <a:ext cx="0" cy="416235"/>
+          </a:xfrm>
+          <a:prstGeom prst="line">
+            <a:avLst/>
+          </a:prstGeom>
+          <a:noFill/>
+          <a:ln w="12700">
+            <a:solidFill>
+              <a:srgbClr val="B45309"/>
+            </a:solidFill>
+            <a:prstDash val="solid"/>
+            <a:tailEnd type="triangle"/>
+          </a:ln>
+        </p:spPr>
+      </p:sp>
+      <p:sp>
+        <p:nvSpPr>
+          <p:cNvPr id="9" name="Shape 7"/>
+          <p:cNvSpPr/>
+          <p:nvPr/>
+        </p:nvSpPr>
+        <p:spPr>
+          <a:xfrm>
+            <a:off x="7748016" y="4576572"/>
+            <a:ext cx="457200" cy="0"/>
+          </a:xfrm>
+          <a:prstGeom prst="line">
+            <a:avLst/>
+          </a:prstGeom>
+          <a:noFill/>
+          <a:ln w="12700">
+            <a:solidFill>
+              <a:srgbClr val="B45309"/>
+            </a:solidFill>
+            <a:prstDash val="solid"/>
+            <a:headEnd type="triangle"/>
+          </a:ln>
+        </p:spPr>
+      </p:sp>
+      <p:sp>
+        <p:nvSpPr>
+          <p:cNvPr id="10" name="Shape 8"/>
+          <p:cNvSpPr/>
+          <p:nvPr/>
+        </p:nvSpPr>
+        <p:spPr>
+          <a:xfrm>
+            <a:off x="4002024" y="4576572"/>
+            <a:ext cx="457200" cy="0"/>
+          </a:xfrm>
+          <a:prstGeom prst="line">
+            <a:avLst/>
+          </a:prstGeom>
+          <a:noFill/>
+          <a:ln w="12700">
+            <a:solidFill>
+              <a:srgbClr val="B45309"/>
+            </a:solidFill>
+            <a:prstDash val="solid"/>
+            <a:headEnd type="triangle"/>
+          </a:ln>
+        </p:spPr>
+      </p:sp>
+      <p:sp>
+        <p:nvSpPr>
+          <p:cNvPr id="11" name="Shape 9"/>
+          <p:cNvSpPr/>
+          <p:nvPr/>
+        </p:nvSpPr>
+        <p:spPr>
+          <a:xfrm>
+            <a:off x="640080" y="2510028"/>
+            <a:ext cx="3435096" cy="1170432"/>
+          </a:xfrm>
+          <a:prstGeom prst="roundRect">
+            <a:avLst>
+              <a:gd name="adj" fmla="val 4688"/>
+            </a:avLst>
+          </a:prstGeom>
+          <a:solidFill>
+            <a:srgbClr val="FFFBF5"/>
+          </a:solidFill>
+          <a:ln w="12700">
+            <a:solidFill>
+              <a:srgbClr val="B45309"/>
+            </a:solidFill>
+            <a:prstDash val="solid"/>
+          </a:ln>
+          <a:effectLst>
+            <a:outerShdw sx="100000" sy="100000" kx="0" ky="0" algn="bl" rotWithShape="0" blurRad="12700" dist="50800" dir="2700000">
+              <a:srgbClr val="000000">
+                <a:alpha val="12000"/>
+              </a:srgbClr>
+            </a:outerShdw>
+          </a:effectLst>
+        </p:spPr>
+      </p:sp>
+      <p:sp>
+        <p:nvSpPr>
+          <p:cNvPr id="12" name="Shape 10"/>
+          <p:cNvSpPr/>
+          <p:nvPr/>
+        </p:nvSpPr>
+        <p:spPr>
+          <a:xfrm>
+            <a:off x="640080" y="2510028"/>
+            <a:ext cx="3435096" cy="109728"/>
+          </a:xfrm>
+          <a:prstGeom prst="rect">
+            <a:avLst/>
+          </a:prstGeom>
+          <a:solidFill>
+            <a:srgbClr val="B45309"/>
+          </a:solidFill>
+          <a:ln w="12700">
+            <a:solidFill>
+              <a:srgbClr val="B45309">
+                <a:alpha val="0"/>
+              </a:srgbClr>
+            </a:solidFill>
+            <a:prstDash val="solid"/>
+          </a:ln>
+        </p:spPr>
+      </p:sp>
+      <p:sp>
+        <p:nvSpPr>
+          <p:cNvPr id="13" name="Shape 11"/>
+          <p:cNvSpPr/>
+          <p:nvPr/>
+        </p:nvSpPr>
+        <p:spPr>
+          <a:xfrm>
+            <a:off x="804672" y="2907975"/>
+            <a:ext cx="374538" cy="374538"/>
+          </a:xfrm>
+          <a:prstGeom prst="ellipse">
+            <a:avLst/>
+          </a:prstGeom>
+          <a:solidFill>
+            <a:srgbClr val="B45309"/>
+          </a:solidFill>
+          <a:ln w="12700">
+            <a:solidFill>
+              <a:srgbClr val="B45309">
+                <a:alpha val="0"/>
+              </a:srgbClr>
+            </a:solidFill>
+            <a:prstDash val="solid"/>
+          </a:ln>
+        </p:spPr>
+      </p:sp>
+      <p:sp>
+        <p:nvSpPr>
+          <p:cNvPr id="14" name="Text 12"/>
+          <p:cNvSpPr txBox="1"/>
+          <p:nvPr/>
+        </p:nvSpPr>
+        <p:spPr>
+          <a:xfrm>
+            <a:off x="804672" y="2907975"/>
+            <a:ext cx="374538" cy="374538"/>
+          </a:xfrm>
+          <a:prstGeom prst="rect">
+            <a:avLst/>
+          </a:prstGeom>
+          <a:noFill/>
+          <a:ln/>
+        </p:spPr>
+        <p:txBody>
+          <a:bodyPr wrap="square" lIns="0" tIns="0" rIns="0" bIns="0" rtlCol="0" anchor="ctr">
+            <a:normAutofit/>
+          </a:bodyPr>
+          <a:lstStyle/>
+          <a:p>
+            <a:pPr algn="ctr" indent="0" marL="0">
+              <a:lnSpc>
+                <a:spcPct val="120000"/>
+              </a:lnSpc>
+              <a:buNone/>
+            </a:pPr>
+            <a:r>
+              <a:rPr lang="en-US" sz="1500" b="1" dirty="0">
+                <a:solidFill>
+                  <a:srgbClr val="F7F3EF"/>
+                </a:solidFill>
+                <a:latin typeface="Pretendard" pitchFamily="34" charset="0"/>
+                <a:ea typeface="Pretendard" pitchFamily="34" charset="-122"/>
+                <a:cs typeface="Pretendard" pitchFamily="34" charset="-120"/>
+              </a:rPr>
+              <a:t>1</a:t>
+            </a:r>
+            <a:endParaRPr lang="en-US" sz="1500" dirty="0"/>
+          </a:p>
+        </p:txBody>
+      </p:sp>
+      <p:sp>
+        <p:nvSpPr>
+          <p:cNvPr id="15" name="Text 13"/>
+          <p:cNvSpPr txBox="1"/>
+          <p:nvPr/>
+        </p:nvSpPr>
+        <p:spPr>
+          <a:xfrm>
+            <a:off x="1325514" y="2638044"/>
+            <a:ext cx="2585070" cy="914400"/>
+          </a:xfrm>
+          <a:prstGeom prst="rect">
+            <a:avLst/>
+          </a:prstGeom>
+          <a:noFill/>
+          <a:ln/>
+        </p:spPr>
+        <p:txBody>
+          <a:bodyPr wrap="square" lIns="0" tIns="25400" rIns="25400" bIns="0" rtlCol="0" anchor="ctr">
+            <a:normAutofit/>
+          </a:bodyPr>
+          <a:lstStyle/>
+          <a:p>
+            <a:pPr algn="l" indent="0" marL="0">
+              <a:lnSpc>
+                <a:spcPct val="92000"/>
+              </a:lnSpc>
+              <a:buNone/>
+            </a:pPr>
+            <a:r>
+              <a:rPr lang="en-US" sz="1600" dirty="0">
+                <a:solidFill>
+                  <a:srgbClr val="1F2937"/>
+                </a:solidFill>
+                <a:latin typeface="Pretendard" pitchFamily="34" charset="0"/>
+                <a:ea typeface="Pretendard" pitchFamily="34" charset="-122"/>
+                <a:cs typeface="Pretendard" pitchFamily="34" charset="-120"/>
+              </a:rPr>
+              <a:t>Markdown source</a:t>
+            </a:r>
+            <a:endParaRPr lang="en-US" sz="1600" dirty="0"/>
+          </a:p>
+        </p:txBody>
+      </p:sp>
+      <p:sp>
+        <p:nvSpPr>
+          <p:cNvPr id="16" name="Shape 14"/>
+          <p:cNvSpPr/>
+          <p:nvPr/>
+        </p:nvSpPr>
+        <p:spPr>
+          <a:xfrm>
+            <a:off x="4386072" y="2510028"/>
+            <a:ext cx="3435096" cy="1170432"/>
+          </a:xfrm>
+          <a:prstGeom prst="roundRect">
+            <a:avLst>
+              <a:gd name="adj" fmla="val 4688"/>
+            </a:avLst>
+          </a:prstGeom>
+          <a:solidFill>
+            <a:srgbClr val="FFFBF5"/>
+          </a:solidFill>
+          <a:ln w="12700">
+            <a:solidFill>
+              <a:srgbClr val="B45309"/>
+            </a:solidFill>
+            <a:prstDash val="solid"/>
+          </a:ln>
+          <a:effectLst>
+            <a:outerShdw sx="100000" sy="100000" kx="0" ky="0" algn="bl" rotWithShape="0" blurRad="12700" dist="50800" dir="2700000">
+              <a:srgbClr val="000000">
+                <a:alpha val="12000"/>
+              </a:srgbClr>
+            </a:outerShdw>
+          </a:effectLst>
+        </p:spPr>
+      </p:sp>
+      <p:sp>
+        <p:nvSpPr>
+          <p:cNvPr id="17" name="Shape 15"/>
+          <p:cNvSpPr/>
+          <p:nvPr/>
+        </p:nvSpPr>
+        <p:spPr>
+          <a:xfrm>
+            <a:off x="4386072" y="2510028"/>
+            <a:ext cx="3435096" cy="109728"/>
+          </a:xfrm>
+          <a:prstGeom prst="rect">
+            <a:avLst/>
+          </a:prstGeom>
+          <a:solidFill>
+            <a:srgbClr val="B45309"/>
+          </a:solidFill>
+          <a:ln w="12700">
+            <a:solidFill>
+              <a:srgbClr val="B45309">
+                <a:alpha val="0"/>
+              </a:srgbClr>
+            </a:solidFill>
+            <a:prstDash val="solid"/>
+          </a:ln>
+        </p:spPr>
+      </p:sp>
+      <p:sp>
+        <p:nvSpPr>
+          <p:cNvPr id="18" name="Shape 16"/>
+          <p:cNvSpPr/>
+          <p:nvPr/>
+        </p:nvSpPr>
+        <p:spPr>
+          <a:xfrm>
+            <a:off x="4550664" y="2907975"/>
+            <a:ext cx="374538" cy="374538"/>
+          </a:xfrm>
+          <a:prstGeom prst="ellipse">
+            <a:avLst/>
+          </a:prstGeom>
+          <a:solidFill>
+            <a:srgbClr val="B45309"/>
+          </a:solidFill>
+          <a:ln w="12700">
+            <a:solidFill>
+              <a:srgbClr val="B45309">
+                <a:alpha val="0"/>
+              </a:srgbClr>
+            </a:solidFill>
+            <a:prstDash val="solid"/>
+          </a:ln>
+        </p:spPr>
+      </p:sp>
+      <p:sp>
+        <p:nvSpPr>
+          <p:cNvPr id="19" name="Text 17"/>
+          <p:cNvSpPr txBox="1"/>
+          <p:nvPr/>
+        </p:nvSpPr>
+        <p:spPr>
+          <a:xfrm>
+            <a:off x="4550664" y="2907975"/>
+            <a:ext cx="374538" cy="374538"/>
+          </a:xfrm>
+          <a:prstGeom prst="rect">
+            <a:avLst/>
+          </a:prstGeom>
+          <a:noFill/>
+          <a:ln/>
+        </p:spPr>
+        <p:txBody>
+          <a:bodyPr wrap="square" lIns="0" tIns="0" rIns="0" bIns="0" rtlCol="0" anchor="ctr">
+            <a:normAutofit/>
+          </a:bodyPr>
+          <a:lstStyle/>
+          <a:p>
+            <a:pPr algn="ctr" indent="0" marL="0">
+              <a:lnSpc>
+                <a:spcPct val="120000"/>
+              </a:lnSpc>
+              <a:buNone/>
+            </a:pPr>
+            <a:r>
+              <a:rPr lang="en-US" sz="1500" b="1" dirty="0">
+                <a:solidFill>
+                  <a:srgbClr val="F7F3EF"/>
+                </a:solidFill>
+                <a:latin typeface="Pretendard" pitchFamily="34" charset="0"/>
+                <a:ea typeface="Pretendard" pitchFamily="34" charset="-122"/>
+                <a:cs typeface="Pretendard" pitchFamily="34" charset="-120"/>
+              </a:rPr>
+              <a:t>2</a:t>
+            </a:r>
+            <a:endParaRPr lang="en-US" sz="1500" dirty="0"/>
+          </a:p>
+        </p:txBody>
+      </p:sp>
+      <p:sp>
+        <p:nvSpPr>
+          <p:cNvPr id="20" name="Text 18"/>
+          <p:cNvSpPr txBox="1"/>
+          <p:nvPr/>
+        </p:nvSpPr>
+        <p:spPr>
+          <a:xfrm>
+            <a:off x="5071506" y="2638044"/>
+            <a:ext cx="2585070" cy="914400"/>
+          </a:xfrm>
+          <a:prstGeom prst="rect">
+            <a:avLst/>
+          </a:prstGeom>
+          <a:noFill/>
+          <a:ln/>
+        </p:spPr>
+        <p:txBody>
+          <a:bodyPr wrap="square" lIns="0" tIns="25400" rIns="25400" bIns="0" rtlCol="0" anchor="ctr">
+            <a:normAutofit/>
+          </a:bodyPr>
+          <a:lstStyle/>
+          <a:p>
+            <a:pPr algn="l" indent="0" marL="0">
+              <a:lnSpc>
+                <a:spcPct val="92000"/>
+              </a:lnSpc>
+              <a:buNone/>
+            </a:pPr>
+            <a:r>
+              <a:rPr lang="en-US" sz="1600" dirty="0">
+                <a:solidFill>
+                  <a:srgbClr val="1F2937"/>
+                </a:solidFill>
+                <a:latin typeface="Pretendard" pitchFamily="34" charset="0"/>
+                <a:ea typeface="Pretendard" pitchFamily="34" charset="-122"/>
+                <a:cs typeface="Pretendard" pitchFamily="34" charset="-120"/>
+              </a:rPr>
+              <a:t>Parse blocks</a:t>
+            </a:r>
+            <a:endParaRPr lang="en-US" sz="1600" dirty="0"/>
+          </a:p>
+        </p:txBody>
+      </p:sp>
+      <p:sp>
+        <p:nvSpPr>
+          <p:cNvPr id="21" name="Shape 19"/>
+          <p:cNvSpPr/>
+          <p:nvPr/>
+        </p:nvSpPr>
+        <p:spPr>
+          <a:xfrm>
+            <a:off x="8132064" y="2510028"/>
+            <a:ext cx="3435096" cy="1170432"/>
+          </a:xfrm>
+          <a:prstGeom prst="roundRect">
+            <a:avLst>
+              <a:gd name="adj" fmla="val 4688"/>
+            </a:avLst>
+          </a:prstGeom>
+          <a:solidFill>
+            <a:srgbClr val="FFFBF5"/>
+          </a:solidFill>
+          <a:ln w="12700">
+            <a:solidFill>
+              <a:srgbClr val="B45309"/>
+            </a:solidFill>
+            <a:prstDash val="solid"/>
+          </a:ln>
+          <a:effectLst>
+            <a:outerShdw sx="100000" sy="100000" kx="0" ky="0" algn="bl" rotWithShape="0" blurRad="12700" dist="50800" dir="2700000">
+              <a:srgbClr val="000000">
+                <a:alpha val="12000"/>
+              </a:srgbClr>
+            </a:outerShdw>
+          </a:effectLst>
+        </p:spPr>
+      </p:sp>
+      <p:sp>
+        <p:nvSpPr>
+          <p:cNvPr id="22" name="Shape 20"/>
+          <p:cNvSpPr/>
+          <p:nvPr/>
+        </p:nvSpPr>
+        <p:spPr>
+          <a:xfrm>
+            <a:off x="8132064" y="2510028"/>
+            <a:ext cx="3435096" cy="109728"/>
+          </a:xfrm>
+          <a:prstGeom prst="rect">
+            <a:avLst/>
+          </a:prstGeom>
+          <a:solidFill>
+            <a:srgbClr val="B45309"/>
+          </a:solidFill>
+          <a:ln w="12700">
+            <a:solidFill>
+              <a:srgbClr val="B45309">
+                <a:alpha val="0"/>
+              </a:srgbClr>
+            </a:solidFill>
+            <a:prstDash val="solid"/>
+          </a:ln>
+        </p:spPr>
+      </p:sp>
+      <p:sp>
+        <p:nvSpPr>
+          <p:cNvPr id="23" name="Shape 21"/>
+          <p:cNvSpPr/>
+          <p:nvPr/>
+        </p:nvSpPr>
+        <p:spPr>
+          <a:xfrm>
+            <a:off x="8296656" y="2907975"/>
+            <a:ext cx="374538" cy="374538"/>
+          </a:xfrm>
+          <a:prstGeom prst="ellipse">
+            <a:avLst/>
+          </a:prstGeom>
+          <a:solidFill>
+            <a:srgbClr val="B45309"/>
+          </a:solidFill>
+          <a:ln w="12700">
+            <a:solidFill>
+              <a:srgbClr val="B45309">
+                <a:alpha val="0"/>
+              </a:srgbClr>
+            </a:solidFill>
+            <a:prstDash val="solid"/>
+          </a:ln>
+        </p:spPr>
+      </p:sp>
+      <p:sp>
+        <p:nvSpPr>
+          <p:cNvPr id="24" name="Text 22"/>
+          <p:cNvSpPr txBox="1"/>
+          <p:nvPr/>
+        </p:nvSpPr>
+        <p:spPr>
+          <a:xfrm>
+            <a:off x="8296656" y="2907975"/>
+            <a:ext cx="374538" cy="374538"/>
+          </a:xfrm>
+          <a:prstGeom prst="rect">
+            <a:avLst/>
+          </a:prstGeom>
+          <a:noFill/>
+          <a:ln/>
+        </p:spPr>
+        <p:txBody>
+          <a:bodyPr wrap="square" lIns="0" tIns="0" rIns="0" bIns="0" rtlCol="0" anchor="ctr">
+            <a:normAutofit/>
+          </a:bodyPr>
+          <a:lstStyle/>
+          <a:p>
+            <a:pPr algn="ctr" indent="0" marL="0">
+              <a:lnSpc>
+                <a:spcPct val="120000"/>
+              </a:lnSpc>
+              <a:buNone/>
+            </a:pPr>
+            <a:r>
+              <a:rPr lang="en-US" sz="1500" b="1" dirty="0">
+                <a:solidFill>
+                  <a:srgbClr val="F7F3EF"/>
+                </a:solidFill>
+                <a:latin typeface="Pretendard" pitchFamily="34" charset="0"/>
+                <a:ea typeface="Pretendard" pitchFamily="34" charset="-122"/>
+                <a:cs typeface="Pretendard" pitchFamily="34" charset="-120"/>
+              </a:rPr>
+              <a:t>3</a:t>
+            </a:r>
+            <a:endParaRPr lang="en-US" sz="1500" dirty="0"/>
+          </a:p>
+        </p:txBody>
+      </p:sp>
+      <p:sp>
+        <p:nvSpPr>
+          <p:cNvPr id="25" name="Text 23"/>
+          <p:cNvSpPr txBox="1"/>
+          <p:nvPr/>
+        </p:nvSpPr>
+        <p:spPr>
+          <a:xfrm>
+            <a:off x="8817498" y="2638044"/>
+            <a:ext cx="2585070" cy="914400"/>
+          </a:xfrm>
+          <a:prstGeom prst="rect">
+            <a:avLst/>
+          </a:prstGeom>
+          <a:noFill/>
+          <a:ln/>
+        </p:spPr>
+        <p:txBody>
+          <a:bodyPr wrap="square" lIns="0" tIns="25400" rIns="25400" bIns="0" rtlCol="0" anchor="ctr">
+            <a:normAutofit/>
+          </a:bodyPr>
+          <a:lstStyle/>
+          <a:p>
+            <a:pPr algn="l" indent="0" marL="0">
+              <a:lnSpc>
+                <a:spcPct val="92000"/>
+              </a:lnSpc>
+              <a:buNone/>
+            </a:pPr>
+            <a:r>
+              <a:rPr lang="en-US" sz="1600" dirty="0">
+                <a:solidFill>
+                  <a:srgbClr val="1F2937"/>
+                </a:solidFill>
+                <a:latin typeface="Pretendard" pitchFamily="34" charset="0"/>
+                <a:ea typeface="Pretendard" pitchFamily="34" charset="-122"/>
+                <a:cs typeface="Pretendard" pitchFamily="34" charset="-120"/>
+              </a:rPr>
+              <a:t>Split slides</a:t>
+            </a:r>
+            <a:endParaRPr lang="en-US" sz="1600" dirty="0"/>
+          </a:p>
+        </p:txBody>
+      </p:sp>
+      <p:sp>
+        <p:nvSpPr>
+          <p:cNvPr id="26" name="Shape 24"/>
+          <p:cNvSpPr/>
+          <p:nvPr/>
+        </p:nvSpPr>
+        <p:spPr>
+          <a:xfrm>
+            <a:off x="8132064" y="3991356"/>
+            <a:ext cx="3435096" cy="1170432"/>
+          </a:xfrm>
+          <a:prstGeom prst="roundRect">
+            <a:avLst>
+              <a:gd name="adj" fmla="val 4688"/>
+            </a:avLst>
+          </a:prstGeom>
+          <a:solidFill>
+            <a:srgbClr val="FFFBF5"/>
+          </a:solidFill>
+          <a:ln w="12700">
+            <a:solidFill>
+              <a:srgbClr val="B45309"/>
+            </a:solidFill>
+            <a:prstDash val="solid"/>
+          </a:ln>
+          <a:effectLst>
+            <a:outerShdw sx="100000" sy="100000" kx="0" ky="0" algn="bl" rotWithShape="0" blurRad="12700" dist="50800" dir="2700000">
+              <a:srgbClr val="000000">
+                <a:alpha val="12000"/>
+              </a:srgbClr>
+            </a:outerShdw>
+          </a:effectLst>
+        </p:spPr>
+      </p:sp>
+      <p:sp>
+        <p:nvSpPr>
+          <p:cNvPr id="27" name="Shape 25"/>
+          <p:cNvSpPr/>
+          <p:nvPr/>
+        </p:nvSpPr>
+        <p:spPr>
+          <a:xfrm>
+            <a:off x="8132064" y="3991356"/>
+            <a:ext cx="3435096" cy="109728"/>
+          </a:xfrm>
+          <a:prstGeom prst="rect">
+            <a:avLst/>
+          </a:prstGeom>
+          <a:solidFill>
+            <a:srgbClr val="B45309"/>
+          </a:solidFill>
+          <a:ln w="12700">
+            <a:solidFill>
+              <a:srgbClr val="B45309">
+                <a:alpha val="0"/>
+              </a:srgbClr>
+            </a:solidFill>
+            <a:prstDash val="solid"/>
+          </a:ln>
+        </p:spPr>
+      </p:sp>
+      <p:sp>
+        <p:nvSpPr>
+          <p:cNvPr id="28" name="Shape 26"/>
+          <p:cNvSpPr/>
+          <p:nvPr/>
+        </p:nvSpPr>
+        <p:spPr>
+          <a:xfrm>
+            <a:off x="8296656" y="4389303"/>
+            <a:ext cx="374538" cy="374538"/>
+          </a:xfrm>
+          <a:prstGeom prst="ellipse">
+            <a:avLst/>
+          </a:prstGeom>
+          <a:solidFill>
+            <a:srgbClr val="B45309"/>
+          </a:solidFill>
+          <a:ln w="12700">
+            <a:solidFill>
+              <a:srgbClr val="B45309">
+                <a:alpha val="0"/>
+              </a:srgbClr>
+            </a:solidFill>
+            <a:prstDash val="solid"/>
+          </a:ln>
+        </p:spPr>
+      </p:sp>
+      <p:sp>
+        <p:nvSpPr>
+          <p:cNvPr id="29" name="Text 27"/>
+          <p:cNvSpPr txBox="1"/>
+          <p:nvPr/>
+        </p:nvSpPr>
+        <p:spPr>
+          <a:xfrm>
+            <a:off x="8296656" y="4389303"/>
+            <a:ext cx="374538" cy="374538"/>
+          </a:xfrm>
+          <a:prstGeom prst="rect">
+            <a:avLst/>
+          </a:prstGeom>
+          <a:noFill/>
+          <a:ln/>
+        </p:spPr>
+        <p:txBody>
+          <a:bodyPr wrap="square" lIns="0" tIns="0" rIns="0" bIns="0" rtlCol="0" anchor="ctr">
+            <a:normAutofit/>
+          </a:bodyPr>
+          <a:lstStyle/>
+          <a:p>
+            <a:pPr algn="ctr" indent="0" marL="0">
+              <a:lnSpc>
+                <a:spcPct val="120000"/>
+              </a:lnSpc>
+              <a:buNone/>
+            </a:pPr>
+            <a:r>
+              <a:rPr lang="en-US" sz="1500" b="1" dirty="0">
+                <a:solidFill>
+                  <a:srgbClr val="F7F3EF"/>
+                </a:solidFill>
+                <a:latin typeface="Pretendard" pitchFamily="34" charset="0"/>
+                <a:ea typeface="Pretendard" pitchFamily="34" charset="-122"/>
+                <a:cs typeface="Pretendard" pitchFamily="34" charset="-120"/>
+              </a:rPr>
+              <a:t>4</a:t>
+            </a:r>
+            <a:endParaRPr lang="en-US" sz="1500" dirty="0"/>
+          </a:p>
+        </p:txBody>
+      </p:sp>
+      <p:sp>
+        <p:nvSpPr>
+          <p:cNvPr id="30" name="Text 28"/>
+          <p:cNvSpPr txBox="1"/>
+          <p:nvPr/>
+        </p:nvSpPr>
+        <p:spPr>
+          <a:xfrm>
+            <a:off x="8817498" y="4119372"/>
+            <a:ext cx="2585070" cy="914400"/>
+          </a:xfrm>
+          <a:prstGeom prst="rect">
+            <a:avLst/>
+          </a:prstGeom>
+          <a:noFill/>
+          <a:ln/>
+        </p:spPr>
+        <p:txBody>
+          <a:bodyPr wrap="square" lIns="0" tIns="25400" rIns="25400" bIns="0" rtlCol="0" anchor="ctr">
+            <a:normAutofit/>
+          </a:bodyPr>
+          <a:lstStyle/>
+          <a:p>
+            <a:pPr algn="l" indent="0" marL="0">
+              <a:lnSpc>
+                <a:spcPct val="92000"/>
+              </a:lnSpc>
+              <a:buNone/>
+            </a:pPr>
+            <a:r>
+              <a:rPr lang="en-US" sz="1600" dirty="0">
+                <a:solidFill>
+                  <a:srgbClr val="1F2937"/>
+                </a:solidFill>
+                <a:latin typeface="Pretendard" pitchFamily="34" charset="0"/>
+                <a:ea typeface="Pretendard" pitchFamily="34" charset="-122"/>
+                <a:cs typeface="Pretendard" pitchFamily="34" charset="-120"/>
+              </a:rPr>
+              <a:t>Layout objects</a:t>
+            </a:r>
+            <a:endParaRPr lang="en-US" sz="1600" dirty="0"/>
+          </a:p>
+        </p:txBody>
+      </p:sp>
+      <p:sp>
+        <p:nvSpPr>
+          <p:cNvPr id="31" name="Shape 29"/>
+          <p:cNvSpPr/>
+          <p:nvPr/>
+        </p:nvSpPr>
+        <p:spPr>
+          <a:xfrm>
+            <a:off x="4386072" y="3991356"/>
+            <a:ext cx="3435096" cy="1170432"/>
+          </a:xfrm>
+          <a:prstGeom prst="roundRect">
+            <a:avLst>
+              <a:gd name="adj" fmla="val 4688"/>
+            </a:avLst>
+          </a:prstGeom>
+          <a:solidFill>
+            <a:srgbClr val="FFFBF5"/>
+          </a:solidFill>
+          <a:ln w="12700">
+            <a:solidFill>
+              <a:srgbClr val="B45309"/>
+            </a:solidFill>
+            <a:prstDash val="solid"/>
+          </a:ln>
+          <a:effectLst>
+            <a:outerShdw sx="100000" sy="100000" kx="0" ky="0" algn="bl" rotWithShape="0" blurRad="12700" dist="50800" dir="2700000">
+              <a:srgbClr val="000000">
+                <a:alpha val="12000"/>
+              </a:srgbClr>
+            </a:outerShdw>
+          </a:effectLst>
+        </p:spPr>
+      </p:sp>
+      <p:sp>
+        <p:nvSpPr>
+          <p:cNvPr id="32" name="Shape 30"/>
+          <p:cNvSpPr/>
+          <p:nvPr/>
+        </p:nvSpPr>
+        <p:spPr>
+          <a:xfrm>
+            <a:off x="4386072" y="3991356"/>
+            <a:ext cx="3435096" cy="109728"/>
+          </a:xfrm>
+          <a:prstGeom prst="rect">
+            <a:avLst/>
+          </a:prstGeom>
+          <a:solidFill>
+            <a:srgbClr val="B45309"/>
+          </a:solidFill>
+          <a:ln w="12700">
+            <a:solidFill>
+              <a:srgbClr val="B45309">
+                <a:alpha val="0"/>
+              </a:srgbClr>
+            </a:solidFill>
+            <a:prstDash val="solid"/>
+          </a:ln>
+        </p:spPr>
+      </p:sp>
+      <p:sp>
+        <p:nvSpPr>
+          <p:cNvPr id="33" name="Shape 31"/>
+          <p:cNvSpPr/>
+          <p:nvPr/>
+        </p:nvSpPr>
+        <p:spPr>
+          <a:xfrm>
+            <a:off x="4550664" y="4389303"/>
+            <a:ext cx="374538" cy="374538"/>
+          </a:xfrm>
+          <a:prstGeom prst="ellipse">
+            <a:avLst/>
+          </a:prstGeom>
+          <a:solidFill>
+            <a:srgbClr val="B45309"/>
+          </a:solidFill>
+          <a:ln w="12700">
+            <a:solidFill>
+              <a:srgbClr val="B45309">
+                <a:alpha val="0"/>
+              </a:srgbClr>
+            </a:solidFill>
+            <a:prstDash val="solid"/>
+          </a:ln>
+        </p:spPr>
+      </p:sp>
+      <p:sp>
+        <p:nvSpPr>
+          <p:cNvPr id="34" name="Text 32"/>
+          <p:cNvSpPr txBox="1"/>
+          <p:nvPr/>
+        </p:nvSpPr>
+        <p:spPr>
+          <a:xfrm>
+            <a:off x="4550664" y="4389303"/>
+            <a:ext cx="374538" cy="374538"/>
+          </a:xfrm>
+          <a:prstGeom prst="rect">
+            <a:avLst/>
+          </a:prstGeom>
+          <a:noFill/>
+          <a:ln/>
+        </p:spPr>
+        <p:txBody>
+          <a:bodyPr wrap="square" lIns="0" tIns="0" rIns="0" bIns="0" rtlCol="0" anchor="ctr">
+            <a:normAutofit/>
+          </a:bodyPr>
+          <a:lstStyle/>
+          <a:p>
+            <a:pPr algn="ctr" indent="0" marL="0">
+              <a:lnSpc>
+                <a:spcPct val="120000"/>
+              </a:lnSpc>
+              <a:buNone/>
+            </a:pPr>
+            <a:r>
+              <a:rPr lang="en-US" sz="1500" b="1" dirty="0">
+                <a:solidFill>
+                  <a:srgbClr val="F7F3EF"/>
+                </a:solidFill>
+                <a:latin typeface="Pretendard" pitchFamily="34" charset="0"/>
+                <a:ea typeface="Pretendard" pitchFamily="34" charset="-122"/>
+                <a:cs typeface="Pretendard" pitchFamily="34" charset="-120"/>
+              </a:rPr>
+              <a:t>5</a:t>
+            </a:r>
+            <a:endParaRPr lang="en-US" sz="1500" dirty="0"/>
+          </a:p>
+        </p:txBody>
+      </p:sp>
+      <p:sp>
+        <p:nvSpPr>
+          <p:cNvPr id="35" name="Text 33"/>
+          <p:cNvSpPr txBox="1"/>
+          <p:nvPr/>
+        </p:nvSpPr>
+        <p:spPr>
+          <a:xfrm>
+            <a:off x="5071506" y="4119372"/>
+            <a:ext cx="2585070" cy="914400"/>
+          </a:xfrm>
+          <a:prstGeom prst="rect">
+            <a:avLst/>
+          </a:prstGeom>
+          <a:noFill/>
+          <a:ln/>
+        </p:spPr>
+        <p:txBody>
+          <a:bodyPr wrap="square" lIns="0" tIns="25400" rIns="25400" bIns="0" rtlCol="0" anchor="ctr">
+            <a:normAutofit/>
+          </a:bodyPr>
+          <a:lstStyle/>
+          <a:p>
+            <a:pPr algn="l" indent="0" marL="0">
+              <a:lnSpc>
+                <a:spcPct val="92000"/>
+              </a:lnSpc>
+              <a:buNone/>
+            </a:pPr>
+            <a:r>
+              <a:rPr lang="en-US" sz="1600" dirty="0">
+                <a:solidFill>
+                  <a:srgbClr val="1F2937"/>
+                </a:solidFill>
+                <a:latin typeface="Pretendard" pitchFamily="34" charset="0"/>
+                <a:ea typeface="Pretendard" pitchFamily="34" charset="-122"/>
+                <a:cs typeface="Pretendard" pitchFamily="34" charset="-120"/>
+              </a:rPr>
+              <a:t>Validate overflow</a:t>
+            </a:r>
+            <a:endParaRPr lang="en-US" sz="1600" dirty="0"/>
+          </a:p>
+        </p:txBody>
+      </p:sp>
+      <p:sp>
+        <p:nvSpPr>
+          <p:cNvPr id="36" name="Shape 34"/>
+          <p:cNvSpPr/>
+          <p:nvPr/>
+        </p:nvSpPr>
+        <p:spPr>
+          <a:xfrm>
+            <a:off x="640080" y="3991356"/>
+            <a:ext cx="3435096" cy="1170432"/>
+          </a:xfrm>
+          <a:prstGeom prst="roundRect">
+            <a:avLst>
+              <a:gd name="adj" fmla="val 4688"/>
+            </a:avLst>
+          </a:prstGeom>
+          <a:solidFill>
+            <a:srgbClr val="FFFBF5"/>
+          </a:solidFill>
+          <a:ln w="12700">
+            <a:solidFill>
+              <a:srgbClr val="B45309"/>
+            </a:solidFill>
+            <a:prstDash val="solid"/>
+          </a:ln>
+          <a:effectLst>
+            <a:outerShdw sx="100000" sy="100000" kx="0" ky="0" algn="bl" rotWithShape="0" blurRad="12700" dist="50800" dir="2700000">
+              <a:srgbClr val="000000">
+                <a:alpha val="12000"/>
+              </a:srgbClr>
+            </a:outerShdw>
+          </a:effectLst>
+        </p:spPr>
+      </p:sp>
+      <p:sp>
+        <p:nvSpPr>
+          <p:cNvPr id="37" name="Shape 35"/>
+          <p:cNvSpPr/>
+          <p:nvPr/>
+        </p:nvSpPr>
+        <p:spPr>
+          <a:xfrm>
+            <a:off x="640080" y="3991356"/>
+            <a:ext cx="3435096" cy="109728"/>
+          </a:xfrm>
+          <a:prstGeom prst="rect">
+            <a:avLst/>
+          </a:prstGeom>
+          <a:solidFill>
+            <a:srgbClr val="B45309"/>
+          </a:solidFill>
+          <a:ln w="12700">
+            <a:solidFill>
+              <a:srgbClr val="B45309">
+                <a:alpha val="0"/>
+              </a:srgbClr>
+            </a:solidFill>
+            <a:prstDash val="solid"/>
+          </a:ln>
+        </p:spPr>
+      </p:sp>
+      <p:sp>
+        <p:nvSpPr>
+          <p:cNvPr id="38" name="Shape 36"/>
+          <p:cNvSpPr/>
+          <p:nvPr/>
+        </p:nvSpPr>
+        <p:spPr>
+          <a:xfrm>
+            <a:off x="804672" y="4389303"/>
+            <a:ext cx="374538" cy="374538"/>
+          </a:xfrm>
+          <a:prstGeom prst="ellipse">
+            <a:avLst/>
+          </a:prstGeom>
+          <a:solidFill>
+            <a:srgbClr val="B45309"/>
+          </a:solidFill>
+          <a:ln w="12700">
+            <a:solidFill>
+              <a:srgbClr val="B45309">
+                <a:alpha val="0"/>
+              </a:srgbClr>
+            </a:solidFill>
+            <a:prstDash val="solid"/>
+          </a:ln>
+        </p:spPr>
+      </p:sp>
+      <p:sp>
+        <p:nvSpPr>
+          <p:cNvPr id="39" name="Text 37"/>
+          <p:cNvSpPr txBox="1"/>
+          <p:nvPr/>
+        </p:nvSpPr>
+        <p:spPr>
+          <a:xfrm>
+            <a:off x="804672" y="4389303"/>
+            <a:ext cx="374538" cy="374538"/>
+          </a:xfrm>
+          <a:prstGeom prst="rect">
+            <a:avLst/>
+          </a:prstGeom>
+          <a:noFill/>
+          <a:ln/>
+        </p:spPr>
+        <p:txBody>
+          <a:bodyPr wrap="square" lIns="0" tIns="0" rIns="0" bIns="0" rtlCol="0" anchor="ctr">
+            <a:normAutofit/>
+          </a:bodyPr>
+          <a:lstStyle/>
+          <a:p>
+            <a:pPr algn="ctr" indent="0" marL="0">
+              <a:lnSpc>
+                <a:spcPct val="120000"/>
+              </a:lnSpc>
+              <a:buNone/>
+            </a:pPr>
+            <a:r>
+              <a:rPr lang="en-US" sz="1500" b="1" dirty="0">
+                <a:solidFill>
+                  <a:srgbClr val="F7F3EF"/>
+                </a:solidFill>
+                <a:latin typeface="Pretendard" pitchFamily="34" charset="0"/>
+                <a:ea typeface="Pretendard" pitchFamily="34" charset="-122"/>
+                <a:cs typeface="Pretendard" pitchFamily="34" charset="-120"/>
+              </a:rPr>
+              <a:t>6</a:t>
+            </a:r>
+            <a:endParaRPr lang="en-US" sz="1500" dirty="0"/>
+          </a:p>
+        </p:txBody>
+      </p:sp>
+      <p:sp>
+        <p:nvSpPr>
+          <p:cNvPr id="40" name="Text 38"/>
+          <p:cNvSpPr txBox="1"/>
+          <p:nvPr/>
+        </p:nvSpPr>
+        <p:spPr>
+          <a:xfrm>
+            <a:off x="1325514" y="4119372"/>
+            <a:ext cx="2585070" cy="914400"/>
+          </a:xfrm>
+          <a:prstGeom prst="rect">
+            <a:avLst/>
+          </a:prstGeom>
+          <a:noFill/>
+          <a:ln/>
+        </p:spPr>
+        <p:txBody>
+          <a:bodyPr wrap="square" lIns="0" tIns="25400" rIns="25400" bIns="0" rtlCol="0" anchor="ctr">
+            <a:normAutofit/>
+          </a:bodyPr>
+          <a:lstStyle/>
+          <a:p>
+            <a:pPr algn="l" indent="0" marL="0">
+              <a:lnSpc>
+                <a:spcPct val="92000"/>
+              </a:lnSpc>
+              <a:buNone/>
+            </a:pPr>
+            <a:r>
+              <a:rPr lang="en-US" sz="1600" dirty="0">
+                <a:solidFill>
+                  <a:srgbClr val="1F2937"/>
+                </a:solidFill>
+                <a:latin typeface="Pretendard" pitchFamily="34" charset="0"/>
+                <a:ea typeface="Pretendard" pitchFamily="34" charset="-122"/>
+                <a:cs typeface="Pretendard" pitchFamily="34" charset="-120"/>
+              </a:rPr>
+              <a:t>Render PPTX HTML PDF</a:t>
+            </a:r>
+            <a:endParaRPr lang="en-US" sz="1600" dirty="0"/>
+          </a:p>
+        </p:txBody>
+      </p:sp>
+    </p:spTree>
+  </p:cSld>
+  <p:clrMapOvr>
+    <a:masterClrMapping/>
+  </p:clrMapOvr>
+</p:sld>
+</file>
+
+<file path=ppt/slides/slide11.xml><?xml version="1.0" encoding="utf-8"?>
+<p:sld xmlns:a="http://schemas.openxmlformats.org/drawingml/2006/main" xmlns:r="http://schemas.openxmlformats.org/officeDocument/2006/relationships" xmlns:p="http://schemas.openxmlformats.org/presentationml/2006/main">
+  <p:cSld name="Slide 11">
+    <p:bg>
+      <p:bgPr>
+        <a:solidFill>
+          <a:srgbClr val="F7F3EF"/>
+        </a:solidFill>
+      </p:bgPr>
+    </p:bg>
+    <p:spTree>
+      <p:nvGrpSpPr>
+        <p:cNvPr id="1" name=""/>
+        <p:cNvGrpSpPr/>
+        <p:nvPr/>
+      </p:nvGrpSpPr>
+      <p:grpSpPr>
+        <a:xfrm>
+          <a:off x="0" y="0"/>
+          <a:ext cx="0" cy="0"/>
+          <a:chOff x="0" y="0"/>
+          <a:chExt cx="0" cy="0"/>
+        </a:xfrm>
+      </p:grpSpPr>
+      <p:sp>
+        <p:nvSpPr>
+          <p:cNvPr id="2" name="Shape 0"/>
+          <p:cNvSpPr/>
+          <p:nvPr/>
+        </p:nvSpPr>
+        <p:spPr>
+          <a:xfrm>
+            <a:off x="10134295" y="0"/>
+            <a:ext cx="2057400" cy="256032"/>
+          </a:xfrm>
+          <a:prstGeom prst="rect">
+            <a:avLst/>
+          </a:prstGeom>
+          <a:solidFill>
+            <a:srgbClr val="B45309"/>
+          </a:solidFill>
+          <a:ln w="12700">
+            <a:solidFill>
+              <a:srgbClr val="B45309">
+                <a:alpha val="0"/>
+              </a:srgbClr>
+            </a:solidFill>
+            <a:prstDash val="solid"/>
+          </a:ln>
+        </p:spPr>
+      </p:sp>
+      <p:sp>
+        <p:nvSpPr>
+          <p:cNvPr id="3" name="Shape 1"/>
+          <p:cNvSpPr/>
+          <p:nvPr/>
+        </p:nvSpPr>
+        <p:spPr>
+          <a:xfrm>
+            <a:off x="11048695" y="256032"/>
+            <a:ext cx="1143000" cy="73152"/>
+          </a:xfrm>
+          <a:prstGeom prst="rect">
+            <a:avLst/>
+          </a:prstGeom>
+          <a:solidFill>
+            <a:srgbClr val="FCD34D"/>
+          </a:solidFill>
+          <a:ln w="12700">
+            <a:solidFill>
+              <a:srgbClr val="FCD34D">
+                <a:alpha val="0"/>
+              </a:srgbClr>
+            </a:solidFill>
+            <a:prstDash val="solid"/>
+          </a:ln>
+        </p:spPr>
+      </p:sp>
+      <p:sp>
+        <p:nvSpPr>
+          <p:cNvPr id="4" name="Shape 2"/>
+          <p:cNvSpPr/>
+          <p:nvPr/>
+        </p:nvSpPr>
+        <p:spPr>
+          <a:xfrm>
+            <a:off x="731520" y="1207008"/>
+            <a:ext cx="1325880" cy="54864"/>
+          </a:xfrm>
+          <a:prstGeom prst="rect">
+            <a:avLst/>
+          </a:prstGeom>
+          <a:solidFill>
+            <a:srgbClr val="B45309"/>
+          </a:solidFill>
+          <a:ln w="12700">
+            <a:solidFill>
+              <a:srgbClr val="B45309">
+                <a:alpha val="0"/>
+              </a:srgbClr>
+            </a:solidFill>
+            <a:prstDash val="solid"/>
+          </a:ln>
+        </p:spPr>
+      </p:sp>
+      <p:sp>
+        <p:nvSpPr>
+          <p:cNvPr id="5" name="Shape 3"/>
+          <p:cNvSpPr/>
+          <p:nvPr/>
+        </p:nvSpPr>
+        <p:spPr>
+          <a:xfrm>
+            <a:off x="914400" y="1463040"/>
+            <a:ext cx="10241280" cy="73152"/>
+          </a:xfrm>
+          <a:prstGeom prst="rect">
+            <a:avLst/>
+          </a:prstGeom>
+          <a:solidFill>
+            <a:srgbClr val="B45309"/>
+          </a:solidFill>
+          <a:ln w="12700">
+            <a:solidFill>
+              <a:srgbClr val="B45309">
+                <a:alpha val="0"/>
+              </a:srgbClr>
+            </a:solidFill>
+            <a:prstDash val="solid"/>
+          </a:ln>
+        </p:spPr>
+      </p:sp>
+      <p:sp>
+        <p:nvSpPr>
+          <p:cNvPr id="6" name="Text 4"/>
+          <p:cNvSpPr txBox="1"/>
+          <p:nvPr/>
+        </p:nvSpPr>
+        <p:spPr>
+          <a:xfrm>
+            <a:off x="731520" y="457200"/>
+            <a:ext cx="10698480" cy="731520"/>
+          </a:xfrm>
+          <a:prstGeom prst="rect">
+            <a:avLst/>
+          </a:prstGeom>
+          <a:noFill/>
+          <a:ln/>
+        </p:spPr>
+        <p:txBody>
+          <a:bodyPr wrap="square" lIns="0" tIns="0" rIns="0" bIns="0" rtlCol="0" anchor="ctr"/>
+          <a:lstStyle/>
+          <a:p>
+            <a:pPr algn="ctr" indent="0" marL="0">
+              <a:lnSpc>
+                <a:spcPct val="120000"/>
+              </a:lnSpc>
+              <a:buNone/>
+            </a:pPr>
+            <a:r>
+              <a:rPr lang="en-US" sz="3400" b="1" dirty="0">
+                <a:solidFill>
+                  <a:srgbClr val="1F2937"/>
+                </a:solidFill>
+                <a:latin typeface="Pretendard" pitchFamily="34" charset="0"/>
+                <a:ea typeface="Pretendard" pitchFamily="34" charset="-122"/>
+                <a:cs typeface="Pretendard" pitchFamily="34" charset="-120"/>
+              </a:rPr>
+              <a:t>Decoration Pattern Catalog</a:t>
+            </a:r>
+            <a:endParaRPr lang="en-US" sz="3400" dirty="0"/>
+          </a:p>
+        </p:txBody>
+      </p:sp>
+      <p:sp>
+        <p:nvSpPr>
+          <p:cNvPr id="7" name="Text 5"/>
+          <p:cNvSpPr txBox="1"/>
+          <p:nvPr/>
+        </p:nvSpPr>
+        <p:spPr>
+          <a:xfrm>
+            <a:off x="987552" y="1572768"/>
+            <a:ext cx="10094976" cy="4261104"/>
+          </a:xfrm>
+          <a:prstGeom prst="rect">
+            <a:avLst/>
+          </a:prstGeom>
+          <a:noFill/>
+          <a:ln/>
+        </p:spPr>
+        <p:txBody>
+          <a:bodyPr wrap="square" lIns="0" tIns="25400" rIns="25400" bIns="0" rtlCol="0" anchor="t"/>
+          <a:lstStyle/>
+          <a:p>
+            <a:pPr algn="l" indent="0" marL="0">
+              <a:lnSpc>
+                <a:spcPct val="120000"/>
+              </a:lnSpc>
+              <a:buNone/>
+            </a:pPr>
+            <a:r>
+              <a:rPr lang="en-US" sz="2200" b="1" dirty="0">
+                <a:solidFill>
+                  <a:srgbClr val="B45309"/>
+                </a:solidFill>
+                <a:latin typeface="Pretendard" pitchFamily="34" charset="0"/>
+                <a:ea typeface="Pretendard" pitchFamily="34" charset="-122"/>
+                <a:cs typeface="Pretendard" pitchFamily="34" charset="-120"/>
+              </a:rPr>
+              <a:t>- Surfaces</a:t>
+            </a:r>
+            <a:pPr algn="l" indent="0" marL="0">
+              <a:lnSpc>
+                <a:spcPct val="120000"/>
+              </a:lnSpc>
+              <a:buNone/>
+            </a:pPr>
+            <a:r>
+              <a:rPr lang="en-US" sz="2200" dirty="0">
+                <a:solidFill>
+                  <a:srgbClr val="1F2937"/>
+                </a:solidFill>
+                <a:latin typeface="Pretendard" pitchFamily="34" charset="0"/>
+                <a:ea typeface="Pretendard" pitchFamily="34" charset="-122"/>
+                <a:cs typeface="Pretendard" pitchFamily="34" charset="-120"/>
+              </a:rPr>
+              <a:t>  rounded-card, two-corner-card, flag-drop, ticket-panel, notched-panel, circle-vine.</a:t>
+            </a:r>
+            <a:endParaRPr lang="en-US" sz="2200" dirty="0"/>
+          </a:p>
+          <a:p>
+            <a:pPr algn="l" indent="0" marL="0">
+              <a:lnSpc>
+                <a:spcPct val="120000"/>
+              </a:lnSpc>
+              <a:buNone/>
+            </a:pPr>
+            <a:r>
+              <a:rPr lang="en-US" sz="2200" b="1" dirty="0">
+                <a:solidFill>
+                  <a:srgbClr val="B45309"/>
+                </a:solidFill>
+                <a:latin typeface="Pretendard" pitchFamily="34" charset="0"/>
+                <a:ea typeface="Pretendard" pitchFamily="34" charset="-122"/>
+                <a:cs typeface="Pretendard" pitchFamily="34" charset="-120"/>
+              </a:rPr>
+              <a:t>- Layouts</a:t>
+            </a:r>
+            <a:endParaRPr lang="en-US" sz="2200" dirty="0"/>
+          </a:p>
+          <a:p>
+            <a:pPr algn="l" indent="0" marL="0">
+              <a:lnSpc>
+                <a:spcPct val="120000"/>
+              </a:lnSpc>
+              <a:buNone/>
+            </a:pPr>
+            <a:r>
+              <a:rPr lang="en-US" sz="2200" dirty="0">
+                <a:solidFill>
+                  <a:srgbClr val="1F2937"/>
+                </a:solidFill>
+                <a:latin typeface="Pretendard" pitchFamily="34" charset="0"/>
+                <a:ea typeface="Pretendard" pitchFamily="34" charset="-122"/>
+                <a:cs typeface="Pretendard" pitchFamily="34" charset="-120"/>
+              </a:rPr>
+              <a:t>  toc-strips, two-column-compare, three-card-grid, six-tile-grid, timeline-rail, pipeline-chain.</a:t>
+            </a:r>
+            <a:endParaRPr lang="en-US" sz="2200" dirty="0"/>
+          </a:p>
+          <a:p>
+            <a:pPr algn="l" indent="0" marL="0">
+              <a:lnSpc>
+                <a:spcPct val="120000"/>
+              </a:lnSpc>
+              <a:buNone/>
+            </a:pPr>
+            <a:r>
+              <a:rPr lang="en-US" sz="2200" b="1" dirty="0">
+                <a:solidFill>
+                  <a:srgbClr val="B45309"/>
+                </a:solidFill>
+                <a:latin typeface="Pretendard" pitchFamily="34" charset="0"/>
+                <a:ea typeface="Pretendard" pitchFamily="34" charset="-122"/>
+                <a:cs typeface="Pretendard" pitchFamily="34" charset="-120"/>
+              </a:rPr>
+              <a:t>- Evidence</a:t>
+            </a:r>
+            <a:endParaRPr lang="en-US" sz="2200" dirty="0"/>
+          </a:p>
+          <a:p>
+            <a:pPr algn="l" indent="0" marL="0">
+              <a:lnSpc>
+                <a:spcPct val="120000"/>
+              </a:lnSpc>
+              <a:buNone/>
+            </a:pPr>
+            <a:r>
+              <a:rPr lang="en-US" sz="2200" dirty="0">
+                <a:solidFill>
+                  <a:srgbClr val="1F2937"/>
+                </a:solidFill>
+                <a:latin typeface="Pretendard" pitchFamily="34" charset="0"/>
+                <a:ea typeface="Pretendard" pitchFamily="34" charset="-122"/>
+                <a:cs typeface="Pretendard" pitchFamily="34" charset="-120"/>
+              </a:rPr>
+              <a:t>  chart-table-pair, metric-proof, arc-ring-proof, gauge-proof, connected-strip, mixed-object-pack.</a:t>
+            </a:r>
+            <a:endParaRPr lang="en-US" sz="2200" dirty="0"/>
+          </a:p>
+          <a:p>
+            <a:pPr algn="l" indent="0" marL="0">
+              <a:lnSpc>
+                <a:spcPct val="120000"/>
+              </a:lnSpc>
+              <a:buNone/>
+            </a:pPr>
+            <a:r>
+              <a:rPr lang="en-US" sz="2200" b="1" dirty="0">
+                <a:solidFill>
+                  <a:srgbClr val="B45309"/>
+                </a:solidFill>
+                <a:latin typeface="Pretendard" pitchFamily="34" charset="0"/>
+                <a:ea typeface="Pretendard" pitchFamily="34" charset="-122"/>
+                <a:cs typeface="Pretendard" pitchFamily="34" charset="-120"/>
+              </a:rPr>
+              <a:t>- Connectors</a:t>
+            </a:r>
+            <a:endParaRPr lang="en-US" sz="2200" dirty="0"/>
+          </a:p>
+          <a:p>
+            <a:pPr algn="l" indent="0" marL="0">
+              <a:lnSpc>
+                <a:spcPct val="120000"/>
+              </a:lnSpc>
+              <a:buNone/>
+            </a:pPr>
+            <a:r>
+              <a:rPr lang="en-US" sz="2200" dirty="0">
+                <a:solidFill>
+                  <a:srgbClr val="1F2937"/>
+                </a:solidFill>
+                <a:latin typeface="Pretendard" pitchFamily="34" charset="0"/>
+                <a:ea typeface="Pretendard" pitchFamily="34" charset="-122"/>
+                <a:cs typeface="Pretendard" pitchFamily="34" charset="-120"/>
+              </a:rPr>
+              <a:t>  straight-arrow, elbow-arrow, boundary-attach, overlap-joint, parallel-flow, contrast-flow.</a:t>
+            </a:r>
+            <a:endParaRPr lang="en-US" sz="2200" dirty="0"/>
+          </a:p>
+        </p:txBody>
+      </p:sp>
+    </p:spTree>
+  </p:cSld>
+  <p:clrMapOvr>
+    <a:masterClrMapping/>
+  </p:clrMapOvr>
+</p:sld>
+</file>
+
+<file path=ppt/slides/slide12.xml><?xml version="1.0" encoding="utf-8"?>
+<p:sld xmlns:a="http://schemas.openxmlformats.org/drawingml/2006/main" xmlns:r="http://schemas.openxmlformats.org/officeDocument/2006/relationships" xmlns:p="http://schemas.openxmlformats.org/presentationml/2006/main">
+  <p:cSld name="Slide 12">
+    <p:bg>
+      <p:bgPr>
+        <a:solidFill>
+          <a:srgbClr val="F7F3EF"/>
+        </a:solidFill>
+      </p:bgPr>
+    </p:bg>
+    <p:spTree>
+      <p:nvGrpSpPr>
+        <p:cNvPr id="1" name=""/>
+        <p:cNvGrpSpPr/>
+        <p:nvPr/>
+      </p:nvGrpSpPr>
+      <p:grpSpPr>
+        <a:xfrm>
+          <a:off x="0" y="0"/>
+          <a:ext cx="0" cy="0"/>
+          <a:chOff x="0" y="0"/>
+          <a:chExt cx="0" cy="0"/>
+        </a:xfrm>
+      </p:grpSpPr>
+      <p:sp>
+        <p:nvSpPr>
+          <p:cNvPr id="2" name="Shape 0"/>
+          <p:cNvSpPr/>
+          <p:nvPr/>
+        </p:nvSpPr>
+        <p:spPr>
+          <a:xfrm>
+            <a:off x="10134295" y="0"/>
+            <a:ext cx="2057400" cy="256032"/>
+          </a:xfrm>
+          <a:prstGeom prst="rect">
+            <a:avLst/>
+          </a:prstGeom>
+          <a:solidFill>
+            <a:srgbClr val="B45309"/>
+          </a:solidFill>
+          <a:ln w="12700">
+            <a:solidFill>
+              <a:srgbClr val="B45309">
+                <a:alpha val="0"/>
+              </a:srgbClr>
+            </a:solidFill>
+            <a:prstDash val="solid"/>
+          </a:ln>
+        </p:spPr>
+      </p:sp>
+      <p:sp>
+        <p:nvSpPr>
+          <p:cNvPr id="3" name="Shape 1"/>
+          <p:cNvSpPr/>
+          <p:nvPr/>
+        </p:nvSpPr>
+        <p:spPr>
+          <a:xfrm>
+            <a:off x="11048695" y="256032"/>
+            <a:ext cx="1143000" cy="73152"/>
+          </a:xfrm>
+          <a:prstGeom prst="rect">
+            <a:avLst/>
+          </a:prstGeom>
+          <a:solidFill>
+            <a:srgbClr val="FCD34D"/>
+          </a:solidFill>
+          <a:ln w="12700">
+            <a:solidFill>
+              <a:srgbClr val="FCD34D">
+                <a:alpha val="0"/>
+              </a:srgbClr>
+            </a:solidFill>
+            <a:prstDash val="solid"/>
+          </a:ln>
+        </p:spPr>
+      </p:sp>
+      <p:sp>
+        <p:nvSpPr>
+          <p:cNvPr id="4" name="Shape 2"/>
+          <p:cNvSpPr/>
+          <p:nvPr/>
+        </p:nvSpPr>
+        <p:spPr>
+          <a:xfrm>
+            <a:off x="731520" y="1207008"/>
+            <a:ext cx="1325880" cy="54864"/>
+          </a:xfrm>
+          <a:prstGeom prst="rect">
+            <a:avLst/>
+          </a:prstGeom>
+          <a:solidFill>
+            <a:srgbClr val="B45309"/>
+          </a:solidFill>
+          <a:ln w="12700">
+            <a:solidFill>
+              <a:srgbClr val="B45309">
+                <a:alpha val="0"/>
+              </a:srgbClr>
+            </a:solidFill>
+            <a:prstDash val="solid"/>
+          </a:ln>
+        </p:spPr>
+      </p:sp>
+      <p:sp>
+        <p:nvSpPr>
+          <p:cNvPr id="5" name="Shape 3"/>
+          <p:cNvSpPr/>
+          <p:nvPr/>
+        </p:nvSpPr>
+        <p:spPr>
+          <a:xfrm>
+            <a:off x="822960" y="1554480"/>
+            <a:ext cx="4937760" cy="73152"/>
+          </a:xfrm>
+          <a:prstGeom prst="rect">
+            <a:avLst/>
+          </a:prstGeom>
+          <a:solidFill>
+            <a:srgbClr val="B45309"/>
+          </a:solidFill>
+          <a:ln w="12700">
+            <a:solidFill>
+              <a:srgbClr val="B45309">
+                <a:alpha val="0"/>
+              </a:srgbClr>
+            </a:solidFill>
+            <a:prstDash val="solid"/>
+          </a:ln>
+        </p:spPr>
+      </p:sp>
+      <p:sp>
+        <p:nvSpPr>
+          <p:cNvPr id="6" name="Shape 4"/>
+          <p:cNvSpPr/>
+          <p:nvPr/>
+        </p:nvSpPr>
+        <p:spPr>
+          <a:xfrm>
+            <a:off x="6400800" y="1554480"/>
+            <a:ext cx="4937760" cy="73152"/>
+          </a:xfrm>
+          <a:prstGeom prst="rect">
+            <a:avLst/>
+          </a:prstGeom>
+          <a:solidFill>
+            <a:srgbClr val="B45309"/>
+          </a:solidFill>
+          <a:ln w="12700">
+            <a:solidFill>
+              <a:srgbClr val="B45309">
+                <a:alpha val="0"/>
+              </a:srgbClr>
+            </a:solidFill>
+            <a:prstDash val="solid"/>
+          </a:ln>
+        </p:spPr>
+      </p:sp>
+      <p:sp>
+        <p:nvSpPr>
+          <p:cNvPr id="7" name="Text 5"/>
+          <p:cNvSpPr txBox="1"/>
+          <p:nvPr/>
+        </p:nvSpPr>
+        <p:spPr>
+          <a:xfrm>
+            <a:off x="731520" y="457200"/>
+            <a:ext cx="10698480" cy="731520"/>
+          </a:xfrm>
+          <a:prstGeom prst="rect">
+            <a:avLst/>
+          </a:prstGeom>
+          <a:noFill/>
+          <a:ln/>
+        </p:spPr>
+        <p:txBody>
+          <a:bodyPr wrap="square" lIns="0" tIns="0" rIns="0" bIns="0" rtlCol="0" anchor="ctr"/>
+          <a:lstStyle/>
+          <a:p>
+            <a:pPr algn="ctr" indent="0" marL="0">
+              <a:lnSpc>
+                <a:spcPct val="120000"/>
+              </a:lnSpc>
+              <a:buNone/>
+            </a:pPr>
+            <a:r>
+              <a:rPr lang="en-US" sz="3400" b="1" dirty="0">
+                <a:solidFill>
+                  <a:srgbClr val="1F2937"/>
+                </a:solidFill>
+                <a:latin typeface="Pretendard" pitchFamily="34" charset="0"/>
+                <a:ea typeface="Pretendard" pitchFamily="34" charset="-122"/>
+                <a:cs typeface="Pretendard" pitchFamily="34" charset="-120"/>
+              </a:rPr>
+              <a:t>Decoration Pattern Catalog (Cont. 2/2)</a:t>
+            </a:r>
+            <a:endParaRPr lang="en-US" sz="3400" dirty="0"/>
+          </a:p>
+        </p:txBody>
+      </p:sp>
+      <p:sp>
+        <p:nvSpPr>
+          <p:cNvPr id="8" name="Text 6"/>
+          <p:cNvSpPr txBox="1"/>
+          <p:nvPr/>
+        </p:nvSpPr>
+        <p:spPr>
+          <a:xfrm>
+            <a:off x="896112" y="1664208"/>
+            <a:ext cx="4791456" cy="4169664"/>
+          </a:xfrm>
+          <a:prstGeom prst="rect">
+            <a:avLst/>
+          </a:prstGeom>
+          <a:noFill/>
+          <a:ln/>
+        </p:spPr>
+        <p:txBody>
+          <a:bodyPr wrap="square" lIns="0" tIns="25400" rIns="25400" bIns="0" rtlCol="0" anchor="t"/>
+          <a:lstStyle/>
+          <a:p>
+            <a:pPr algn="l" indent="0" marL="0">
+              <a:lnSpc>
+                <a:spcPct val="120000"/>
+              </a:lnSpc>
+              <a:buNone/>
+            </a:pPr>
+            <a:r>
+              <a:rPr lang="en-US" sz="2200" b="1" dirty="0">
+                <a:solidFill>
+                  <a:srgbClr val="B45309"/>
+                </a:solidFill>
+                <a:latin typeface="Pretendard" pitchFamily="34" charset="0"/>
+                <a:ea typeface="Pretendard" pitchFamily="34" charset="-122"/>
+                <a:cs typeface="Pretendard" pitchFamily="34" charset="-120"/>
+              </a:rPr>
+              <a:t>- Icons</a:t>
+            </a:r>
+            <a:pPr algn="l" indent="0" marL="0">
+              <a:lnSpc>
+                <a:spcPct val="120000"/>
+              </a:lnSpc>
+              <a:buNone/>
+            </a:pPr>
+            <a:r>
+              <a:rPr lang="en-US" sz="2200" dirty="0">
+                <a:solidFill>
+                  <a:srgbClr val="1F2937"/>
+                </a:solidFill>
+                <a:latin typeface="Pretendard" pitchFamily="34" charset="0"/>
+                <a:ea typeface="Pretendard" pitchFamily="34" charset="-122"/>
+                <a:cs typeface="Pretendard" pitchFamily="34" charset="-120"/>
+              </a:rPr>
+              <a:t>  number-badge, mono-icon-slot, letter-disc, quiet-aside, image-safe-frame, brand-glyph.</a:t>
+            </a:r>
+            <a:endParaRPr lang="en-US" sz="2200" dirty="0"/>
+          </a:p>
+        </p:txBody>
+      </p:sp>
+      <p:sp>
+        <p:nvSpPr>
+          <p:cNvPr id="9" name="Text 7"/>
+          <p:cNvSpPr txBox="1"/>
+          <p:nvPr/>
+        </p:nvSpPr>
+        <p:spPr>
+          <a:xfrm>
+            <a:off x="6473952" y="1664208"/>
+            <a:ext cx="4791456" cy="4169664"/>
+          </a:xfrm>
+          <a:prstGeom prst="rect">
+            <a:avLst/>
+          </a:prstGeom>
+          <a:noFill/>
+          <a:ln/>
+        </p:spPr>
+        <p:txBody>
+          <a:bodyPr wrap="square" lIns="0" tIns="25400" rIns="25400" bIns="0" rtlCol="0" anchor="t"/>
+          <a:lstStyle/>
+          <a:p>
+            <a:pPr algn="l" indent="0" marL="0">
+              <a:lnSpc>
+                <a:spcPct val="120000"/>
+              </a:lnSpc>
+              <a:buNone/>
+            </a:pPr>
+            <a:r>
+              <a:rPr lang="en-US" sz="2200" b="1" dirty="0">
+                <a:solidFill>
+                  <a:srgbClr val="B45309"/>
+                </a:solidFill>
+                <a:latin typeface="Pretendard" pitchFamily="34" charset="0"/>
+                <a:ea typeface="Pretendard" pitchFamily="34" charset="-122"/>
+                <a:cs typeface="Pretendard" pitchFamily="34" charset="-120"/>
+              </a:rPr>
+              <a:t>- Page grammar</a:t>
+            </a:r>
+            <a:pPr algn="l" indent="0" marL="0">
+              <a:lnSpc>
+                <a:spcPct val="120000"/>
+              </a:lnSpc>
+              <a:buNone/>
+            </a:pPr>
+            <a:r>
+              <a:rPr lang="en-US" sz="2200" dirty="0">
+                <a:solidFill>
+                  <a:srgbClr val="1F2937"/>
+                </a:solidFill>
+                <a:latin typeface="Pretendard" pitchFamily="34" charset="0"/>
+                <a:ea typeface="Pretendard" pitchFamily="34" charset="-122"/>
+                <a:cs typeface="Pretendard" pitchFamily="34" charset="-120"/>
+              </a:rPr>
+              <a:t>  magazine-rail, grid-baseline, glass-surface, newmorphic-panel, data-rail, minimal-rule.</a:t>
+            </a:r>
+            <a:endParaRPr lang="en-US" sz="2200" dirty="0"/>
+          </a:p>
+        </p:txBody>
+      </p:sp>
+    </p:spTree>
+  </p:cSld>
+  <p:clrMapOvr>
+    <a:masterClrMapping/>
+  </p:clrMapOvr>
+</p:sld>
+</file>
+
+<file path=ppt/slides/slide13.xml><?xml version="1.0" encoding="utf-8"?>
+<p:sld xmlns:a="http://schemas.openxmlformats.org/drawingml/2006/main" xmlns:r="http://schemas.openxmlformats.org/officeDocument/2006/relationships" xmlns:p="http://schemas.openxmlformats.org/presentationml/2006/main">
+  <p:cSld name="Slide 13">
+    <p:bg>
+      <p:bgPr>
+        <a:solidFill>
+          <a:srgbClr val="F7F3EF"/>
+        </a:solidFill>
+      </p:bgPr>
+    </p:bg>
+    <p:spTree>
+      <p:nvGrpSpPr>
+        <p:cNvPr id="1" name=""/>
+        <p:cNvGrpSpPr/>
+        <p:nvPr/>
+      </p:nvGrpSpPr>
+      <p:grpSpPr>
+        <a:xfrm>
+          <a:off x="0" y="0"/>
+          <a:ext cx="0" cy="0"/>
+          <a:chOff x="0" y="0"/>
+          <a:chExt cx="0" cy="0"/>
+        </a:xfrm>
+      </p:grpSpPr>
+      <p:sp>
+        <p:nvSpPr>
+          <p:cNvPr id="2" name="Shape 0"/>
+          <p:cNvSpPr/>
+          <p:nvPr/>
+        </p:nvSpPr>
+        <p:spPr>
+          <a:xfrm>
+            <a:off x="10134295" y="0"/>
+            <a:ext cx="2057400" cy="256032"/>
+          </a:xfrm>
+          <a:prstGeom prst="rect">
+            <a:avLst/>
+          </a:prstGeom>
+          <a:solidFill>
+            <a:srgbClr val="B45309"/>
+          </a:solidFill>
+          <a:ln w="12700">
+            <a:solidFill>
+              <a:srgbClr val="B45309">
+                <a:alpha val="0"/>
+              </a:srgbClr>
+            </a:solidFill>
+            <a:prstDash val="solid"/>
+          </a:ln>
+        </p:spPr>
+      </p:sp>
+      <p:sp>
+        <p:nvSpPr>
+          <p:cNvPr id="3" name="Shape 1"/>
+          <p:cNvSpPr/>
+          <p:nvPr/>
+        </p:nvSpPr>
+        <p:spPr>
+          <a:xfrm>
+            <a:off x="11048695" y="256032"/>
+            <a:ext cx="1143000" cy="73152"/>
+          </a:xfrm>
+          <a:prstGeom prst="rect">
+            <a:avLst/>
+          </a:prstGeom>
+          <a:solidFill>
+            <a:srgbClr val="FCD34D"/>
+          </a:solidFill>
+          <a:ln w="12700">
+            <a:solidFill>
+              <a:srgbClr val="FCD34D">
+                <a:alpha val="0"/>
+              </a:srgbClr>
+            </a:solidFill>
+            <a:prstDash val="solid"/>
+          </a:ln>
+        </p:spPr>
+      </p:sp>
+      <p:sp>
+        <p:nvSpPr>
+          <p:cNvPr id="4" name="Shape 2"/>
+          <p:cNvSpPr/>
+          <p:nvPr/>
+        </p:nvSpPr>
+        <p:spPr>
+          <a:xfrm>
+            <a:off x="731520" y="1207008"/>
+            <a:ext cx="1325880" cy="54864"/>
+          </a:xfrm>
+          <a:prstGeom prst="rect">
+            <a:avLst/>
+          </a:prstGeom>
+          <a:solidFill>
+            <a:srgbClr val="B45309"/>
+          </a:solidFill>
+          <a:ln w="12700">
+            <a:solidFill>
+              <a:srgbClr val="B45309">
+                <a:alpha val="0"/>
+              </a:srgbClr>
+            </a:solidFill>
+            <a:prstDash val="solid"/>
+          </a:ln>
+        </p:spPr>
+      </p:sp>
       <p:pic>
         <p:nvPicPr>
           <p:cNvPr id="5" name="Image 0" descr="preencoded.png">    </p:cNvPr>
@@ -3222,7 +5926,7 @@
       </p:sp>
       <p:graphicFrame>
         <p:nvGraphicFramePr>
-          <p:cNvPr id="11" name="Table 0"/>
+          <p:cNvPr id="14" name="Table 0"/>
           <p:cNvGraphicFramePr>
             <a:graphicFrameLocks noGrp="1"/>
           </p:cNvGraphicFramePr>
@@ -4283,9 +6987,9 @@
 </p:sld>
 </file>
 
-<file path=ppt/slides/slide11.xml><?xml version="1.0" encoding="utf-8"?>
+<file path=ppt/slides/slide14.xml><?xml version="1.0" encoding="utf-8"?>
 <p:sld xmlns:a="http://schemas.openxmlformats.org/drawingml/2006/main" xmlns:r="http://schemas.openxmlformats.org/officeDocument/2006/relationships" xmlns:p="http://schemas.openxmlformats.org/presentationml/2006/main">
-  <p:cSld name="Slide 11">
+  <p:cSld name="Slide 14">
     <p:bg>
       <p:bgPr>
         <a:solidFill>
@@ -4686,9 +7390,9 @@
 </p:sld>
 </file>
 
-<file path=ppt/slides/slide12.xml><?xml version="1.0" encoding="utf-8"?>
+<file path=ppt/slides/slide15.xml><?xml version="1.0" encoding="utf-8"?>
 <p:sld xmlns:a="http://schemas.openxmlformats.org/drawingml/2006/main" xmlns:r="http://schemas.openxmlformats.org/officeDocument/2006/relationships" xmlns:p="http://schemas.openxmlformats.org/presentationml/2006/main">
-  <p:cSld name="Slide 12">
+  <p:cSld name="Slide 15">
     <p:bg>
       <p:bgPr>
         <a:solidFill>
@@ -4901,7 +7605,7 @@
       </p:sp>
       <p:graphicFrame>
         <p:nvGraphicFramePr>
-          <p:cNvPr id="13" name="Table 0"/>
+          <p:cNvPr id="16" name="Table 0"/>
           <p:cNvGraphicFramePr>
             <a:graphicFrameLocks noGrp="1"/>
           </p:cNvGraphicFramePr>
@@ -5750,9 +8454,9 @@
 </p:sld>
 </file>
 
-<file path=ppt/slides/slide13.xml><?xml version="1.0" encoding="utf-8"?>
+<file path=ppt/slides/slide16.xml><?xml version="1.0" encoding="utf-8"?>
 <p:sld xmlns:a="http://schemas.openxmlformats.org/drawingml/2006/main" xmlns:r="http://schemas.openxmlformats.org/officeDocument/2006/relationships" xmlns:p="http://schemas.openxmlformats.org/presentationml/2006/main">
-  <p:cSld name="Slide 13">
+  <p:cSld name="Slide 16">
     <p:bg>
       <p:bgPr>
         <a:solidFill>
@@ -6674,9 +9378,9 @@
 </p:sld>
 </file>
 
-<file path=ppt/slides/slide14.xml><?xml version="1.0" encoding="utf-8"?>
+<file path=ppt/slides/slide17.xml><?xml version="1.0" encoding="utf-8"?>
 <p:sld xmlns:a="http://schemas.openxmlformats.org/drawingml/2006/main" xmlns:r="http://schemas.openxmlformats.org/officeDocument/2006/relationships" xmlns:p="http://schemas.openxmlformats.org/presentationml/2006/main">
-  <p:cSld name="Slide 14">
+  <p:cSld name="Slide 17">
     <p:bg>
       <p:bgPr>
         <a:solidFill>
@@ -7535,9 +10239,9 @@
 </p:sld>
 </file>
 
-<file path=ppt/slides/slide15.xml><?xml version="1.0" encoding="utf-8"?>
+<file path=ppt/slides/slide18.xml><?xml version="1.0" encoding="utf-8"?>
 <p:sld xmlns:a="http://schemas.openxmlformats.org/drawingml/2006/main" xmlns:r="http://schemas.openxmlformats.org/officeDocument/2006/relationships" xmlns:p="http://schemas.openxmlformats.org/presentationml/2006/main">
-  <p:cSld name="Slide 15">
+  <p:cSld name="Slide 18">
     <p:bg>
       <p:bgPr>
         <a:solidFill>
@@ -7856,9 +10560,9 @@
 </p:sld>
 </file>
 
-<file path=ppt/slides/slide16.xml><?xml version="1.0" encoding="utf-8"?>
+<file path=ppt/slides/slide19.xml><?xml version="1.0" encoding="utf-8"?>
 <p:sld xmlns:a="http://schemas.openxmlformats.org/drawingml/2006/main" xmlns:r="http://schemas.openxmlformats.org/officeDocument/2006/relationships" xmlns:p="http://schemas.openxmlformats.org/presentationml/2006/main">
-  <p:cSld name="Slide 16">
+  <p:cSld name="Slide 19">
     <p:bg>
       <p:bgPr>
         <a:solidFill>
@@ -8183,9 +10887,1213 @@
 </p:sld>
 </file>
 
-<file path=ppt/slides/slide17.xml><?xml version="1.0" encoding="utf-8"?>
+<file path=ppt/slides/slide2.xml><?xml version="1.0" encoding="utf-8"?>
 <p:sld xmlns:a="http://schemas.openxmlformats.org/drawingml/2006/main" xmlns:r="http://schemas.openxmlformats.org/officeDocument/2006/relationships" xmlns:p="http://schemas.openxmlformats.org/presentationml/2006/main">
-  <p:cSld name="Slide 17">
+  <p:cSld name="Slide 2">
+    <p:bg>
+      <p:bgPr>
+        <a:solidFill>
+          <a:srgbClr val="F7F3EF"/>
+        </a:solidFill>
+      </p:bgPr>
+    </p:bg>
+    <p:spTree>
+      <p:nvGrpSpPr>
+        <p:cNvPr id="1" name=""/>
+        <p:cNvGrpSpPr/>
+        <p:nvPr/>
+      </p:nvGrpSpPr>
+      <p:grpSpPr>
+        <a:xfrm>
+          <a:off x="0" y="0"/>
+          <a:ext cx="0" cy="0"/>
+          <a:chOff x="0" y="0"/>
+          <a:chExt cx="0" cy="0"/>
+        </a:xfrm>
+      </p:grpSpPr>
+      <p:sp>
+        <p:nvSpPr>
+          <p:cNvPr id="2" name="Shape 0"/>
+          <p:cNvSpPr/>
+          <p:nvPr/>
+        </p:nvSpPr>
+        <p:spPr>
+          <a:xfrm>
+            <a:off x="10134295" y="0"/>
+            <a:ext cx="2057400" cy="256032"/>
+          </a:xfrm>
+          <a:prstGeom prst="rect">
+            <a:avLst/>
+          </a:prstGeom>
+          <a:solidFill>
+            <a:srgbClr val="B45309"/>
+          </a:solidFill>
+          <a:ln w="12700">
+            <a:solidFill>
+              <a:srgbClr val="B45309">
+                <a:alpha val="0"/>
+              </a:srgbClr>
+            </a:solidFill>
+            <a:prstDash val="solid"/>
+          </a:ln>
+        </p:spPr>
+      </p:sp>
+      <p:sp>
+        <p:nvSpPr>
+          <p:cNvPr id="3" name="Shape 1"/>
+          <p:cNvSpPr/>
+          <p:nvPr/>
+        </p:nvSpPr>
+        <p:spPr>
+          <a:xfrm>
+            <a:off x="11048695" y="256032"/>
+            <a:ext cx="1143000" cy="73152"/>
+          </a:xfrm>
+          <a:prstGeom prst="rect">
+            <a:avLst/>
+          </a:prstGeom>
+          <a:solidFill>
+            <a:srgbClr val="FCD34D"/>
+          </a:solidFill>
+          <a:ln w="12700">
+            <a:solidFill>
+              <a:srgbClr val="FCD34D">
+                <a:alpha val="0"/>
+              </a:srgbClr>
+            </a:solidFill>
+            <a:prstDash val="solid"/>
+          </a:ln>
+        </p:spPr>
+      </p:sp>
+      <p:sp>
+        <p:nvSpPr>
+          <p:cNvPr id="4" name="Shape 2"/>
+          <p:cNvSpPr/>
+          <p:nvPr/>
+        </p:nvSpPr>
+        <p:spPr>
+          <a:xfrm>
+            <a:off x="731520" y="1207008"/>
+            <a:ext cx="1325880" cy="54864"/>
+          </a:xfrm>
+          <a:prstGeom prst="rect">
+            <a:avLst/>
+          </a:prstGeom>
+          <a:solidFill>
+            <a:srgbClr val="B45309"/>
+          </a:solidFill>
+          <a:ln w="12700">
+            <a:solidFill>
+              <a:srgbClr val="B45309">
+                <a:alpha val="0"/>
+              </a:srgbClr>
+            </a:solidFill>
+            <a:prstDash val="solid"/>
+          </a:ln>
+        </p:spPr>
+      </p:sp>
+      <p:sp>
+        <p:nvSpPr>
+          <p:cNvPr id="5" name="Shape 3"/>
+          <p:cNvSpPr/>
+          <p:nvPr/>
+        </p:nvSpPr>
+        <p:spPr>
+          <a:xfrm>
+            <a:off x="822960" y="1188720"/>
+            <a:ext cx="10515600" cy="45720"/>
+          </a:xfrm>
+          <a:prstGeom prst="rect">
+            <a:avLst/>
+          </a:prstGeom>
+          <a:solidFill>
+            <a:srgbClr val="B45309"/>
+          </a:solidFill>
+          <a:ln w="12700">
+            <a:solidFill>
+              <a:srgbClr val="B45309">
+                <a:alpha val="0"/>
+              </a:srgbClr>
+            </a:solidFill>
+            <a:prstDash val="solid"/>
+          </a:ln>
+        </p:spPr>
+      </p:sp>
+      <p:sp>
+        <p:nvSpPr>
+          <p:cNvPr id="6" name="Shape 4"/>
+          <p:cNvSpPr/>
+          <p:nvPr/>
+        </p:nvSpPr>
+        <p:spPr>
+          <a:xfrm>
+            <a:off x="822960" y="6382512"/>
+            <a:ext cx="2011680" cy="45720"/>
+          </a:xfrm>
+          <a:prstGeom prst="rect">
+            <a:avLst/>
+          </a:prstGeom>
+          <a:solidFill>
+            <a:srgbClr val="FCD34D"/>
+          </a:solidFill>
+          <a:ln w="12700">
+            <a:solidFill>
+              <a:srgbClr val="FCD34D">
+                <a:alpha val="0"/>
+              </a:srgbClr>
+            </a:solidFill>
+            <a:prstDash val="solid"/>
+          </a:ln>
+        </p:spPr>
+      </p:sp>
+      <p:sp>
+        <p:nvSpPr>
+          <p:cNvPr id="7" name="Shape 5"/>
+          <p:cNvSpPr/>
+          <p:nvPr/>
+        </p:nvSpPr>
+        <p:spPr>
+          <a:xfrm>
+            <a:off x="6080760" y="1389888"/>
+            <a:ext cx="22860" cy="4846320"/>
+          </a:xfrm>
+          <a:prstGeom prst="rect">
+            <a:avLst/>
+          </a:prstGeom>
+          <a:solidFill>
+            <a:srgbClr val="E7D8C9">
+              <a:alpha val="90000"/>
+            </a:srgbClr>
+          </a:solidFill>
+          <a:ln w="12700">
+            <a:solidFill>
+              <a:srgbClr val="E7D8C9">
+                <a:alpha val="0"/>
+              </a:srgbClr>
+            </a:solidFill>
+            <a:prstDash val="solid"/>
+          </a:ln>
+        </p:spPr>
+      </p:sp>
+      <p:sp>
+        <p:nvSpPr>
+          <p:cNvPr id="8" name="Shape 6"/>
+          <p:cNvSpPr/>
+          <p:nvPr/>
+        </p:nvSpPr>
+        <p:spPr>
+          <a:xfrm>
+            <a:off x="822960" y="1389888"/>
+            <a:ext cx="73152" cy="566928"/>
+          </a:xfrm>
+          <a:prstGeom prst="rect">
+            <a:avLst/>
+          </a:prstGeom>
+          <a:solidFill>
+            <a:srgbClr val="B45309"/>
+          </a:solidFill>
+          <a:ln w="12700">
+            <a:solidFill>
+              <a:srgbClr val="B45309">
+                <a:alpha val="0"/>
+              </a:srgbClr>
+            </a:solidFill>
+            <a:prstDash val="solid"/>
+          </a:ln>
+        </p:spPr>
+      </p:sp>
+      <p:sp>
+        <p:nvSpPr>
+          <p:cNvPr id="9" name="Shape 7"/>
+          <p:cNvSpPr/>
+          <p:nvPr/>
+        </p:nvSpPr>
+        <p:spPr>
+          <a:xfrm>
+            <a:off x="822960" y="2103120"/>
+            <a:ext cx="73152" cy="566928"/>
+          </a:xfrm>
+          <a:prstGeom prst="rect">
+            <a:avLst/>
+          </a:prstGeom>
+          <a:solidFill>
+            <a:srgbClr val="FCD34D"/>
+          </a:solidFill>
+          <a:ln w="12700">
+            <a:solidFill>
+              <a:srgbClr val="FCD34D">
+                <a:alpha val="0"/>
+              </a:srgbClr>
+            </a:solidFill>
+            <a:prstDash val="solid"/>
+          </a:ln>
+        </p:spPr>
+      </p:sp>
+      <p:sp>
+        <p:nvSpPr>
+          <p:cNvPr id="10" name="Shape 8"/>
+          <p:cNvSpPr/>
+          <p:nvPr/>
+        </p:nvSpPr>
+        <p:spPr>
+          <a:xfrm>
+            <a:off x="822960" y="2816352"/>
+            <a:ext cx="73152" cy="566928"/>
+          </a:xfrm>
+          <a:prstGeom prst="rect">
+            <a:avLst/>
+          </a:prstGeom>
+          <a:solidFill>
+            <a:srgbClr val="B45309"/>
+          </a:solidFill>
+          <a:ln w="12700">
+            <a:solidFill>
+              <a:srgbClr val="B45309">
+                <a:alpha val="0"/>
+              </a:srgbClr>
+            </a:solidFill>
+            <a:prstDash val="solid"/>
+          </a:ln>
+        </p:spPr>
+      </p:sp>
+      <p:sp>
+        <p:nvSpPr>
+          <p:cNvPr id="11" name="Shape 9"/>
+          <p:cNvSpPr/>
+          <p:nvPr/>
+        </p:nvSpPr>
+        <p:spPr>
+          <a:xfrm>
+            <a:off x="822960" y="3529584"/>
+            <a:ext cx="73152" cy="566928"/>
+          </a:xfrm>
+          <a:prstGeom prst="rect">
+            <a:avLst/>
+          </a:prstGeom>
+          <a:solidFill>
+            <a:srgbClr val="FCD34D"/>
+          </a:solidFill>
+          <a:ln w="12700">
+            <a:solidFill>
+              <a:srgbClr val="FCD34D">
+                <a:alpha val="0"/>
+              </a:srgbClr>
+            </a:solidFill>
+            <a:prstDash val="solid"/>
+          </a:ln>
+        </p:spPr>
+      </p:sp>
+      <p:sp>
+        <p:nvSpPr>
+          <p:cNvPr id="12" name="Shape 10"/>
+          <p:cNvSpPr/>
+          <p:nvPr/>
+        </p:nvSpPr>
+        <p:spPr>
+          <a:xfrm>
+            <a:off x="822960" y="4242816"/>
+            <a:ext cx="73152" cy="566928"/>
+          </a:xfrm>
+          <a:prstGeom prst="rect">
+            <a:avLst/>
+          </a:prstGeom>
+          <a:solidFill>
+            <a:srgbClr val="B45309"/>
+          </a:solidFill>
+          <a:ln w="12700">
+            <a:solidFill>
+              <a:srgbClr val="B45309">
+                <a:alpha val="0"/>
+              </a:srgbClr>
+            </a:solidFill>
+            <a:prstDash val="solid"/>
+          </a:ln>
+        </p:spPr>
+      </p:sp>
+      <p:sp>
+        <p:nvSpPr>
+          <p:cNvPr id="13" name="Shape 11"/>
+          <p:cNvSpPr/>
+          <p:nvPr/>
+        </p:nvSpPr>
+        <p:spPr>
+          <a:xfrm>
+            <a:off x="822960" y="4956048"/>
+            <a:ext cx="73152" cy="566928"/>
+          </a:xfrm>
+          <a:prstGeom prst="rect">
+            <a:avLst/>
+          </a:prstGeom>
+          <a:solidFill>
+            <a:srgbClr val="FCD34D"/>
+          </a:solidFill>
+          <a:ln w="12700">
+            <a:solidFill>
+              <a:srgbClr val="FCD34D">
+                <a:alpha val="0"/>
+              </a:srgbClr>
+            </a:solidFill>
+            <a:prstDash val="solid"/>
+          </a:ln>
+        </p:spPr>
+      </p:sp>
+      <p:sp>
+        <p:nvSpPr>
+          <p:cNvPr id="14" name="Shape 12"/>
+          <p:cNvSpPr/>
+          <p:nvPr/>
+        </p:nvSpPr>
+        <p:spPr>
+          <a:xfrm>
+            <a:off x="822960" y="5669280"/>
+            <a:ext cx="73152" cy="566928"/>
+          </a:xfrm>
+          <a:prstGeom prst="rect">
+            <a:avLst/>
+          </a:prstGeom>
+          <a:solidFill>
+            <a:srgbClr val="B45309"/>
+          </a:solidFill>
+          <a:ln w="12700">
+            <a:solidFill>
+              <a:srgbClr val="B45309">
+                <a:alpha val="0"/>
+              </a:srgbClr>
+            </a:solidFill>
+            <a:prstDash val="solid"/>
+          </a:ln>
+        </p:spPr>
+      </p:sp>
+      <p:sp>
+        <p:nvSpPr>
+          <p:cNvPr id="15" name="Shape 13"/>
+          <p:cNvSpPr/>
+          <p:nvPr/>
+        </p:nvSpPr>
+        <p:spPr>
+          <a:xfrm>
+            <a:off x="6272784" y="1389888"/>
+            <a:ext cx="73152" cy="566928"/>
+          </a:xfrm>
+          <a:prstGeom prst="rect">
+            <a:avLst/>
+          </a:prstGeom>
+          <a:solidFill>
+            <a:srgbClr val="FCD34D"/>
+          </a:solidFill>
+          <a:ln w="12700">
+            <a:solidFill>
+              <a:srgbClr val="FCD34D">
+                <a:alpha val="0"/>
+              </a:srgbClr>
+            </a:solidFill>
+            <a:prstDash val="solid"/>
+          </a:ln>
+        </p:spPr>
+      </p:sp>
+      <p:sp>
+        <p:nvSpPr>
+          <p:cNvPr id="16" name="Shape 14"/>
+          <p:cNvSpPr/>
+          <p:nvPr/>
+        </p:nvSpPr>
+        <p:spPr>
+          <a:xfrm>
+            <a:off x="6272784" y="2103120"/>
+            <a:ext cx="73152" cy="566928"/>
+          </a:xfrm>
+          <a:prstGeom prst="rect">
+            <a:avLst/>
+          </a:prstGeom>
+          <a:solidFill>
+            <a:srgbClr val="B45309"/>
+          </a:solidFill>
+          <a:ln w="12700">
+            <a:solidFill>
+              <a:srgbClr val="B45309">
+                <a:alpha val="0"/>
+              </a:srgbClr>
+            </a:solidFill>
+            <a:prstDash val="solid"/>
+          </a:ln>
+        </p:spPr>
+      </p:sp>
+      <p:sp>
+        <p:nvSpPr>
+          <p:cNvPr id="17" name="Shape 15"/>
+          <p:cNvSpPr/>
+          <p:nvPr/>
+        </p:nvSpPr>
+        <p:spPr>
+          <a:xfrm>
+            <a:off x="6272784" y="2816352"/>
+            <a:ext cx="73152" cy="566928"/>
+          </a:xfrm>
+          <a:prstGeom prst="rect">
+            <a:avLst/>
+          </a:prstGeom>
+          <a:solidFill>
+            <a:srgbClr val="FCD34D"/>
+          </a:solidFill>
+          <a:ln w="12700">
+            <a:solidFill>
+              <a:srgbClr val="FCD34D">
+                <a:alpha val="0"/>
+              </a:srgbClr>
+            </a:solidFill>
+            <a:prstDash val="solid"/>
+          </a:ln>
+        </p:spPr>
+      </p:sp>
+      <p:sp>
+        <p:nvSpPr>
+          <p:cNvPr id="18" name="Shape 16"/>
+          <p:cNvSpPr/>
+          <p:nvPr/>
+        </p:nvSpPr>
+        <p:spPr>
+          <a:xfrm>
+            <a:off x="6272784" y="3529584"/>
+            <a:ext cx="73152" cy="566928"/>
+          </a:xfrm>
+          <a:prstGeom prst="rect">
+            <a:avLst/>
+          </a:prstGeom>
+          <a:solidFill>
+            <a:srgbClr val="B45309"/>
+          </a:solidFill>
+          <a:ln w="12700">
+            <a:solidFill>
+              <a:srgbClr val="B45309">
+                <a:alpha val="0"/>
+              </a:srgbClr>
+            </a:solidFill>
+            <a:prstDash val="solid"/>
+          </a:ln>
+        </p:spPr>
+      </p:sp>
+      <p:sp>
+        <p:nvSpPr>
+          <p:cNvPr id="19" name="Shape 17"/>
+          <p:cNvSpPr/>
+          <p:nvPr/>
+        </p:nvSpPr>
+        <p:spPr>
+          <a:xfrm>
+            <a:off x="6272784" y="4242816"/>
+            <a:ext cx="73152" cy="566928"/>
+          </a:xfrm>
+          <a:prstGeom prst="rect">
+            <a:avLst/>
+          </a:prstGeom>
+          <a:solidFill>
+            <a:srgbClr val="FCD34D"/>
+          </a:solidFill>
+          <a:ln w="12700">
+            <a:solidFill>
+              <a:srgbClr val="FCD34D">
+                <a:alpha val="0"/>
+              </a:srgbClr>
+            </a:solidFill>
+            <a:prstDash val="solid"/>
+          </a:ln>
+        </p:spPr>
+      </p:sp>
+      <p:sp>
+        <p:nvSpPr>
+          <p:cNvPr id="20" name="Shape 18"/>
+          <p:cNvSpPr/>
+          <p:nvPr/>
+        </p:nvSpPr>
+        <p:spPr>
+          <a:xfrm>
+            <a:off x="6272784" y="4956048"/>
+            <a:ext cx="73152" cy="566928"/>
+          </a:xfrm>
+          <a:prstGeom prst="rect">
+            <a:avLst/>
+          </a:prstGeom>
+          <a:solidFill>
+            <a:srgbClr val="B45309"/>
+          </a:solidFill>
+          <a:ln w="12700">
+            <a:solidFill>
+              <a:srgbClr val="B45309">
+                <a:alpha val="0"/>
+              </a:srgbClr>
+            </a:solidFill>
+            <a:prstDash val="solid"/>
+          </a:ln>
+        </p:spPr>
+      </p:sp>
+      <p:sp>
+        <p:nvSpPr>
+          <p:cNvPr id="21" name="Shape 19"/>
+          <p:cNvSpPr/>
+          <p:nvPr/>
+        </p:nvSpPr>
+        <p:spPr>
+          <a:xfrm>
+            <a:off x="6272784" y="5669280"/>
+            <a:ext cx="73152" cy="566928"/>
+          </a:xfrm>
+          <a:prstGeom prst="rect">
+            <a:avLst/>
+          </a:prstGeom>
+          <a:solidFill>
+            <a:srgbClr val="FCD34D"/>
+          </a:solidFill>
+          <a:ln w="12700">
+            <a:solidFill>
+              <a:srgbClr val="FCD34D">
+                <a:alpha val="0"/>
+              </a:srgbClr>
+            </a:solidFill>
+            <a:prstDash val="solid"/>
+          </a:ln>
+        </p:spPr>
+      </p:sp>
+      <p:sp>
+        <p:nvSpPr>
+          <p:cNvPr id="22" name="Text 20"/>
+          <p:cNvSpPr txBox="1"/>
+          <p:nvPr/>
+        </p:nvSpPr>
+        <p:spPr>
+          <a:xfrm>
+            <a:off x="731520" y="384048"/>
+            <a:ext cx="10698480" cy="822960"/>
+          </a:xfrm>
+          <a:prstGeom prst="rect">
+            <a:avLst/>
+          </a:prstGeom>
+          <a:noFill/>
+          <a:ln/>
+        </p:spPr>
+        <p:txBody>
+          <a:bodyPr wrap="square" lIns="0" tIns="0" rIns="0" bIns="0" rtlCol="0" anchor="ctr"/>
+          <a:lstStyle/>
+          <a:p>
+            <a:pPr algn="ctr" indent="0" marL="0">
+              <a:lnSpc>
+                <a:spcPct val="120000"/>
+              </a:lnSpc>
+              <a:buNone/>
+            </a:pPr>
+            <a:r>
+              <a:rPr lang="en-US" sz="3800" b="1" dirty="0">
+                <a:solidFill>
+                  <a:srgbClr val="1F2937"/>
+                </a:solidFill>
+                <a:latin typeface="Pretendard" pitchFamily="34" charset="0"/>
+                <a:ea typeface="Pretendard" pitchFamily="34" charset="-122"/>
+                <a:cs typeface="Pretendard" pitchFamily="34" charset="-120"/>
+              </a:rPr>
+              <a:t>Agenda</a:t>
+            </a:r>
+            <a:endParaRPr lang="en-US" sz="3800" dirty="0"/>
+          </a:p>
+        </p:txBody>
+      </p:sp>
+      <p:sp>
+        <p:nvSpPr>
+          <p:cNvPr id="23" name="Text 21"/>
+          <p:cNvSpPr txBox="1"/>
+          <p:nvPr/>
+        </p:nvSpPr>
+        <p:spPr>
+          <a:xfrm>
+            <a:off x="1042416" y="1481328"/>
+            <a:ext cx="4645152" cy="384048"/>
+          </a:xfrm>
+          <a:prstGeom prst="rect">
+            <a:avLst/>
+          </a:prstGeom>
+          <a:noFill/>
+          <a:ln/>
+        </p:spPr>
+        <p:txBody>
+          <a:bodyPr wrap="square" lIns="0" tIns="25400" rIns="25400" bIns="0" rtlCol="0" anchor="ctr"/>
+          <a:lstStyle/>
+          <a:p>
+            <a:pPr algn="ctr" indent="0" marL="0">
+              <a:lnSpc>
+                <a:spcPct val="120000"/>
+              </a:lnSpc>
+              <a:buNone/>
+            </a:pPr>
+            <a:r>
+              <a:rPr lang="en-US" sz="1800" dirty="0">
+                <a:solidFill>
+                  <a:srgbClr val="1F2937"/>
+                </a:solidFill>
+                <a:latin typeface="Pretendard" pitchFamily="34" charset="0"/>
+                <a:ea typeface="Pretendard" pitchFamily="34" charset="-122"/>
+                <a:cs typeface="Pretendard" pitchFamily="34" charset="-120"/>
+              </a:rPr>
+              <a:t>01  Teaser Summary</a:t>
+            </a:r>
+            <a:endParaRPr lang="en-US" sz="1800" dirty="0"/>
+          </a:p>
+        </p:txBody>
+      </p:sp>
+      <p:sp>
+        <p:nvSpPr>
+          <p:cNvPr id="24" name="Text 22"/>
+          <p:cNvSpPr txBox="1"/>
+          <p:nvPr/>
+        </p:nvSpPr>
+        <p:spPr>
+          <a:xfrm>
+            <a:off x="1042416" y="2194560"/>
+            <a:ext cx="4645152" cy="384048"/>
+          </a:xfrm>
+          <a:prstGeom prst="rect">
+            <a:avLst/>
+          </a:prstGeom>
+          <a:noFill/>
+          <a:ln/>
+        </p:spPr>
+        <p:txBody>
+          <a:bodyPr wrap="square" lIns="0" tIns="25400" rIns="25400" bIns="0" rtlCol="0" anchor="ctr"/>
+          <a:lstStyle/>
+          <a:p>
+            <a:pPr algn="ctr" indent="0" marL="0">
+              <a:lnSpc>
+                <a:spcPct val="120000"/>
+              </a:lnSpc>
+              <a:buNone/>
+            </a:pPr>
+            <a:r>
+              <a:rPr lang="en-US" sz="1800" dirty="0">
+                <a:solidFill>
+                  <a:srgbClr val="1F2937"/>
+                </a:solidFill>
+                <a:latin typeface="Pretendard" pitchFamily="34" charset="0"/>
+                <a:ea typeface="Pretendard" pitchFamily="34" charset="-122"/>
+                <a:cs typeface="Pretendard" pitchFamily="34" charset="-120"/>
+              </a:rPr>
+              <a:t>02  Composition Contract</a:t>
+            </a:r>
+            <a:endParaRPr lang="en-US" sz="1800" dirty="0"/>
+          </a:p>
+        </p:txBody>
+      </p:sp>
+      <p:sp>
+        <p:nvSpPr>
+          <p:cNvPr id="25" name="Text 23"/>
+          <p:cNvSpPr txBox="1"/>
+          <p:nvPr/>
+        </p:nvSpPr>
+        <p:spPr>
+          <a:xfrm>
+            <a:off x="1042416" y="2907792"/>
+            <a:ext cx="4645152" cy="384048"/>
+          </a:xfrm>
+          <a:prstGeom prst="rect">
+            <a:avLst/>
+          </a:prstGeom>
+          <a:noFill/>
+          <a:ln/>
+        </p:spPr>
+        <p:txBody>
+          <a:bodyPr wrap="square" lIns="0" tIns="25400" rIns="25400" bIns="0" rtlCol="0" anchor="ctr"/>
+          <a:lstStyle/>
+          <a:p>
+            <a:pPr algn="ctr" indent="0" marL="0">
+              <a:lnSpc>
+                <a:spcPct val="120000"/>
+              </a:lnSpc>
+              <a:buNone/>
+            </a:pPr>
+            <a:r>
+              <a:rPr lang="en-US" sz="1800" dirty="0">
+                <a:solidFill>
+                  <a:srgbClr val="1F2937"/>
+                </a:solidFill>
+                <a:latin typeface="Pretendard" pitchFamily="34" charset="0"/>
+                <a:ea typeface="Pretendard" pitchFamily="34" charset="-122"/>
+                <a:cs typeface="Pretendard" pitchFamily="34" charset="-120"/>
+              </a:rPr>
+              <a:t>03  Pruned Style Families</a:t>
+            </a:r>
+            <a:endParaRPr lang="en-US" sz="1800" dirty="0"/>
+          </a:p>
+        </p:txBody>
+      </p:sp>
+      <p:sp>
+        <p:nvSpPr>
+          <p:cNvPr id="26" name="Text 24"/>
+          <p:cNvSpPr txBox="1"/>
+          <p:nvPr/>
+        </p:nvSpPr>
+        <p:spPr>
+          <a:xfrm>
+            <a:off x="1042416" y="3621024"/>
+            <a:ext cx="4645152" cy="384048"/>
+          </a:xfrm>
+          <a:prstGeom prst="rect">
+            <a:avLst/>
+          </a:prstGeom>
+          <a:noFill/>
+          <a:ln/>
+        </p:spPr>
+        <p:txBody>
+          <a:bodyPr wrap="square" lIns="0" tIns="25400" rIns="25400" bIns="0" rtlCol="0" anchor="ctr"/>
+          <a:lstStyle/>
+          <a:p>
+            <a:pPr algn="ctr" indent="0" marL="0">
+              <a:lnSpc>
+                <a:spcPct val="120000"/>
+              </a:lnSpc>
+              <a:buNone/>
+            </a:pPr>
+            <a:r>
+              <a:rPr lang="en-US" sz="1800" dirty="0">
+                <a:solidFill>
+                  <a:srgbClr val="1F2937"/>
+                </a:solidFill>
+                <a:latin typeface="Pretendard" pitchFamily="34" charset="0"/>
+                <a:ea typeface="Pretendard" pitchFamily="34" charset="-122"/>
+                <a:cs typeface="Pretendard" pitchFamily="34" charset="-120"/>
+              </a:rPr>
+              <a:t>04  Semantic Blocks</a:t>
+            </a:r>
+            <a:endParaRPr lang="en-US" sz="1800" dirty="0"/>
+          </a:p>
+        </p:txBody>
+      </p:sp>
+      <p:sp>
+        <p:nvSpPr>
+          <p:cNvPr id="27" name="Text 25"/>
+          <p:cNvSpPr txBox="1"/>
+          <p:nvPr/>
+        </p:nvSpPr>
+        <p:spPr>
+          <a:xfrm>
+            <a:off x="1042416" y="4334256"/>
+            <a:ext cx="4645152" cy="384048"/>
+          </a:xfrm>
+          <a:prstGeom prst="rect">
+            <a:avLst/>
+          </a:prstGeom>
+          <a:noFill/>
+          <a:ln/>
+        </p:spPr>
+        <p:txBody>
+          <a:bodyPr wrap="square" lIns="0" tIns="25400" rIns="25400" bIns="0" rtlCol="0" anchor="ctr"/>
+          <a:lstStyle/>
+          <a:p>
+            <a:pPr algn="ctr" indent="0" marL="0">
+              <a:lnSpc>
+                <a:spcPct val="120000"/>
+              </a:lnSpc>
+              <a:buNone/>
+            </a:pPr>
+            <a:r>
+              <a:rPr lang="en-US" sz="1800" dirty="0">
+                <a:solidFill>
+                  <a:srgbClr val="1F2937"/>
+                </a:solidFill>
+                <a:latin typeface="Pretendard" pitchFamily="34" charset="0"/>
+                <a:ea typeface="Pretendard" pitchFamily="34" charset="-122"/>
+                <a:cs typeface="Pretendard" pitchFamily="34" charset="-120"/>
+              </a:rPr>
+              <a:t>05  Pipeline Diagram</a:t>
+            </a:r>
+            <a:endParaRPr lang="en-US" sz="1800" dirty="0"/>
+          </a:p>
+        </p:txBody>
+      </p:sp>
+      <p:sp>
+        <p:nvSpPr>
+          <p:cNvPr id="28" name="Text 26"/>
+          <p:cNvSpPr txBox="1"/>
+          <p:nvPr/>
+        </p:nvSpPr>
+        <p:spPr>
+          <a:xfrm>
+            <a:off x="1042416" y="5047488"/>
+            <a:ext cx="4645152" cy="384048"/>
+          </a:xfrm>
+          <a:prstGeom prst="rect">
+            <a:avLst/>
+          </a:prstGeom>
+          <a:noFill/>
+          <a:ln/>
+        </p:spPr>
+        <p:txBody>
+          <a:bodyPr wrap="square" lIns="0" tIns="25400" rIns="25400" bIns="0" rtlCol="0" anchor="ctr"/>
+          <a:lstStyle/>
+          <a:p>
+            <a:pPr algn="ctr" indent="0" marL="0">
+              <a:lnSpc>
+                <a:spcPct val="120000"/>
+              </a:lnSpc>
+              <a:buNone/>
+            </a:pPr>
+            <a:r>
+              <a:rPr lang="en-US" sz="1800" dirty="0">
+                <a:solidFill>
+                  <a:srgbClr val="1F2937"/>
+                </a:solidFill>
+                <a:latin typeface="Pretendard" pitchFamily="34" charset="0"/>
+                <a:ea typeface="Pretendard" pitchFamily="34" charset="-122"/>
+                <a:cs typeface="Pretendard" pitchFamily="34" charset="-120"/>
+              </a:rPr>
+              <a:t>06  Decoration Pattern Catalog</a:t>
+            </a:r>
+            <a:endParaRPr lang="en-US" sz="1800" dirty="0"/>
+          </a:p>
+        </p:txBody>
+      </p:sp>
+      <p:sp>
+        <p:nvSpPr>
+          <p:cNvPr id="29" name="Text 27"/>
+          <p:cNvSpPr txBox="1"/>
+          <p:nvPr/>
+        </p:nvSpPr>
+        <p:spPr>
+          <a:xfrm>
+            <a:off x="1042416" y="5760720"/>
+            <a:ext cx="4645152" cy="384048"/>
+          </a:xfrm>
+          <a:prstGeom prst="rect">
+            <a:avLst/>
+          </a:prstGeom>
+          <a:noFill/>
+          <a:ln/>
+        </p:spPr>
+        <p:txBody>
+          <a:bodyPr wrap="square" lIns="0" tIns="25400" rIns="25400" bIns="0" rtlCol="0" anchor="ctr"/>
+          <a:lstStyle/>
+          <a:p>
+            <a:pPr algn="ctr" indent="0" marL="0">
+              <a:lnSpc>
+                <a:spcPct val="120000"/>
+              </a:lnSpc>
+              <a:buNone/>
+            </a:pPr>
+            <a:r>
+              <a:rPr lang="en-US" sz="1800" dirty="0">
+                <a:solidFill>
+                  <a:srgbClr val="1F2937"/>
+                </a:solidFill>
+                <a:latin typeface="Pretendard" pitchFamily="34" charset="0"/>
+                <a:ea typeface="Pretendard" pitchFamily="34" charset="-122"/>
+                <a:cs typeface="Pretendard" pitchFamily="34" charset="-120"/>
+              </a:rPr>
+              <a:t>07  Table Coherence</a:t>
+            </a:r>
+            <a:endParaRPr lang="en-US" sz="1800" dirty="0"/>
+          </a:p>
+        </p:txBody>
+      </p:sp>
+      <p:sp>
+        <p:nvSpPr>
+          <p:cNvPr id="30" name="Text 28"/>
+          <p:cNvSpPr txBox="1"/>
+          <p:nvPr/>
+        </p:nvSpPr>
+        <p:spPr>
+          <a:xfrm>
+            <a:off x="6492240" y="1481328"/>
+            <a:ext cx="4645152" cy="384048"/>
+          </a:xfrm>
+          <a:prstGeom prst="rect">
+            <a:avLst/>
+          </a:prstGeom>
+          <a:noFill/>
+          <a:ln/>
+        </p:spPr>
+        <p:txBody>
+          <a:bodyPr wrap="square" lIns="0" tIns="25400" rIns="25400" bIns="0" rtlCol="0" anchor="ctr"/>
+          <a:lstStyle/>
+          <a:p>
+            <a:pPr algn="ctr" indent="0" marL="0">
+              <a:lnSpc>
+                <a:spcPct val="120000"/>
+              </a:lnSpc>
+              <a:buNone/>
+            </a:pPr>
+            <a:r>
+              <a:rPr lang="en-US" sz="1800" dirty="0">
+                <a:solidFill>
+                  <a:srgbClr val="1F2937"/>
+                </a:solidFill>
+                <a:latin typeface="Pretendard" pitchFamily="34" charset="0"/>
+                <a:ea typeface="Pretendard" pitchFamily="34" charset="-122"/>
+                <a:cs typeface="Pretendard" pitchFamily="34" charset="-120"/>
+              </a:rPr>
+              <a:t>08  Chart and Table Pair</a:t>
+            </a:r>
+            <a:endParaRPr lang="en-US" sz="1800" dirty="0"/>
+          </a:p>
+        </p:txBody>
+      </p:sp>
+      <p:sp>
+        <p:nvSpPr>
+          <p:cNvPr id="31" name="Text 29"/>
+          <p:cNvSpPr txBox="1"/>
+          <p:nvPr/>
+        </p:nvSpPr>
+        <p:spPr>
+          <a:xfrm>
+            <a:off x="6492240" y="2194560"/>
+            <a:ext cx="4645152" cy="384048"/>
+          </a:xfrm>
+          <a:prstGeom prst="rect">
+            <a:avLst/>
+          </a:prstGeom>
+          <a:noFill/>
+          <a:ln/>
+        </p:spPr>
+        <p:txBody>
+          <a:bodyPr wrap="square" lIns="0" tIns="25400" rIns="25400" bIns="0" rtlCol="0" anchor="ctr"/>
+          <a:lstStyle/>
+          <a:p>
+            <a:pPr algn="ctr" indent="0" marL="0">
+              <a:lnSpc>
+                <a:spcPct val="120000"/>
+              </a:lnSpc>
+              <a:buNone/>
+            </a:pPr>
+            <a:r>
+              <a:rPr lang="en-US" sz="1800" dirty="0">
+                <a:solidFill>
+                  <a:srgbClr val="1F2937"/>
+                </a:solidFill>
+                <a:latin typeface="Pretendard" pitchFamily="34" charset="0"/>
+                <a:ea typeface="Pretendard" pitchFamily="34" charset="-122"/>
+                <a:cs typeface="Pretendard" pitchFamily="34" charset="-120"/>
+              </a:rPr>
+              <a:t>09  Editable Proof Objects</a:t>
+            </a:r>
+            <a:endParaRPr lang="en-US" sz="1800" dirty="0"/>
+          </a:p>
+        </p:txBody>
+      </p:sp>
+      <p:sp>
+        <p:nvSpPr>
+          <p:cNvPr id="32" name="Text 30"/>
+          <p:cNvSpPr txBox="1"/>
+          <p:nvPr/>
+        </p:nvSpPr>
+        <p:spPr>
+          <a:xfrm>
+            <a:off x="6492240" y="2907792"/>
+            <a:ext cx="4645152" cy="384048"/>
+          </a:xfrm>
+          <a:prstGeom prst="rect">
+            <a:avLst/>
+          </a:prstGeom>
+          <a:noFill/>
+          <a:ln/>
+        </p:spPr>
+        <p:txBody>
+          <a:bodyPr wrap="square" lIns="0" tIns="25400" rIns="25400" bIns="0" rtlCol="0" anchor="ctr"/>
+          <a:lstStyle/>
+          <a:p>
+            <a:pPr algn="ctr" indent="0" marL="0">
+              <a:lnSpc>
+                <a:spcPct val="120000"/>
+              </a:lnSpc>
+              <a:buNone/>
+            </a:pPr>
+            <a:r>
+              <a:rPr lang="en-US" sz="1800" dirty="0">
+                <a:solidFill>
+                  <a:srgbClr val="1F2937"/>
+                </a:solidFill>
+                <a:latin typeface="Pretendard" pitchFamily="34" charset="0"/>
+                <a:ea typeface="Pretendard" pitchFamily="34" charset="-122"/>
+                <a:cs typeface="Pretendard" pitchFamily="34" charset="-120"/>
+              </a:rPr>
+              <a:t>10  Object Shape Grammar</a:t>
+            </a:r>
+            <a:endParaRPr lang="en-US" sz="1800" dirty="0"/>
+          </a:p>
+        </p:txBody>
+      </p:sp>
+      <p:sp>
+        <p:nvSpPr>
+          <p:cNvPr id="33" name="Text 31"/>
+          <p:cNvSpPr txBox="1"/>
+          <p:nvPr/>
+        </p:nvSpPr>
+        <p:spPr>
+          <a:xfrm>
+            <a:off x="6492240" y="3621024"/>
+            <a:ext cx="4645152" cy="384048"/>
+          </a:xfrm>
+          <a:prstGeom prst="rect">
+            <a:avLst/>
+          </a:prstGeom>
+          <a:noFill/>
+          <a:ln/>
+        </p:spPr>
+        <p:txBody>
+          <a:bodyPr wrap="square" lIns="0" tIns="25400" rIns="25400" bIns="0" rtlCol="0" anchor="ctr"/>
+          <a:lstStyle/>
+          <a:p>
+            <a:pPr algn="ctr" indent="0" marL="0">
+              <a:lnSpc>
+                <a:spcPct val="120000"/>
+              </a:lnSpc>
+              <a:buNone/>
+            </a:pPr>
+            <a:r>
+              <a:rPr lang="en-US" sz="1800" dirty="0">
+                <a:solidFill>
+                  <a:srgbClr val="1F2937"/>
+                </a:solidFill>
+                <a:latin typeface="Pretendard" pitchFamily="34" charset="0"/>
+                <a:ea typeface="Pretendard" pitchFamily="34" charset="-122"/>
+                <a:cs typeface="Pretendard" pitchFamily="34" charset="-120"/>
+              </a:rPr>
+              <a:t>11  Icon and Text Aside</a:t>
+            </a:r>
+            <a:endParaRPr lang="en-US" sz="1800" dirty="0"/>
+          </a:p>
+        </p:txBody>
+      </p:sp>
+      <p:sp>
+        <p:nvSpPr>
+          <p:cNvPr id="34" name="Text 32"/>
+          <p:cNvSpPr txBox="1"/>
+          <p:nvPr/>
+        </p:nvSpPr>
+        <p:spPr>
+          <a:xfrm>
+            <a:off x="6492240" y="4334256"/>
+            <a:ext cx="4645152" cy="384048"/>
+          </a:xfrm>
+          <a:prstGeom prst="rect">
+            <a:avLst/>
+          </a:prstGeom>
+          <a:noFill/>
+          <a:ln/>
+        </p:spPr>
+        <p:txBody>
+          <a:bodyPr wrap="square" lIns="0" tIns="25400" rIns="25400" bIns="0" rtlCol="0" anchor="ctr"/>
+          <a:lstStyle/>
+          <a:p>
+            <a:pPr algn="ctr" indent="0" marL="0">
+              <a:lnSpc>
+                <a:spcPct val="120000"/>
+              </a:lnSpc>
+              <a:buNone/>
+            </a:pPr>
+            <a:r>
+              <a:rPr lang="en-US" sz="1800" dirty="0">
+                <a:solidFill>
+                  <a:srgbClr val="1F2937"/>
+                </a:solidFill>
+                <a:latin typeface="Pretendard" pitchFamily="34" charset="0"/>
+                <a:ea typeface="Pretendard" pitchFamily="34" charset="-122"/>
+                <a:cs typeface="Pretendard" pitchFamily="34" charset="-120"/>
+              </a:rPr>
+              <a:t>12  Overflow Guard</a:t>
+            </a:r>
+            <a:endParaRPr lang="en-US" sz="1800" dirty="0"/>
+          </a:p>
+        </p:txBody>
+      </p:sp>
+      <p:sp>
+        <p:nvSpPr>
+          <p:cNvPr id="35" name="Text 33"/>
+          <p:cNvSpPr txBox="1"/>
+          <p:nvPr/>
+        </p:nvSpPr>
+        <p:spPr>
+          <a:xfrm>
+            <a:off x="6492240" y="5047488"/>
+            <a:ext cx="4645152" cy="384048"/>
+          </a:xfrm>
+          <a:prstGeom prst="rect">
+            <a:avLst/>
+          </a:prstGeom>
+          <a:noFill/>
+          <a:ln/>
+        </p:spPr>
+        <p:txBody>
+          <a:bodyPr wrap="square" lIns="0" tIns="25400" rIns="25400" bIns="0" rtlCol="0" anchor="ctr"/>
+          <a:lstStyle/>
+          <a:p>
+            <a:pPr algn="ctr" indent="0" marL="0">
+              <a:lnSpc>
+                <a:spcPct val="120000"/>
+              </a:lnSpc>
+              <a:buNone/>
+            </a:pPr>
+            <a:r>
+              <a:rPr lang="en-US" sz="1800" dirty="0">
+                <a:solidFill>
+                  <a:srgbClr val="1F2937"/>
+                </a:solidFill>
+                <a:latin typeface="Pretendard" pitchFamily="34" charset="0"/>
+                <a:ea typeface="Pretendard" pitchFamily="34" charset="-122"/>
+                <a:cs typeface="Pretendard" pitchFamily="34" charset="-120"/>
+              </a:rPr>
+              <a:t>13  Image Safe Frame</a:t>
+            </a:r>
+            <a:endParaRPr lang="en-US" sz="1800" dirty="0"/>
+          </a:p>
+        </p:txBody>
+      </p:sp>
+      <p:sp>
+        <p:nvSpPr>
+          <p:cNvPr id="36" name="Text 34"/>
+          <p:cNvSpPr txBox="1"/>
+          <p:nvPr/>
+        </p:nvSpPr>
+        <p:spPr>
+          <a:xfrm>
+            <a:off x="6492240" y="5760720"/>
+            <a:ext cx="4645152" cy="384048"/>
+          </a:xfrm>
+          <a:prstGeom prst="rect">
+            <a:avLst/>
+          </a:prstGeom>
+          <a:noFill/>
+          <a:ln/>
+        </p:spPr>
+        <p:txBody>
+          <a:bodyPr wrap="square" lIns="0" tIns="25400" rIns="25400" bIns="0" rtlCol="0" anchor="ctr"/>
+          <a:lstStyle/>
+          <a:p>
+            <a:pPr algn="ctr" indent="0" marL="0">
+              <a:lnSpc>
+                <a:spcPct val="120000"/>
+              </a:lnSpc>
+              <a:buNone/>
+            </a:pPr>
+            <a:r>
+              <a:rPr lang="en-US" sz="1800" dirty="0">
+                <a:solidFill>
+                  <a:srgbClr val="1F2937"/>
+                </a:solidFill>
+                <a:latin typeface="Pretendard" pitchFamily="34" charset="0"/>
+                <a:ea typeface="Pretendard" pitchFamily="34" charset="-122"/>
+                <a:cs typeface="Pretendard" pitchFamily="34" charset="-120"/>
+              </a:rPr>
+              <a:t>14  Mixed Object Packing</a:t>
+            </a:r>
+            <a:endParaRPr lang="en-US" sz="1800" dirty="0"/>
+          </a:p>
+        </p:txBody>
+      </p:sp>
+    </p:spTree>
+  </p:cSld>
+  <p:clrMapOvr>
+    <a:masterClrMapping/>
+  </p:clrMapOvr>
+</p:sld>
+</file>
+
+<file path=ppt/slides/slide20.xml><?xml version="1.0" encoding="utf-8"?>
+<p:sld xmlns:a="http://schemas.openxmlformats.org/drawingml/2006/main" xmlns:r="http://schemas.openxmlformats.org/officeDocument/2006/relationships" xmlns:p="http://schemas.openxmlformats.org/presentationml/2006/main">
+  <p:cSld name="Slide 20">
     <p:bg>
       <p:bgPr>
         <a:solidFill>
@@ -8767,8 +12675,8 @@
         </p:nvSpPr>
         <p:spPr>
           <a:xfrm>
-            <a:off x="1689354" y="1627632"/>
-            <a:ext cx="3961638" cy="1591056"/>
+            <a:off x="1689354" y="2033016"/>
+            <a:ext cx="3961638" cy="780288"/>
           </a:xfrm>
           <a:prstGeom prst="rect">
             <a:avLst/>
@@ -8883,8 +12791,8 @@
         </p:nvSpPr>
         <p:spPr>
           <a:xfrm>
-            <a:off x="7175754" y="1627632"/>
-            <a:ext cx="3961638" cy="1591056"/>
+            <a:off x="7175754" y="1865376"/>
+            <a:ext cx="3961638" cy="1115568"/>
           </a:xfrm>
           <a:prstGeom prst="rect">
             <a:avLst/>
@@ -8999,8 +12907,8 @@
         </p:nvSpPr>
         <p:spPr>
           <a:xfrm>
-            <a:off x="1689354" y="3913632"/>
-            <a:ext cx="3961638" cy="1591056"/>
+            <a:off x="1689354" y="4151376"/>
+            <a:ext cx="3961638" cy="1115568"/>
           </a:xfrm>
           <a:prstGeom prst="rect">
             <a:avLst/>
@@ -9115,8 +13023,8 @@
         </p:nvSpPr>
         <p:spPr>
           <a:xfrm>
-            <a:off x="7175754" y="3913632"/>
-            <a:ext cx="3961638" cy="1591056"/>
+            <a:off x="7175754" y="4151376"/>
+            <a:ext cx="3961638" cy="1115568"/>
           </a:xfrm>
           <a:prstGeom prst="rect">
             <a:avLst/>
@@ -9174,9 +13082,9 @@
 </p:sld>
 </file>
 
-<file path=ppt/slides/slide18.xml><?xml version="1.0" encoding="utf-8"?>
+<file path=ppt/slides/slide21.xml><?xml version="1.0" encoding="utf-8"?>
 <p:sld xmlns:a="http://schemas.openxmlformats.org/drawingml/2006/main" xmlns:r="http://schemas.openxmlformats.org/officeDocument/2006/relationships" xmlns:p="http://schemas.openxmlformats.org/presentationml/2006/main">
-  <p:cSld name="Slide 18">
+  <p:cSld name="Slide 21">
     <p:bg>
       <p:bgPr>
         <a:solidFill>
@@ -9758,8 +13666,8 @@
         </p:nvSpPr>
         <p:spPr>
           <a:xfrm>
-            <a:off x="1689354" y="1627632"/>
-            <a:ext cx="3961638" cy="1591056"/>
+            <a:off x="1689354" y="1865376"/>
+            <a:ext cx="3961638" cy="1115568"/>
           </a:xfrm>
           <a:prstGeom prst="rect">
             <a:avLst/>
@@ -9874,8 +13782,8 @@
         </p:nvSpPr>
         <p:spPr>
           <a:xfrm>
-            <a:off x="7175754" y="1627632"/>
-            <a:ext cx="3961638" cy="1591056"/>
+            <a:off x="7175754" y="1697736"/>
+            <a:ext cx="3961638" cy="1450848"/>
           </a:xfrm>
           <a:prstGeom prst="rect">
             <a:avLst/>
@@ -9990,8 +13898,8 @@
         </p:nvSpPr>
         <p:spPr>
           <a:xfrm>
-            <a:off x="1689354" y="3913632"/>
-            <a:ext cx="3961638" cy="1591056"/>
+            <a:off x="1689354" y="4151376"/>
+            <a:ext cx="3961638" cy="1115568"/>
           </a:xfrm>
           <a:prstGeom prst="rect">
             <a:avLst/>
@@ -10106,8 +14014,8 @@
         </p:nvSpPr>
         <p:spPr>
           <a:xfrm>
-            <a:off x="7175754" y="3913632"/>
-            <a:ext cx="3961638" cy="1591056"/>
+            <a:off x="7175754" y="4151376"/>
+            <a:ext cx="3961638" cy="1115568"/>
           </a:xfrm>
           <a:prstGeom prst="rect">
             <a:avLst/>
@@ -10165,9 +14073,1393 @@
 </p:sld>
 </file>
 
-<file path=ppt/slides/slide19.xml><?xml version="1.0" encoding="utf-8"?>
+<file path=ppt/slides/slide22.xml><?xml version="1.0" encoding="utf-8"?>
 <p:sld xmlns:a="http://schemas.openxmlformats.org/drawingml/2006/main" xmlns:r="http://schemas.openxmlformats.org/officeDocument/2006/relationships" xmlns:p="http://schemas.openxmlformats.org/presentationml/2006/main">
-  <p:cSld name="Slide 19">
+  <p:cSld name="Slide 22">
+    <p:bg>
+      <p:bgPr>
+        <a:solidFill>
+          <a:srgbClr val="F7F3EF"/>
+        </a:solidFill>
+      </p:bgPr>
+    </p:bg>
+    <p:spTree>
+      <p:nvGrpSpPr>
+        <p:cNvPr id="1" name=""/>
+        <p:cNvGrpSpPr/>
+        <p:nvPr/>
+      </p:nvGrpSpPr>
+      <p:grpSpPr>
+        <a:xfrm>
+          <a:off x="0" y="0"/>
+          <a:ext cx="0" cy="0"/>
+          <a:chOff x="0" y="0"/>
+          <a:chExt cx="0" cy="0"/>
+        </a:xfrm>
+      </p:grpSpPr>
+      <p:sp>
+        <p:nvSpPr>
+          <p:cNvPr id="2" name="Shape 0"/>
+          <p:cNvSpPr/>
+          <p:nvPr/>
+        </p:nvSpPr>
+        <p:spPr>
+          <a:xfrm>
+            <a:off x="10134295" y="0"/>
+            <a:ext cx="2057400" cy="256032"/>
+          </a:xfrm>
+          <a:prstGeom prst="rect">
+            <a:avLst/>
+          </a:prstGeom>
+          <a:solidFill>
+            <a:srgbClr val="B45309"/>
+          </a:solidFill>
+          <a:ln w="12700">
+            <a:solidFill>
+              <a:srgbClr val="B45309">
+                <a:alpha val="0"/>
+              </a:srgbClr>
+            </a:solidFill>
+            <a:prstDash val="solid"/>
+          </a:ln>
+        </p:spPr>
+      </p:sp>
+      <p:sp>
+        <p:nvSpPr>
+          <p:cNvPr id="3" name="Shape 1"/>
+          <p:cNvSpPr/>
+          <p:nvPr/>
+        </p:nvSpPr>
+        <p:spPr>
+          <a:xfrm>
+            <a:off x="11048695" y="256032"/>
+            <a:ext cx="1143000" cy="73152"/>
+          </a:xfrm>
+          <a:prstGeom prst="rect">
+            <a:avLst/>
+          </a:prstGeom>
+          <a:solidFill>
+            <a:srgbClr val="FCD34D"/>
+          </a:solidFill>
+          <a:ln w="12700">
+            <a:solidFill>
+              <a:srgbClr val="FCD34D">
+                <a:alpha val="0"/>
+              </a:srgbClr>
+            </a:solidFill>
+            <a:prstDash val="solid"/>
+          </a:ln>
+        </p:spPr>
+      </p:sp>
+      <p:sp>
+        <p:nvSpPr>
+          <p:cNvPr id="4" name="Shape 2"/>
+          <p:cNvSpPr/>
+          <p:nvPr/>
+        </p:nvSpPr>
+        <p:spPr>
+          <a:xfrm>
+            <a:off x="731520" y="1207008"/>
+            <a:ext cx="1325880" cy="54864"/>
+          </a:xfrm>
+          <a:prstGeom prst="rect">
+            <a:avLst/>
+          </a:prstGeom>
+          <a:solidFill>
+            <a:srgbClr val="B45309"/>
+          </a:solidFill>
+          <a:ln w="12700">
+            <a:solidFill>
+              <a:srgbClr val="B45309">
+                <a:alpha val="0"/>
+              </a:srgbClr>
+            </a:solidFill>
+            <a:prstDash val="solid"/>
+          </a:ln>
+        </p:spPr>
+      </p:sp>
+      <p:sp>
+        <p:nvSpPr>
+          <p:cNvPr id="5" name="Shape 3"/>
+          <p:cNvSpPr/>
+          <p:nvPr/>
+        </p:nvSpPr>
+        <p:spPr>
+          <a:xfrm>
+            <a:off x="822960" y="1463040"/>
+            <a:ext cx="5623560" cy="73152"/>
+          </a:xfrm>
+          <a:prstGeom prst="rect">
+            <a:avLst/>
+          </a:prstGeom>
+          <a:solidFill>
+            <a:srgbClr val="B45309"/>
+          </a:solidFill>
+          <a:ln w="12700">
+            <a:solidFill>
+              <a:srgbClr val="B45309">
+                <a:alpha val="0"/>
+              </a:srgbClr>
+            </a:solidFill>
+            <a:prstDash val="solid"/>
+          </a:ln>
+        </p:spPr>
+      </p:sp>
+      <p:pic>
+        <p:nvPicPr>
+          <p:cNvPr id="6" name="Image 0" descr="preencoded.png">    </p:cNvPr>
+          <p:cNvPicPr>
+            <a:picLocks noChangeAspect="1"/>
+          </p:cNvPicPr>
+          <p:nvPr/>
+        </p:nvPicPr>
+        <p:blipFill>
+          <a:blip r:embed="rId1">
+            <a:extLst>
+              <a:ext uri="{96DAC541-7B7A-43D3-8B79-37D633B846F1}">
+                <asvg:svgBlip xmlns:asvg="http://schemas.microsoft.com/office/drawing/2016/SVG/main" r:embed="rId2"/>
+              </a:ext>
+            </a:extLst>
+          </a:blip>
+          <a:stretch>
+            <a:fillRect/>
+          </a:stretch>
+        </p:blipFill>
+        <p:spPr>
+          <a:xfrm>
+            <a:off x="6812280" y="1463040"/>
+            <a:ext cx="4434840" cy="4526280"/>
+          </a:xfrm>
+          <a:prstGeom prst="rect">
+            <a:avLst/>
+          </a:prstGeom>
+        </p:spPr>
+      </p:pic>
+      <p:sp>
+        <p:nvSpPr>
+          <p:cNvPr id="7" name="Shape 4"/>
+          <p:cNvSpPr/>
+          <p:nvPr/>
+        </p:nvSpPr>
+        <p:spPr>
+          <a:xfrm>
+            <a:off x="6812280" y="1463040"/>
+            <a:ext cx="4434840" cy="4526280"/>
+          </a:xfrm>
+          <a:prstGeom prst="rect">
+            <a:avLst/>
+          </a:prstGeom>
+          <a:solidFill>
+            <a:srgbClr val="FFFBF5">
+              <a:alpha val="0"/>
+            </a:srgbClr>
+          </a:solidFill>
+          <a:ln w="12700">
+            <a:solidFill>
+              <a:srgbClr val="E7D8C9">
+                <a:alpha val="0"/>
+              </a:srgbClr>
+            </a:solidFill>
+            <a:prstDash val="solid"/>
+          </a:ln>
+          <a:effectLst>
+            <a:outerShdw sx="100000" sy="100000" kx="0" ky="0" algn="bl" rotWithShape="0" blurRad="12700" dist="50800" dir="2700000">
+              <a:srgbClr val="000000">
+                <a:alpha val="8000"/>
+              </a:srgbClr>
+            </a:outerShdw>
+          </a:effectLst>
+        </p:spPr>
+      </p:sp>
+      <p:sp>
+        <p:nvSpPr>
+          <p:cNvPr id="8" name="Text 5"/>
+          <p:cNvSpPr txBox="1"/>
+          <p:nvPr/>
+        </p:nvSpPr>
+        <p:spPr>
+          <a:xfrm>
+            <a:off x="731520" y="457200"/>
+            <a:ext cx="10698480" cy="731520"/>
+          </a:xfrm>
+          <a:prstGeom prst="rect">
+            <a:avLst/>
+          </a:prstGeom>
+          <a:noFill/>
+          <a:ln/>
+        </p:spPr>
+        <p:txBody>
+          <a:bodyPr wrap="square" lIns="0" tIns="0" rIns="0" bIns="0" rtlCol="0" anchor="ctr"/>
+          <a:lstStyle/>
+          <a:p>
+            <a:pPr algn="ctr" indent="0" marL="0">
+              <a:lnSpc>
+                <a:spcPct val="120000"/>
+              </a:lnSpc>
+              <a:buNone/>
+            </a:pPr>
+            <a:r>
+              <a:rPr lang="en-US" sz="3400" b="1" dirty="0">
+                <a:solidFill>
+                  <a:srgbClr val="1F2937"/>
+                </a:solidFill>
+                <a:latin typeface="Pretendard" pitchFamily="34" charset="0"/>
+                <a:ea typeface="Pretendard" pitchFamily="34" charset="-122"/>
+                <a:cs typeface="Pretendard" pitchFamily="34" charset="-120"/>
+              </a:rPr>
+              <a:t>Image Safe Frame</a:t>
+            </a:r>
+            <a:endParaRPr lang="en-US" sz="3400" dirty="0"/>
+          </a:p>
+        </p:txBody>
+      </p:sp>
+      <p:sp>
+        <p:nvSpPr>
+          <p:cNvPr id="9" name="Text 6"/>
+          <p:cNvSpPr txBox="1"/>
+          <p:nvPr/>
+        </p:nvSpPr>
+        <p:spPr>
+          <a:xfrm>
+            <a:off x="896112" y="1572768"/>
+            <a:ext cx="5477256" cy="4306824"/>
+          </a:xfrm>
+          <a:prstGeom prst="rect">
+            <a:avLst/>
+          </a:prstGeom>
+          <a:noFill/>
+          <a:ln/>
+        </p:spPr>
+        <p:txBody>
+          <a:bodyPr wrap="square" lIns="0" tIns="25400" rIns="25400" bIns="0" rtlCol="0" anchor="t"/>
+          <a:lstStyle/>
+          <a:p>
+            <a:pPr algn="l" indent="0" marL="0">
+              <a:lnSpc>
+                <a:spcPct val="120000"/>
+              </a:lnSpc>
+              <a:buNone/>
+            </a:pPr>
+            <a:r>
+              <a:rPr lang="en-US" sz="2200" b="1" dirty="0">
+                <a:solidFill>
+                  <a:srgbClr val="B45309"/>
+                </a:solidFill>
+                <a:latin typeface="Pretendard" pitchFamily="34" charset="0"/>
+                <a:ea typeface="Pretendard" pitchFamily="34" charset="-122"/>
+                <a:cs typeface="Pretendard" pitchFamily="34" charset="-120"/>
+              </a:rPr>
+              <a:t>- Image role</a:t>
+            </a:r>
+            <a:pPr algn="l" indent="0" marL="0">
+              <a:lnSpc>
+                <a:spcPct val="120000"/>
+              </a:lnSpc>
+              <a:buNone/>
+            </a:pPr>
+            <a:r>
+              <a:rPr lang="en-US" sz="2200" dirty="0">
+                <a:solidFill>
+                  <a:srgbClr val="1F2937"/>
+                </a:solidFill>
+                <a:latin typeface="Pretendard" pitchFamily="34" charset="0"/>
+                <a:ea typeface="Pretendard" pitchFamily="34" charset="-122"/>
+                <a:cs typeface="Pretendard" pitchFamily="34" charset="-120"/>
+              </a:rPr>
+              <a:t>  picture content uses an internal safe frame.</a:t>
+            </a:r>
+            <a:endParaRPr lang="en-US" sz="2200" dirty="0"/>
+          </a:p>
+          <a:p>
+            <a:pPr algn="l" indent="0" marL="0">
+              <a:lnSpc>
+                <a:spcPct val="120000"/>
+              </a:lnSpc>
+              <a:buNone/>
+            </a:pPr>
+            <a:r>
+              <a:rPr lang="en-US" sz="2200" b="1" dirty="0">
+                <a:solidFill>
+                  <a:srgbClr val="B45309"/>
+                </a:solidFill>
+                <a:latin typeface="Pretendard" pitchFamily="34" charset="0"/>
+                <a:ea typeface="Pretendard" pitchFamily="34" charset="-122"/>
+                <a:cs typeface="Pretendard" pitchFamily="34" charset="-120"/>
+              </a:rPr>
+              <a:t>- Surface rule</a:t>
+            </a:r>
+            <a:endParaRPr lang="en-US" sz="2200" dirty="0"/>
+          </a:p>
+          <a:p>
+            <a:pPr algn="l" indent="0" marL="0">
+              <a:lnSpc>
+                <a:spcPct val="120000"/>
+              </a:lnSpc>
+              <a:buNone/>
+            </a:pPr>
+            <a:r>
+              <a:rPr lang="en-US" sz="2200" dirty="0">
+                <a:solidFill>
+                  <a:srgbClr val="1F2937"/>
+                </a:solidFill>
+                <a:latin typeface="Pretendard" pitchFamily="34" charset="0"/>
+                <a:ea typeface="Pretendard" pitchFamily="34" charset="-122"/>
+                <a:cs typeface="Pretendard" pitchFamily="34" charset="-120"/>
+              </a:rPr>
+              <a:t>  background decoration stays outside the picture bounds.</a:t>
+            </a:r>
+            <a:endParaRPr lang="en-US" sz="2200" dirty="0"/>
+          </a:p>
+          <a:p>
+            <a:pPr algn="l" indent="0" marL="0">
+              <a:lnSpc>
+                <a:spcPct val="120000"/>
+              </a:lnSpc>
+              <a:buNone/>
+            </a:pPr>
+            <a:r>
+              <a:rPr lang="en-US" sz="2200" b="1" dirty="0">
+                <a:solidFill>
+                  <a:srgbClr val="B45309"/>
+                </a:solidFill>
+                <a:latin typeface="Pretendard" pitchFamily="34" charset="0"/>
+                <a:ea typeface="Pretendard" pitchFamily="34" charset="-122"/>
+                <a:cs typeface="Pretendard" pitchFamily="34" charset="-120"/>
+              </a:rPr>
+              <a:t>- Bounds rule</a:t>
+            </a:r>
+            <a:endParaRPr lang="en-US" sz="2200" dirty="0"/>
+          </a:p>
+          <a:p>
+            <a:pPr algn="l" indent="0" marL="0">
+              <a:lnSpc>
+                <a:spcPct val="120000"/>
+              </a:lnSpc>
+              <a:buNone/>
+            </a:pPr>
+            <a:r>
+              <a:rPr lang="en-US" sz="2200" dirty="0">
+                <a:solidFill>
+                  <a:srgbClr val="1F2937"/>
+                </a:solidFill>
+                <a:latin typeface="Pretendard" pitchFamily="34" charset="0"/>
+                <a:ea typeface="Pretendard" pitchFamily="34" charset="-122"/>
+                <a:cs typeface="Pretendard" pitchFamily="34" charset="-120"/>
+              </a:rPr>
+              <a:t>  child images never exceed their owning image region.</a:t>
+            </a:r>
+            <a:endParaRPr lang="en-US" sz="2200" dirty="0"/>
+          </a:p>
+        </p:txBody>
+      </p:sp>
+      <p:pic>
+        <p:nvPicPr>
+          <p:cNvPr id="10" name="Image 1" descr="Safe frame diagram">    </p:cNvPr>
+          <p:cNvPicPr>
+            <a:picLocks noChangeAspect="1"/>
+          </p:cNvPicPr>
+          <p:nvPr/>
+        </p:nvPicPr>
+        <p:blipFill>
+          <a:blip r:embed="rId3">
+            <a:extLst>
+              <a:ext uri="{96DAC541-7B7A-43D3-8B79-37D633B846F1}">
+                <asvg:svgBlip xmlns:asvg="http://schemas.microsoft.com/office/drawing/2016/SVG/main" r:embed="rId4"/>
+              </a:ext>
+            </a:extLst>
+          </a:blip>
+          <a:stretch>
+            <a:fillRect/>
+          </a:stretch>
+        </p:blipFill>
+        <p:spPr>
+          <a:xfrm>
+            <a:off x="6940296" y="1591056"/>
+            <a:ext cx="4178808" cy="4270248"/>
+          </a:xfrm>
+          <a:prstGeom prst="rect">
+            <a:avLst/>
+          </a:prstGeom>
+        </p:spPr>
+      </p:pic>
+    </p:spTree>
+  </p:cSld>
+  <p:clrMapOvr>
+    <a:masterClrMapping/>
+  </p:clrMapOvr>
+</p:sld>
+</file>
+
+<file path=ppt/slides/slide23.xml><?xml version="1.0" encoding="utf-8"?>
+<p:sld xmlns:a="http://schemas.openxmlformats.org/drawingml/2006/main" xmlns:r="http://schemas.openxmlformats.org/officeDocument/2006/relationships" xmlns:p="http://schemas.openxmlformats.org/presentationml/2006/main">
+  <p:cSld name="Slide 23">
+    <p:bg>
+      <p:bgPr>
+        <a:solidFill>
+          <a:srgbClr val="F7F3EF"/>
+        </a:solidFill>
+      </p:bgPr>
+    </p:bg>
+    <p:spTree>
+      <p:nvGrpSpPr>
+        <p:cNvPr id="1" name=""/>
+        <p:cNvGrpSpPr/>
+        <p:nvPr/>
+      </p:nvGrpSpPr>
+      <p:grpSpPr>
+        <a:xfrm>
+          <a:off x="0" y="0"/>
+          <a:ext cx="0" cy="0"/>
+          <a:chOff x="0" y="0"/>
+          <a:chExt cx="0" cy="0"/>
+        </a:xfrm>
+      </p:grpSpPr>
+      <p:sp>
+        <p:nvSpPr>
+          <p:cNvPr id="2" name="Shape 0"/>
+          <p:cNvSpPr/>
+          <p:nvPr/>
+        </p:nvSpPr>
+        <p:spPr>
+          <a:xfrm>
+            <a:off x="10134295" y="0"/>
+            <a:ext cx="2057400" cy="256032"/>
+          </a:xfrm>
+          <a:prstGeom prst="rect">
+            <a:avLst/>
+          </a:prstGeom>
+          <a:solidFill>
+            <a:srgbClr val="B45309"/>
+          </a:solidFill>
+          <a:ln w="12700">
+            <a:solidFill>
+              <a:srgbClr val="B45309">
+                <a:alpha val="0"/>
+              </a:srgbClr>
+            </a:solidFill>
+            <a:prstDash val="solid"/>
+          </a:ln>
+        </p:spPr>
+      </p:sp>
+      <p:sp>
+        <p:nvSpPr>
+          <p:cNvPr id="3" name="Shape 1"/>
+          <p:cNvSpPr/>
+          <p:nvPr/>
+        </p:nvSpPr>
+        <p:spPr>
+          <a:xfrm>
+            <a:off x="11048695" y="256032"/>
+            <a:ext cx="1143000" cy="73152"/>
+          </a:xfrm>
+          <a:prstGeom prst="rect">
+            <a:avLst/>
+          </a:prstGeom>
+          <a:solidFill>
+            <a:srgbClr val="FCD34D"/>
+          </a:solidFill>
+          <a:ln w="12700">
+            <a:solidFill>
+              <a:srgbClr val="FCD34D">
+                <a:alpha val="0"/>
+              </a:srgbClr>
+            </a:solidFill>
+            <a:prstDash val="solid"/>
+          </a:ln>
+        </p:spPr>
+      </p:sp>
+      <p:sp>
+        <p:nvSpPr>
+          <p:cNvPr id="4" name="Shape 2"/>
+          <p:cNvSpPr/>
+          <p:nvPr/>
+        </p:nvSpPr>
+        <p:spPr>
+          <a:xfrm>
+            <a:off x="731520" y="1207008"/>
+            <a:ext cx="1325880" cy="54864"/>
+          </a:xfrm>
+          <a:prstGeom prst="rect">
+            <a:avLst/>
+          </a:prstGeom>
+          <a:solidFill>
+            <a:srgbClr val="B45309"/>
+          </a:solidFill>
+          <a:ln w="12700">
+            <a:solidFill>
+              <a:srgbClr val="B45309">
+                <a:alpha val="0"/>
+              </a:srgbClr>
+            </a:solidFill>
+            <a:prstDash val="solid"/>
+          </a:ln>
+        </p:spPr>
+      </p:sp>
+      <p:sp>
+        <p:nvSpPr>
+          <p:cNvPr id="5" name="Shape 3"/>
+          <p:cNvSpPr/>
+          <p:nvPr/>
+        </p:nvSpPr>
+        <p:spPr>
+          <a:xfrm>
+            <a:off x="841248" y="4041648"/>
+            <a:ext cx="4572000" cy="73152"/>
+          </a:xfrm>
+          <a:prstGeom prst="rect">
+            <a:avLst/>
+          </a:prstGeom>
+          <a:solidFill>
+            <a:srgbClr val="B45309"/>
+          </a:solidFill>
+          <a:ln w="12700">
+            <a:solidFill>
+              <a:srgbClr val="B45309">
+                <a:alpha val="0"/>
+              </a:srgbClr>
+            </a:solidFill>
+            <a:prstDash val="solid"/>
+          </a:ln>
+        </p:spPr>
+      </p:sp>
+      <p:pic>
+        <p:nvPicPr>
+          <p:cNvPr id="6" name="Image 0" descr="preencoded.png">    </p:cNvPr>
+          <p:cNvPicPr>
+            <a:picLocks noChangeAspect="1"/>
+          </p:cNvPicPr>
+          <p:nvPr/>
+        </p:nvPicPr>
+        <p:blipFill>
+          <a:blip r:embed="rId1">
+            <a:extLst>
+              <a:ext uri="{96DAC541-7B7A-43D3-8B79-37D633B846F1}">
+                <asvg:svgBlip xmlns:asvg="http://schemas.microsoft.com/office/drawing/2016/SVG/main" r:embed="rId2"/>
+              </a:ext>
+            </a:extLst>
+          </a:blip>
+          <a:stretch>
+            <a:fillRect/>
+          </a:stretch>
+        </p:blipFill>
+        <p:spPr>
+          <a:xfrm>
+            <a:off x="749808" y="1444752"/>
+            <a:ext cx="4617720" cy="2359152"/>
+          </a:xfrm>
+          <a:prstGeom prst="rect">
+            <a:avLst/>
+          </a:prstGeom>
+        </p:spPr>
+      </p:pic>
+      <p:sp>
+        <p:nvSpPr>
+          <p:cNvPr id="7" name="Shape 4"/>
+          <p:cNvSpPr/>
+          <p:nvPr/>
+        </p:nvSpPr>
+        <p:spPr>
+          <a:xfrm>
+            <a:off x="749808" y="1444752"/>
+            <a:ext cx="4617720" cy="2359152"/>
+          </a:xfrm>
+          <a:prstGeom prst="rect">
+            <a:avLst/>
+          </a:prstGeom>
+          <a:solidFill>
+            <a:srgbClr val="FFFBF5">
+              <a:alpha val="0"/>
+            </a:srgbClr>
+          </a:solidFill>
+          <a:ln w="12700">
+            <a:solidFill>
+              <a:srgbClr val="E7D8C9">
+                <a:alpha val="0"/>
+              </a:srgbClr>
+            </a:solidFill>
+            <a:prstDash val="solid"/>
+          </a:ln>
+          <a:effectLst>
+            <a:outerShdw sx="100000" sy="100000" kx="0" ky="0" algn="bl" rotWithShape="0" blurRad="12700" dist="50800" dir="2700000">
+              <a:srgbClr val="000000">
+                <a:alpha val="8000"/>
+              </a:srgbClr>
+            </a:outerShdw>
+          </a:effectLst>
+        </p:spPr>
+      </p:sp>
+      <p:pic>
+        <p:nvPicPr>
+          <p:cNvPr id="8" name="Image 1" descr="preencoded.png">    </p:cNvPr>
+          <p:cNvPicPr>
+            <a:picLocks noChangeAspect="1"/>
+          </p:cNvPicPr>
+          <p:nvPr/>
+        </p:nvPicPr>
+        <p:blipFill>
+          <a:blip r:embed="rId3">
+            <a:extLst>
+              <a:ext uri="{96DAC541-7B7A-43D3-8B79-37D633B846F1}">
+                <asvg:svgBlip xmlns:asvg="http://schemas.microsoft.com/office/drawing/2016/SVG/main" r:embed="rId4"/>
+              </a:ext>
+            </a:extLst>
+          </a:blip>
+          <a:stretch>
+            <a:fillRect/>
+          </a:stretch>
+        </p:blipFill>
+        <p:spPr>
+          <a:xfrm>
+            <a:off x="5577840" y="1481328"/>
+            <a:ext cx="5532120" cy="2212848"/>
+          </a:xfrm>
+          <a:prstGeom prst="rect">
+            <a:avLst/>
+          </a:prstGeom>
+        </p:spPr>
+      </p:pic>
+      <p:sp>
+        <p:nvSpPr>
+          <p:cNvPr id="9" name="Shape 5"/>
+          <p:cNvSpPr/>
+          <p:nvPr/>
+        </p:nvSpPr>
+        <p:spPr>
+          <a:xfrm>
+            <a:off x="5577840" y="1481328"/>
+            <a:ext cx="5532120" cy="2212848"/>
+          </a:xfrm>
+          <a:prstGeom prst="rect">
+            <a:avLst/>
+          </a:prstGeom>
+          <a:solidFill>
+            <a:srgbClr val="FFFBF5">
+              <a:alpha val="0"/>
+            </a:srgbClr>
+          </a:solidFill>
+          <a:ln w="12700">
+            <a:solidFill>
+              <a:srgbClr val="E7D8C9">
+                <a:alpha val="0"/>
+              </a:srgbClr>
+            </a:solidFill>
+            <a:prstDash val="solid"/>
+          </a:ln>
+          <a:effectLst>
+            <a:outerShdw sx="100000" sy="100000" kx="0" ky="0" algn="bl" rotWithShape="0" blurRad="12700" dist="50800" dir="2700000">
+              <a:srgbClr val="000000">
+                <a:alpha val="8000"/>
+              </a:srgbClr>
+            </a:outerShdw>
+          </a:effectLst>
+        </p:spPr>
+      </p:sp>
+      <p:pic>
+        <p:nvPicPr>
+          <p:cNvPr id="10" name="Image 2" descr="preencoded.png">    </p:cNvPr>
+          <p:cNvPicPr>
+            <a:picLocks noChangeAspect="1"/>
+          </p:cNvPicPr>
+          <p:nvPr/>
+        </p:nvPicPr>
+        <p:blipFill>
+          <a:blip r:embed="rId5">
+            <a:extLst>
+              <a:ext uri="{96DAC541-7B7A-43D3-8B79-37D633B846F1}">
+                <asvg:svgBlip xmlns:asvg="http://schemas.microsoft.com/office/drawing/2016/SVG/main" r:embed="rId6"/>
+              </a:ext>
+            </a:extLst>
+          </a:blip>
+          <a:stretch>
+            <a:fillRect/>
+          </a:stretch>
+        </p:blipFill>
+        <p:spPr>
+          <a:xfrm>
+            <a:off x="5577840" y="3913632"/>
+            <a:ext cx="5532120" cy="2011680"/>
+          </a:xfrm>
+          <a:prstGeom prst="rect">
+            <a:avLst/>
+          </a:prstGeom>
+        </p:spPr>
+      </p:pic>
+      <p:sp>
+        <p:nvSpPr>
+          <p:cNvPr id="11" name="Shape 6"/>
+          <p:cNvSpPr/>
+          <p:nvPr/>
+        </p:nvSpPr>
+        <p:spPr>
+          <a:xfrm>
+            <a:off x="5577840" y="3913632"/>
+            <a:ext cx="5532120" cy="2011680"/>
+          </a:xfrm>
+          <a:prstGeom prst="rect">
+            <a:avLst/>
+          </a:prstGeom>
+          <a:solidFill>
+            <a:srgbClr val="FFFBF5">
+              <a:alpha val="0"/>
+            </a:srgbClr>
+          </a:solidFill>
+          <a:ln w="12700">
+            <a:solidFill>
+              <a:srgbClr val="E7D8C9">
+                <a:alpha val="0"/>
+              </a:srgbClr>
+            </a:solidFill>
+            <a:prstDash val="solid"/>
+          </a:ln>
+          <a:effectLst>
+            <a:outerShdw sx="100000" sy="100000" kx="0" ky="0" algn="bl" rotWithShape="0" blurRad="12700" dist="50800" dir="2700000">
+              <a:srgbClr val="000000">
+                <a:alpha val="8000"/>
+              </a:srgbClr>
+            </a:outerShdw>
+          </a:effectLst>
+        </p:spPr>
+      </p:sp>
+      <p:sp>
+        <p:nvSpPr>
+          <p:cNvPr id="12" name="Text 7"/>
+          <p:cNvSpPr txBox="1"/>
+          <p:nvPr/>
+        </p:nvSpPr>
+        <p:spPr>
+          <a:xfrm>
+            <a:off x="731520" y="457200"/>
+            <a:ext cx="10698480" cy="731520"/>
+          </a:xfrm>
+          <a:prstGeom prst="rect">
+            <a:avLst/>
+          </a:prstGeom>
+          <a:noFill/>
+          <a:ln/>
+        </p:spPr>
+        <p:txBody>
+          <a:bodyPr wrap="square" lIns="0" tIns="0" rIns="0" bIns="0" rtlCol="0" anchor="ctr"/>
+          <a:lstStyle/>
+          <a:p>
+            <a:pPr algn="ctr" indent="0" marL="0">
+              <a:lnSpc>
+                <a:spcPct val="120000"/>
+              </a:lnSpc>
+              <a:buNone/>
+            </a:pPr>
+            <a:r>
+              <a:rPr lang="en-US" sz="3400" b="1" dirty="0">
+                <a:solidFill>
+                  <a:srgbClr val="1F2937"/>
+                </a:solidFill>
+                <a:latin typeface="Pretendard" pitchFamily="34" charset="0"/>
+                <a:ea typeface="Pretendard" pitchFamily="34" charset="-122"/>
+                <a:cs typeface="Pretendard" pitchFamily="34" charset="-120"/>
+              </a:rPr>
+              <a:t>Mixed Object Packing</a:t>
+            </a:r>
+            <a:endParaRPr lang="en-US" sz="3400" dirty="0"/>
+          </a:p>
+        </p:txBody>
+      </p:sp>
+      <p:graphicFrame>
+        <p:nvGraphicFramePr>
+          <p:cNvPr id="13" name="Chart 0" descr=""/>
+          <p:cNvGraphicFramePr/>
+          <p:nvPr/>
+        </p:nvGraphicFramePr>
+        <p:xfrm>
+          <a:off x="877824" y="1591056"/>
+          <a:ext cx="4361688" cy="2066544"/>
+        </p:xfrm>
+        <a:graphic xmlns:a="http://schemas.openxmlformats.org/drawingml/2006/main">
+          <a:graphicData uri="http://schemas.openxmlformats.org/drawingml/2006/chart">
+            <c:chart xmlns:c="http://schemas.openxmlformats.org/drawingml/2006/chart" r:id="rId7"/>
+          </a:graphicData>
+        </a:graphic>
+      </p:graphicFrame>
+      <p:graphicFrame>
+        <p:nvGraphicFramePr>
+          <p:cNvPr id="24" name="Table 0"/>
+          <p:cNvGraphicFramePr>
+            <a:graphicFrameLocks noGrp="1"/>
+          </p:cNvGraphicFramePr>
+          <p:nvPr>
+            <p:extLst>
+              <p:ext uri="{D42A27DB-BD31-4B8C-83A1-F6EECF244321}">
+                <p14:modId xmlns:p14="http://schemas.microsoft.com/office/powerpoint/2010/main" val="1579011935"/>
+              </p:ext>
+            </p:extLst>
+          </p:nvPr>
+        </p:nvGraphicFramePr>
+        <p:xfrm>
+          <a:off x="5577840" y="1481328"/>
+          <a:ext cx="5532120" cy="2212848"/>
+        </p:xfrm>
+        <a:graphic>
+          <a:graphicData uri="http://schemas.openxmlformats.org/drawingml/2006/table">
+            <a:tbl>
+              <a:tblPr/>
+              <a:tblGrid>
+                <a:gridCol w="2766060"/>
+                <a:gridCol w="2766060"/>
+              </a:tblGrid>
+              <a:tr h="737616">
+                <a:tc>
+                  <a:txBody>
+                    <a:bodyPr/>
+                    <a:lstStyle/>
+                    <a:p>
+                      <a:pPr algn="ctr" indent="0" marL="0">
+                        <a:buNone/>
+                      </a:pPr>
+                      <a:r>
+                        <a:rPr lang="en-US" sz="1800" b="1" dirty="0">
+                          <a:solidFill>
+                            <a:srgbClr val="FFFFFF"/>
+                          </a:solidFill>
+                          <a:latin typeface="Pretendard" pitchFamily="34" charset="0"/>
+                          <a:ea typeface="Pretendard" pitchFamily="34" charset="-122"/>
+                          <a:cs typeface="Pretendard" pitchFamily="34" charset="-120"/>
+                        </a:rPr>
+                        <a:t>Object</a:t>
+                      </a:r>
+                      <a:endParaRPr lang="en-US" sz="1800" dirty="0">
+                        <a:latin typeface="Pretendard" charset="0"/>
+                        <a:ea typeface="Pretendard" charset="0"/>
+                        <a:cs typeface="Pretendard" charset="0"/>
+                      </a:endParaRPr>
+                    </a:p>
+                  </a:txBody>
+                  <a:tcPr marL="54864" marR="54864" marT="36576" marB="36576" anchor="ctr">
+                    <a:lnL w="12700" cap="flat" cmpd="sng" algn="ctr">
+                      <a:solidFill>
+                        <a:srgbClr val="E7D8C9"/>
+                      </a:solidFill>
+                      <a:prstDash val="solid"/>
+                      <a:round/>
+                      <a:headEnd type="none" w="med" len="med"/>
+                      <a:tailEnd type="none" w="med" len="med"/>
+                    </a:lnL>
+                    <a:lnR w="12700" cap="flat" cmpd="sng" algn="ctr">
+                      <a:solidFill>
+                        <a:srgbClr val="E7D8C9"/>
+                      </a:solidFill>
+                      <a:prstDash val="solid"/>
+                      <a:round/>
+                      <a:headEnd type="none" w="med" len="med"/>
+                      <a:tailEnd type="none" w="med" len="med"/>
+                    </a:lnR>
+                    <a:lnT w="12700" cap="flat" cmpd="sng" algn="ctr">
+                      <a:solidFill>
+                        <a:srgbClr val="E7D8C9"/>
+                      </a:solidFill>
+                      <a:prstDash val="solid"/>
+                      <a:round/>
+                      <a:headEnd type="none" w="med" len="med"/>
+                      <a:tailEnd type="none" w="med" len="med"/>
+                    </a:lnT>
+                    <a:lnB w="12700" cap="flat" cmpd="sng" algn="ctr">
+                      <a:solidFill>
+                        <a:srgbClr val="E7D8C9"/>
+                      </a:solidFill>
+                      <a:prstDash val="solid"/>
+                      <a:round/>
+                      <a:headEnd type="none" w="med" len="med"/>
+                      <a:tailEnd type="none" w="med" len="med"/>
+                    </a:lnB>
+                    <a:solidFill>
+                      <a:srgbClr val="B45309"/>
+                    </a:solidFill>
+                  </a:tcPr>
+                </a:tc>
+                <a:tc>
+                  <a:txBody>
+                    <a:bodyPr/>
+                    <a:lstStyle/>
+                    <a:p>
+                      <a:pPr algn="ctr" indent="0" marL="0">
+                        <a:buNone/>
+                      </a:pPr>
+                      <a:r>
+                        <a:rPr lang="en-US" sz="1800" b="1" dirty="0">
+                          <a:solidFill>
+                            <a:srgbClr val="FFFFFF"/>
+                          </a:solidFill>
+                          <a:latin typeface="Pretendard" pitchFamily="34" charset="0"/>
+                          <a:ea typeface="Pretendard" pitchFamily="34" charset="-122"/>
+                          <a:cs typeface="Pretendard" pitchFamily="34" charset="-120"/>
+                        </a:rPr>
+                        <a:t>Signal</a:t>
+                      </a:r>
+                      <a:endParaRPr lang="en-US" sz="1800" dirty="0">
+                        <a:latin typeface="Pretendard" charset="0"/>
+                        <a:ea typeface="Pretendard" charset="0"/>
+                        <a:cs typeface="Pretendard" charset="0"/>
+                      </a:endParaRPr>
+                    </a:p>
+                  </a:txBody>
+                  <a:tcPr marL="54864" marR="54864" marT="36576" marB="36576" anchor="ctr">
+                    <a:lnL w="12700" cap="flat" cmpd="sng" algn="ctr">
+                      <a:solidFill>
+                        <a:srgbClr val="E7D8C9"/>
+                      </a:solidFill>
+                      <a:prstDash val="solid"/>
+                      <a:round/>
+                      <a:headEnd type="none" w="med" len="med"/>
+                      <a:tailEnd type="none" w="med" len="med"/>
+                    </a:lnL>
+                    <a:lnR w="12700" cap="flat" cmpd="sng" algn="ctr">
+                      <a:solidFill>
+                        <a:srgbClr val="E7D8C9"/>
+                      </a:solidFill>
+                      <a:prstDash val="solid"/>
+                      <a:round/>
+                      <a:headEnd type="none" w="med" len="med"/>
+                      <a:tailEnd type="none" w="med" len="med"/>
+                    </a:lnR>
+                    <a:lnT w="12700" cap="flat" cmpd="sng" algn="ctr">
+                      <a:solidFill>
+                        <a:srgbClr val="E7D8C9"/>
+                      </a:solidFill>
+                      <a:prstDash val="solid"/>
+                      <a:round/>
+                      <a:headEnd type="none" w="med" len="med"/>
+                      <a:tailEnd type="none" w="med" len="med"/>
+                    </a:lnT>
+                    <a:lnB w="12700" cap="flat" cmpd="sng" algn="ctr">
+                      <a:solidFill>
+                        <a:srgbClr val="E7D8C9"/>
+                      </a:solidFill>
+                      <a:prstDash val="solid"/>
+                      <a:round/>
+                      <a:headEnd type="none" w="med" len="med"/>
+                      <a:tailEnd type="none" w="med" len="med"/>
+                    </a:lnB>
+                    <a:solidFill>
+                      <a:srgbClr val="B45309"/>
+                    </a:solidFill>
+                  </a:tcPr>
+                </a:tc>
+              </a:tr>
+              <a:tr h="737616">
+                <a:tc>
+                  <a:txBody>
+                    <a:bodyPr/>
+                    <a:lstStyle/>
+                    <a:p>
+                      <a:pPr algn="l" indent="0" marL="0">
+                        <a:buNone/>
+                      </a:pPr>
+                      <a:r>
+                        <a:rPr lang="en-US" sz="1800" b="1" dirty="0">
+                          <a:solidFill>
+                            <a:srgbClr val="1F2937"/>
+                          </a:solidFill>
+                          <a:latin typeface="Pretendard" pitchFamily="34" charset="0"/>
+                          <a:ea typeface="Pretendard" pitchFamily="34" charset="-122"/>
+                          <a:cs typeface="Pretendard" pitchFamily="34" charset="-120"/>
+                        </a:rPr>
+                        <a:t>Chart</a:t>
+                      </a:r>
+                      <a:endParaRPr lang="en-US" sz="1800" dirty="0">
+                        <a:latin typeface="Pretendard" charset="0"/>
+                        <a:ea typeface="Pretendard" charset="0"/>
+                        <a:cs typeface="Pretendard" charset="0"/>
+                      </a:endParaRPr>
+                    </a:p>
+                  </a:txBody>
+                  <a:tcPr marL="54864" marR="54864" marT="36576" marB="36576" anchor="ctr">
+                    <a:lnL w="12700" cap="flat" cmpd="sng" algn="ctr">
+                      <a:solidFill>
+                        <a:srgbClr val="E7D8C9"/>
+                      </a:solidFill>
+                      <a:prstDash val="solid"/>
+                      <a:round/>
+                      <a:headEnd type="none" w="med" len="med"/>
+                      <a:tailEnd type="none" w="med" len="med"/>
+                    </a:lnL>
+                    <a:lnR w="12700" cap="flat" cmpd="sng" algn="ctr">
+                      <a:solidFill>
+                        <a:srgbClr val="E7D8C9"/>
+                      </a:solidFill>
+                      <a:prstDash val="solid"/>
+                      <a:round/>
+                      <a:headEnd type="none" w="med" len="med"/>
+                      <a:tailEnd type="none" w="med" len="med"/>
+                    </a:lnR>
+                    <a:lnT w="12700" cap="flat" cmpd="sng" algn="ctr">
+                      <a:solidFill>
+                        <a:srgbClr val="E7D8C9"/>
+                      </a:solidFill>
+                      <a:prstDash val="solid"/>
+                      <a:round/>
+                      <a:headEnd type="none" w="med" len="med"/>
+                      <a:tailEnd type="none" w="med" len="med"/>
+                    </a:lnT>
+                    <a:lnB w="12700" cap="flat" cmpd="sng" algn="ctr">
+                      <a:solidFill>
+                        <a:srgbClr val="E7D8C9"/>
+                      </a:solidFill>
+                      <a:prstDash val="solid"/>
+                      <a:round/>
+                      <a:headEnd type="none" w="med" len="med"/>
+                      <a:tailEnd type="none" w="med" len="med"/>
+                    </a:lnB>
+                  </a:tcPr>
+                </a:tc>
+                <a:tc>
+                  <a:txBody>
+                    <a:bodyPr/>
+                    <a:lstStyle/>
+                    <a:p>
+                      <a:pPr algn="l" indent="0" marL="0">
+                        <a:buNone/>
+                      </a:pPr>
+                      <a:r>
+                        <a:rPr lang="en-US" sz="1800" dirty="0">
+                          <a:solidFill>
+                            <a:srgbClr val="1F2937"/>
+                          </a:solidFill>
+                          <a:latin typeface="Pretendard" pitchFamily="34" charset="0"/>
+                          <a:ea typeface="Pretendard" pitchFamily="34" charset="-122"/>
+                          <a:cs typeface="Pretendard" pitchFamily="34" charset="-120"/>
+                        </a:rPr>
+                        <a:t>trend</a:t>
+                      </a:r>
+                      <a:endParaRPr lang="en-US" sz="1800" dirty="0">
+                        <a:latin typeface="Pretendard" charset="0"/>
+                        <a:ea typeface="Pretendard" charset="0"/>
+                        <a:cs typeface="Pretendard" charset="0"/>
+                      </a:endParaRPr>
+                    </a:p>
+                  </a:txBody>
+                  <a:tcPr marL="54864" marR="54864" marT="36576" marB="36576" anchor="ctr">
+                    <a:lnL w="12700" cap="flat" cmpd="sng" algn="ctr">
+                      <a:solidFill>
+                        <a:srgbClr val="E7D8C9"/>
+                      </a:solidFill>
+                      <a:prstDash val="solid"/>
+                      <a:round/>
+                      <a:headEnd type="none" w="med" len="med"/>
+                      <a:tailEnd type="none" w="med" len="med"/>
+                    </a:lnL>
+                    <a:lnR w="12700" cap="flat" cmpd="sng" algn="ctr">
+                      <a:solidFill>
+                        <a:srgbClr val="E7D8C9"/>
+                      </a:solidFill>
+                      <a:prstDash val="solid"/>
+                      <a:round/>
+                      <a:headEnd type="none" w="med" len="med"/>
+                      <a:tailEnd type="none" w="med" len="med"/>
+                    </a:lnR>
+                    <a:lnT w="12700" cap="flat" cmpd="sng" algn="ctr">
+                      <a:solidFill>
+                        <a:srgbClr val="E7D8C9"/>
+                      </a:solidFill>
+                      <a:prstDash val="solid"/>
+                      <a:round/>
+                      <a:headEnd type="none" w="med" len="med"/>
+                      <a:tailEnd type="none" w="med" len="med"/>
+                    </a:lnT>
+                    <a:lnB w="12700" cap="flat" cmpd="sng" algn="ctr">
+                      <a:solidFill>
+                        <a:srgbClr val="E7D8C9"/>
+                      </a:solidFill>
+                      <a:prstDash val="solid"/>
+                      <a:round/>
+                      <a:headEnd type="none" w="med" len="med"/>
+                      <a:tailEnd type="none" w="med" len="med"/>
+                    </a:lnB>
+                  </a:tcPr>
+                </a:tc>
+              </a:tr>
+              <a:tr h="737616">
+                <a:tc>
+                  <a:txBody>
+                    <a:bodyPr/>
+                    <a:lstStyle/>
+                    <a:p>
+                      <a:pPr algn="l" indent="0" marL="0">
+                        <a:buNone/>
+                      </a:pPr>
+                      <a:r>
+                        <a:rPr lang="en-US" sz="1800" b="1" dirty="0">
+                          <a:solidFill>
+                            <a:srgbClr val="1F2937"/>
+                          </a:solidFill>
+                          <a:latin typeface="Pretendard" pitchFamily="34" charset="0"/>
+                          <a:ea typeface="Pretendard" pitchFamily="34" charset="-122"/>
+                          <a:cs typeface="Pretendard" pitchFamily="34" charset="-120"/>
+                        </a:rPr>
+                        <a:t>Image</a:t>
+                      </a:r>
+                      <a:endParaRPr lang="en-US" sz="1800" dirty="0">
+                        <a:latin typeface="Pretendard" charset="0"/>
+                        <a:ea typeface="Pretendard" charset="0"/>
+                        <a:cs typeface="Pretendard" charset="0"/>
+                      </a:endParaRPr>
+                    </a:p>
+                  </a:txBody>
+                  <a:tcPr marL="54864" marR="54864" marT="36576" marB="36576" anchor="ctr">
+                    <a:lnL w="12700" cap="flat" cmpd="sng" algn="ctr">
+                      <a:solidFill>
+                        <a:srgbClr val="E7D8C9"/>
+                      </a:solidFill>
+                      <a:prstDash val="solid"/>
+                      <a:round/>
+                      <a:headEnd type="none" w="med" len="med"/>
+                      <a:tailEnd type="none" w="med" len="med"/>
+                    </a:lnL>
+                    <a:lnR w="12700" cap="flat" cmpd="sng" algn="ctr">
+                      <a:solidFill>
+                        <a:srgbClr val="E7D8C9"/>
+                      </a:solidFill>
+                      <a:prstDash val="solid"/>
+                      <a:round/>
+                      <a:headEnd type="none" w="med" len="med"/>
+                      <a:tailEnd type="none" w="med" len="med"/>
+                    </a:lnR>
+                    <a:lnT w="12700" cap="flat" cmpd="sng" algn="ctr">
+                      <a:solidFill>
+                        <a:srgbClr val="E7D8C9"/>
+                      </a:solidFill>
+                      <a:prstDash val="solid"/>
+                      <a:round/>
+                      <a:headEnd type="none" w="med" len="med"/>
+                      <a:tailEnd type="none" w="med" len="med"/>
+                    </a:lnT>
+                    <a:lnB w="12700" cap="flat" cmpd="sng" algn="ctr">
+                      <a:solidFill>
+                        <a:srgbClr val="E7D8C9"/>
+                      </a:solidFill>
+                      <a:prstDash val="solid"/>
+                      <a:round/>
+                      <a:headEnd type="none" w="med" len="med"/>
+                      <a:tailEnd type="none" w="med" len="med"/>
+                    </a:lnB>
+                    <a:solidFill>
+                      <a:srgbClr val="FFFBF5">
+                        <a:alpha val="80000"/>
+                      </a:srgbClr>
+                    </a:solidFill>
+                  </a:tcPr>
+                </a:tc>
+                <a:tc>
+                  <a:txBody>
+                    <a:bodyPr/>
+                    <a:lstStyle/>
+                    <a:p>
+                      <a:pPr algn="l" indent="0" marL="0">
+                        <a:buNone/>
+                      </a:pPr>
+                      <a:r>
+                        <a:rPr lang="en-US" sz="1800" dirty="0">
+                          <a:solidFill>
+                            <a:srgbClr val="1F2937"/>
+                          </a:solidFill>
+                          <a:latin typeface="Pretendard" pitchFamily="34" charset="0"/>
+                          <a:ea typeface="Pretendard" pitchFamily="34" charset="-122"/>
+                          <a:cs typeface="Pretendard" pitchFamily="34" charset="-120"/>
+                        </a:rPr>
+                        <a:t>bounded</a:t>
+                      </a:r>
+                      <a:endParaRPr lang="en-US" sz="1800" dirty="0">
+                        <a:latin typeface="Pretendard" charset="0"/>
+                        <a:ea typeface="Pretendard" charset="0"/>
+                        <a:cs typeface="Pretendard" charset="0"/>
+                      </a:endParaRPr>
+                    </a:p>
+                  </a:txBody>
+                  <a:tcPr marL="54864" marR="54864" marT="36576" marB="36576" anchor="ctr">
+                    <a:lnL w="12700" cap="flat" cmpd="sng" algn="ctr">
+                      <a:solidFill>
+                        <a:srgbClr val="E7D8C9"/>
+                      </a:solidFill>
+                      <a:prstDash val="solid"/>
+                      <a:round/>
+                      <a:headEnd type="none" w="med" len="med"/>
+                      <a:tailEnd type="none" w="med" len="med"/>
+                    </a:lnL>
+                    <a:lnR w="12700" cap="flat" cmpd="sng" algn="ctr">
+                      <a:solidFill>
+                        <a:srgbClr val="E7D8C9"/>
+                      </a:solidFill>
+                      <a:prstDash val="solid"/>
+                      <a:round/>
+                      <a:headEnd type="none" w="med" len="med"/>
+                      <a:tailEnd type="none" w="med" len="med"/>
+                    </a:lnR>
+                    <a:lnT w="12700" cap="flat" cmpd="sng" algn="ctr">
+                      <a:solidFill>
+                        <a:srgbClr val="E7D8C9"/>
+                      </a:solidFill>
+                      <a:prstDash val="solid"/>
+                      <a:round/>
+                      <a:headEnd type="none" w="med" len="med"/>
+                      <a:tailEnd type="none" w="med" len="med"/>
+                    </a:lnT>
+                    <a:lnB w="12700" cap="flat" cmpd="sng" algn="ctr">
+                      <a:solidFill>
+                        <a:srgbClr val="E7D8C9"/>
+                      </a:solidFill>
+                      <a:prstDash val="solid"/>
+                      <a:round/>
+                      <a:headEnd type="none" w="med" len="med"/>
+                      <a:tailEnd type="none" w="med" len="med"/>
+                    </a:lnB>
+                    <a:solidFill>
+                      <a:srgbClr val="FFFBF5">
+                        <a:alpha val="80000"/>
+                      </a:srgbClr>
+                    </a:solidFill>
+                  </a:tcPr>
+                </a:tc>
+              </a:tr>
+            </a:tbl>
+          </a:graphicData>
+        </a:graphic>
+      </p:graphicFrame>
+      <p:sp>
+        <p:nvSpPr>
+          <p:cNvPr id="15" name="Text 8"/>
+          <p:cNvSpPr txBox="1"/>
+          <p:nvPr/>
+        </p:nvSpPr>
+        <p:spPr>
+          <a:xfrm>
+            <a:off x="914400" y="4151376"/>
+            <a:ext cx="4425696" cy="1499616"/>
+          </a:xfrm>
+          <a:prstGeom prst="rect">
+            <a:avLst/>
+          </a:prstGeom>
+          <a:noFill/>
+          <a:ln/>
+        </p:spPr>
+        <p:txBody>
+          <a:bodyPr wrap="square" lIns="0" tIns="25400" rIns="25400" bIns="0" rtlCol="0" anchor="t"/>
+          <a:lstStyle/>
+          <a:p>
+            <a:pPr algn="l" indent="0" marL="0">
+              <a:lnSpc>
+                <a:spcPct val="120000"/>
+              </a:lnSpc>
+              <a:buNone/>
+            </a:pPr>
+            <a:r>
+              <a:rPr lang="en-US" sz="1800" b="1" dirty="0">
+                <a:solidFill>
+                  <a:srgbClr val="B45309"/>
+                </a:solidFill>
+                <a:latin typeface="Pretendard" pitchFamily="34" charset="0"/>
+                <a:ea typeface="Pretendard" pitchFamily="34" charset="-122"/>
+                <a:cs typeface="Pretendard" pitchFamily="34" charset="-120"/>
+              </a:rPr>
+              <a:t>- Reading order</a:t>
+            </a:r>
+            <a:pPr algn="l" indent="0" marL="0">
+              <a:lnSpc>
+                <a:spcPct val="120000"/>
+              </a:lnSpc>
+              <a:buNone/>
+            </a:pPr>
+            <a:r>
+              <a:rPr lang="en-US" sz="1800" dirty="0">
+                <a:solidFill>
+                  <a:srgbClr val="1F2937"/>
+                </a:solidFill>
+                <a:latin typeface="Pretendard" pitchFamily="34" charset="0"/>
+                <a:ea typeface="Pretendard" pitchFamily="34" charset="-122"/>
+                <a:cs typeface="Pretendard" pitchFamily="34" charset="-120"/>
+              </a:rPr>
+              <a:t>  chart and table remain the primary evidence.</a:t>
+            </a:r>
+            <a:endParaRPr lang="en-US" sz="1800" dirty="0"/>
+          </a:p>
+          <a:p>
+            <a:pPr algn="l" indent="0" marL="0">
+              <a:lnSpc>
+                <a:spcPct val="120000"/>
+              </a:lnSpc>
+              <a:buNone/>
+            </a:pPr>
+            <a:r>
+              <a:rPr lang="en-US" sz="1800" b="1" dirty="0">
+                <a:solidFill>
+                  <a:srgbClr val="B45309"/>
+                </a:solidFill>
+                <a:latin typeface="Pretendard" pitchFamily="34" charset="0"/>
+                <a:ea typeface="Pretendard" pitchFamily="34" charset="-122"/>
+                <a:cs typeface="Pretendard" pitchFamily="34" charset="-120"/>
+              </a:rPr>
+              <a:t>- Image role</a:t>
+            </a:r>
+            <a:endParaRPr lang="en-US" sz="1800" dirty="0"/>
+          </a:p>
+          <a:p>
+            <a:pPr algn="l" indent="0" marL="0">
+              <a:lnSpc>
+                <a:spcPct val="120000"/>
+              </a:lnSpc>
+              <a:buNone/>
+            </a:pPr>
+            <a:r>
+              <a:rPr lang="en-US" sz="1800" dirty="0">
+                <a:solidFill>
+                  <a:srgbClr val="1F2937"/>
+                </a:solidFill>
+                <a:latin typeface="Pretendard" pitchFamily="34" charset="0"/>
+                <a:ea typeface="Pretendard" pitchFamily="34" charset="-122"/>
+                <a:cs typeface="Pretendard" pitchFamily="34" charset="-120"/>
+              </a:rPr>
+              <a:t>  visual evidence stays bounded in a separate safe frame.</a:t>
+            </a:r>
+            <a:endParaRPr lang="en-US" sz="1800" dirty="0"/>
+          </a:p>
+        </p:txBody>
+      </p:sp>
+      <p:pic>
+        <p:nvPicPr>
+          <p:cNvPr id="16" name="Image 3" descr="Safe frame diagram">    </p:cNvPr>
+          <p:cNvPicPr>
+            <a:picLocks noChangeAspect="1"/>
+          </p:cNvPicPr>
+          <p:nvPr/>
+        </p:nvPicPr>
+        <p:blipFill>
+          <a:blip r:embed="rId8">
+            <a:extLst>
+              <a:ext uri="{96DAC541-7B7A-43D3-8B79-37D633B846F1}">
+                <asvg:svgBlip xmlns:asvg="http://schemas.microsoft.com/office/drawing/2016/SVG/main" r:embed="rId9"/>
+              </a:ext>
+            </a:extLst>
+          </a:blip>
+          <a:stretch>
+            <a:fillRect/>
+          </a:stretch>
+        </p:blipFill>
+        <p:spPr>
+          <a:xfrm>
+            <a:off x="5648249" y="3984041"/>
+            <a:ext cx="5391302" cy="1870862"/>
+          </a:xfrm>
+          <a:prstGeom prst="rect">
+            <a:avLst/>
+          </a:prstGeom>
+        </p:spPr>
+      </p:pic>
+    </p:spTree>
+  </p:cSld>
+  <p:clrMapOvr>
+    <a:masterClrMapping/>
+  </p:clrMapOvr>
+</p:sld>
+</file>
+
+<file path=ppt/slides/slide24.xml><?xml version="1.0" encoding="utf-8"?>
+<p:sld xmlns:a="http://schemas.openxmlformats.org/drawingml/2006/main" xmlns:r="http://schemas.openxmlformats.org/officeDocument/2006/relationships" xmlns:p="http://schemas.openxmlformats.org/presentationml/2006/main">
+  <p:cSld name="Slide 24">
     <p:bg>
       <p:bgPr>
         <a:solidFill>
@@ -10685,8 +15977,8 @@
         </p:nvSpPr>
         <p:spPr>
           <a:xfrm>
-            <a:off x="1699321" y="1957548"/>
-            <a:ext cx="9255191" cy="839785"/>
+            <a:off x="1699321" y="1987296"/>
+            <a:ext cx="9255191" cy="780288"/>
           </a:xfrm>
           <a:prstGeom prst="rect">
             <a:avLst/>
@@ -10801,8 +16093,8 @@
         </p:nvSpPr>
         <p:spPr>
           <a:xfrm>
-            <a:off x="1699321" y="3283428"/>
-            <a:ext cx="9255191" cy="839785"/>
+            <a:off x="1699321" y="3313176"/>
+            <a:ext cx="9255191" cy="780288"/>
           </a:xfrm>
           <a:prstGeom prst="rect">
             <a:avLst/>
@@ -10917,8 +16209,8 @@
         </p:nvSpPr>
         <p:spPr>
           <a:xfrm>
-            <a:off x="1699321" y="4600164"/>
-            <a:ext cx="9255191" cy="839785"/>
+            <a:off x="1699321" y="4629912"/>
+            <a:ext cx="9255191" cy="780288"/>
           </a:xfrm>
           <a:prstGeom prst="rect">
             <a:avLst/>
@@ -10976,1072 +16268,6 @@
 </p:sld>
 </file>
 
-<file path=ppt/slides/slide2.xml><?xml version="1.0" encoding="utf-8"?>
-<p:sld xmlns:a="http://schemas.openxmlformats.org/drawingml/2006/main" xmlns:r="http://schemas.openxmlformats.org/officeDocument/2006/relationships" xmlns:p="http://schemas.openxmlformats.org/presentationml/2006/main">
-  <p:cSld name="Slide 2">
-    <p:bg>
-      <p:bgPr>
-        <a:solidFill>
-          <a:srgbClr val="F7F3EF"/>
-        </a:solidFill>
-      </p:bgPr>
-    </p:bg>
-    <p:spTree>
-      <p:nvGrpSpPr>
-        <p:cNvPr id="1" name=""/>
-        <p:cNvGrpSpPr/>
-        <p:nvPr/>
-      </p:nvGrpSpPr>
-      <p:grpSpPr>
-        <a:xfrm>
-          <a:off x="0" y="0"/>
-          <a:ext cx="0" cy="0"/>
-          <a:chOff x="0" y="0"/>
-          <a:chExt cx="0" cy="0"/>
-        </a:xfrm>
-      </p:grpSpPr>
-      <p:sp>
-        <p:nvSpPr>
-          <p:cNvPr id="2" name="Shape 0"/>
-          <p:cNvSpPr/>
-          <p:nvPr/>
-        </p:nvSpPr>
-        <p:spPr>
-          <a:xfrm>
-            <a:off x="10134295" y="0"/>
-            <a:ext cx="2057400" cy="256032"/>
-          </a:xfrm>
-          <a:prstGeom prst="rect">
-            <a:avLst/>
-          </a:prstGeom>
-          <a:solidFill>
-            <a:srgbClr val="B45309"/>
-          </a:solidFill>
-          <a:ln w="12700">
-            <a:solidFill>
-              <a:srgbClr val="B45309">
-                <a:alpha val="0"/>
-              </a:srgbClr>
-            </a:solidFill>
-            <a:prstDash val="solid"/>
-          </a:ln>
-        </p:spPr>
-      </p:sp>
-      <p:sp>
-        <p:nvSpPr>
-          <p:cNvPr id="3" name="Shape 1"/>
-          <p:cNvSpPr/>
-          <p:nvPr/>
-        </p:nvSpPr>
-        <p:spPr>
-          <a:xfrm>
-            <a:off x="11048695" y="256032"/>
-            <a:ext cx="1143000" cy="73152"/>
-          </a:xfrm>
-          <a:prstGeom prst="rect">
-            <a:avLst/>
-          </a:prstGeom>
-          <a:solidFill>
-            <a:srgbClr val="FCD34D"/>
-          </a:solidFill>
-          <a:ln w="12700">
-            <a:solidFill>
-              <a:srgbClr val="FCD34D">
-                <a:alpha val="0"/>
-              </a:srgbClr>
-            </a:solidFill>
-            <a:prstDash val="solid"/>
-          </a:ln>
-        </p:spPr>
-      </p:sp>
-      <p:sp>
-        <p:nvSpPr>
-          <p:cNvPr id="4" name="Shape 2"/>
-          <p:cNvSpPr/>
-          <p:nvPr/>
-        </p:nvSpPr>
-        <p:spPr>
-          <a:xfrm>
-            <a:off x="731520" y="1207008"/>
-            <a:ext cx="1325880" cy="54864"/>
-          </a:xfrm>
-          <a:prstGeom prst="rect">
-            <a:avLst/>
-          </a:prstGeom>
-          <a:solidFill>
-            <a:srgbClr val="B45309"/>
-          </a:solidFill>
-          <a:ln w="12700">
-            <a:solidFill>
-              <a:srgbClr val="B45309">
-                <a:alpha val="0"/>
-              </a:srgbClr>
-            </a:solidFill>
-            <a:prstDash val="solid"/>
-          </a:ln>
-        </p:spPr>
-      </p:sp>
-      <p:sp>
-        <p:nvSpPr>
-          <p:cNvPr id="5" name="Shape 3"/>
-          <p:cNvSpPr/>
-          <p:nvPr/>
-        </p:nvSpPr>
-        <p:spPr>
-          <a:xfrm>
-            <a:off x="822960" y="1188720"/>
-            <a:ext cx="10515600" cy="45720"/>
-          </a:xfrm>
-          <a:prstGeom prst="rect">
-            <a:avLst/>
-          </a:prstGeom>
-          <a:solidFill>
-            <a:srgbClr val="B45309"/>
-          </a:solidFill>
-          <a:ln w="12700">
-            <a:solidFill>
-              <a:srgbClr val="B45309">
-                <a:alpha val="0"/>
-              </a:srgbClr>
-            </a:solidFill>
-            <a:prstDash val="solid"/>
-          </a:ln>
-        </p:spPr>
-      </p:sp>
-      <p:sp>
-        <p:nvSpPr>
-          <p:cNvPr id="6" name="Shape 4"/>
-          <p:cNvSpPr/>
-          <p:nvPr/>
-        </p:nvSpPr>
-        <p:spPr>
-          <a:xfrm>
-            <a:off x="822960" y="6199632"/>
-            <a:ext cx="2011680" cy="45720"/>
-          </a:xfrm>
-          <a:prstGeom prst="rect">
-            <a:avLst/>
-          </a:prstGeom>
-          <a:solidFill>
-            <a:srgbClr val="FCD34D"/>
-          </a:solidFill>
-          <a:ln w="12700">
-            <a:solidFill>
-              <a:srgbClr val="FCD34D">
-                <a:alpha val="0"/>
-              </a:srgbClr>
-            </a:solidFill>
-            <a:prstDash val="solid"/>
-          </a:ln>
-        </p:spPr>
-      </p:sp>
-      <p:sp>
-        <p:nvSpPr>
-          <p:cNvPr id="7" name="Shape 5"/>
-          <p:cNvSpPr/>
-          <p:nvPr/>
-        </p:nvSpPr>
-        <p:spPr>
-          <a:xfrm>
-            <a:off x="6080760" y="1389888"/>
-            <a:ext cx="22860" cy="4663440"/>
-          </a:xfrm>
-          <a:prstGeom prst="rect">
-            <a:avLst/>
-          </a:prstGeom>
-          <a:solidFill>
-            <a:srgbClr val="E7D8C9">
-              <a:alpha val="90000"/>
-            </a:srgbClr>
-          </a:solidFill>
-          <a:ln w="12700">
-            <a:solidFill>
-              <a:srgbClr val="E7D8C9">
-                <a:alpha val="0"/>
-              </a:srgbClr>
-            </a:solidFill>
-            <a:prstDash val="solid"/>
-          </a:ln>
-        </p:spPr>
-      </p:sp>
-      <p:sp>
-        <p:nvSpPr>
-          <p:cNvPr id="8" name="Shape 6"/>
-          <p:cNvSpPr/>
-          <p:nvPr/>
-        </p:nvSpPr>
-        <p:spPr>
-          <a:xfrm>
-            <a:off x="822960" y="1389888"/>
-            <a:ext cx="73152" cy="658368"/>
-          </a:xfrm>
-          <a:prstGeom prst="rect">
-            <a:avLst/>
-          </a:prstGeom>
-          <a:solidFill>
-            <a:srgbClr val="B45309"/>
-          </a:solidFill>
-          <a:ln w="12700">
-            <a:solidFill>
-              <a:srgbClr val="B45309">
-                <a:alpha val="0"/>
-              </a:srgbClr>
-            </a:solidFill>
-            <a:prstDash val="solid"/>
-          </a:ln>
-        </p:spPr>
-      </p:sp>
-      <p:sp>
-        <p:nvSpPr>
-          <p:cNvPr id="9" name="Shape 7"/>
-          <p:cNvSpPr/>
-          <p:nvPr/>
-        </p:nvSpPr>
-        <p:spPr>
-          <a:xfrm>
-            <a:off x="822960" y="2194560"/>
-            <a:ext cx="73152" cy="658368"/>
-          </a:xfrm>
-          <a:prstGeom prst="rect">
-            <a:avLst/>
-          </a:prstGeom>
-          <a:solidFill>
-            <a:srgbClr val="FCD34D"/>
-          </a:solidFill>
-          <a:ln w="12700">
-            <a:solidFill>
-              <a:srgbClr val="FCD34D">
-                <a:alpha val="0"/>
-              </a:srgbClr>
-            </a:solidFill>
-            <a:prstDash val="solid"/>
-          </a:ln>
-        </p:spPr>
-      </p:sp>
-      <p:sp>
-        <p:nvSpPr>
-          <p:cNvPr id="10" name="Shape 8"/>
-          <p:cNvSpPr/>
-          <p:nvPr/>
-        </p:nvSpPr>
-        <p:spPr>
-          <a:xfrm>
-            <a:off x="822960" y="2990088"/>
-            <a:ext cx="73152" cy="658368"/>
-          </a:xfrm>
-          <a:prstGeom prst="rect">
-            <a:avLst/>
-          </a:prstGeom>
-          <a:solidFill>
-            <a:srgbClr val="B45309"/>
-          </a:solidFill>
-          <a:ln w="12700">
-            <a:solidFill>
-              <a:srgbClr val="B45309">
-                <a:alpha val="0"/>
-              </a:srgbClr>
-            </a:solidFill>
-            <a:prstDash val="solid"/>
-          </a:ln>
-        </p:spPr>
-      </p:sp>
-      <p:sp>
-        <p:nvSpPr>
-          <p:cNvPr id="11" name="Shape 9"/>
-          <p:cNvSpPr/>
-          <p:nvPr/>
-        </p:nvSpPr>
-        <p:spPr>
-          <a:xfrm>
-            <a:off x="822960" y="3794760"/>
-            <a:ext cx="73152" cy="658368"/>
-          </a:xfrm>
-          <a:prstGeom prst="rect">
-            <a:avLst/>
-          </a:prstGeom>
-          <a:solidFill>
-            <a:srgbClr val="FCD34D"/>
-          </a:solidFill>
-          <a:ln w="12700">
-            <a:solidFill>
-              <a:srgbClr val="FCD34D">
-                <a:alpha val="0"/>
-              </a:srgbClr>
-            </a:solidFill>
-            <a:prstDash val="solid"/>
-          </a:ln>
-        </p:spPr>
-      </p:sp>
-      <p:sp>
-        <p:nvSpPr>
-          <p:cNvPr id="12" name="Shape 10"/>
-          <p:cNvSpPr/>
-          <p:nvPr/>
-        </p:nvSpPr>
-        <p:spPr>
-          <a:xfrm>
-            <a:off x="822960" y="4599432"/>
-            <a:ext cx="73152" cy="658368"/>
-          </a:xfrm>
-          <a:prstGeom prst="rect">
-            <a:avLst/>
-          </a:prstGeom>
-          <a:solidFill>
-            <a:srgbClr val="B45309"/>
-          </a:solidFill>
-          <a:ln w="12700">
-            <a:solidFill>
-              <a:srgbClr val="B45309">
-                <a:alpha val="0"/>
-              </a:srgbClr>
-            </a:solidFill>
-            <a:prstDash val="solid"/>
-          </a:ln>
-        </p:spPr>
-      </p:sp>
-      <p:sp>
-        <p:nvSpPr>
-          <p:cNvPr id="13" name="Shape 11"/>
-          <p:cNvSpPr/>
-          <p:nvPr/>
-        </p:nvSpPr>
-        <p:spPr>
-          <a:xfrm>
-            <a:off x="822960" y="5394960"/>
-            <a:ext cx="73152" cy="658368"/>
-          </a:xfrm>
-          <a:prstGeom prst="rect">
-            <a:avLst/>
-          </a:prstGeom>
-          <a:solidFill>
-            <a:srgbClr val="FCD34D"/>
-          </a:solidFill>
-          <a:ln w="12700">
-            <a:solidFill>
-              <a:srgbClr val="FCD34D">
-                <a:alpha val="0"/>
-              </a:srgbClr>
-            </a:solidFill>
-            <a:prstDash val="solid"/>
-          </a:ln>
-        </p:spPr>
-      </p:sp>
-      <p:sp>
-        <p:nvSpPr>
-          <p:cNvPr id="14" name="Shape 12"/>
-          <p:cNvSpPr/>
-          <p:nvPr/>
-        </p:nvSpPr>
-        <p:spPr>
-          <a:xfrm>
-            <a:off x="6272784" y="1389888"/>
-            <a:ext cx="73152" cy="658368"/>
-          </a:xfrm>
-          <a:prstGeom prst="rect">
-            <a:avLst/>
-          </a:prstGeom>
-          <a:solidFill>
-            <a:srgbClr val="B45309"/>
-          </a:solidFill>
-          <a:ln w="12700">
-            <a:solidFill>
-              <a:srgbClr val="B45309">
-                <a:alpha val="0"/>
-              </a:srgbClr>
-            </a:solidFill>
-            <a:prstDash val="solid"/>
-          </a:ln>
-        </p:spPr>
-      </p:sp>
-      <p:sp>
-        <p:nvSpPr>
-          <p:cNvPr id="15" name="Shape 13"/>
-          <p:cNvSpPr/>
-          <p:nvPr/>
-        </p:nvSpPr>
-        <p:spPr>
-          <a:xfrm>
-            <a:off x="6272784" y="2194560"/>
-            <a:ext cx="73152" cy="658368"/>
-          </a:xfrm>
-          <a:prstGeom prst="rect">
-            <a:avLst/>
-          </a:prstGeom>
-          <a:solidFill>
-            <a:srgbClr val="FCD34D"/>
-          </a:solidFill>
-          <a:ln w="12700">
-            <a:solidFill>
-              <a:srgbClr val="FCD34D">
-                <a:alpha val="0"/>
-              </a:srgbClr>
-            </a:solidFill>
-            <a:prstDash val="solid"/>
-          </a:ln>
-        </p:spPr>
-      </p:sp>
-      <p:sp>
-        <p:nvSpPr>
-          <p:cNvPr id="16" name="Shape 14"/>
-          <p:cNvSpPr/>
-          <p:nvPr/>
-        </p:nvSpPr>
-        <p:spPr>
-          <a:xfrm>
-            <a:off x="6272784" y="2990088"/>
-            <a:ext cx="73152" cy="658368"/>
-          </a:xfrm>
-          <a:prstGeom prst="rect">
-            <a:avLst/>
-          </a:prstGeom>
-          <a:solidFill>
-            <a:srgbClr val="B45309"/>
-          </a:solidFill>
-          <a:ln w="12700">
-            <a:solidFill>
-              <a:srgbClr val="B45309">
-                <a:alpha val="0"/>
-              </a:srgbClr>
-            </a:solidFill>
-            <a:prstDash val="solid"/>
-          </a:ln>
-        </p:spPr>
-      </p:sp>
-      <p:sp>
-        <p:nvSpPr>
-          <p:cNvPr id="17" name="Shape 15"/>
-          <p:cNvSpPr/>
-          <p:nvPr/>
-        </p:nvSpPr>
-        <p:spPr>
-          <a:xfrm>
-            <a:off x="6272784" y="3794760"/>
-            <a:ext cx="73152" cy="658368"/>
-          </a:xfrm>
-          <a:prstGeom prst="rect">
-            <a:avLst/>
-          </a:prstGeom>
-          <a:solidFill>
-            <a:srgbClr val="FCD34D"/>
-          </a:solidFill>
-          <a:ln w="12700">
-            <a:solidFill>
-              <a:srgbClr val="FCD34D">
-                <a:alpha val="0"/>
-              </a:srgbClr>
-            </a:solidFill>
-            <a:prstDash val="solid"/>
-          </a:ln>
-        </p:spPr>
-      </p:sp>
-      <p:sp>
-        <p:nvSpPr>
-          <p:cNvPr id="18" name="Shape 16"/>
-          <p:cNvSpPr/>
-          <p:nvPr/>
-        </p:nvSpPr>
-        <p:spPr>
-          <a:xfrm>
-            <a:off x="6272784" y="4599432"/>
-            <a:ext cx="73152" cy="658368"/>
-          </a:xfrm>
-          <a:prstGeom prst="rect">
-            <a:avLst/>
-          </a:prstGeom>
-          <a:solidFill>
-            <a:srgbClr val="B45309"/>
-          </a:solidFill>
-          <a:ln w="12700">
-            <a:solidFill>
-              <a:srgbClr val="B45309">
-                <a:alpha val="0"/>
-              </a:srgbClr>
-            </a:solidFill>
-            <a:prstDash val="solid"/>
-          </a:ln>
-        </p:spPr>
-      </p:sp>
-      <p:sp>
-        <p:nvSpPr>
-          <p:cNvPr id="19" name="Shape 17"/>
-          <p:cNvSpPr/>
-          <p:nvPr/>
-        </p:nvSpPr>
-        <p:spPr>
-          <a:xfrm>
-            <a:off x="6272784" y="5394960"/>
-            <a:ext cx="73152" cy="658368"/>
-          </a:xfrm>
-          <a:prstGeom prst="rect">
-            <a:avLst/>
-          </a:prstGeom>
-          <a:solidFill>
-            <a:srgbClr val="FCD34D"/>
-          </a:solidFill>
-          <a:ln w="12700">
-            <a:solidFill>
-              <a:srgbClr val="FCD34D">
-                <a:alpha val="0"/>
-              </a:srgbClr>
-            </a:solidFill>
-            <a:prstDash val="solid"/>
-          </a:ln>
-        </p:spPr>
-      </p:sp>
-      <p:sp>
-        <p:nvSpPr>
-          <p:cNvPr id="20" name="Text 18"/>
-          <p:cNvSpPr txBox="1"/>
-          <p:nvPr/>
-        </p:nvSpPr>
-        <p:spPr>
-          <a:xfrm>
-            <a:off x="731520" y="384048"/>
-            <a:ext cx="10698480" cy="822960"/>
-          </a:xfrm>
-          <a:prstGeom prst="rect">
-            <a:avLst/>
-          </a:prstGeom>
-          <a:noFill/>
-          <a:ln/>
-        </p:spPr>
-        <p:txBody>
-          <a:bodyPr wrap="square" lIns="0" tIns="0" rIns="0" bIns="0" rtlCol="0" anchor="ctr"/>
-          <a:lstStyle/>
-          <a:p>
-            <a:pPr algn="ctr" indent="0" marL="0">
-              <a:lnSpc>
-                <a:spcPct val="120000"/>
-              </a:lnSpc>
-              <a:buNone/>
-            </a:pPr>
-            <a:r>
-              <a:rPr lang="en-US" sz="3800" b="1" dirty="0">
-                <a:solidFill>
-                  <a:srgbClr val="1F2937"/>
-                </a:solidFill>
-                <a:latin typeface="Pretendard" pitchFamily="34" charset="0"/>
-                <a:ea typeface="Pretendard" pitchFamily="34" charset="-122"/>
-                <a:cs typeface="Pretendard" pitchFamily="34" charset="-120"/>
-              </a:rPr>
-              <a:t>Agenda</a:t>
-            </a:r>
-            <a:endParaRPr lang="en-US" sz="3800" dirty="0"/>
-          </a:p>
-        </p:txBody>
-      </p:sp>
-      <p:sp>
-        <p:nvSpPr>
-          <p:cNvPr id="21" name="Text 19"/>
-          <p:cNvSpPr txBox="1"/>
-          <p:nvPr/>
-        </p:nvSpPr>
-        <p:spPr>
-          <a:xfrm>
-            <a:off x="1042416" y="1481328"/>
-            <a:ext cx="4645152" cy="475488"/>
-          </a:xfrm>
-          <a:prstGeom prst="rect">
-            <a:avLst/>
-          </a:prstGeom>
-          <a:noFill/>
-          <a:ln/>
-        </p:spPr>
-        <p:txBody>
-          <a:bodyPr wrap="square" lIns="0" tIns="25400" rIns="25400" bIns="0" rtlCol="0" anchor="ctr"/>
-          <a:lstStyle/>
-          <a:p>
-            <a:pPr algn="ctr" indent="0" marL="0">
-              <a:lnSpc>
-                <a:spcPct val="120000"/>
-              </a:lnSpc>
-              <a:buNone/>
-            </a:pPr>
-            <a:r>
-              <a:rPr lang="en-US" sz="1800" dirty="0">
-                <a:solidFill>
-                  <a:srgbClr val="1F2937"/>
-                </a:solidFill>
-                <a:latin typeface="Pretendard" pitchFamily="34" charset="0"/>
-                <a:ea typeface="Pretendard" pitchFamily="34" charset="-122"/>
-                <a:cs typeface="Pretendard" pitchFamily="34" charset="-120"/>
-              </a:rPr>
-              <a:t>01  Preview Purpose</a:t>
-            </a:r>
-            <a:endParaRPr lang="en-US" sz="1800" dirty="0"/>
-          </a:p>
-        </p:txBody>
-      </p:sp>
-      <p:sp>
-        <p:nvSpPr>
-          <p:cNvPr id="22" name="Text 20"/>
-          <p:cNvSpPr txBox="1"/>
-          <p:nvPr/>
-        </p:nvSpPr>
-        <p:spPr>
-          <a:xfrm>
-            <a:off x="1042416" y="2286000"/>
-            <a:ext cx="4645152" cy="475488"/>
-          </a:xfrm>
-          <a:prstGeom prst="rect">
-            <a:avLst/>
-          </a:prstGeom>
-          <a:noFill/>
-          <a:ln/>
-        </p:spPr>
-        <p:txBody>
-          <a:bodyPr wrap="square" lIns="0" tIns="25400" rIns="25400" bIns="0" rtlCol="0" anchor="ctr"/>
-          <a:lstStyle/>
-          <a:p>
-            <a:pPr algn="ctr" indent="0" marL="0">
-              <a:lnSpc>
-                <a:spcPct val="120000"/>
-              </a:lnSpc>
-              <a:buNone/>
-            </a:pPr>
-            <a:r>
-              <a:rPr lang="en-US" sz="1800" dirty="0">
-                <a:solidFill>
-                  <a:srgbClr val="1F2937"/>
-                </a:solidFill>
-                <a:latin typeface="Pretendard" pitchFamily="34" charset="0"/>
-                <a:ea typeface="Pretendard" pitchFamily="34" charset="-122"/>
-                <a:cs typeface="Pretendard" pitchFamily="34" charset="-120"/>
-              </a:rPr>
-              <a:t>02  Composition Contract</a:t>
-            </a:r>
-            <a:endParaRPr lang="en-US" sz="1800" dirty="0"/>
-          </a:p>
-        </p:txBody>
-      </p:sp>
-      <p:sp>
-        <p:nvSpPr>
-          <p:cNvPr id="23" name="Text 21"/>
-          <p:cNvSpPr txBox="1"/>
-          <p:nvPr/>
-        </p:nvSpPr>
-        <p:spPr>
-          <a:xfrm>
-            <a:off x="1042416" y="3081528"/>
-            <a:ext cx="4645152" cy="475488"/>
-          </a:xfrm>
-          <a:prstGeom prst="rect">
-            <a:avLst/>
-          </a:prstGeom>
-          <a:noFill/>
-          <a:ln/>
-        </p:spPr>
-        <p:txBody>
-          <a:bodyPr wrap="square" lIns="0" tIns="25400" rIns="25400" bIns="0" rtlCol="0" anchor="ctr"/>
-          <a:lstStyle/>
-          <a:p>
-            <a:pPr algn="ctr" indent="0" marL="0">
-              <a:lnSpc>
-                <a:spcPct val="120000"/>
-              </a:lnSpc>
-              <a:buNone/>
-            </a:pPr>
-            <a:r>
-              <a:rPr lang="en-US" sz="1800" dirty="0">
-                <a:solidFill>
-                  <a:srgbClr val="1F2937"/>
-                </a:solidFill>
-                <a:latin typeface="Pretendard" pitchFamily="34" charset="0"/>
-                <a:ea typeface="Pretendard" pitchFamily="34" charset="-122"/>
-                <a:cs typeface="Pretendard" pitchFamily="34" charset="-120"/>
-              </a:rPr>
-              <a:t>03  Style Families</a:t>
-            </a:r>
-            <a:endParaRPr lang="en-US" sz="1800" dirty="0"/>
-          </a:p>
-        </p:txBody>
-      </p:sp>
-      <p:sp>
-        <p:nvSpPr>
-          <p:cNvPr id="24" name="Text 22"/>
-          <p:cNvSpPr txBox="1"/>
-          <p:nvPr/>
-        </p:nvSpPr>
-        <p:spPr>
-          <a:xfrm>
-            <a:off x="1042416" y="3886200"/>
-            <a:ext cx="4645152" cy="475488"/>
-          </a:xfrm>
-          <a:prstGeom prst="rect">
-            <a:avLst/>
-          </a:prstGeom>
-          <a:noFill/>
-          <a:ln/>
-        </p:spPr>
-        <p:txBody>
-          <a:bodyPr wrap="square" lIns="0" tIns="25400" rIns="25400" bIns="0" rtlCol="0" anchor="ctr"/>
-          <a:lstStyle/>
-          <a:p>
-            <a:pPr algn="ctr" indent="0" marL="0">
-              <a:lnSpc>
-                <a:spcPct val="120000"/>
-              </a:lnSpc>
-              <a:buNone/>
-            </a:pPr>
-            <a:r>
-              <a:rPr lang="en-US" sz="1800" dirty="0">
-                <a:solidFill>
-                  <a:srgbClr val="1F2937"/>
-                </a:solidFill>
-                <a:latin typeface="Pretendard" pitchFamily="34" charset="0"/>
-                <a:ea typeface="Pretendard" pitchFamily="34" charset="-122"/>
-                <a:cs typeface="Pretendard" pitchFamily="34" charset="-120"/>
-              </a:rPr>
-              <a:t>04  Semantic Blocks</a:t>
-            </a:r>
-            <a:endParaRPr lang="en-US" sz="1800" dirty="0"/>
-          </a:p>
-        </p:txBody>
-      </p:sp>
-      <p:sp>
-        <p:nvSpPr>
-          <p:cNvPr id="25" name="Text 23"/>
-          <p:cNvSpPr txBox="1"/>
-          <p:nvPr/>
-        </p:nvSpPr>
-        <p:spPr>
-          <a:xfrm>
-            <a:off x="1042416" y="4690872"/>
-            <a:ext cx="4645152" cy="475488"/>
-          </a:xfrm>
-          <a:prstGeom prst="rect">
-            <a:avLst/>
-          </a:prstGeom>
-          <a:noFill/>
-          <a:ln/>
-        </p:spPr>
-        <p:txBody>
-          <a:bodyPr wrap="square" lIns="0" tIns="25400" rIns="25400" bIns="0" rtlCol="0" anchor="ctr"/>
-          <a:lstStyle/>
-          <a:p>
-            <a:pPr algn="ctr" indent="0" marL="0">
-              <a:lnSpc>
-                <a:spcPct val="120000"/>
-              </a:lnSpc>
-              <a:buNone/>
-            </a:pPr>
-            <a:r>
-              <a:rPr lang="en-US" sz="1800" dirty="0">
-                <a:solidFill>
-                  <a:srgbClr val="1F2937"/>
-                </a:solidFill>
-                <a:latin typeface="Pretendard" pitchFamily="34" charset="0"/>
-                <a:ea typeface="Pretendard" pitchFamily="34" charset="-122"/>
-                <a:cs typeface="Pretendard" pitchFamily="34" charset="-120"/>
-              </a:rPr>
-              <a:t>05  Pipeline Diagram</a:t>
-            </a:r>
-            <a:endParaRPr lang="en-US" sz="1800" dirty="0"/>
-          </a:p>
-        </p:txBody>
-      </p:sp>
-      <p:sp>
-        <p:nvSpPr>
-          <p:cNvPr id="26" name="Text 24"/>
-          <p:cNvSpPr txBox="1"/>
-          <p:nvPr/>
-        </p:nvSpPr>
-        <p:spPr>
-          <a:xfrm>
-            <a:off x="1042416" y="5486400"/>
-            <a:ext cx="4645152" cy="475488"/>
-          </a:xfrm>
-          <a:prstGeom prst="rect">
-            <a:avLst/>
-          </a:prstGeom>
-          <a:noFill/>
-          <a:ln/>
-        </p:spPr>
-        <p:txBody>
-          <a:bodyPr wrap="square" lIns="0" tIns="25400" rIns="25400" bIns="0" rtlCol="0" anchor="ctr"/>
-          <a:lstStyle/>
-          <a:p>
-            <a:pPr algn="ctr" indent="0" marL="0">
-              <a:lnSpc>
-                <a:spcPct val="120000"/>
-              </a:lnSpc>
-              <a:buNone/>
-            </a:pPr>
-            <a:r>
-              <a:rPr lang="en-US" sz="1800" dirty="0">
-                <a:solidFill>
-                  <a:srgbClr val="1F2937"/>
-                </a:solidFill>
-                <a:latin typeface="Pretendard" pitchFamily="34" charset="0"/>
-                <a:ea typeface="Pretendard" pitchFamily="34" charset="-122"/>
-                <a:cs typeface="Pretendard" pitchFamily="34" charset="-120"/>
-              </a:rPr>
-              <a:t>06  Table Coherence</a:t>
-            </a:r>
-            <a:endParaRPr lang="en-US" sz="1800" dirty="0"/>
-          </a:p>
-        </p:txBody>
-      </p:sp>
-      <p:sp>
-        <p:nvSpPr>
-          <p:cNvPr id="27" name="Text 25"/>
-          <p:cNvSpPr txBox="1"/>
-          <p:nvPr/>
-        </p:nvSpPr>
-        <p:spPr>
-          <a:xfrm>
-            <a:off x="6492240" y="1481328"/>
-            <a:ext cx="4645152" cy="475488"/>
-          </a:xfrm>
-          <a:prstGeom prst="rect">
-            <a:avLst/>
-          </a:prstGeom>
-          <a:noFill/>
-          <a:ln/>
-        </p:spPr>
-        <p:txBody>
-          <a:bodyPr wrap="square" lIns="0" tIns="25400" rIns="25400" bIns="0" rtlCol="0" anchor="ctr"/>
-          <a:lstStyle/>
-          <a:p>
-            <a:pPr algn="ctr" indent="0" marL="0">
-              <a:lnSpc>
-                <a:spcPct val="120000"/>
-              </a:lnSpc>
-              <a:buNone/>
-            </a:pPr>
-            <a:r>
-              <a:rPr lang="en-US" sz="1800" dirty="0">
-                <a:solidFill>
-                  <a:srgbClr val="1F2937"/>
-                </a:solidFill>
-                <a:latin typeface="Pretendard" pitchFamily="34" charset="0"/>
-                <a:ea typeface="Pretendard" pitchFamily="34" charset="-122"/>
-                <a:cs typeface="Pretendard" pitchFamily="34" charset="-120"/>
-              </a:rPr>
-              <a:t>07  Chart and Table Pair</a:t>
-            </a:r>
-            <a:endParaRPr lang="en-US" sz="1800" dirty="0"/>
-          </a:p>
-        </p:txBody>
-      </p:sp>
-      <p:sp>
-        <p:nvSpPr>
-          <p:cNvPr id="28" name="Text 26"/>
-          <p:cNvSpPr txBox="1"/>
-          <p:nvPr/>
-        </p:nvSpPr>
-        <p:spPr>
-          <a:xfrm>
-            <a:off x="6492240" y="2286000"/>
-            <a:ext cx="4645152" cy="475488"/>
-          </a:xfrm>
-          <a:prstGeom prst="rect">
-            <a:avLst/>
-          </a:prstGeom>
-          <a:noFill/>
-          <a:ln/>
-        </p:spPr>
-        <p:txBody>
-          <a:bodyPr wrap="square" lIns="0" tIns="25400" rIns="25400" bIns="0" rtlCol="0" anchor="ctr"/>
-          <a:lstStyle/>
-          <a:p>
-            <a:pPr algn="ctr" indent="0" marL="0">
-              <a:lnSpc>
-                <a:spcPct val="120000"/>
-              </a:lnSpc>
-              <a:buNone/>
-            </a:pPr>
-            <a:r>
-              <a:rPr lang="en-US" sz="1800" dirty="0">
-                <a:solidFill>
-                  <a:srgbClr val="1F2937"/>
-                </a:solidFill>
-                <a:latin typeface="Pretendard" pitchFamily="34" charset="0"/>
-                <a:ea typeface="Pretendard" pitchFamily="34" charset="-122"/>
-                <a:cs typeface="Pretendard" pitchFamily="34" charset="-120"/>
-              </a:rPr>
-              <a:t>08  Editable Proof Objects</a:t>
-            </a:r>
-            <a:endParaRPr lang="en-US" sz="1800" dirty="0"/>
-          </a:p>
-        </p:txBody>
-      </p:sp>
-      <p:sp>
-        <p:nvSpPr>
-          <p:cNvPr id="29" name="Text 27"/>
-          <p:cNvSpPr txBox="1"/>
-          <p:nvPr/>
-        </p:nvSpPr>
-        <p:spPr>
-          <a:xfrm>
-            <a:off x="6492240" y="3081528"/>
-            <a:ext cx="4645152" cy="475488"/>
-          </a:xfrm>
-          <a:prstGeom prst="rect">
-            <a:avLst/>
-          </a:prstGeom>
-          <a:noFill/>
-          <a:ln/>
-        </p:spPr>
-        <p:txBody>
-          <a:bodyPr wrap="square" lIns="0" tIns="25400" rIns="25400" bIns="0" rtlCol="0" anchor="ctr"/>
-          <a:lstStyle/>
-          <a:p>
-            <a:pPr algn="ctr" indent="0" marL="0">
-              <a:lnSpc>
-                <a:spcPct val="120000"/>
-              </a:lnSpc>
-              <a:buNone/>
-            </a:pPr>
-            <a:r>
-              <a:rPr lang="en-US" sz="1800" dirty="0">
-                <a:solidFill>
-                  <a:srgbClr val="1F2937"/>
-                </a:solidFill>
-                <a:latin typeface="Pretendard" pitchFamily="34" charset="0"/>
-                <a:ea typeface="Pretendard" pitchFamily="34" charset="-122"/>
-                <a:cs typeface="Pretendard" pitchFamily="34" charset="-120"/>
-              </a:rPr>
-              <a:t>09  Object Shape Grammar</a:t>
-            </a:r>
-            <a:endParaRPr lang="en-US" sz="1800" dirty="0"/>
-          </a:p>
-        </p:txBody>
-      </p:sp>
-      <p:sp>
-        <p:nvSpPr>
-          <p:cNvPr id="30" name="Text 28"/>
-          <p:cNvSpPr txBox="1"/>
-          <p:nvPr/>
-        </p:nvSpPr>
-        <p:spPr>
-          <a:xfrm>
-            <a:off x="6492240" y="3886200"/>
-            <a:ext cx="4645152" cy="475488"/>
-          </a:xfrm>
-          <a:prstGeom prst="rect">
-            <a:avLst/>
-          </a:prstGeom>
-          <a:noFill/>
-          <a:ln/>
-        </p:spPr>
-        <p:txBody>
-          <a:bodyPr wrap="square" lIns="0" tIns="25400" rIns="25400" bIns="0" rtlCol="0" anchor="ctr"/>
-          <a:lstStyle/>
-          <a:p>
-            <a:pPr algn="ctr" indent="0" marL="0">
-              <a:lnSpc>
-                <a:spcPct val="120000"/>
-              </a:lnSpc>
-              <a:buNone/>
-            </a:pPr>
-            <a:r>
-              <a:rPr lang="en-US" sz="1800" dirty="0">
-                <a:solidFill>
-                  <a:srgbClr val="1F2937"/>
-                </a:solidFill>
-                <a:latin typeface="Pretendard" pitchFamily="34" charset="0"/>
-                <a:ea typeface="Pretendard" pitchFamily="34" charset="-122"/>
-                <a:cs typeface="Pretendard" pitchFamily="34" charset="-120"/>
-              </a:rPr>
-              <a:t>10  Icon and Text Aside</a:t>
-            </a:r>
-            <a:endParaRPr lang="en-US" sz="1800" dirty="0"/>
-          </a:p>
-        </p:txBody>
-      </p:sp>
-      <p:sp>
-        <p:nvSpPr>
-          <p:cNvPr id="31" name="Text 29"/>
-          <p:cNvSpPr txBox="1"/>
-          <p:nvPr/>
-        </p:nvSpPr>
-        <p:spPr>
-          <a:xfrm>
-            <a:off x="6492240" y="4690872"/>
-            <a:ext cx="4645152" cy="475488"/>
-          </a:xfrm>
-          <a:prstGeom prst="rect">
-            <a:avLst/>
-          </a:prstGeom>
-          <a:noFill/>
-          <a:ln/>
-        </p:spPr>
-        <p:txBody>
-          <a:bodyPr wrap="square" lIns="0" tIns="25400" rIns="25400" bIns="0" rtlCol="0" anchor="ctr"/>
-          <a:lstStyle/>
-          <a:p>
-            <a:pPr algn="ctr" indent="0" marL="0">
-              <a:lnSpc>
-                <a:spcPct val="120000"/>
-              </a:lnSpc>
-              <a:buNone/>
-            </a:pPr>
-            <a:r>
-              <a:rPr lang="en-US" sz="1800" dirty="0">
-                <a:solidFill>
-                  <a:srgbClr val="1F2937"/>
-                </a:solidFill>
-                <a:latin typeface="Pretendard" pitchFamily="34" charset="0"/>
-                <a:ea typeface="Pretendard" pitchFamily="34" charset="-122"/>
-                <a:cs typeface="Pretendard" pitchFamily="34" charset="-120"/>
-              </a:rPr>
-              <a:t>11  Overflow Guard</a:t>
-            </a:r>
-            <a:endParaRPr lang="en-US" sz="1800" dirty="0"/>
-          </a:p>
-        </p:txBody>
-      </p:sp>
-      <p:sp>
-        <p:nvSpPr>
-          <p:cNvPr id="32" name="Text 30"/>
-          <p:cNvSpPr txBox="1"/>
-          <p:nvPr/>
-        </p:nvSpPr>
-        <p:spPr>
-          <a:xfrm>
-            <a:off x="6492240" y="5486400"/>
-            <a:ext cx="4645152" cy="475488"/>
-          </a:xfrm>
-          <a:prstGeom prst="rect">
-            <a:avLst/>
-          </a:prstGeom>
-          <a:noFill/>
-          <a:ln/>
-        </p:spPr>
-        <p:txBody>
-          <a:bodyPr wrap="square" lIns="0" tIns="25400" rIns="25400" bIns="0" rtlCol="0" anchor="ctr"/>
-          <a:lstStyle/>
-          <a:p>
-            <a:pPr algn="ctr" indent="0" marL="0">
-              <a:lnSpc>
-                <a:spcPct val="120000"/>
-              </a:lnSpc>
-              <a:buNone/>
-            </a:pPr>
-            <a:r>
-              <a:rPr lang="en-US" sz="1800" dirty="0">
-                <a:solidFill>
-                  <a:srgbClr val="1F2937"/>
-                </a:solidFill>
-                <a:latin typeface="Pretendard" pitchFamily="34" charset="0"/>
-                <a:ea typeface="Pretendard" pitchFamily="34" charset="-122"/>
-                <a:cs typeface="Pretendard" pitchFamily="34" charset="-120"/>
-              </a:rPr>
-              <a:t>12  Actions Output Review</a:t>
-            </a:r>
-            <a:endParaRPr lang="en-US" sz="1800" dirty="0"/>
-          </a:p>
-        </p:txBody>
-      </p:sp>
-    </p:spTree>
-  </p:cSld>
-  <p:clrMapOvr>
-    <a:masterClrMapping/>
-  </p:clrMapOvr>
-</p:sld>
-</file>
-
 <file path=ppt/slides/slide3.xml><?xml version="1.0" encoding="utf-8"?>
 <p:sld xmlns:a="http://schemas.openxmlformats.org/drawingml/2006/main" xmlns:r="http://schemas.openxmlformats.org/officeDocument/2006/relationships" xmlns:p="http://schemas.openxmlformats.org/presentationml/2006/main">
   <p:cSld name="Slide 3">
@@ -12155,8 +16381,8 @@
         </p:nvSpPr>
         <p:spPr>
           <a:xfrm>
-            <a:off x="914400" y="3063240"/>
-            <a:ext cx="10241280" cy="73152"/>
+            <a:off x="822960" y="3099816"/>
+            <a:ext cx="10515600" cy="45720"/>
           </a:xfrm>
           <a:prstGeom prst="rect">
             <a:avLst/>
@@ -12174,87 +16400,46 @@
           </a:ln>
         </p:spPr>
       </p:sp>
-      <p:pic>
-        <p:nvPicPr>
-          <p:cNvPr id="6" name="Image 0" descr="preencoded.png">    </p:cNvPr>
-          <p:cNvPicPr>
-            <a:picLocks noChangeAspect="1"/>
-          </p:cNvPicPr>
-          <p:nvPr/>
-        </p:nvPicPr>
-        <p:blipFill>
-          <a:blip r:embed="rId1">
-            <a:extLst>
-              <a:ext uri="{96DAC541-7B7A-43D3-8B79-37D633B846F1}">
-                <asvg:svgBlip xmlns:asvg="http://schemas.microsoft.com/office/drawing/2016/SVG/main" r:embed="rId2"/>
-              </a:ext>
-            </a:extLst>
-          </a:blip>
-          <a:stretch>
-            <a:fillRect/>
-          </a:stretch>
-        </p:blipFill>
-        <p:spPr>
-          <a:xfrm>
-            <a:off x="914400" y="1417320"/>
-            <a:ext cx="10241280" cy="1325880"/>
-          </a:xfrm>
-          <a:prstGeom prst="rect">
-            <a:avLst/>
-          </a:prstGeom>
-        </p:spPr>
-      </p:pic>
-      <p:sp>
-        <p:nvSpPr>
-          <p:cNvPr id="7" name="Shape 4"/>
-          <p:cNvSpPr/>
-          <p:nvPr/>
-        </p:nvSpPr>
-        <p:spPr>
-          <a:xfrm>
-            <a:off x="914400" y="1417320"/>
-            <a:ext cx="10241280" cy="1325880"/>
-          </a:xfrm>
-          <a:prstGeom prst="rect">
-            <a:avLst/>
-          </a:prstGeom>
-          <a:solidFill>
-            <a:srgbClr val="FFFBF5">
-              <a:alpha val="0"/>
-            </a:srgbClr>
-          </a:solidFill>
-          <a:ln w="12700">
-            <a:solidFill>
-              <a:srgbClr val="E7D8C9">
+      <p:sp>
+        <p:nvSpPr>
+          <p:cNvPr id="6" name="Shape 4"/>
+          <p:cNvSpPr/>
+          <p:nvPr/>
+        </p:nvSpPr>
+        <p:spPr>
+          <a:xfrm>
+            <a:off x="822960" y="4288536"/>
+            <a:ext cx="2011680" cy="45720"/>
+          </a:xfrm>
+          <a:prstGeom prst="rect">
+            <a:avLst/>
+          </a:prstGeom>
+          <a:solidFill>
+            <a:srgbClr val="FCD34D"/>
+          </a:solidFill>
+          <a:ln w="12700">
+            <a:solidFill>
+              <a:srgbClr val="FCD34D">
                 <a:alpha val="0"/>
               </a:srgbClr>
             </a:solidFill>
             <a:prstDash val="solid"/>
           </a:ln>
-          <a:effectLst>
-            <a:outerShdw sx="100000" sy="100000" kx="0" ky="0" algn="bl" rotWithShape="0" blurRad="12700" dist="50800" dir="2700000">
-              <a:srgbClr val="000000">
-                <a:alpha val="8000"/>
-              </a:srgbClr>
-            </a:outerShdw>
-          </a:effectLst>
-        </p:spPr>
-      </p:sp>
-      <p:sp>
-        <p:nvSpPr>
-          <p:cNvPr id="8" name="Shape 5"/>
-          <p:cNvSpPr/>
-          <p:nvPr/>
-        </p:nvSpPr>
-        <p:spPr>
-          <a:xfrm>
-            <a:off x="1046988" y="1549908"/>
-            <a:ext cx="73152" cy="1060704"/>
-          </a:xfrm>
-          <a:prstGeom prst="roundRect">
-            <a:avLst>
-              <a:gd name="adj" fmla="val 25000"/>
-            </a:avLst>
+        </p:spPr>
+      </p:sp>
+      <p:sp>
+        <p:nvSpPr>
+          <p:cNvPr id="7" name="Shape 5"/>
+          <p:cNvSpPr/>
+          <p:nvPr/>
+        </p:nvSpPr>
+        <p:spPr>
+          <a:xfrm>
+            <a:off x="822960" y="3300984"/>
+            <a:ext cx="73152" cy="841248"/>
+          </a:xfrm>
+          <a:prstGeom prst="rect">
+            <a:avLst/>
           </a:prstGeom>
           <a:solidFill>
             <a:srgbClr val="B45309"/>
@@ -12271,14 +16456,14 @@
       </p:sp>
       <p:sp>
         <p:nvSpPr>
-          <p:cNvPr id="9" name="Text 6"/>
+          <p:cNvPr id="8" name="Text 6"/>
           <p:cNvSpPr txBox="1"/>
           <p:nvPr/>
         </p:nvSpPr>
         <p:spPr>
           <a:xfrm>
-            <a:off x="731520" y="457200"/>
-            <a:ext cx="10698480" cy="731520"/>
+            <a:off x="731520" y="384048"/>
+            <a:ext cx="10698480" cy="822960"/>
           </a:xfrm>
           <a:prstGeom prst="rect">
             <a:avLst/>
@@ -12297,7 +16482,7 @@
               <a:buNone/>
             </a:pPr>
             <a:r>
-              <a:rPr lang="en-US" sz="3400" b="1" dirty="0">
+              <a:rPr lang="en-US" sz="3800" b="1" dirty="0">
                 <a:solidFill>
                   <a:srgbClr val="1F2937"/>
                 </a:solidFill>
@@ -12305,22 +16490,22 @@
                 <a:ea typeface="Pretendard" pitchFamily="34" charset="-122"/>
                 <a:cs typeface="Pretendard" pitchFamily="34" charset="-120"/>
               </a:rPr>
-              <a:t>Preview Purpose</a:t>
+              <a:t>Agenda (Cont. 2/2)</a:t>
             </a:r>
-            <a:endParaRPr lang="en-US" sz="3400" dirty="0"/>
+            <a:endParaRPr lang="en-US" sz="3800" dirty="0"/>
           </a:p>
         </p:txBody>
       </p:sp>
       <p:sp>
         <p:nvSpPr>
-          <p:cNvPr id="10" name="Text 7"/>
+          <p:cNvPr id="9" name="Text 7"/>
           <p:cNvSpPr txBox="1"/>
           <p:nvPr/>
         </p:nvSpPr>
         <p:spPr>
           <a:xfrm>
-            <a:off x="1298448" y="1545336"/>
-            <a:ext cx="9637776" cy="1069848"/>
+            <a:off x="1042416" y="3392424"/>
+            <a:ext cx="10094976" cy="658368"/>
           </a:xfrm>
           <a:prstGeom prst="rect">
             <a:avLst/>
@@ -12329,69 +16514,10 @@
           <a:ln/>
         </p:spPr>
         <p:txBody>
-          <a:bodyPr wrap="square" lIns="0" tIns="0" rIns="0" bIns="0" rtlCol="0" anchor="ctr"/>
+          <a:bodyPr wrap="square" lIns="0" tIns="25400" rIns="25400" bIns="0" rtlCol="0" anchor="ctr"/>
           <a:lstStyle/>
           <a:p>
-            <a:pPr algn="l" indent="0" marL="0">
-              <a:lnSpc>
-                <a:spcPct val="120000"/>
-              </a:lnSpc>
-              <a:buNone/>
-            </a:pPr>
-            <a:r>
-              <a:rPr lang="en-US" sz="2200" b="1" dirty="0">
-                <a:solidFill>
-                  <a:srgbClr val="1F2937"/>
-                </a:solidFill>
-                <a:latin typeface="Pretendard" pitchFamily="34" charset="0"/>
-                <a:ea typeface="Pretendard" pitchFamily="34" charset="-122"/>
-                <a:cs typeface="Pretendard" pitchFamily="34" charset="-120"/>
-              </a:rPr>
-              <a:t>Generated decks must prove hierarchy, evidence, and object grammar before decoration.</a:t>
-            </a:r>
-            <a:endParaRPr lang="en-US" sz="2200" dirty="0"/>
-          </a:p>
-        </p:txBody>
-      </p:sp>
-      <p:sp>
-        <p:nvSpPr>
-          <p:cNvPr id="11" name="Text 8"/>
-          <p:cNvSpPr txBox="1"/>
-          <p:nvPr/>
-        </p:nvSpPr>
-        <p:spPr>
-          <a:xfrm>
-            <a:off x="987552" y="3172968"/>
-            <a:ext cx="10094976" cy="2478024"/>
-          </a:xfrm>
-          <a:prstGeom prst="rect">
-            <a:avLst/>
-          </a:prstGeom>
-          <a:noFill/>
-          <a:ln/>
-        </p:spPr>
-        <p:txBody>
-          <a:bodyPr wrap="square" lIns="0" tIns="25400" rIns="25400" bIns="0" rtlCol="0" anchor="t"/>
-          <a:lstStyle/>
-          <a:p>
-            <a:pPr algn="l" indent="0" marL="0">
-              <a:lnSpc>
-                <a:spcPct val="120000"/>
-              </a:lnSpc>
-              <a:buNone/>
-            </a:pPr>
-            <a:r>
-              <a:rPr lang="en-US" sz="2200" b="1" dirty="0">
-                <a:solidFill>
-                  <a:srgbClr val="B45309"/>
-                </a:solidFill>
-                <a:latin typeface="Pretendard" pitchFamily="34" charset="0"/>
-                <a:ea typeface="Pretendard" pitchFamily="34" charset="-122"/>
-                <a:cs typeface="Pretendard" pitchFamily="34" charset="-120"/>
-              </a:rPr>
-              <a:t>- Fixture type</a:t>
-            </a:r>
-            <a:pPr algn="l" indent="0" marL="0">
+            <a:pPr algn="ctr" indent="0" marL="0">
               <a:lnSpc>
                 <a:spcPct val="120000"/>
               </a:lnSpc>
@@ -12406,87 +16532,7 @@
                 <a:ea typeface="Pretendard" pitchFamily="34" charset="-122"/>
                 <a:cs typeface="Pretendard" pitchFamily="34" charset="-120"/>
               </a:rPr>
-              <a:t>  Actions theme preview source.</a:t>
-            </a:r>
-            <a:endParaRPr lang="en-US" sz="2200" dirty="0"/>
-          </a:p>
-          <a:p>
-            <a:pPr algn="l" indent="0" marL="0">
-              <a:lnSpc>
-                <a:spcPct val="120000"/>
-              </a:lnSpc>
-              <a:buNone/>
-            </a:pPr>
-            <a:r>
-              <a:rPr lang="en-US" sz="2200" b="1" dirty="0">
-                <a:solidFill>
-                  <a:srgbClr val="B45309"/>
-                </a:solidFill>
-                <a:latin typeface="Pretendard" pitchFamily="34" charset="0"/>
-                <a:ea typeface="Pretendard" pitchFamily="34" charset="-122"/>
-                <a:cs typeface="Pretendard" pitchFamily="34" charset="-120"/>
-              </a:rPr>
-              <a:t>- Source shape</a:t>
-            </a:r>
-            <a:endParaRPr lang="en-US" sz="2200" dirty="0"/>
-          </a:p>
-          <a:p>
-            <a:pPr algn="l" indent="0" marL="0">
-              <a:lnSpc>
-                <a:spcPct val="120000"/>
-              </a:lnSpc>
-              <a:buNone/>
-            </a:pPr>
-            <a:r>
-              <a:rPr lang="en-US" sz="2200" dirty="0">
-                <a:solidFill>
-                  <a:srgbClr val="1F2937"/>
-                </a:solidFill>
-                <a:latin typeface="Pretendard" pitchFamily="34" charset="0"/>
-                <a:ea typeface="Pretendard" pitchFamily="34" charset="-122"/>
-                <a:cs typeface="Pretendard" pitchFamily="34" charset="-120"/>
-              </a:rPr>
-              <a:t>  short bullets, bounded tables, and one-slide diagrams.</a:t>
-            </a:r>
-            <a:endParaRPr lang="en-US" sz="2200" dirty="0"/>
-          </a:p>
-          <a:p>
-            <a:pPr algn="l" indent="0" marL="0">
-              <a:lnSpc>
-                <a:spcPct val="120000"/>
-              </a:lnSpc>
-              <a:buNone/>
-            </a:pPr>
-            <a:r>
-              <a:rPr lang="en-US" sz="2200" b="1" dirty="0">
-                <a:solidFill>
-                  <a:srgbClr val="B45309"/>
-                </a:solidFill>
-                <a:latin typeface="Pretendard" pitchFamily="34" charset="0"/>
-                <a:ea typeface="Pretendard" pitchFamily="34" charset="-122"/>
-                <a:cs typeface="Pretendard" pitchFamily="34" charset="-120"/>
-              </a:rPr>
-              <a:t>- Review target</a:t>
-            </a:r>
-            <a:endParaRPr lang="en-US" sz="2200" dirty="0"/>
-          </a:p>
-          <a:p>
-            <a:pPr algn="l" indent="0" marL="0">
-              <a:lnSpc>
-                <a:spcPct val="120000"/>
-              </a:lnSpc>
-              <a:buNone/>
-            </a:pPr>
-            <a:r>
-              <a:rPr lang="en-US" sz="2200" dirty="0">
-                <a:solidFill>
-                  <a:srgbClr val="1F2937"/>
-                </a:solidFill>
-                <a:latin typeface="Pretendard" pitchFamily="34" charset="0"/>
-                <a:ea typeface="Pretendard" pitchFamily="34" charset="-122"/>
-                <a:cs typeface="Pretendard" pitchFamily="34" charset="-120"/>
-              </a:rPr>
-              <a:t>  readable, coherent, composition-aware output.</a:t>
+              <a:t>01  Actions Output Review</a:t>
             </a:r>
             <a:endParaRPr lang="en-US" sz="2200" dirty="0"/>
           </a:p>
@@ -12613,6 +16659,504 @@
         </p:nvSpPr>
         <p:spPr>
           <a:xfrm>
+            <a:off x="914400" y="3063240"/>
+            <a:ext cx="10241280" cy="73152"/>
+          </a:xfrm>
+          <a:prstGeom prst="rect">
+            <a:avLst/>
+          </a:prstGeom>
+          <a:solidFill>
+            <a:srgbClr val="B45309"/>
+          </a:solidFill>
+          <a:ln w="12700">
+            <a:solidFill>
+              <a:srgbClr val="B45309">
+                <a:alpha val="0"/>
+              </a:srgbClr>
+            </a:solidFill>
+            <a:prstDash val="solid"/>
+          </a:ln>
+        </p:spPr>
+      </p:sp>
+      <p:pic>
+        <p:nvPicPr>
+          <p:cNvPr id="6" name="Image 0" descr="preencoded.png">    </p:cNvPr>
+          <p:cNvPicPr>
+            <a:picLocks noChangeAspect="1"/>
+          </p:cNvPicPr>
+          <p:nvPr/>
+        </p:nvPicPr>
+        <p:blipFill>
+          <a:blip r:embed="rId1">
+            <a:extLst>
+              <a:ext uri="{96DAC541-7B7A-43D3-8B79-37D633B846F1}">
+                <asvg:svgBlip xmlns:asvg="http://schemas.microsoft.com/office/drawing/2016/SVG/main" r:embed="rId2"/>
+              </a:ext>
+            </a:extLst>
+          </a:blip>
+          <a:stretch>
+            <a:fillRect/>
+          </a:stretch>
+        </p:blipFill>
+        <p:spPr>
+          <a:xfrm>
+            <a:off x="914400" y="1417320"/>
+            <a:ext cx="10241280" cy="1325880"/>
+          </a:xfrm>
+          <a:prstGeom prst="rect">
+            <a:avLst/>
+          </a:prstGeom>
+        </p:spPr>
+      </p:pic>
+      <p:sp>
+        <p:nvSpPr>
+          <p:cNvPr id="7" name="Shape 4"/>
+          <p:cNvSpPr/>
+          <p:nvPr/>
+        </p:nvSpPr>
+        <p:spPr>
+          <a:xfrm>
+            <a:off x="914400" y="1417320"/>
+            <a:ext cx="10241280" cy="1325880"/>
+          </a:xfrm>
+          <a:prstGeom prst="rect">
+            <a:avLst/>
+          </a:prstGeom>
+          <a:solidFill>
+            <a:srgbClr val="FFFBF5">
+              <a:alpha val="0"/>
+            </a:srgbClr>
+          </a:solidFill>
+          <a:ln w="12700">
+            <a:solidFill>
+              <a:srgbClr val="E7D8C9">
+                <a:alpha val="0"/>
+              </a:srgbClr>
+            </a:solidFill>
+            <a:prstDash val="solid"/>
+          </a:ln>
+          <a:effectLst>
+            <a:outerShdw sx="100000" sy="100000" kx="0" ky="0" algn="bl" rotWithShape="0" blurRad="12700" dist="50800" dir="2700000">
+              <a:srgbClr val="000000">
+                <a:alpha val="8000"/>
+              </a:srgbClr>
+            </a:outerShdw>
+          </a:effectLst>
+        </p:spPr>
+      </p:sp>
+      <p:sp>
+        <p:nvSpPr>
+          <p:cNvPr id="8" name="Shape 5"/>
+          <p:cNvSpPr/>
+          <p:nvPr/>
+        </p:nvSpPr>
+        <p:spPr>
+          <a:xfrm>
+            <a:off x="1046988" y="1549908"/>
+            <a:ext cx="73152" cy="1060704"/>
+          </a:xfrm>
+          <a:prstGeom prst="roundRect">
+            <a:avLst>
+              <a:gd name="adj" fmla="val 25000"/>
+            </a:avLst>
+          </a:prstGeom>
+          <a:solidFill>
+            <a:srgbClr val="B45309"/>
+          </a:solidFill>
+          <a:ln w="12700">
+            <a:solidFill>
+              <a:srgbClr val="B45309">
+                <a:alpha val="0"/>
+              </a:srgbClr>
+            </a:solidFill>
+            <a:prstDash val="solid"/>
+          </a:ln>
+        </p:spPr>
+      </p:sp>
+      <p:sp>
+        <p:nvSpPr>
+          <p:cNvPr id="9" name="Text 6"/>
+          <p:cNvSpPr txBox="1"/>
+          <p:nvPr/>
+        </p:nvSpPr>
+        <p:spPr>
+          <a:xfrm>
+            <a:off x="731520" y="457200"/>
+            <a:ext cx="10698480" cy="731520"/>
+          </a:xfrm>
+          <a:prstGeom prst="rect">
+            <a:avLst/>
+          </a:prstGeom>
+          <a:noFill/>
+          <a:ln/>
+        </p:spPr>
+        <p:txBody>
+          <a:bodyPr wrap="square" lIns="0" tIns="0" rIns="0" bIns="0" rtlCol="0" anchor="ctr"/>
+          <a:lstStyle/>
+          <a:p>
+            <a:pPr algn="ctr" indent="0" marL="0">
+              <a:lnSpc>
+                <a:spcPct val="120000"/>
+              </a:lnSpc>
+              <a:buNone/>
+            </a:pPr>
+            <a:r>
+              <a:rPr lang="en-US" sz="3400" b="1" dirty="0">
+                <a:solidFill>
+                  <a:srgbClr val="1F2937"/>
+                </a:solidFill>
+                <a:latin typeface="Pretendard" pitchFamily="34" charset="0"/>
+                <a:ea typeface="Pretendard" pitchFamily="34" charset="-122"/>
+                <a:cs typeface="Pretendard" pitchFamily="34" charset="-120"/>
+              </a:rPr>
+              <a:t>Teaser Summary</a:t>
+            </a:r>
+            <a:endParaRPr lang="en-US" sz="3400" dirty="0"/>
+          </a:p>
+        </p:txBody>
+      </p:sp>
+      <p:sp>
+        <p:nvSpPr>
+          <p:cNvPr id="10" name="Text 7"/>
+          <p:cNvSpPr txBox="1"/>
+          <p:nvPr/>
+        </p:nvSpPr>
+        <p:spPr>
+          <a:xfrm>
+            <a:off x="1298448" y="1545336"/>
+            <a:ext cx="9637776" cy="1069848"/>
+          </a:xfrm>
+          <a:prstGeom prst="rect">
+            <a:avLst/>
+          </a:prstGeom>
+          <a:noFill/>
+          <a:ln/>
+        </p:spPr>
+        <p:txBody>
+          <a:bodyPr wrap="square" lIns="0" tIns="0" rIns="0" bIns="0" rtlCol="0" anchor="ctr"/>
+          <a:lstStyle/>
+          <a:p>
+            <a:pPr algn="l" indent="0" marL="0">
+              <a:lnSpc>
+                <a:spcPct val="120000"/>
+              </a:lnSpc>
+              <a:buNone/>
+            </a:pPr>
+            <a:r>
+              <a:rPr lang="en-US" sz="2200" b="1" dirty="0">
+                <a:solidFill>
+                  <a:srgbClr val="1F2937"/>
+                </a:solidFill>
+                <a:latin typeface="Pretendard" pitchFamily="34" charset="0"/>
+                <a:ea typeface="Pretendard" pitchFamily="34" charset="-122"/>
+                <a:cs typeface="Pretendard" pitchFamily="34" charset="-120"/>
+              </a:rPr>
+              <a:t>Generated PPTX slides should show design range without sacrificing coherence.</a:t>
+            </a:r>
+            <a:endParaRPr lang="en-US" sz="2200" dirty="0"/>
+          </a:p>
+        </p:txBody>
+      </p:sp>
+      <p:sp>
+        <p:nvSpPr>
+          <p:cNvPr id="11" name="Text 8"/>
+          <p:cNvSpPr txBox="1"/>
+          <p:nvPr/>
+        </p:nvSpPr>
+        <p:spPr>
+          <a:xfrm>
+            <a:off x="987552" y="3172968"/>
+            <a:ext cx="10094976" cy="2478024"/>
+          </a:xfrm>
+          <a:prstGeom prst="rect">
+            <a:avLst/>
+          </a:prstGeom>
+          <a:noFill/>
+          <a:ln/>
+        </p:spPr>
+        <p:txBody>
+          <a:bodyPr wrap="square" lIns="0" tIns="25400" rIns="25400" bIns="0" rtlCol="0" anchor="t"/>
+          <a:lstStyle/>
+          <a:p>
+            <a:pPr algn="l" indent="0" marL="0">
+              <a:lnSpc>
+                <a:spcPct val="120000"/>
+              </a:lnSpc>
+              <a:buNone/>
+            </a:pPr>
+            <a:r>
+              <a:rPr lang="en-US" sz="2200" b="1" dirty="0">
+                <a:solidFill>
+                  <a:srgbClr val="B45309"/>
+                </a:solidFill>
+                <a:latin typeface="Pretendard" pitchFamily="34" charset="0"/>
+                <a:ea typeface="Pretendard" pitchFamily="34" charset="-122"/>
+                <a:cs typeface="Pretendard" pitchFamily="34" charset="-120"/>
+              </a:rPr>
+              <a:t>- Preview styles</a:t>
+            </a:r>
+            <a:pPr algn="l" indent="0" marL="0">
+              <a:lnSpc>
+                <a:spcPct val="120000"/>
+              </a:lnSpc>
+              <a:buNone/>
+            </a:pPr>
+            <a:r>
+              <a:rPr lang="en-US" sz="2200" dirty="0">
+                <a:solidFill>
+                  <a:srgbClr val="1F2937"/>
+                </a:solidFill>
+                <a:latin typeface="Pretendard" pitchFamily="34" charset="0"/>
+                <a:ea typeface="Pretendard" pitchFamily="34" charset="-122"/>
+                <a:cs typeface="Pretendard" pitchFamily="34" charset="-120"/>
+              </a:rPr>
+              <a:t>  8 pruned decoration grammars, not palette-only swaps.</a:t>
+            </a:r>
+            <a:endParaRPr lang="en-US" sz="2200" dirty="0"/>
+          </a:p>
+          <a:p>
+            <a:pPr algn="l" indent="0" marL="0">
+              <a:lnSpc>
+                <a:spcPct val="120000"/>
+              </a:lnSpc>
+              <a:buNone/>
+            </a:pPr>
+            <a:r>
+              <a:rPr lang="en-US" sz="2200" b="1" dirty="0">
+                <a:solidFill>
+                  <a:srgbClr val="B45309"/>
+                </a:solidFill>
+                <a:latin typeface="Pretendard" pitchFamily="34" charset="0"/>
+                <a:ea typeface="Pretendard" pitchFamily="34" charset="-122"/>
+                <a:cs typeface="Pretendard" pitchFamily="34" charset="-120"/>
+              </a:rPr>
+              <a:t>- Pattern range</a:t>
+            </a:r>
+            <a:endParaRPr lang="en-US" sz="2200" dirty="0"/>
+          </a:p>
+          <a:p>
+            <a:pPr algn="l" indent="0" marL="0">
+              <a:lnSpc>
+                <a:spcPct val="120000"/>
+              </a:lnSpc>
+              <a:buNone/>
+            </a:pPr>
+            <a:r>
+              <a:rPr lang="en-US" sz="2200" dirty="0">
+                <a:solidFill>
+                  <a:srgbClr val="1F2937"/>
+                </a:solidFill>
+                <a:latin typeface="Pretendard" pitchFamily="34" charset="0"/>
+                <a:ea typeface="Pretendard" pitchFamily="34" charset="-122"/>
+                <a:cs typeface="Pretendard" pitchFamily="34" charset="-120"/>
+              </a:rPr>
+              <a:t>  36+ decoration and layout patterns selected by content role.</a:t>
+            </a:r>
+            <a:endParaRPr lang="en-US" sz="2200" dirty="0"/>
+          </a:p>
+          <a:p>
+            <a:pPr algn="l" indent="0" marL="0">
+              <a:lnSpc>
+                <a:spcPct val="120000"/>
+              </a:lnSpc>
+              <a:buNone/>
+            </a:pPr>
+            <a:r>
+              <a:rPr lang="en-US" sz="2200" b="1" dirty="0">
+                <a:solidFill>
+                  <a:srgbClr val="B45309"/>
+                </a:solidFill>
+                <a:latin typeface="Pretendard" pitchFamily="34" charset="0"/>
+                <a:ea typeface="Pretendard" pitchFamily="34" charset="-122"/>
+                <a:cs typeface="Pretendard" pitchFamily="34" charset="-120"/>
+              </a:rPr>
+              <a:t>- Object support</a:t>
+            </a:r>
+            <a:endParaRPr lang="en-US" sz="2200" dirty="0"/>
+          </a:p>
+          <a:p>
+            <a:pPr algn="l" indent="0" marL="0">
+              <a:lnSpc>
+                <a:spcPct val="120000"/>
+              </a:lnSpc>
+              <a:buNone/>
+            </a:pPr>
+            <a:r>
+              <a:rPr lang="en-US" sz="2200" dirty="0">
+                <a:solidFill>
+                  <a:srgbClr val="1F2937"/>
+                </a:solidFill>
+                <a:latin typeface="Pretendard" pitchFamily="34" charset="0"/>
+                <a:ea typeface="Pretendard" pitchFamily="34" charset="-122"/>
+                <a:cs typeface="Pretendard" pitchFamily="34" charset="-120"/>
+              </a:rPr>
+              <a:t>  native tables, charts, proof objects, diagrams, images, and icon slots.</a:t>
+            </a:r>
+            <a:endParaRPr lang="en-US" sz="2200" dirty="0"/>
+          </a:p>
+          <a:p>
+            <a:pPr algn="l" indent="0" marL="0">
+              <a:lnSpc>
+                <a:spcPct val="120000"/>
+              </a:lnSpc>
+              <a:buNone/>
+            </a:pPr>
+            <a:r>
+              <a:rPr lang="en-US" sz="2200" b="1" dirty="0">
+                <a:solidFill>
+                  <a:srgbClr val="B45309"/>
+                </a:solidFill>
+                <a:latin typeface="Pretendard" pitchFamily="34" charset="0"/>
+                <a:ea typeface="Pretendard" pitchFamily="34" charset="-122"/>
+                <a:cs typeface="Pretendard" pitchFamily="34" charset="-120"/>
+              </a:rPr>
+              <a:t>- QA contract</a:t>
+            </a:r>
+            <a:endParaRPr lang="en-US" sz="2200" dirty="0"/>
+          </a:p>
+          <a:p>
+            <a:pPr algn="l" indent="0" marL="0">
+              <a:lnSpc>
+                <a:spcPct val="120000"/>
+              </a:lnSpc>
+              <a:buNone/>
+            </a:pPr>
+            <a:r>
+              <a:rPr lang="en-US" sz="2200" dirty="0">
+                <a:solidFill>
+                  <a:srgbClr val="1F2937"/>
+                </a:solidFill>
+                <a:latin typeface="Pretendard" pitchFamily="34" charset="0"/>
+                <a:ea typeface="Pretendard" pitchFamily="34" charset="-122"/>
+                <a:cs typeface="Pretendard" pitchFamily="34" charset="-120"/>
+              </a:rPr>
+              <a:t>  readable text, bounded objects, aligned connectors, and editable PPTX output.</a:t>
+            </a:r>
+            <a:endParaRPr lang="en-US" sz="2200" dirty="0"/>
+          </a:p>
+        </p:txBody>
+      </p:sp>
+    </p:spTree>
+  </p:cSld>
+  <p:clrMapOvr>
+    <a:masterClrMapping/>
+  </p:clrMapOvr>
+</p:sld>
+</file>
+
+<file path=ppt/slides/slide5.xml><?xml version="1.0" encoding="utf-8"?>
+<p:sld xmlns:a="http://schemas.openxmlformats.org/drawingml/2006/main" xmlns:r="http://schemas.openxmlformats.org/officeDocument/2006/relationships" xmlns:p="http://schemas.openxmlformats.org/presentationml/2006/main">
+  <p:cSld name="Slide 5">
+    <p:bg>
+      <p:bgPr>
+        <a:solidFill>
+          <a:srgbClr val="F7F3EF"/>
+        </a:solidFill>
+      </p:bgPr>
+    </p:bg>
+    <p:spTree>
+      <p:nvGrpSpPr>
+        <p:cNvPr id="1" name=""/>
+        <p:cNvGrpSpPr/>
+        <p:nvPr/>
+      </p:nvGrpSpPr>
+      <p:grpSpPr>
+        <a:xfrm>
+          <a:off x="0" y="0"/>
+          <a:ext cx="0" cy="0"/>
+          <a:chOff x="0" y="0"/>
+          <a:chExt cx="0" cy="0"/>
+        </a:xfrm>
+      </p:grpSpPr>
+      <p:sp>
+        <p:nvSpPr>
+          <p:cNvPr id="2" name="Shape 0"/>
+          <p:cNvSpPr/>
+          <p:nvPr/>
+        </p:nvSpPr>
+        <p:spPr>
+          <a:xfrm>
+            <a:off x="10134295" y="0"/>
+            <a:ext cx="2057400" cy="256032"/>
+          </a:xfrm>
+          <a:prstGeom prst="rect">
+            <a:avLst/>
+          </a:prstGeom>
+          <a:solidFill>
+            <a:srgbClr val="B45309"/>
+          </a:solidFill>
+          <a:ln w="12700">
+            <a:solidFill>
+              <a:srgbClr val="B45309">
+                <a:alpha val="0"/>
+              </a:srgbClr>
+            </a:solidFill>
+            <a:prstDash val="solid"/>
+          </a:ln>
+        </p:spPr>
+      </p:sp>
+      <p:sp>
+        <p:nvSpPr>
+          <p:cNvPr id="3" name="Shape 1"/>
+          <p:cNvSpPr/>
+          <p:nvPr/>
+        </p:nvSpPr>
+        <p:spPr>
+          <a:xfrm>
+            <a:off x="11048695" y="256032"/>
+            <a:ext cx="1143000" cy="73152"/>
+          </a:xfrm>
+          <a:prstGeom prst="rect">
+            <a:avLst/>
+          </a:prstGeom>
+          <a:solidFill>
+            <a:srgbClr val="FCD34D"/>
+          </a:solidFill>
+          <a:ln w="12700">
+            <a:solidFill>
+              <a:srgbClr val="FCD34D">
+                <a:alpha val="0"/>
+              </a:srgbClr>
+            </a:solidFill>
+            <a:prstDash val="solid"/>
+          </a:ln>
+        </p:spPr>
+      </p:sp>
+      <p:sp>
+        <p:nvSpPr>
+          <p:cNvPr id="4" name="Shape 2"/>
+          <p:cNvSpPr/>
+          <p:nvPr/>
+        </p:nvSpPr>
+        <p:spPr>
+          <a:xfrm>
+            <a:off x="731520" y="1207008"/>
+            <a:ext cx="1325880" cy="54864"/>
+          </a:xfrm>
+          <a:prstGeom prst="rect">
+            <a:avLst/>
+          </a:prstGeom>
+          <a:solidFill>
+            <a:srgbClr val="B45309"/>
+          </a:solidFill>
+          <a:ln w="12700">
+            <a:solidFill>
+              <a:srgbClr val="B45309">
+                <a:alpha val="0"/>
+              </a:srgbClr>
+            </a:solidFill>
+            <a:prstDash val="solid"/>
+          </a:ln>
+        </p:spPr>
+      </p:sp>
+      <p:sp>
+        <p:nvSpPr>
+          <p:cNvPr id="5" name="Shape 3"/>
+          <p:cNvSpPr/>
+          <p:nvPr/>
+        </p:nvSpPr>
+        <p:spPr>
+          <a:xfrm>
             <a:off x="786384" y="1956816"/>
             <a:ext cx="32004" cy="3483864"/>
           </a:xfrm>
@@ -13020,8 +17564,8 @@
         </p:nvSpPr>
         <p:spPr>
           <a:xfrm>
-            <a:off x="1699321" y="1957548"/>
-            <a:ext cx="9255191" cy="839785"/>
+            <a:off x="1699321" y="1987296"/>
+            <a:ext cx="9255191" cy="780288"/>
           </a:xfrm>
           <a:prstGeom prst="rect">
             <a:avLst/>
@@ -13136,8 +17680,8 @@
         </p:nvSpPr>
         <p:spPr>
           <a:xfrm>
-            <a:off x="1699321" y="3283428"/>
-            <a:ext cx="9255191" cy="839785"/>
+            <a:off x="1699321" y="3313176"/>
+            <a:ext cx="9255191" cy="780288"/>
           </a:xfrm>
           <a:prstGeom prst="rect">
             <a:avLst/>
@@ -13252,8 +17796,8 @@
         </p:nvSpPr>
         <p:spPr>
           <a:xfrm>
-            <a:off x="1699321" y="4600164"/>
-            <a:ext cx="9255191" cy="839785"/>
+            <a:off x="1699321" y="4629912"/>
+            <a:ext cx="9255191" cy="780288"/>
           </a:xfrm>
           <a:prstGeom prst="rect">
             <a:avLst/>
@@ -13311,9 +17855,9 @@
 </p:sld>
 </file>
 
-<file path=ppt/slides/slide5.xml><?xml version="1.0" encoding="utf-8"?>
+<file path=ppt/slides/slide6.xml><?xml version="1.0" encoding="utf-8"?>
 <p:sld xmlns:a="http://schemas.openxmlformats.org/drawingml/2006/main" xmlns:r="http://schemas.openxmlformats.org/officeDocument/2006/relationships" xmlns:p="http://schemas.openxmlformats.org/presentationml/2006/main">
-  <p:cSld name="Slide 5">
+  <p:cSld name="Slide 6">
     <p:bg>
       <p:bgPr>
         <a:solidFill>
@@ -13638,9 +18182,9 @@
 </p:sld>
 </file>
 
-<file path=ppt/slides/slide6.xml><?xml version="1.0" encoding="utf-8"?>
+<file path=ppt/slides/slide7.xml><?xml version="1.0" encoding="utf-8"?>
 <p:sld xmlns:a="http://schemas.openxmlformats.org/drawingml/2006/main" xmlns:r="http://schemas.openxmlformats.org/officeDocument/2006/relationships" xmlns:p="http://schemas.openxmlformats.org/presentationml/2006/main">
-  <p:cSld name="Slide 6">
+  <p:cSld name="Slide 7">
     <p:bg>
       <p:bgPr>
         <a:solidFill>
@@ -14087,7 +18631,7 @@
                 <a:ea typeface="Pretendard" pitchFamily="34" charset="-122"/>
                 <a:cs typeface="Pretendard" pitchFamily="34" charset="-120"/>
               </a:rPr>
-              <a:t>Style Families</a:t>
+              <a:t>Pruned Style Families</a:t>
             </a:r>
             <a:endParaRPr lang="en-US" sz="3400" dirty="0"/>
           </a:p>
@@ -14158,8 +18702,8 @@
         </p:nvSpPr>
         <p:spPr>
           <a:xfrm>
-            <a:off x="1699321" y="1957548"/>
-            <a:ext cx="9255191" cy="839785"/>
+            <a:off x="1699321" y="1987296"/>
+            <a:ext cx="9255191" cy="780288"/>
           </a:xfrm>
           <a:prstGeom prst="rect">
             <a:avLst/>
@@ -14186,7 +18730,7 @@
                 <a:ea typeface="Pretendard" pitchFamily="34" charset="-122"/>
                 <a:cs typeface="Pretendard" pitchFamily="34" charset="-120"/>
               </a:rPr>
-              <a:t>Clean / minimalism</a:t>
+              <a:t>Clean</a:t>
             </a:r>
             <a:pPr algn="l" indent="0" marL="0">
               <a:lnSpc>
@@ -14203,7 +18747,7 @@
                 <a:ea typeface="Pretendard" pitchFamily="34" charset="-122"/>
                 <a:cs typeface="Pretendard" pitchFamily="34" charset="-120"/>
               </a:rPr>
-              <a:t>  restrained structural baselines.</a:t>
+              <a:t>  restrained default structure.</a:t>
             </a:r>
             <a:endParaRPr lang="en-US" sz="2200" dirty="0"/>
           </a:p>
@@ -14238,7 +18782,7 @@
       </p:sp>
       <p:pic>
         <p:nvPicPr>
-          <p:cNvPr id="20" name="Image 4" descr="article icon from tabler-icons (MIT)">    </p:cNvPr>
+          <p:cNvPr id="20" name="Image 4" descr="chart icon from tabler-icons (MIT)">    </p:cNvPr>
           <p:cNvPicPr>
             <a:picLocks noChangeAspect="1"/>
           </p:cNvPicPr>
@@ -14274,124 +18818,8 @@
         </p:nvSpPr>
         <p:spPr>
           <a:xfrm>
-            <a:off x="1699321" y="3283428"/>
-            <a:ext cx="9255191" cy="839785"/>
-          </a:xfrm>
-          <a:prstGeom prst="rect">
-            <a:avLst/>
-          </a:prstGeom>
-          <a:noFill/>
-          <a:ln/>
-        </p:spPr>
-        <p:txBody>
-          <a:bodyPr wrap="square" lIns="0" tIns="25400" rIns="25400" bIns="0" rtlCol="0" anchor="ctr"/>
-          <a:lstStyle/>
-          <a:p>
-            <a:pPr algn="l" indent="0" marL="0">
-              <a:lnSpc>
-                <a:spcPct val="120000"/>
-              </a:lnSpc>
-              <a:buNone/>
-            </a:pPr>
-            <a:r>
-              <a:rPr lang="en-US" sz="2200" b="1" dirty="0">
-                <a:solidFill>
-                  <a:srgbClr val="B45309"/>
-                </a:solidFill>
-                <a:latin typeface="Pretendard" pitchFamily="34" charset="0"/>
-                <a:ea typeface="Pretendard" pitchFamily="34" charset="-122"/>
-                <a:cs typeface="Pretendard" pitchFamily="34" charset="-120"/>
-              </a:rPr>
-              <a:t>Executive / technical</a:t>
-            </a:r>
-            <a:pPr algn="l" indent="0" marL="0">
-              <a:lnSpc>
-                <a:spcPct val="120000"/>
-              </a:lnSpc>
-              <a:buNone/>
-            </a:pPr>
-            <a:r>
-              <a:rPr lang="en-US" sz="2200" dirty="0">
-                <a:solidFill>
-                  <a:srgbClr val="1F2937"/>
-                </a:solidFill>
-                <a:latin typeface="Pretendard" pitchFamily="34" charset="0"/>
-                <a:ea typeface="Pretendard" pitchFamily="34" charset="-122"/>
-                <a:cs typeface="Pretendard" pitchFamily="34" charset="-120"/>
-              </a:rPr>
-              <a:t>  structured operational hierarchy.</a:t>
-            </a:r>
-            <a:endParaRPr lang="en-US" sz="2200" dirty="0"/>
-          </a:p>
-        </p:txBody>
-      </p:sp>
-      <p:sp>
-        <p:nvSpPr>
-          <p:cNvPr id="22" name="Shape 15"/>
-          <p:cNvSpPr/>
-          <p:nvPr/>
-        </p:nvSpPr>
-        <p:spPr>
-          <a:xfrm>
-            <a:off x="1097280" y="4783044"/>
-            <a:ext cx="474025" cy="474025"/>
-          </a:xfrm>
-          <a:prstGeom prst="roundRect">
-            <a:avLst>
-              <a:gd name="adj" fmla="val 7716"/>
-            </a:avLst>
-          </a:prstGeom>
-          <a:solidFill>
-            <a:srgbClr val="F7F3EF"/>
-          </a:solidFill>
-          <a:ln w="12700">
-            <a:solidFill>
-              <a:srgbClr val="E7D8C9"/>
-            </a:solidFill>
-            <a:prstDash val="solid"/>
-          </a:ln>
-        </p:spPr>
-      </p:sp>
-      <p:pic>
-        <p:nvPicPr>
-          <p:cNvPr id="23" name="Image 5" descr="article icon from tabler-icons (MIT)">    </p:cNvPr>
-          <p:cNvPicPr>
-            <a:picLocks noChangeAspect="1"/>
-          </p:cNvPicPr>
-          <p:nvPr/>
-        </p:nvPicPr>
-        <p:blipFill>
-          <a:blip r:embed="rId11">
-            <a:extLst>
-              <a:ext uri="{96DAC541-7B7A-43D3-8B79-37D633B846F1}">
-                <asvg:svgBlip xmlns:asvg="http://schemas.microsoft.com/office/drawing/2016/SVG/main" r:embed="rId12"/>
-              </a:ext>
-            </a:extLst>
-          </a:blip>
-          <a:stretch>
-            <a:fillRect/>
-          </a:stretch>
-        </p:blipFill>
-        <p:spPr>
-          <a:xfrm>
-            <a:off x="1170432" y="4856196"/>
-            <a:ext cx="327721" cy="327721"/>
-          </a:xfrm>
-          <a:prstGeom prst="rect">
-            <a:avLst/>
-          </a:prstGeom>
-        </p:spPr>
-      </p:pic>
-      <p:sp>
-        <p:nvSpPr>
-          <p:cNvPr id="24" name="Text 16"/>
-          <p:cNvSpPr txBox="1"/>
-          <p:nvPr/>
-        </p:nvSpPr>
-        <p:spPr>
-          <a:xfrm>
-            <a:off x="1699321" y="4600164"/>
-            <a:ext cx="9255191" cy="839785"/>
+            <a:off x="1699321" y="3313176"/>
+            <a:ext cx="9255191" cy="780288"/>
           </a:xfrm>
           <a:prstGeom prst="rect">
             <a:avLst/>
@@ -14435,7 +18863,123 @@
                 <a:ea typeface="Pretendard" pitchFamily="34" charset="-122"/>
                 <a:cs typeface="Pretendard" pitchFamily="34" charset="-120"/>
               </a:rPr>
-              <a:t>  warmer page rhythm.</a:t>
+              <a:t>  asymmetric rhythm and publication-like accents.</a:t>
+            </a:r>
+            <a:endParaRPr lang="en-US" sz="2200" dirty="0"/>
+          </a:p>
+        </p:txBody>
+      </p:sp>
+      <p:sp>
+        <p:nvSpPr>
+          <p:cNvPr id="22" name="Shape 15"/>
+          <p:cNvSpPr/>
+          <p:nvPr/>
+        </p:nvSpPr>
+        <p:spPr>
+          <a:xfrm>
+            <a:off x="1097280" y="4783044"/>
+            <a:ext cx="474025" cy="474025"/>
+          </a:xfrm>
+          <a:prstGeom prst="roundRect">
+            <a:avLst>
+              <a:gd name="adj" fmla="val 7716"/>
+            </a:avLst>
+          </a:prstGeom>
+          <a:solidFill>
+            <a:srgbClr val="F7F3EF"/>
+          </a:solidFill>
+          <a:ln w="12700">
+            <a:solidFill>
+              <a:srgbClr val="E7D8C9"/>
+            </a:solidFill>
+            <a:prstDash val="solid"/>
+          </a:ln>
+        </p:spPr>
+      </p:sp>
+      <p:pic>
+        <p:nvPicPr>
+          <p:cNvPr id="23" name="Image 5" descr="article icon from tabler-icons (MIT)">    </p:cNvPr>
+          <p:cNvPicPr>
+            <a:picLocks noChangeAspect="1"/>
+          </p:cNvPicPr>
+          <p:nvPr/>
+        </p:nvPicPr>
+        <p:blipFill>
+          <a:blip r:embed="rId11">
+            <a:extLst>
+              <a:ext uri="{96DAC541-7B7A-43D3-8B79-37D633B846F1}">
+                <asvg:svgBlip xmlns:asvg="http://schemas.microsoft.com/office/drawing/2016/SVG/main" r:embed="rId12"/>
+              </a:ext>
+            </a:extLst>
+          </a:blip>
+          <a:stretch>
+            <a:fillRect/>
+          </a:stretch>
+        </p:blipFill>
+        <p:spPr>
+          <a:xfrm>
+            <a:off x="1170432" y="4856196"/>
+            <a:ext cx="327721" cy="327721"/>
+          </a:xfrm>
+          <a:prstGeom prst="rect">
+            <a:avLst/>
+          </a:prstGeom>
+        </p:spPr>
+      </p:pic>
+      <p:sp>
+        <p:nvSpPr>
+          <p:cNvPr id="24" name="Text 16"/>
+          <p:cNvSpPr txBox="1"/>
+          <p:nvPr/>
+        </p:nvSpPr>
+        <p:spPr>
+          <a:xfrm>
+            <a:off x="1699321" y="4629912"/>
+            <a:ext cx="9255191" cy="780288"/>
+          </a:xfrm>
+          <a:prstGeom prst="rect">
+            <a:avLst/>
+          </a:prstGeom>
+          <a:noFill/>
+          <a:ln/>
+        </p:spPr>
+        <p:txBody>
+          <a:bodyPr wrap="square" lIns="0" tIns="25400" rIns="25400" bIns="0" rtlCol="0" anchor="ctr"/>
+          <a:lstStyle/>
+          <a:p>
+            <a:pPr algn="l" indent="0" marL="0">
+              <a:lnSpc>
+                <a:spcPct val="120000"/>
+              </a:lnSpc>
+              <a:buNone/>
+            </a:pPr>
+            <a:r>
+              <a:rPr lang="en-US" sz="2200" b="1" dirty="0">
+                <a:solidFill>
+                  <a:srgbClr val="B45309"/>
+                </a:solidFill>
+                <a:latin typeface="Pretendard" pitchFamily="34" charset="0"/>
+                <a:ea typeface="Pretendard" pitchFamily="34" charset="-122"/>
+                <a:cs typeface="Pretendard" pitchFamily="34" charset="-120"/>
+              </a:rPr>
+              <a:t>Minimalism / newmorphism</a:t>
+            </a:r>
+            <a:pPr algn="l" indent="0" marL="0">
+              <a:lnSpc>
+                <a:spcPct val="120000"/>
+              </a:lnSpc>
+              <a:buNone/>
+            </a:pPr>
+            <a:r>
+              <a:rPr lang="en-US" sz="2200" dirty="0">
+                <a:solidFill>
+                  <a:srgbClr val="1F2937"/>
+                </a:solidFill>
+                <a:latin typeface="Pretendard" pitchFamily="34" charset="0"/>
+                <a:ea typeface="Pretendard" pitchFamily="34" charset="-122"/>
+                <a:cs typeface="Pretendard" pitchFamily="34" charset="-120"/>
+              </a:rPr>
+              <a:t>  sparse rules or soft raised surfaces.</a:t>
             </a:r>
             <a:endParaRPr lang="en-US" sz="2200" dirty="0"/>
           </a:p>
@@ -14449,9 +18993,9 @@
 </p:sld>
 </file>
 
-<file path=ppt/slides/slide7.xml><?xml version="1.0" encoding="utf-8"?>
+<file path=ppt/slides/slide8.xml><?xml version="1.0" encoding="utf-8"?>
 <p:sld xmlns:a="http://schemas.openxmlformats.org/drawingml/2006/main" xmlns:r="http://schemas.openxmlformats.org/officeDocument/2006/relationships" xmlns:p="http://schemas.openxmlformats.org/presentationml/2006/main">
-  <p:cSld name="Slide 7">
+  <p:cSld name="Slide 8">
     <p:bg>
       <p:bgPr>
         <a:solidFill>
@@ -14644,7 +19188,7 @@
                 <a:ea typeface="Pretendard" pitchFamily="34" charset="-122"/>
                 <a:cs typeface="Pretendard" pitchFamily="34" charset="-120"/>
               </a:rPr>
-              <a:t>Style Families (Cont. 2/2)</a:t>
+              <a:t>Pruned Style Families (Cont. 2/2)</a:t>
             </a:r>
             <a:endParaRPr lang="en-US" sz="3400" dirty="0"/>
           </a:p>
@@ -14659,65 +19203,6 @@
         <p:spPr>
           <a:xfrm>
             <a:off x="896112" y="1664208"/>
-            <a:ext cx="4791456" cy="4169664"/>
-          </a:xfrm>
-          <a:prstGeom prst="rect">
-            <a:avLst/>
-          </a:prstGeom>
-          <a:noFill/>
-          <a:ln/>
-        </p:spPr>
-        <p:txBody>
-          <a:bodyPr wrap="square" lIns="0" tIns="25400" rIns="25400" bIns="0" rtlCol="0" anchor="t"/>
-          <a:lstStyle/>
-          <a:p>
-            <a:pPr algn="l" indent="0" marL="0">
-              <a:lnSpc>
-                <a:spcPct val="120000"/>
-              </a:lnSpc>
-              <a:buNone/>
-            </a:pPr>
-            <a:r>
-              <a:rPr lang="en-US" sz="2200" b="1" dirty="0">
-                <a:solidFill>
-                  <a:srgbClr val="B45309"/>
-                </a:solidFill>
-                <a:latin typeface="Pretendard" pitchFamily="34" charset="0"/>
-                <a:ea typeface="Pretendard" pitchFamily="34" charset="-122"/>
-                <a:cs typeface="Pretendard" pitchFamily="34" charset="-120"/>
-              </a:rPr>
-              <a:t>- Minimalism / newmorphism</a:t>
-            </a:r>
-            <a:pPr algn="l" indent="0" marL="0">
-              <a:lnSpc>
-                <a:spcPct val="120000"/>
-              </a:lnSpc>
-              <a:buNone/>
-            </a:pPr>
-            <a:r>
-              <a:rPr lang="en-US" sz="2200" dirty="0">
-                <a:solidFill>
-                  <a:srgbClr val="1F2937"/>
-                </a:solidFill>
-                <a:latin typeface="Pretendard" pitchFamily="34" charset="0"/>
-                <a:ea typeface="Pretendard" pitchFamily="34" charset="-122"/>
-                <a:cs typeface="Pretendard" pitchFamily="34" charset="-120"/>
-              </a:rPr>
-              <a:t>  sparse or softly raised surfaces.</a:t>
-            </a:r>
-            <a:endParaRPr lang="en-US" sz="2200" dirty="0"/>
-          </a:p>
-        </p:txBody>
-      </p:sp>
-      <p:sp>
-        <p:nvSpPr>
-          <p:cNvPr id="9" name="Text 7"/>
-          <p:cNvSpPr txBox="1"/>
-          <p:nvPr/>
-        </p:nvSpPr>
-        <p:spPr>
-          <a:xfrm>
-            <a:off x="6473952" y="1664208"/>
             <a:ext cx="4791456" cy="4169664"/>
           </a:xfrm>
           <a:prstGeom prst="rect">
@@ -14762,7 +19247,66 @@
                 <a:ea typeface="Pretendard" pitchFamily="34" charset="-122"/>
                 <a:cs typeface="Pretendard" pitchFamily="34" charset="-120"/>
               </a:rPr>
-              <a:t>  distinct surface and background grammar.</a:t>
+              <a:t>  translucent surfaces, construction lines, or metric rails.</a:t>
+            </a:r>
+            <a:endParaRPr lang="en-US" sz="2200" dirty="0"/>
+          </a:p>
+        </p:txBody>
+      </p:sp>
+      <p:sp>
+        <p:nvSpPr>
+          <p:cNvPr id="9" name="Text 7"/>
+          <p:cNvSpPr txBox="1"/>
+          <p:nvPr/>
+        </p:nvSpPr>
+        <p:spPr>
+          <a:xfrm>
+            <a:off x="6473952" y="1664208"/>
+            <a:ext cx="4791456" cy="4169664"/>
+          </a:xfrm>
+          <a:prstGeom prst="rect">
+            <a:avLst/>
+          </a:prstGeom>
+          <a:noFill/>
+          <a:ln/>
+        </p:spPr>
+        <p:txBody>
+          <a:bodyPr wrap="square" lIns="0" tIns="25400" rIns="25400" bIns="0" rtlCol="0" anchor="t"/>
+          <a:lstStyle/>
+          <a:p>
+            <a:pPr algn="l" indent="0" marL="0">
+              <a:lnSpc>
+                <a:spcPct val="120000"/>
+              </a:lnSpc>
+              <a:buNone/>
+            </a:pPr>
+            <a:r>
+              <a:rPr lang="en-US" sz="2200" b="1" dirty="0">
+                <a:solidFill>
+                  <a:srgbClr val="B45309"/>
+                </a:solidFill>
+                <a:latin typeface="Pretendard" pitchFamily="34" charset="0"/>
+                <a:ea typeface="Pretendard" pitchFamily="34" charset="-122"/>
+                <a:cs typeface="Pretendard" pitchFamily="34" charset="-120"/>
+              </a:rPr>
+              <a:t>- Pruning rule</a:t>
+            </a:r>
+            <a:pPr algn="l" indent="0" marL="0">
+              <a:lnSpc>
+                <a:spcPct val="120000"/>
+              </a:lnSpc>
+              <a:buNone/>
+            </a:pPr>
+            <a:r>
+              <a:rPr lang="en-US" sz="2200" dirty="0">
+                <a:solidFill>
+                  <a:srgbClr val="1F2937"/>
+                </a:solidFill>
+                <a:latin typeface="Pretendard" pitchFamily="34" charset="0"/>
+                <a:ea typeface="Pretendard" pitchFamily="34" charset="-122"/>
+                <a:cs typeface="Pretendard" pitchFamily="34" charset="-120"/>
+              </a:rPr>
+              <a:t>  preview excludes styles that only change palette or background.</a:t>
             </a:r>
             <a:endParaRPr lang="en-US" sz="2200" dirty="0"/>
           </a:p>
@@ -14776,9 +19320,9 @@
 </p:sld>
 </file>
 
-<file path=ppt/slides/slide8.xml><?xml version="1.0" encoding="utf-8"?>
+<file path=ppt/slides/slide9.xml><?xml version="1.0" encoding="utf-8"?>
 <p:sld xmlns:a="http://schemas.openxmlformats.org/drawingml/2006/main" xmlns:r="http://schemas.openxmlformats.org/officeDocument/2006/relationships" xmlns:p="http://schemas.openxmlformats.org/presentationml/2006/main">
-  <p:cSld name="Slide 8">
+  <p:cSld name="Slide 9">
     <p:bg>
       <p:bgPr>
         <a:solidFill>
@@ -15360,8 +19904,8 @@
         </p:nvSpPr>
         <p:spPr>
           <a:xfrm>
-            <a:off x="1689354" y="1627632"/>
-            <a:ext cx="3961638" cy="1591056"/>
+            <a:off x="1689354" y="2033016"/>
+            <a:ext cx="3961638" cy="780288"/>
           </a:xfrm>
           <a:prstGeom prst="rect">
             <a:avLst/>
@@ -15476,8 +20020,8 @@
         </p:nvSpPr>
         <p:spPr>
           <a:xfrm>
-            <a:off x="7175754" y="1627632"/>
-            <a:ext cx="3961638" cy="1591056"/>
+            <a:off x="7175754" y="1865376"/>
+            <a:ext cx="3961638" cy="1115568"/>
           </a:xfrm>
           <a:prstGeom prst="rect">
             <a:avLst/>
@@ -15592,8 +20136,8 @@
         </p:nvSpPr>
         <p:spPr>
           <a:xfrm>
-            <a:off x="1689354" y="3913632"/>
-            <a:ext cx="3961638" cy="1591056"/>
+            <a:off x="1689354" y="4151376"/>
+            <a:ext cx="3961638" cy="1115568"/>
           </a:xfrm>
           <a:prstGeom prst="rect">
             <a:avLst/>
@@ -15708,8 +20252,8 @@
         </p:nvSpPr>
         <p:spPr>
           <a:xfrm>
-            <a:off x="7175754" y="3913632"/>
-            <a:ext cx="3961638" cy="1591056"/>
+            <a:off x="7175754" y="4151376"/>
+            <a:ext cx="3961638" cy="1115568"/>
           </a:xfrm>
           <a:prstGeom prst="rect">
             <a:avLst/>
@@ -15756,1337 +20300,6 @@
               <a:t>  bold and italic remain editable.</a:t>
             </a:r>
             <a:endParaRPr lang="en-US" sz="2200" dirty="0"/>
-          </a:p>
-        </p:txBody>
-      </p:sp>
-    </p:spTree>
-  </p:cSld>
-  <p:clrMapOvr>
-    <a:masterClrMapping/>
-  </p:clrMapOvr>
-</p:sld>
-</file>
-
-<file path=ppt/slides/slide9.xml><?xml version="1.0" encoding="utf-8"?>
-<p:sld xmlns:a="http://schemas.openxmlformats.org/drawingml/2006/main" xmlns:r="http://schemas.openxmlformats.org/officeDocument/2006/relationships" xmlns:p="http://schemas.openxmlformats.org/presentationml/2006/main">
-  <p:cSld name="Slide 9">
-    <p:bg>
-      <p:bgPr>
-        <a:solidFill>
-          <a:srgbClr val="F7F3EF"/>
-        </a:solidFill>
-      </p:bgPr>
-    </p:bg>
-    <p:spTree>
-      <p:nvGrpSpPr>
-        <p:cNvPr id="1" name=""/>
-        <p:cNvGrpSpPr/>
-        <p:nvPr/>
-      </p:nvGrpSpPr>
-      <p:grpSpPr>
-        <a:xfrm>
-          <a:off x="0" y="0"/>
-          <a:ext cx="0" cy="0"/>
-          <a:chOff x="0" y="0"/>
-          <a:chExt cx="0" cy="0"/>
-        </a:xfrm>
-      </p:grpSpPr>
-      <p:sp>
-        <p:nvSpPr>
-          <p:cNvPr id="2" name="Shape 0"/>
-          <p:cNvSpPr/>
-          <p:nvPr/>
-        </p:nvSpPr>
-        <p:spPr>
-          <a:xfrm>
-            <a:off x="10134295" y="0"/>
-            <a:ext cx="2057400" cy="256032"/>
-          </a:xfrm>
-          <a:prstGeom prst="rect">
-            <a:avLst/>
-          </a:prstGeom>
-          <a:solidFill>
-            <a:srgbClr val="B45309"/>
-          </a:solidFill>
-          <a:ln w="12700">
-            <a:solidFill>
-              <a:srgbClr val="B45309">
-                <a:alpha val="0"/>
-              </a:srgbClr>
-            </a:solidFill>
-            <a:prstDash val="solid"/>
-          </a:ln>
-        </p:spPr>
-      </p:sp>
-      <p:sp>
-        <p:nvSpPr>
-          <p:cNvPr id="3" name="Shape 1"/>
-          <p:cNvSpPr/>
-          <p:nvPr/>
-        </p:nvSpPr>
-        <p:spPr>
-          <a:xfrm>
-            <a:off x="11048695" y="256032"/>
-            <a:ext cx="1143000" cy="73152"/>
-          </a:xfrm>
-          <a:prstGeom prst="rect">
-            <a:avLst/>
-          </a:prstGeom>
-          <a:solidFill>
-            <a:srgbClr val="FCD34D"/>
-          </a:solidFill>
-          <a:ln w="12700">
-            <a:solidFill>
-              <a:srgbClr val="FCD34D">
-                <a:alpha val="0"/>
-              </a:srgbClr>
-            </a:solidFill>
-            <a:prstDash val="solid"/>
-          </a:ln>
-        </p:spPr>
-      </p:sp>
-      <p:sp>
-        <p:nvSpPr>
-          <p:cNvPr id="4" name="Shape 2"/>
-          <p:cNvSpPr/>
-          <p:nvPr/>
-        </p:nvSpPr>
-        <p:spPr>
-          <a:xfrm>
-            <a:off x="731520" y="1207008"/>
-            <a:ext cx="1325880" cy="54864"/>
-          </a:xfrm>
-          <a:prstGeom prst="rect">
-            <a:avLst/>
-          </a:prstGeom>
-          <a:solidFill>
-            <a:srgbClr val="B45309"/>
-          </a:solidFill>
-          <a:ln w="12700">
-            <a:solidFill>
-              <a:srgbClr val="B45309">
-                <a:alpha val="0"/>
-              </a:srgbClr>
-            </a:solidFill>
-            <a:prstDash val="solid"/>
-          </a:ln>
-        </p:spPr>
-      </p:sp>
-      <p:sp>
-        <p:nvSpPr>
-          <p:cNvPr id="5" name="Text 3"/>
-          <p:cNvSpPr txBox="1"/>
-          <p:nvPr/>
-        </p:nvSpPr>
-        <p:spPr>
-          <a:xfrm>
-            <a:off x="731520" y="457200"/>
-            <a:ext cx="10698480" cy="731520"/>
-          </a:xfrm>
-          <a:prstGeom prst="rect">
-            <a:avLst/>
-          </a:prstGeom>
-          <a:noFill/>
-          <a:ln/>
-        </p:spPr>
-        <p:txBody>
-          <a:bodyPr wrap="square" lIns="0" tIns="0" rIns="0" bIns="0" rtlCol="0" anchor="ctr"/>
-          <a:lstStyle/>
-          <a:p>
-            <a:pPr algn="ctr" indent="0" marL="0">
-              <a:lnSpc>
-                <a:spcPct val="120000"/>
-              </a:lnSpc>
-              <a:buNone/>
-            </a:pPr>
-            <a:r>
-              <a:rPr lang="en-US" sz="3400" b="1" dirty="0">
-                <a:solidFill>
-                  <a:srgbClr val="1F2937"/>
-                </a:solidFill>
-                <a:latin typeface="Pretendard" pitchFamily="34" charset="0"/>
-                <a:ea typeface="Pretendard" pitchFamily="34" charset="-122"/>
-                <a:cs typeface="Pretendard" pitchFamily="34" charset="-120"/>
-              </a:rPr>
-              <a:t>Pipeline Diagram</a:t>
-            </a:r>
-            <a:endParaRPr lang="en-US" sz="3400" dirty="0"/>
-          </a:p>
-        </p:txBody>
-      </p:sp>
-      <p:sp>
-        <p:nvSpPr>
-          <p:cNvPr id="6" name="Shape 4"/>
-          <p:cNvSpPr/>
-          <p:nvPr/>
-        </p:nvSpPr>
-        <p:spPr>
-          <a:xfrm>
-            <a:off x="4002024" y="3095244"/>
-            <a:ext cx="457200" cy="0"/>
-          </a:xfrm>
-          <a:prstGeom prst="line">
-            <a:avLst/>
-          </a:prstGeom>
-          <a:noFill/>
-          <a:ln w="12700">
-            <a:solidFill>
-              <a:srgbClr val="B45309"/>
-            </a:solidFill>
-            <a:prstDash val="solid"/>
-            <a:tailEnd type="triangle"/>
-          </a:ln>
-        </p:spPr>
-      </p:sp>
-      <p:sp>
-        <p:nvSpPr>
-          <p:cNvPr id="7" name="Shape 5"/>
-          <p:cNvSpPr/>
-          <p:nvPr/>
-        </p:nvSpPr>
-        <p:spPr>
-          <a:xfrm>
-            <a:off x="7748016" y="3095244"/>
-            <a:ext cx="457200" cy="0"/>
-          </a:xfrm>
-          <a:prstGeom prst="line">
-            <a:avLst/>
-          </a:prstGeom>
-          <a:noFill/>
-          <a:ln w="12700">
-            <a:solidFill>
-              <a:srgbClr val="B45309"/>
-            </a:solidFill>
-            <a:prstDash val="solid"/>
-            <a:tailEnd type="triangle"/>
-          </a:ln>
-        </p:spPr>
-      </p:sp>
-      <p:sp>
-        <p:nvSpPr>
-          <p:cNvPr id="8" name="Shape 6"/>
-          <p:cNvSpPr/>
-          <p:nvPr/>
-        </p:nvSpPr>
-        <p:spPr>
-          <a:xfrm>
-            <a:off x="9849612" y="3627791"/>
-            <a:ext cx="0" cy="416235"/>
-          </a:xfrm>
-          <a:prstGeom prst="line">
-            <a:avLst/>
-          </a:prstGeom>
-          <a:noFill/>
-          <a:ln w="12700">
-            <a:solidFill>
-              <a:srgbClr val="B45309"/>
-            </a:solidFill>
-            <a:prstDash val="solid"/>
-            <a:tailEnd type="triangle"/>
-          </a:ln>
-        </p:spPr>
-      </p:sp>
-      <p:sp>
-        <p:nvSpPr>
-          <p:cNvPr id="9" name="Shape 7"/>
-          <p:cNvSpPr/>
-          <p:nvPr/>
-        </p:nvSpPr>
-        <p:spPr>
-          <a:xfrm>
-            <a:off x="7748016" y="4576572"/>
-            <a:ext cx="457200" cy="0"/>
-          </a:xfrm>
-          <a:prstGeom prst="line">
-            <a:avLst/>
-          </a:prstGeom>
-          <a:noFill/>
-          <a:ln w="12700">
-            <a:solidFill>
-              <a:srgbClr val="B45309"/>
-            </a:solidFill>
-            <a:prstDash val="solid"/>
-            <a:headEnd type="triangle"/>
-          </a:ln>
-        </p:spPr>
-      </p:sp>
-      <p:sp>
-        <p:nvSpPr>
-          <p:cNvPr id="10" name="Shape 8"/>
-          <p:cNvSpPr/>
-          <p:nvPr/>
-        </p:nvSpPr>
-        <p:spPr>
-          <a:xfrm>
-            <a:off x="4002024" y="4576572"/>
-            <a:ext cx="457200" cy="0"/>
-          </a:xfrm>
-          <a:prstGeom prst="line">
-            <a:avLst/>
-          </a:prstGeom>
-          <a:noFill/>
-          <a:ln w="12700">
-            <a:solidFill>
-              <a:srgbClr val="B45309"/>
-            </a:solidFill>
-            <a:prstDash val="solid"/>
-            <a:headEnd type="triangle"/>
-          </a:ln>
-        </p:spPr>
-      </p:sp>
-      <p:sp>
-        <p:nvSpPr>
-          <p:cNvPr id="11" name="Shape 9"/>
-          <p:cNvSpPr/>
-          <p:nvPr/>
-        </p:nvSpPr>
-        <p:spPr>
-          <a:xfrm>
-            <a:off x="640080" y="2510028"/>
-            <a:ext cx="3435096" cy="1170432"/>
-          </a:xfrm>
-          <a:prstGeom prst="roundRect">
-            <a:avLst>
-              <a:gd name="adj" fmla="val 4688"/>
-            </a:avLst>
-          </a:prstGeom>
-          <a:solidFill>
-            <a:srgbClr val="FFFBF5"/>
-          </a:solidFill>
-          <a:ln w="12700">
-            <a:solidFill>
-              <a:srgbClr val="B45309"/>
-            </a:solidFill>
-            <a:prstDash val="solid"/>
-          </a:ln>
-          <a:effectLst>
-            <a:outerShdw sx="100000" sy="100000" kx="0" ky="0" algn="bl" rotWithShape="0" blurRad="12700" dist="50800" dir="2700000">
-              <a:srgbClr val="000000">
-                <a:alpha val="12000"/>
-              </a:srgbClr>
-            </a:outerShdw>
-          </a:effectLst>
-        </p:spPr>
-      </p:sp>
-      <p:sp>
-        <p:nvSpPr>
-          <p:cNvPr id="12" name="Shape 10"/>
-          <p:cNvSpPr/>
-          <p:nvPr/>
-        </p:nvSpPr>
-        <p:spPr>
-          <a:xfrm>
-            <a:off x="640080" y="2510028"/>
-            <a:ext cx="3435096" cy="109728"/>
-          </a:xfrm>
-          <a:prstGeom prst="rect">
-            <a:avLst/>
-          </a:prstGeom>
-          <a:solidFill>
-            <a:srgbClr val="B45309"/>
-          </a:solidFill>
-          <a:ln w="12700">
-            <a:solidFill>
-              <a:srgbClr val="B45309">
-                <a:alpha val="0"/>
-              </a:srgbClr>
-            </a:solidFill>
-            <a:prstDash val="solid"/>
-          </a:ln>
-        </p:spPr>
-      </p:sp>
-      <p:sp>
-        <p:nvSpPr>
-          <p:cNvPr id="13" name="Shape 11"/>
-          <p:cNvSpPr/>
-          <p:nvPr/>
-        </p:nvSpPr>
-        <p:spPr>
-          <a:xfrm>
-            <a:off x="804672" y="2907975"/>
-            <a:ext cx="374538" cy="374538"/>
-          </a:xfrm>
-          <a:prstGeom prst="ellipse">
-            <a:avLst/>
-          </a:prstGeom>
-          <a:solidFill>
-            <a:srgbClr val="B45309"/>
-          </a:solidFill>
-          <a:ln w="12700">
-            <a:solidFill>
-              <a:srgbClr val="B45309">
-                <a:alpha val="0"/>
-              </a:srgbClr>
-            </a:solidFill>
-            <a:prstDash val="solid"/>
-          </a:ln>
-        </p:spPr>
-      </p:sp>
-      <p:sp>
-        <p:nvSpPr>
-          <p:cNvPr id="14" name="Text 12"/>
-          <p:cNvSpPr txBox="1"/>
-          <p:nvPr/>
-        </p:nvSpPr>
-        <p:spPr>
-          <a:xfrm>
-            <a:off x="804672" y="2907975"/>
-            <a:ext cx="374538" cy="374538"/>
-          </a:xfrm>
-          <a:prstGeom prst="rect">
-            <a:avLst/>
-          </a:prstGeom>
-          <a:noFill/>
-          <a:ln/>
-        </p:spPr>
-        <p:txBody>
-          <a:bodyPr wrap="square" lIns="0" tIns="0" rIns="0" bIns="0" rtlCol="0" anchor="ctr">
-            <a:normAutofit/>
-          </a:bodyPr>
-          <a:lstStyle/>
-          <a:p>
-            <a:pPr algn="ctr" indent="0" marL="0">
-              <a:lnSpc>
-                <a:spcPct val="120000"/>
-              </a:lnSpc>
-              <a:buNone/>
-            </a:pPr>
-            <a:r>
-              <a:rPr lang="en-US" sz="1500" b="1" dirty="0">
-                <a:solidFill>
-                  <a:srgbClr val="F7F3EF"/>
-                </a:solidFill>
-                <a:latin typeface="Pretendard" pitchFamily="34" charset="0"/>
-                <a:ea typeface="Pretendard" pitchFamily="34" charset="-122"/>
-                <a:cs typeface="Pretendard" pitchFamily="34" charset="-120"/>
-              </a:rPr>
-              <a:t>1</a:t>
-            </a:r>
-            <a:endParaRPr lang="en-US" sz="1500" dirty="0"/>
-          </a:p>
-        </p:txBody>
-      </p:sp>
-      <p:sp>
-        <p:nvSpPr>
-          <p:cNvPr id="15" name="Text 13"/>
-          <p:cNvSpPr txBox="1"/>
-          <p:nvPr/>
-        </p:nvSpPr>
-        <p:spPr>
-          <a:xfrm>
-            <a:off x="1325514" y="2638044"/>
-            <a:ext cx="2585070" cy="914400"/>
-          </a:xfrm>
-          <a:prstGeom prst="rect">
-            <a:avLst/>
-          </a:prstGeom>
-          <a:noFill/>
-          <a:ln/>
-        </p:spPr>
-        <p:txBody>
-          <a:bodyPr wrap="square" lIns="0" tIns="25400" rIns="25400" bIns="0" rtlCol="0" anchor="ctr">
-            <a:normAutofit/>
-          </a:bodyPr>
-          <a:lstStyle/>
-          <a:p>
-            <a:pPr algn="l" indent="0" marL="0">
-              <a:lnSpc>
-                <a:spcPct val="92000"/>
-              </a:lnSpc>
-              <a:buNone/>
-            </a:pPr>
-            <a:r>
-              <a:rPr lang="en-US" sz="1600" dirty="0">
-                <a:solidFill>
-                  <a:srgbClr val="1F2937"/>
-                </a:solidFill>
-                <a:latin typeface="Pretendard" pitchFamily="34" charset="0"/>
-                <a:ea typeface="Pretendard" pitchFamily="34" charset="-122"/>
-                <a:cs typeface="Pretendard" pitchFamily="34" charset="-120"/>
-              </a:rPr>
-              <a:t>Markdown source</a:t>
-            </a:r>
-            <a:endParaRPr lang="en-US" sz="1600" dirty="0"/>
-          </a:p>
-        </p:txBody>
-      </p:sp>
-      <p:sp>
-        <p:nvSpPr>
-          <p:cNvPr id="16" name="Shape 14"/>
-          <p:cNvSpPr/>
-          <p:nvPr/>
-        </p:nvSpPr>
-        <p:spPr>
-          <a:xfrm>
-            <a:off x="4386072" y="2510028"/>
-            <a:ext cx="3435096" cy="1170432"/>
-          </a:xfrm>
-          <a:prstGeom prst="roundRect">
-            <a:avLst>
-              <a:gd name="adj" fmla="val 4688"/>
-            </a:avLst>
-          </a:prstGeom>
-          <a:solidFill>
-            <a:srgbClr val="FFFBF5"/>
-          </a:solidFill>
-          <a:ln w="12700">
-            <a:solidFill>
-              <a:srgbClr val="B45309"/>
-            </a:solidFill>
-            <a:prstDash val="solid"/>
-          </a:ln>
-          <a:effectLst>
-            <a:outerShdw sx="100000" sy="100000" kx="0" ky="0" algn="bl" rotWithShape="0" blurRad="12700" dist="50800" dir="2700000">
-              <a:srgbClr val="000000">
-                <a:alpha val="12000"/>
-              </a:srgbClr>
-            </a:outerShdw>
-          </a:effectLst>
-        </p:spPr>
-      </p:sp>
-      <p:sp>
-        <p:nvSpPr>
-          <p:cNvPr id="17" name="Shape 15"/>
-          <p:cNvSpPr/>
-          <p:nvPr/>
-        </p:nvSpPr>
-        <p:spPr>
-          <a:xfrm>
-            <a:off x="4386072" y="2510028"/>
-            <a:ext cx="3435096" cy="109728"/>
-          </a:xfrm>
-          <a:prstGeom prst="rect">
-            <a:avLst/>
-          </a:prstGeom>
-          <a:solidFill>
-            <a:srgbClr val="B45309"/>
-          </a:solidFill>
-          <a:ln w="12700">
-            <a:solidFill>
-              <a:srgbClr val="B45309">
-                <a:alpha val="0"/>
-              </a:srgbClr>
-            </a:solidFill>
-            <a:prstDash val="solid"/>
-          </a:ln>
-        </p:spPr>
-      </p:sp>
-      <p:sp>
-        <p:nvSpPr>
-          <p:cNvPr id="18" name="Shape 16"/>
-          <p:cNvSpPr/>
-          <p:nvPr/>
-        </p:nvSpPr>
-        <p:spPr>
-          <a:xfrm>
-            <a:off x="4550664" y="2907975"/>
-            <a:ext cx="374538" cy="374538"/>
-          </a:xfrm>
-          <a:prstGeom prst="ellipse">
-            <a:avLst/>
-          </a:prstGeom>
-          <a:solidFill>
-            <a:srgbClr val="B45309"/>
-          </a:solidFill>
-          <a:ln w="12700">
-            <a:solidFill>
-              <a:srgbClr val="B45309">
-                <a:alpha val="0"/>
-              </a:srgbClr>
-            </a:solidFill>
-            <a:prstDash val="solid"/>
-          </a:ln>
-        </p:spPr>
-      </p:sp>
-      <p:sp>
-        <p:nvSpPr>
-          <p:cNvPr id="19" name="Text 17"/>
-          <p:cNvSpPr txBox="1"/>
-          <p:nvPr/>
-        </p:nvSpPr>
-        <p:spPr>
-          <a:xfrm>
-            <a:off x="4550664" y="2907975"/>
-            <a:ext cx="374538" cy="374538"/>
-          </a:xfrm>
-          <a:prstGeom prst="rect">
-            <a:avLst/>
-          </a:prstGeom>
-          <a:noFill/>
-          <a:ln/>
-        </p:spPr>
-        <p:txBody>
-          <a:bodyPr wrap="square" lIns="0" tIns="0" rIns="0" bIns="0" rtlCol="0" anchor="ctr">
-            <a:normAutofit/>
-          </a:bodyPr>
-          <a:lstStyle/>
-          <a:p>
-            <a:pPr algn="ctr" indent="0" marL="0">
-              <a:lnSpc>
-                <a:spcPct val="120000"/>
-              </a:lnSpc>
-              <a:buNone/>
-            </a:pPr>
-            <a:r>
-              <a:rPr lang="en-US" sz="1500" b="1" dirty="0">
-                <a:solidFill>
-                  <a:srgbClr val="F7F3EF"/>
-                </a:solidFill>
-                <a:latin typeface="Pretendard" pitchFamily="34" charset="0"/>
-                <a:ea typeface="Pretendard" pitchFamily="34" charset="-122"/>
-                <a:cs typeface="Pretendard" pitchFamily="34" charset="-120"/>
-              </a:rPr>
-              <a:t>2</a:t>
-            </a:r>
-            <a:endParaRPr lang="en-US" sz="1500" dirty="0"/>
-          </a:p>
-        </p:txBody>
-      </p:sp>
-      <p:sp>
-        <p:nvSpPr>
-          <p:cNvPr id="20" name="Text 18"/>
-          <p:cNvSpPr txBox="1"/>
-          <p:nvPr/>
-        </p:nvSpPr>
-        <p:spPr>
-          <a:xfrm>
-            <a:off x="5071506" y="2638044"/>
-            <a:ext cx="2585070" cy="914400"/>
-          </a:xfrm>
-          <a:prstGeom prst="rect">
-            <a:avLst/>
-          </a:prstGeom>
-          <a:noFill/>
-          <a:ln/>
-        </p:spPr>
-        <p:txBody>
-          <a:bodyPr wrap="square" lIns="0" tIns="25400" rIns="25400" bIns="0" rtlCol="0" anchor="ctr">
-            <a:normAutofit/>
-          </a:bodyPr>
-          <a:lstStyle/>
-          <a:p>
-            <a:pPr algn="l" indent="0" marL="0">
-              <a:lnSpc>
-                <a:spcPct val="92000"/>
-              </a:lnSpc>
-              <a:buNone/>
-            </a:pPr>
-            <a:r>
-              <a:rPr lang="en-US" sz="1600" dirty="0">
-                <a:solidFill>
-                  <a:srgbClr val="1F2937"/>
-                </a:solidFill>
-                <a:latin typeface="Pretendard" pitchFamily="34" charset="0"/>
-                <a:ea typeface="Pretendard" pitchFamily="34" charset="-122"/>
-                <a:cs typeface="Pretendard" pitchFamily="34" charset="-120"/>
-              </a:rPr>
-              <a:t>Parse blocks</a:t>
-            </a:r>
-            <a:endParaRPr lang="en-US" sz="1600" dirty="0"/>
-          </a:p>
-        </p:txBody>
-      </p:sp>
-      <p:sp>
-        <p:nvSpPr>
-          <p:cNvPr id="21" name="Shape 19"/>
-          <p:cNvSpPr/>
-          <p:nvPr/>
-        </p:nvSpPr>
-        <p:spPr>
-          <a:xfrm>
-            <a:off x="8132064" y="2510028"/>
-            <a:ext cx="3435096" cy="1170432"/>
-          </a:xfrm>
-          <a:prstGeom prst="roundRect">
-            <a:avLst>
-              <a:gd name="adj" fmla="val 4688"/>
-            </a:avLst>
-          </a:prstGeom>
-          <a:solidFill>
-            <a:srgbClr val="FFFBF5"/>
-          </a:solidFill>
-          <a:ln w="12700">
-            <a:solidFill>
-              <a:srgbClr val="B45309"/>
-            </a:solidFill>
-            <a:prstDash val="solid"/>
-          </a:ln>
-          <a:effectLst>
-            <a:outerShdw sx="100000" sy="100000" kx="0" ky="0" algn="bl" rotWithShape="0" blurRad="12700" dist="50800" dir="2700000">
-              <a:srgbClr val="000000">
-                <a:alpha val="12000"/>
-              </a:srgbClr>
-            </a:outerShdw>
-          </a:effectLst>
-        </p:spPr>
-      </p:sp>
-      <p:sp>
-        <p:nvSpPr>
-          <p:cNvPr id="22" name="Shape 20"/>
-          <p:cNvSpPr/>
-          <p:nvPr/>
-        </p:nvSpPr>
-        <p:spPr>
-          <a:xfrm>
-            <a:off x="8132064" y="2510028"/>
-            <a:ext cx="3435096" cy="109728"/>
-          </a:xfrm>
-          <a:prstGeom prst="rect">
-            <a:avLst/>
-          </a:prstGeom>
-          <a:solidFill>
-            <a:srgbClr val="B45309"/>
-          </a:solidFill>
-          <a:ln w="12700">
-            <a:solidFill>
-              <a:srgbClr val="B45309">
-                <a:alpha val="0"/>
-              </a:srgbClr>
-            </a:solidFill>
-            <a:prstDash val="solid"/>
-          </a:ln>
-        </p:spPr>
-      </p:sp>
-      <p:sp>
-        <p:nvSpPr>
-          <p:cNvPr id="23" name="Shape 21"/>
-          <p:cNvSpPr/>
-          <p:nvPr/>
-        </p:nvSpPr>
-        <p:spPr>
-          <a:xfrm>
-            <a:off x="8296656" y="2907975"/>
-            <a:ext cx="374538" cy="374538"/>
-          </a:xfrm>
-          <a:prstGeom prst="ellipse">
-            <a:avLst/>
-          </a:prstGeom>
-          <a:solidFill>
-            <a:srgbClr val="B45309"/>
-          </a:solidFill>
-          <a:ln w="12700">
-            <a:solidFill>
-              <a:srgbClr val="B45309">
-                <a:alpha val="0"/>
-              </a:srgbClr>
-            </a:solidFill>
-            <a:prstDash val="solid"/>
-          </a:ln>
-        </p:spPr>
-      </p:sp>
-      <p:sp>
-        <p:nvSpPr>
-          <p:cNvPr id="24" name="Text 22"/>
-          <p:cNvSpPr txBox="1"/>
-          <p:nvPr/>
-        </p:nvSpPr>
-        <p:spPr>
-          <a:xfrm>
-            <a:off x="8296656" y="2907975"/>
-            <a:ext cx="374538" cy="374538"/>
-          </a:xfrm>
-          <a:prstGeom prst="rect">
-            <a:avLst/>
-          </a:prstGeom>
-          <a:noFill/>
-          <a:ln/>
-        </p:spPr>
-        <p:txBody>
-          <a:bodyPr wrap="square" lIns="0" tIns="0" rIns="0" bIns="0" rtlCol="0" anchor="ctr">
-            <a:normAutofit/>
-          </a:bodyPr>
-          <a:lstStyle/>
-          <a:p>
-            <a:pPr algn="ctr" indent="0" marL="0">
-              <a:lnSpc>
-                <a:spcPct val="120000"/>
-              </a:lnSpc>
-              <a:buNone/>
-            </a:pPr>
-            <a:r>
-              <a:rPr lang="en-US" sz="1500" b="1" dirty="0">
-                <a:solidFill>
-                  <a:srgbClr val="F7F3EF"/>
-                </a:solidFill>
-                <a:latin typeface="Pretendard" pitchFamily="34" charset="0"/>
-                <a:ea typeface="Pretendard" pitchFamily="34" charset="-122"/>
-                <a:cs typeface="Pretendard" pitchFamily="34" charset="-120"/>
-              </a:rPr>
-              <a:t>3</a:t>
-            </a:r>
-            <a:endParaRPr lang="en-US" sz="1500" dirty="0"/>
-          </a:p>
-        </p:txBody>
-      </p:sp>
-      <p:sp>
-        <p:nvSpPr>
-          <p:cNvPr id="25" name="Text 23"/>
-          <p:cNvSpPr txBox="1"/>
-          <p:nvPr/>
-        </p:nvSpPr>
-        <p:spPr>
-          <a:xfrm>
-            <a:off x="8817498" y="2638044"/>
-            <a:ext cx="2585070" cy="914400"/>
-          </a:xfrm>
-          <a:prstGeom prst="rect">
-            <a:avLst/>
-          </a:prstGeom>
-          <a:noFill/>
-          <a:ln/>
-        </p:spPr>
-        <p:txBody>
-          <a:bodyPr wrap="square" lIns="0" tIns="25400" rIns="25400" bIns="0" rtlCol="0" anchor="ctr">
-            <a:normAutofit/>
-          </a:bodyPr>
-          <a:lstStyle/>
-          <a:p>
-            <a:pPr algn="l" indent="0" marL="0">
-              <a:lnSpc>
-                <a:spcPct val="92000"/>
-              </a:lnSpc>
-              <a:buNone/>
-            </a:pPr>
-            <a:r>
-              <a:rPr lang="en-US" sz="1600" dirty="0">
-                <a:solidFill>
-                  <a:srgbClr val="1F2937"/>
-                </a:solidFill>
-                <a:latin typeface="Pretendard" pitchFamily="34" charset="0"/>
-                <a:ea typeface="Pretendard" pitchFamily="34" charset="-122"/>
-                <a:cs typeface="Pretendard" pitchFamily="34" charset="-120"/>
-              </a:rPr>
-              <a:t>Split slides</a:t>
-            </a:r>
-            <a:endParaRPr lang="en-US" sz="1600" dirty="0"/>
-          </a:p>
-        </p:txBody>
-      </p:sp>
-      <p:sp>
-        <p:nvSpPr>
-          <p:cNvPr id="26" name="Shape 24"/>
-          <p:cNvSpPr/>
-          <p:nvPr/>
-        </p:nvSpPr>
-        <p:spPr>
-          <a:xfrm>
-            <a:off x="8132064" y="3991356"/>
-            <a:ext cx="3435096" cy="1170432"/>
-          </a:xfrm>
-          <a:prstGeom prst="roundRect">
-            <a:avLst>
-              <a:gd name="adj" fmla="val 4688"/>
-            </a:avLst>
-          </a:prstGeom>
-          <a:solidFill>
-            <a:srgbClr val="FFFBF5"/>
-          </a:solidFill>
-          <a:ln w="12700">
-            <a:solidFill>
-              <a:srgbClr val="B45309"/>
-            </a:solidFill>
-            <a:prstDash val="solid"/>
-          </a:ln>
-          <a:effectLst>
-            <a:outerShdw sx="100000" sy="100000" kx="0" ky="0" algn="bl" rotWithShape="0" blurRad="12700" dist="50800" dir="2700000">
-              <a:srgbClr val="000000">
-                <a:alpha val="12000"/>
-              </a:srgbClr>
-            </a:outerShdw>
-          </a:effectLst>
-        </p:spPr>
-      </p:sp>
-      <p:sp>
-        <p:nvSpPr>
-          <p:cNvPr id="27" name="Shape 25"/>
-          <p:cNvSpPr/>
-          <p:nvPr/>
-        </p:nvSpPr>
-        <p:spPr>
-          <a:xfrm>
-            <a:off x="8132064" y="3991356"/>
-            <a:ext cx="3435096" cy="109728"/>
-          </a:xfrm>
-          <a:prstGeom prst="rect">
-            <a:avLst/>
-          </a:prstGeom>
-          <a:solidFill>
-            <a:srgbClr val="B45309"/>
-          </a:solidFill>
-          <a:ln w="12700">
-            <a:solidFill>
-              <a:srgbClr val="B45309">
-                <a:alpha val="0"/>
-              </a:srgbClr>
-            </a:solidFill>
-            <a:prstDash val="solid"/>
-          </a:ln>
-        </p:spPr>
-      </p:sp>
-      <p:sp>
-        <p:nvSpPr>
-          <p:cNvPr id="28" name="Shape 26"/>
-          <p:cNvSpPr/>
-          <p:nvPr/>
-        </p:nvSpPr>
-        <p:spPr>
-          <a:xfrm>
-            <a:off x="8296656" y="4389303"/>
-            <a:ext cx="374538" cy="374538"/>
-          </a:xfrm>
-          <a:prstGeom prst="ellipse">
-            <a:avLst/>
-          </a:prstGeom>
-          <a:solidFill>
-            <a:srgbClr val="B45309"/>
-          </a:solidFill>
-          <a:ln w="12700">
-            <a:solidFill>
-              <a:srgbClr val="B45309">
-                <a:alpha val="0"/>
-              </a:srgbClr>
-            </a:solidFill>
-            <a:prstDash val="solid"/>
-          </a:ln>
-        </p:spPr>
-      </p:sp>
-      <p:sp>
-        <p:nvSpPr>
-          <p:cNvPr id="29" name="Text 27"/>
-          <p:cNvSpPr txBox="1"/>
-          <p:nvPr/>
-        </p:nvSpPr>
-        <p:spPr>
-          <a:xfrm>
-            <a:off x="8296656" y="4389303"/>
-            <a:ext cx="374538" cy="374538"/>
-          </a:xfrm>
-          <a:prstGeom prst="rect">
-            <a:avLst/>
-          </a:prstGeom>
-          <a:noFill/>
-          <a:ln/>
-        </p:spPr>
-        <p:txBody>
-          <a:bodyPr wrap="square" lIns="0" tIns="0" rIns="0" bIns="0" rtlCol="0" anchor="ctr">
-            <a:normAutofit/>
-          </a:bodyPr>
-          <a:lstStyle/>
-          <a:p>
-            <a:pPr algn="ctr" indent="0" marL="0">
-              <a:lnSpc>
-                <a:spcPct val="120000"/>
-              </a:lnSpc>
-              <a:buNone/>
-            </a:pPr>
-            <a:r>
-              <a:rPr lang="en-US" sz="1500" b="1" dirty="0">
-                <a:solidFill>
-                  <a:srgbClr val="F7F3EF"/>
-                </a:solidFill>
-                <a:latin typeface="Pretendard" pitchFamily="34" charset="0"/>
-                <a:ea typeface="Pretendard" pitchFamily="34" charset="-122"/>
-                <a:cs typeface="Pretendard" pitchFamily="34" charset="-120"/>
-              </a:rPr>
-              <a:t>4</a:t>
-            </a:r>
-            <a:endParaRPr lang="en-US" sz="1500" dirty="0"/>
-          </a:p>
-        </p:txBody>
-      </p:sp>
-      <p:sp>
-        <p:nvSpPr>
-          <p:cNvPr id="30" name="Text 28"/>
-          <p:cNvSpPr txBox="1"/>
-          <p:nvPr/>
-        </p:nvSpPr>
-        <p:spPr>
-          <a:xfrm>
-            <a:off x="8817498" y="4119372"/>
-            <a:ext cx="2585070" cy="914400"/>
-          </a:xfrm>
-          <a:prstGeom prst="rect">
-            <a:avLst/>
-          </a:prstGeom>
-          <a:noFill/>
-          <a:ln/>
-        </p:spPr>
-        <p:txBody>
-          <a:bodyPr wrap="square" lIns="0" tIns="25400" rIns="25400" bIns="0" rtlCol="0" anchor="ctr">
-            <a:normAutofit/>
-          </a:bodyPr>
-          <a:lstStyle/>
-          <a:p>
-            <a:pPr algn="l" indent="0" marL="0">
-              <a:lnSpc>
-                <a:spcPct val="92000"/>
-              </a:lnSpc>
-              <a:buNone/>
-            </a:pPr>
-            <a:r>
-              <a:rPr lang="en-US" sz="1600" dirty="0">
-                <a:solidFill>
-                  <a:srgbClr val="1F2937"/>
-                </a:solidFill>
-                <a:latin typeface="Pretendard" pitchFamily="34" charset="0"/>
-                <a:ea typeface="Pretendard" pitchFamily="34" charset="-122"/>
-                <a:cs typeface="Pretendard" pitchFamily="34" charset="-120"/>
-              </a:rPr>
-              <a:t>Layout objects</a:t>
-            </a:r>
-            <a:endParaRPr lang="en-US" sz="1600" dirty="0"/>
-          </a:p>
-        </p:txBody>
-      </p:sp>
-      <p:sp>
-        <p:nvSpPr>
-          <p:cNvPr id="31" name="Shape 29"/>
-          <p:cNvSpPr/>
-          <p:nvPr/>
-        </p:nvSpPr>
-        <p:spPr>
-          <a:xfrm>
-            <a:off x="4386072" y="3991356"/>
-            <a:ext cx="3435096" cy="1170432"/>
-          </a:xfrm>
-          <a:prstGeom prst="roundRect">
-            <a:avLst>
-              <a:gd name="adj" fmla="val 4688"/>
-            </a:avLst>
-          </a:prstGeom>
-          <a:solidFill>
-            <a:srgbClr val="FFFBF5"/>
-          </a:solidFill>
-          <a:ln w="12700">
-            <a:solidFill>
-              <a:srgbClr val="B45309"/>
-            </a:solidFill>
-            <a:prstDash val="solid"/>
-          </a:ln>
-          <a:effectLst>
-            <a:outerShdw sx="100000" sy="100000" kx="0" ky="0" algn="bl" rotWithShape="0" blurRad="12700" dist="50800" dir="2700000">
-              <a:srgbClr val="000000">
-                <a:alpha val="12000"/>
-              </a:srgbClr>
-            </a:outerShdw>
-          </a:effectLst>
-        </p:spPr>
-      </p:sp>
-      <p:sp>
-        <p:nvSpPr>
-          <p:cNvPr id="32" name="Shape 30"/>
-          <p:cNvSpPr/>
-          <p:nvPr/>
-        </p:nvSpPr>
-        <p:spPr>
-          <a:xfrm>
-            <a:off x="4386072" y="3991356"/>
-            <a:ext cx="3435096" cy="109728"/>
-          </a:xfrm>
-          <a:prstGeom prst="rect">
-            <a:avLst/>
-          </a:prstGeom>
-          <a:solidFill>
-            <a:srgbClr val="B45309"/>
-          </a:solidFill>
-          <a:ln w="12700">
-            <a:solidFill>
-              <a:srgbClr val="B45309">
-                <a:alpha val="0"/>
-              </a:srgbClr>
-            </a:solidFill>
-            <a:prstDash val="solid"/>
-          </a:ln>
-        </p:spPr>
-      </p:sp>
-      <p:sp>
-        <p:nvSpPr>
-          <p:cNvPr id="33" name="Shape 31"/>
-          <p:cNvSpPr/>
-          <p:nvPr/>
-        </p:nvSpPr>
-        <p:spPr>
-          <a:xfrm>
-            <a:off x="4550664" y="4389303"/>
-            <a:ext cx="374538" cy="374538"/>
-          </a:xfrm>
-          <a:prstGeom prst="ellipse">
-            <a:avLst/>
-          </a:prstGeom>
-          <a:solidFill>
-            <a:srgbClr val="B45309"/>
-          </a:solidFill>
-          <a:ln w="12700">
-            <a:solidFill>
-              <a:srgbClr val="B45309">
-                <a:alpha val="0"/>
-              </a:srgbClr>
-            </a:solidFill>
-            <a:prstDash val="solid"/>
-          </a:ln>
-        </p:spPr>
-      </p:sp>
-      <p:sp>
-        <p:nvSpPr>
-          <p:cNvPr id="34" name="Text 32"/>
-          <p:cNvSpPr txBox="1"/>
-          <p:nvPr/>
-        </p:nvSpPr>
-        <p:spPr>
-          <a:xfrm>
-            <a:off x="4550664" y="4389303"/>
-            <a:ext cx="374538" cy="374538"/>
-          </a:xfrm>
-          <a:prstGeom prst="rect">
-            <a:avLst/>
-          </a:prstGeom>
-          <a:noFill/>
-          <a:ln/>
-        </p:spPr>
-        <p:txBody>
-          <a:bodyPr wrap="square" lIns="0" tIns="0" rIns="0" bIns="0" rtlCol="0" anchor="ctr">
-            <a:normAutofit/>
-          </a:bodyPr>
-          <a:lstStyle/>
-          <a:p>
-            <a:pPr algn="ctr" indent="0" marL="0">
-              <a:lnSpc>
-                <a:spcPct val="120000"/>
-              </a:lnSpc>
-              <a:buNone/>
-            </a:pPr>
-            <a:r>
-              <a:rPr lang="en-US" sz="1500" b="1" dirty="0">
-                <a:solidFill>
-                  <a:srgbClr val="F7F3EF"/>
-                </a:solidFill>
-                <a:latin typeface="Pretendard" pitchFamily="34" charset="0"/>
-                <a:ea typeface="Pretendard" pitchFamily="34" charset="-122"/>
-                <a:cs typeface="Pretendard" pitchFamily="34" charset="-120"/>
-              </a:rPr>
-              <a:t>5</a:t>
-            </a:r>
-            <a:endParaRPr lang="en-US" sz="1500" dirty="0"/>
-          </a:p>
-        </p:txBody>
-      </p:sp>
-      <p:sp>
-        <p:nvSpPr>
-          <p:cNvPr id="35" name="Text 33"/>
-          <p:cNvSpPr txBox="1"/>
-          <p:nvPr/>
-        </p:nvSpPr>
-        <p:spPr>
-          <a:xfrm>
-            <a:off x="5071506" y="4119372"/>
-            <a:ext cx="2585070" cy="914400"/>
-          </a:xfrm>
-          <a:prstGeom prst="rect">
-            <a:avLst/>
-          </a:prstGeom>
-          <a:noFill/>
-          <a:ln/>
-        </p:spPr>
-        <p:txBody>
-          <a:bodyPr wrap="square" lIns="0" tIns="25400" rIns="25400" bIns="0" rtlCol="0" anchor="ctr">
-            <a:normAutofit/>
-          </a:bodyPr>
-          <a:lstStyle/>
-          <a:p>
-            <a:pPr algn="l" indent="0" marL="0">
-              <a:lnSpc>
-                <a:spcPct val="92000"/>
-              </a:lnSpc>
-              <a:buNone/>
-            </a:pPr>
-            <a:r>
-              <a:rPr lang="en-US" sz="1600" dirty="0">
-                <a:solidFill>
-                  <a:srgbClr val="1F2937"/>
-                </a:solidFill>
-                <a:latin typeface="Pretendard" pitchFamily="34" charset="0"/>
-                <a:ea typeface="Pretendard" pitchFamily="34" charset="-122"/>
-                <a:cs typeface="Pretendard" pitchFamily="34" charset="-120"/>
-              </a:rPr>
-              <a:t>Validate overflow</a:t>
-            </a:r>
-            <a:endParaRPr lang="en-US" sz="1600" dirty="0"/>
-          </a:p>
-        </p:txBody>
-      </p:sp>
-      <p:sp>
-        <p:nvSpPr>
-          <p:cNvPr id="36" name="Shape 34"/>
-          <p:cNvSpPr/>
-          <p:nvPr/>
-        </p:nvSpPr>
-        <p:spPr>
-          <a:xfrm>
-            <a:off x="640080" y="3991356"/>
-            <a:ext cx="3435096" cy="1170432"/>
-          </a:xfrm>
-          <a:prstGeom prst="roundRect">
-            <a:avLst>
-              <a:gd name="adj" fmla="val 4688"/>
-            </a:avLst>
-          </a:prstGeom>
-          <a:solidFill>
-            <a:srgbClr val="FFFBF5"/>
-          </a:solidFill>
-          <a:ln w="12700">
-            <a:solidFill>
-              <a:srgbClr val="B45309"/>
-            </a:solidFill>
-            <a:prstDash val="solid"/>
-          </a:ln>
-          <a:effectLst>
-            <a:outerShdw sx="100000" sy="100000" kx="0" ky="0" algn="bl" rotWithShape="0" blurRad="12700" dist="50800" dir="2700000">
-              <a:srgbClr val="000000">
-                <a:alpha val="12000"/>
-              </a:srgbClr>
-            </a:outerShdw>
-          </a:effectLst>
-        </p:spPr>
-      </p:sp>
-      <p:sp>
-        <p:nvSpPr>
-          <p:cNvPr id="37" name="Shape 35"/>
-          <p:cNvSpPr/>
-          <p:nvPr/>
-        </p:nvSpPr>
-        <p:spPr>
-          <a:xfrm>
-            <a:off x="640080" y="3991356"/>
-            <a:ext cx="3435096" cy="109728"/>
-          </a:xfrm>
-          <a:prstGeom prst="rect">
-            <a:avLst/>
-          </a:prstGeom>
-          <a:solidFill>
-            <a:srgbClr val="B45309"/>
-          </a:solidFill>
-          <a:ln w="12700">
-            <a:solidFill>
-              <a:srgbClr val="B45309">
-                <a:alpha val="0"/>
-              </a:srgbClr>
-            </a:solidFill>
-            <a:prstDash val="solid"/>
-          </a:ln>
-        </p:spPr>
-      </p:sp>
-      <p:sp>
-        <p:nvSpPr>
-          <p:cNvPr id="38" name="Shape 36"/>
-          <p:cNvSpPr/>
-          <p:nvPr/>
-        </p:nvSpPr>
-        <p:spPr>
-          <a:xfrm>
-            <a:off x="804672" y="4389303"/>
-            <a:ext cx="374538" cy="374538"/>
-          </a:xfrm>
-          <a:prstGeom prst="ellipse">
-            <a:avLst/>
-          </a:prstGeom>
-          <a:solidFill>
-            <a:srgbClr val="B45309"/>
-          </a:solidFill>
-          <a:ln w="12700">
-            <a:solidFill>
-              <a:srgbClr val="B45309">
-                <a:alpha val="0"/>
-              </a:srgbClr>
-            </a:solidFill>
-            <a:prstDash val="solid"/>
-          </a:ln>
-        </p:spPr>
-      </p:sp>
-      <p:sp>
-        <p:nvSpPr>
-          <p:cNvPr id="39" name="Text 37"/>
-          <p:cNvSpPr txBox="1"/>
-          <p:nvPr/>
-        </p:nvSpPr>
-        <p:spPr>
-          <a:xfrm>
-            <a:off x="804672" y="4389303"/>
-            <a:ext cx="374538" cy="374538"/>
-          </a:xfrm>
-          <a:prstGeom prst="rect">
-            <a:avLst/>
-          </a:prstGeom>
-          <a:noFill/>
-          <a:ln/>
-        </p:spPr>
-        <p:txBody>
-          <a:bodyPr wrap="square" lIns="0" tIns="0" rIns="0" bIns="0" rtlCol="0" anchor="ctr">
-            <a:normAutofit/>
-          </a:bodyPr>
-          <a:lstStyle/>
-          <a:p>
-            <a:pPr algn="ctr" indent="0" marL="0">
-              <a:lnSpc>
-                <a:spcPct val="120000"/>
-              </a:lnSpc>
-              <a:buNone/>
-            </a:pPr>
-            <a:r>
-              <a:rPr lang="en-US" sz="1500" b="1" dirty="0">
-                <a:solidFill>
-                  <a:srgbClr val="F7F3EF"/>
-                </a:solidFill>
-                <a:latin typeface="Pretendard" pitchFamily="34" charset="0"/>
-                <a:ea typeface="Pretendard" pitchFamily="34" charset="-122"/>
-                <a:cs typeface="Pretendard" pitchFamily="34" charset="-120"/>
-              </a:rPr>
-              <a:t>6</a:t>
-            </a:r>
-            <a:endParaRPr lang="en-US" sz="1500" dirty="0"/>
-          </a:p>
-        </p:txBody>
-      </p:sp>
-      <p:sp>
-        <p:nvSpPr>
-          <p:cNvPr id="40" name="Text 38"/>
-          <p:cNvSpPr txBox="1"/>
-          <p:nvPr/>
-        </p:nvSpPr>
-        <p:spPr>
-          <a:xfrm>
-            <a:off x="1325514" y="4119372"/>
-            <a:ext cx="2585070" cy="914400"/>
-          </a:xfrm>
-          <a:prstGeom prst="rect">
-            <a:avLst/>
-          </a:prstGeom>
-          <a:noFill/>
-          <a:ln/>
-        </p:spPr>
-        <p:txBody>
-          <a:bodyPr wrap="square" lIns="0" tIns="25400" rIns="25400" bIns="0" rtlCol="0" anchor="ctr">
-            <a:normAutofit/>
-          </a:bodyPr>
-          <a:lstStyle/>
-          <a:p>
-            <a:pPr algn="l" indent="0" marL="0">
-              <a:lnSpc>
-                <a:spcPct val="92000"/>
-              </a:lnSpc>
-              <a:buNone/>
-            </a:pPr>
-            <a:r>
-              <a:rPr lang="en-US" sz="1600" dirty="0">
-                <a:solidFill>
-                  <a:srgbClr val="1F2937"/>
-                </a:solidFill>
-                <a:latin typeface="Pretendard" pitchFamily="34" charset="0"/>
-                <a:ea typeface="Pretendard" pitchFamily="34" charset="-122"/>
-                <a:cs typeface="Pretendard" pitchFamily="34" charset="-120"/>
-              </a:rPr>
-              <a:t>Render PPTX HTML PDF</a:t>
-            </a:r>
-            <a:endParaRPr lang="en-US" sz="1600" dirty="0"/>
           </a:p>
         </p:txBody>
       </p:sp>
